--- a/Calculus/Modeling_Simulation_1.pptx
+++ b/Calculus/Modeling_Simulation_1.pptx
@@ -17880,7 +17880,15 @@
             </a:pPr>
             <a:r>
               <a:rPr lang="ko-KR" altLang="en-US" dirty="0"/>
-              <a:t>가속도를 적분 → 속도 속도를 적분 → 위치</a:t>
+              <a:t>가속도를 적분 → 속도</a:t>
+            </a:r>
+            <a:r>
+              <a:rPr lang="en-US" altLang="ko-KR" dirty="0"/>
+              <a:t>,</a:t>
+            </a:r>
+            <a:r>
+              <a:rPr lang="ko-KR" altLang="en-US" dirty="0"/>
+              <a:t> 속도를 적분 → 위치</a:t>
             </a:r>
             <a:endParaRPr lang="en-US" altLang="ko-KR" dirty="0">
               <a:latin typeface="맑은 고딕" panose="020B0503020000020004" pitchFamily="50" charset="-127"/>
@@ -18051,6 +18059,141 @@
           </a:prstGeom>
         </p:spPr>
       </p:pic>
+      <p:pic>
+        <p:nvPicPr>
+          <p:cNvPr id="7" name="그림 6">
+            <a:extLst>
+              <a:ext uri="{FF2B5EF4-FFF2-40B4-BE49-F238E27FC236}">
+                <a16:creationId xmlns:a16="http://schemas.microsoft.com/office/drawing/2014/main" id="{E4205544-8AFC-A571-2BA3-1FA12F752258}"/>
+              </a:ext>
+            </a:extLst>
+          </p:cNvPr>
+          <p:cNvPicPr>
+            <a:picLocks noChangeAspect="1"/>
+          </p:cNvPicPr>
+          <p:nvPr/>
+        </p:nvPicPr>
+        <p:blipFill>
+          <a:blip r:embed="rId4">
+            <a:duotone>
+              <a:prstClr val="black"/>
+              <a:schemeClr val="accent3">
+                <a:tint val="45000"/>
+                <a:satMod val="400000"/>
+              </a:schemeClr>
+            </a:duotone>
+          </a:blip>
+          <a:stretch>
+            <a:fillRect/>
+          </a:stretch>
+        </p:blipFill>
+        <p:spPr>
+          <a:xfrm>
+            <a:off x="7332256" y="4177613"/>
+            <a:ext cx="828764" cy="482415"/>
+          </a:xfrm>
+          <a:prstGeom prst="rect">
+            <a:avLst/>
+          </a:prstGeom>
+        </p:spPr>
+      </p:pic>
+      <p:grpSp>
+        <p:nvGrpSpPr>
+          <p:cNvPr id="17" name="그룹 16">
+            <a:extLst>
+              <a:ext uri="{FF2B5EF4-FFF2-40B4-BE49-F238E27FC236}">
+                <a16:creationId xmlns:a16="http://schemas.microsoft.com/office/drawing/2014/main" id="{75BF96D6-B550-99CE-A26A-677FC7F4D897}"/>
+              </a:ext>
+            </a:extLst>
+          </p:cNvPr>
+          <p:cNvGrpSpPr/>
+          <p:nvPr/>
+        </p:nvGrpSpPr>
+        <p:grpSpPr>
+          <a:xfrm>
+            <a:off x="6375576" y="4757168"/>
+            <a:ext cx="1785444" cy="527169"/>
+            <a:chOff x="6375576" y="4757168"/>
+            <a:chExt cx="1785444" cy="527169"/>
+          </a:xfrm>
+        </p:grpSpPr>
+        <p:pic>
+          <p:nvPicPr>
+            <p:cNvPr id="16" name="그림 15">
+              <a:extLst>
+                <a:ext uri="{FF2B5EF4-FFF2-40B4-BE49-F238E27FC236}">
+                  <a16:creationId xmlns:a16="http://schemas.microsoft.com/office/drawing/2014/main" id="{E623D1EF-EBAA-CEC6-4604-1E74B7DDAFE5}"/>
+                </a:ext>
+              </a:extLst>
+            </p:cNvPr>
+            <p:cNvPicPr>
+              <a:picLocks noChangeAspect="1"/>
+            </p:cNvPicPr>
+            <p:nvPr/>
+          </p:nvPicPr>
+          <p:blipFill>
+            <a:blip r:embed="rId5">
+              <a:duotone>
+                <a:prstClr val="black"/>
+                <a:schemeClr val="accent4">
+                  <a:tint val="45000"/>
+                  <a:satMod val="400000"/>
+                </a:schemeClr>
+              </a:duotone>
+            </a:blip>
+            <a:stretch>
+              <a:fillRect/>
+            </a:stretch>
+          </p:blipFill>
+          <p:spPr>
+            <a:xfrm>
+              <a:off x="7352080" y="4757221"/>
+              <a:ext cx="808940" cy="527116"/>
+            </a:xfrm>
+            <a:prstGeom prst="rect">
+              <a:avLst/>
+            </a:prstGeom>
+          </p:spPr>
+        </p:pic>
+        <p:pic>
+          <p:nvPicPr>
+            <p:cNvPr id="13" name="그림 12">
+              <a:extLst>
+                <a:ext uri="{FF2B5EF4-FFF2-40B4-BE49-F238E27FC236}">
+                  <a16:creationId xmlns:a16="http://schemas.microsoft.com/office/drawing/2014/main" id="{CB5F9300-F8EC-A6E6-DC47-A86676DD6F4F}"/>
+                </a:ext>
+              </a:extLst>
+            </p:cNvPr>
+            <p:cNvPicPr>
+              <a:picLocks noChangeAspect="1"/>
+            </p:cNvPicPr>
+            <p:nvPr/>
+          </p:nvPicPr>
+          <p:blipFill>
+            <a:blip r:embed="rId6">
+              <a:duotone>
+                <a:prstClr val="black"/>
+                <a:schemeClr val="accent4">
+                  <a:tint val="45000"/>
+                  <a:satMod val="400000"/>
+                </a:schemeClr>
+              </a:duotone>
+            </a:blip>
+            <a:stretch>
+              <a:fillRect/>
+            </a:stretch>
+          </p:blipFill>
+          <p:spPr>
+            <a:xfrm>
+              <a:off x="6375576" y="4757168"/>
+              <a:ext cx="1188939" cy="527116"/>
+            </a:xfrm>
+            <a:prstGeom prst="rect">
+              <a:avLst/>
+            </a:prstGeom>
+          </p:spPr>
+        </p:pic>
+      </p:grpSp>
     </p:spTree>
     <p:extLst>
       <p:ext uri="{BB962C8B-B14F-4D97-AF65-F5344CB8AC3E}">

--- a/Calculus/Modeling_Simulation_1.pptx
+++ b/Calculus/Modeling_Simulation_1.pptx
@@ -5,7 +5,7 @@
     <p:sldMasterId id="2147483648" r:id="rId1"/>
   </p:sldMasterIdLst>
   <p:notesMasterIdLst>
-    <p:notesMasterId r:id="rId53"/>
+    <p:notesMasterId r:id="rId57"/>
   </p:notesMasterIdLst>
   <p:sldIdLst>
     <p:sldId id="256" r:id="rId2"/>
@@ -46,19 +46,23 @@
     <p:sldId id="384" r:id="rId37"/>
     <p:sldId id="308" r:id="rId38"/>
     <p:sldId id="320" r:id="rId39"/>
-    <p:sldId id="310" r:id="rId40"/>
-    <p:sldId id="311" r:id="rId41"/>
-    <p:sldId id="312" r:id="rId42"/>
-    <p:sldId id="385" r:id="rId43"/>
-    <p:sldId id="321" r:id="rId44"/>
-    <p:sldId id="322" r:id="rId45"/>
-    <p:sldId id="323" r:id="rId46"/>
-    <p:sldId id="324" r:id="rId47"/>
-    <p:sldId id="386" r:id="rId48"/>
-    <p:sldId id="335" r:id="rId49"/>
-    <p:sldId id="336" r:id="rId50"/>
-    <p:sldId id="337" r:id="rId51"/>
-    <p:sldId id="338" r:id="rId52"/>
+    <p:sldId id="387" r:id="rId40"/>
+    <p:sldId id="310" r:id="rId41"/>
+    <p:sldId id="388" r:id="rId42"/>
+    <p:sldId id="389" r:id="rId43"/>
+    <p:sldId id="390" r:id="rId44"/>
+    <p:sldId id="311" r:id="rId45"/>
+    <p:sldId id="312" r:id="rId46"/>
+    <p:sldId id="385" r:id="rId47"/>
+    <p:sldId id="321" r:id="rId48"/>
+    <p:sldId id="322" r:id="rId49"/>
+    <p:sldId id="323" r:id="rId50"/>
+    <p:sldId id="324" r:id="rId51"/>
+    <p:sldId id="386" r:id="rId52"/>
+    <p:sldId id="335" r:id="rId53"/>
+    <p:sldId id="336" r:id="rId54"/>
+    <p:sldId id="337" r:id="rId55"/>
+    <p:sldId id="338" r:id="rId56"/>
   </p:sldIdLst>
   <p:sldSz cx="12192000" cy="6858000"/>
   <p:notesSz cx="6858000" cy="9144000"/>
@@ -247,7 +251,7 @@
           <a:p>
             <a:fld id="{908017EF-B0C5-4F2B-99F2-8DD7659ECF32}" type="datetimeFigureOut">
               <a:rPr lang="ko-KR" altLang="en-US" smtClean="0"/>
-              <a:t>2026-05-28</a:t>
+              <a:t>2026-05-30</a:t>
             </a:fld>
             <a:endParaRPr lang="ko-KR" altLang="en-US"/>
           </a:p>
@@ -700,7 +704,7 @@
           <a:p>
             <a:fld id="{4AAD347D-5ACD-4C99-B74B-A9C85AD731AF}" type="datetimeFigureOut">
               <a:rPr lang="en-US" dirty="0"/>
-              <a:t>5/28/2026</a:t>
+              <a:t>5/30/2026</a:t>
             </a:fld>
             <a:endParaRPr lang="en-US" dirty="0"/>
           </a:p>
@@ -970,7 +974,7 @@
           <a:p>
             <a:fld id="{4509A250-FF31-4206-8172-F9D3106AACB1}" type="datetimeFigureOut">
               <a:rPr lang="en-US" dirty="0"/>
-              <a:t>5/28/2026</a:t>
+              <a:t>5/30/2026</a:t>
             </a:fld>
             <a:endParaRPr lang="en-US" dirty="0"/>
           </a:p>
@@ -1159,7 +1163,7 @@
           <a:p>
             <a:fld id="{4509A250-FF31-4206-8172-F9D3106AACB1}" type="datetimeFigureOut">
               <a:rPr lang="en-US" dirty="0"/>
-              <a:t>5/28/2026</a:t>
+              <a:t>5/30/2026</a:t>
             </a:fld>
             <a:endParaRPr lang="en-US" dirty="0"/>
           </a:p>
@@ -1427,7 +1431,7 @@
           <a:p>
             <a:fld id="{4509A250-FF31-4206-8172-F9D3106AACB1}" type="datetimeFigureOut">
               <a:rPr lang="en-US" dirty="0"/>
-              <a:t>5/28/2026</a:t>
+              <a:t>5/30/2026</a:t>
             </a:fld>
             <a:endParaRPr lang="en-US" dirty="0"/>
           </a:p>
@@ -1763,7 +1767,7 @@
           <a:p>
             <a:fld id="{4509A250-FF31-4206-8172-F9D3106AACB1}" type="datetimeFigureOut">
               <a:rPr lang="en-US" dirty="0"/>
-              <a:t>5/28/2026</a:t>
+              <a:t>5/30/2026</a:t>
             </a:fld>
             <a:endParaRPr lang="en-US" dirty="0"/>
           </a:p>
@@ -2381,7 +2385,7 @@
           <a:p>
             <a:fld id="{4509A250-FF31-4206-8172-F9D3106AACB1}" type="datetimeFigureOut">
               <a:rPr lang="en-US" dirty="0"/>
-              <a:t>5/28/2026</a:t>
+              <a:t>5/30/2026</a:t>
             </a:fld>
             <a:endParaRPr lang="en-US" dirty="0"/>
           </a:p>
@@ -3236,7 +3240,7 @@
           <a:p>
             <a:fld id="{4509A250-FF31-4206-8172-F9D3106AACB1}" type="datetimeFigureOut">
               <a:rPr lang="en-US" dirty="0"/>
-              <a:t>5/28/2026</a:t>
+              <a:t>5/30/2026</a:t>
             </a:fld>
             <a:endParaRPr lang="en-US" dirty="0"/>
           </a:p>
@@ -3401,7 +3405,7 @@
           <a:p>
             <a:fld id="{4509A250-FF31-4206-8172-F9D3106AACB1}" type="datetimeFigureOut">
               <a:rPr lang="en-US" dirty="0"/>
-              <a:t>5/28/2026</a:t>
+              <a:t>5/30/2026</a:t>
             </a:fld>
             <a:endParaRPr lang="en-US" dirty="0"/>
           </a:p>
@@ -3576,7 +3580,7 @@
           <a:p>
             <a:fld id="{4509A250-FF31-4206-8172-F9D3106AACB1}" type="datetimeFigureOut">
               <a:rPr lang="en-US" dirty="0"/>
-              <a:t>5/28/2026</a:t>
+              <a:t>5/30/2026</a:t>
             </a:fld>
             <a:endParaRPr lang="en-US" dirty="0"/>
           </a:p>
@@ -3741,7 +3745,7 @@
           <a:p>
             <a:fld id="{4509A250-FF31-4206-8172-F9D3106AACB1}" type="datetimeFigureOut">
               <a:rPr lang="en-US" dirty="0"/>
-              <a:t>5/28/2026</a:t>
+              <a:t>5/30/2026</a:t>
             </a:fld>
             <a:endParaRPr lang="en-US" dirty="0"/>
           </a:p>
@@ -3983,7 +3987,7 @@
           <a:p>
             <a:fld id="{9796027F-7875-4030-9381-8BD8C4F21935}" type="datetimeFigureOut">
               <a:rPr lang="en-US" dirty="0"/>
-              <a:t>5/28/2026</a:t>
+              <a:t>5/30/2026</a:t>
             </a:fld>
             <a:endParaRPr lang="en-US" dirty="0"/>
           </a:p>
@@ -4270,7 +4274,7 @@
           <a:p>
             <a:fld id="{9796027F-7875-4030-9381-8BD8C4F21935}" type="datetimeFigureOut">
               <a:rPr lang="en-US" dirty="0"/>
-              <a:t>5/28/2026</a:t>
+              <a:t>5/30/2026</a:t>
             </a:fld>
             <a:endParaRPr lang="en-US" dirty="0"/>
           </a:p>
@@ -4709,7 +4713,7 @@
           <a:p>
             <a:fld id="{9796027F-7875-4030-9381-8BD8C4F21935}" type="datetimeFigureOut">
               <a:rPr lang="en-US" dirty="0"/>
-              <a:t>5/28/2026</a:t>
+              <a:t>5/30/2026</a:t>
             </a:fld>
             <a:endParaRPr lang="en-US" dirty="0"/>
           </a:p>
@@ -4822,7 +4826,7 @@
           <a:p>
             <a:fld id="{4509A250-FF31-4206-8172-F9D3106AACB1}" type="datetimeFigureOut">
               <a:rPr lang="en-US" dirty="0"/>
-              <a:t>5/28/2026</a:t>
+              <a:t>5/30/2026</a:t>
             </a:fld>
             <a:endParaRPr lang="en-US" dirty="0"/>
           </a:p>
@@ -4912,7 +4916,7 @@
           <a:p>
             <a:fld id="{4509A250-FF31-4206-8172-F9D3106AACB1}" type="datetimeFigureOut">
               <a:rPr lang="en-US" dirty="0"/>
-              <a:t>5/28/2026</a:t>
+              <a:t>5/30/2026</a:t>
             </a:fld>
             <a:endParaRPr lang="en-US" dirty="0"/>
           </a:p>
@@ -5186,7 +5190,7 @@
           <a:p>
             <a:fld id="{4509A250-FF31-4206-8172-F9D3106AACB1}" type="datetimeFigureOut">
               <a:rPr lang="en-US" dirty="0"/>
-              <a:t>5/28/2026</a:t>
+              <a:t>5/30/2026</a:t>
             </a:fld>
             <a:endParaRPr lang="en-US" dirty="0"/>
           </a:p>
@@ -5456,7 +5460,7 @@
           <a:p>
             <a:fld id="{4509A250-FF31-4206-8172-F9D3106AACB1}" type="datetimeFigureOut">
               <a:rPr lang="en-US" dirty="0"/>
-              <a:t>5/28/2026</a:t>
+              <a:t>5/30/2026</a:t>
             </a:fld>
             <a:endParaRPr lang="en-US" dirty="0"/>
           </a:p>
@@ -5894,7 +5898,7 @@
           <a:p>
             <a:fld id="{4AAD347D-5ACD-4C99-B74B-A9C85AD731AF}" type="datetimeFigureOut">
               <a:rPr lang="en-US" dirty="0"/>
-              <a:t>5/28/2026</a:t>
+              <a:t>5/30/2026</a:t>
             </a:fld>
             <a:endParaRPr lang="en-US" dirty="0"/>
           </a:p>
@@ -8967,8 +8971,8 @@
           </p:txBody>
         </p:sp>
       </p:grpSp>
-      <mc:AlternateContent xmlns:mc="http://schemas.openxmlformats.org/markup-compatibility/2006">
-        <mc:Choice xmlns:a14="http://schemas.microsoft.com/office/drawing/2010/main" Requires="a14">
+      <mc:AlternateContent xmlns:mc="http://schemas.openxmlformats.org/markup-compatibility/2006" xmlns:a14="http://schemas.microsoft.com/office/drawing/2010/main">
+        <mc:Choice Requires="a14">
           <p:sp>
             <p:nvSpPr>
               <p:cNvPr id="19" name="TextBox 18">
@@ -9035,7 +9039,7 @@
             </p:txBody>
           </p:sp>
         </mc:Choice>
-        <mc:Fallback>
+        <mc:Fallback xmlns="">
           <p:sp>
             <p:nvSpPr>
               <p:cNvPr id="19" name="TextBox 18">
@@ -9080,8 +9084,8 @@
           </p:sp>
         </mc:Fallback>
       </mc:AlternateContent>
-      <mc:AlternateContent xmlns:mc="http://schemas.openxmlformats.org/markup-compatibility/2006">
-        <mc:Choice xmlns:a14="http://schemas.microsoft.com/office/drawing/2010/main" Requires="a14">
+      <mc:AlternateContent xmlns:mc="http://schemas.openxmlformats.org/markup-compatibility/2006" xmlns:a14="http://schemas.microsoft.com/office/drawing/2010/main">
+        <mc:Choice Requires="a14">
           <p:sp>
             <p:nvSpPr>
               <p:cNvPr id="21" name="TextBox 20">
@@ -9171,7 +9175,7 @@
             </p:txBody>
           </p:sp>
         </mc:Choice>
-        <mc:Fallback>
+        <mc:Fallback xmlns="">
           <p:sp>
             <p:nvSpPr>
               <p:cNvPr id="21" name="TextBox 20">
@@ -9216,8 +9220,8 @@
           </p:sp>
         </mc:Fallback>
       </mc:AlternateContent>
-      <mc:AlternateContent xmlns:mc="http://schemas.openxmlformats.org/markup-compatibility/2006">
-        <mc:Choice xmlns:a14="http://schemas.microsoft.com/office/drawing/2010/main" Requires="a14">
+      <mc:AlternateContent xmlns:mc="http://schemas.openxmlformats.org/markup-compatibility/2006" xmlns:a14="http://schemas.microsoft.com/office/drawing/2010/main">
+        <mc:Choice Requires="a14">
           <p:sp>
             <p:nvSpPr>
               <p:cNvPr id="23" name="TextBox 22">
@@ -9425,7 +9429,7 @@
             </p:txBody>
           </p:sp>
         </mc:Choice>
-        <mc:Fallback>
+        <mc:Fallback xmlns="">
           <p:sp>
             <p:nvSpPr>
               <p:cNvPr id="23" name="TextBox 22">
@@ -9594,8 +9598,8 @@
           </p:txBody>
         </p:sp>
       </p:grpSp>
-      <mc:AlternateContent xmlns:mc="http://schemas.openxmlformats.org/markup-compatibility/2006">
-        <mc:Choice xmlns:a14="http://schemas.microsoft.com/office/drawing/2010/main" Requires="a14">
+      <mc:AlternateContent xmlns:mc="http://schemas.openxmlformats.org/markup-compatibility/2006" xmlns:a14="http://schemas.microsoft.com/office/drawing/2010/main">
+        <mc:Choice Requires="a14">
           <p:sp>
             <p:nvSpPr>
               <p:cNvPr id="13" name="TextBox 12">
@@ -9692,7 +9696,7 @@
             </p:txBody>
           </p:sp>
         </mc:Choice>
-        <mc:Fallback>
+        <mc:Fallback xmlns="">
           <p:sp>
             <p:nvSpPr>
               <p:cNvPr id="13" name="TextBox 12">
@@ -9789,8 +9793,8 @@
           </a:p>
         </p:txBody>
       </p:sp>
-      <mc:AlternateContent xmlns:mc="http://schemas.openxmlformats.org/markup-compatibility/2006">
-        <mc:Choice xmlns:a14="http://schemas.microsoft.com/office/drawing/2010/main" Requires="a14">
+      <mc:AlternateContent xmlns:mc="http://schemas.openxmlformats.org/markup-compatibility/2006" xmlns:a14="http://schemas.microsoft.com/office/drawing/2010/main">
+        <mc:Choice Requires="a14">
           <p:sp>
             <p:nvSpPr>
               <p:cNvPr id="25" name="TextBox 24">
@@ -9934,7 +9938,7 @@
             </p:txBody>
           </p:sp>
         </mc:Choice>
-        <mc:Fallback>
+        <mc:Fallback xmlns="">
           <p:sp>
             <p:nvSpPr>
               <p:cNvPr id="25" name="TextBox 24">
@@ -10021,8 +10025,8 @@
           </a:fontRef>
         </p:style>
       </p:cxnSp>
-      <mc:AlternateContent xmlns:mc="http://schemas.openxmlformats.org/markup-compatibility/2006">
-        <mc:Choice xmlns:a14="http://schemas.microsoft.com/office/drawing/2010/main" Requires="a14">
+      <mc:AlternateContent xmlns:mc="http://schemas.openxmlformats.org/markup-compatibility/2006" xmlns:a14="http://schemas.microsoft.com/office/drawing/2010/main">
+        <mc:Choice Requires="a14">
           <p:sp>
             <p:nvSpPr>
               <p:cNvPr id="27" name="TextBox 26">
@@ -10168,7 +10172,7 @@
             </p:txBody>
           </p:sp>
         </mc:Choice>
-        <mc:Fallback>
+        <mc:Fallback xmlns="">
           <p:sp>
             <p:nvSpPr>
               <p:cNvPr id="27" name="TextBox 26">
@@ -10213,8 +10217,8 @@
           </p:sp>
         </mc:Fallback>
       </mc:AlternateContent>
-      <mc:AlternateContent xmlns:mc="http://schemas.openxmlformats.org/markup-compatibility/2006">
-        <mc:Choice xmlns:a14="http://schemas.microsoft.com/office/drawing/2010/main" Requires="a14">
+      <mc:AlternateContent xmlns:mc="http://schemas.openxmlformats.org/markup-compatibility/2006" xmlns:a14="http://schemas.microsoft.com/office/drawing/2010/main">
+        <mc:Choice Requires="a14">
           <p:sp>
             <p:nvSpPr>
               <p:cNvPr id="28" name="TextBox 27">
@@ -10336,7 +10340,7 @@
             </p:txBody>
           </p:sp>
         </mc:Choice>
-        <mc:Fallback>
+        <mc:Fallback xmlns="">
           <p:sp>
             <p:nvSpPr>
               <p:cNvPr id="28" name="TextBox 27">
@@ -10920,8 +10924,8 @@
           </p:spPr>
         </p:pic>
       </p:grpSp>
-      <mc:AlternateContent xmlns:mc="http://schemas.openxmlformats.org/markup-compatibility/2006">
-        <mc:Choice xmlns:a14="http://schemas.microsoft.com/office/drawing/2010/main" Requires="a14">
+      <mc:AlternateContent xmlns:mc="http://schemas.openxmlformats.org/markup-compatibility/2006" xmlns:a14="http://schemas.microsoft.com/office/drawing/2010/main">
+        <mc:Choice Requires="a14">
           <p:sp>
             <p:nvSpPr>
               <p:cNvPr id="14" name="TextBox 13">
@@ -11037,7 +11041,7 @@
             </p:txBody>
           </p:sp>
         </mc:Choice>
-        <mc:Fallback>
+        <mc:Fallback xmlns="">
           <p:sp>
             <p:nvSpPr>
               <p:cNvPr id="14" name="TextBox 13">
@@ -11082,8 +11086,8 @@
           </p:sp>
         </mc:Fallback>
       </mc:AlternateContent>
-      <mc:AlternateContent xmlns:mc="http://schemas.openxmlformats.org/markup-compatibility/2006">
-        <mc:Choice xmlns:a14="http://schemas.microsoft.com/office/drawing/2010/main" Requires="a14">
+      <mc:AlternateContent xmlns:mc="http://schemas.openxmlformats.org/markup-compatibility/2006" xmlns:a14="http://schemas.microsoft.com/office/drawing/2010/main">
+        <mc:Choice Requires="a14">
           <p:sp>
             <p:nvSpPr>
               <p:cNvPr id="18" name="TextBox 17">
@@ -11207,7 +11211,7 @@
             </p:txBody>
           </p:sp>
         </mc:Choice>
-        <mc:Fallback>
+        <mc:Fallback xmlns="">
           <p:sp>
             <p:nvSpPr>
               <p:cNvPr id="18" name="TextBox 17">
@@ -11252,8 +11256,8 @@
           </p:sp>
         </mc:Fallback>
       </mc:AlternateContent>
-      <mc:AlternateContent xmlns:mc="http://schemas.openxmlformats.org/markup-compatibility/2006">
-        <mc:Choice xmlns:a14="http://schemas.microsoft.com/office/drawing/2010/main" Requires="a14">
+      <mc:AlternateContent xmlns:mc="http://schemas.openxmlformats.org/markup-compatibility/2006" xmlns:a14="http://schemas.microsoft.com/office/drawing/2010/main">
+        <mc:Choice Requires="a14">
           <p:sp>
             <p:nvSpPr>
               <p:cNvPr id="20" name="TextBox 19">
@@ -11400,7 +11404,7 @@
             </p:txBody>
           </p:sp>
         </mc:Choice>
-        <mc:Fallback>
+        <mc:Fallback xmlns="">
           <p:sp>
             <p:nvSpPr>
               <p:cNvPr id="20" name="TextBox 19">
@@ -13931,8 +13935,8 @@
             </a:fontRef>
           </p:style>
         </p:cxnSp>
-        <mc:AlternateContent xmlns:mc="http://schemas.openxmlformats.org/markup-compatibility/2006">
-          <mc:Choice xmlns:a14="http://schemas.microsoft.com/office/drawing/2010/main" Requires="a14">
+        <mc:AlternateContent xmlns:mc="http://schemas.openxmlformats.org/markup-compatibility/2006" xmlns:a14="http://schemas.microsoft.com/office/drawing/2010/main">
+          <mc:Choice Requires="a14">
             <p:sp>
               <p:nvSpPr>
                 <p:cNvPr id="3090" name="TextBox 3089">
@@ -14034,7 +14038,7 @@
               </p:txBody>
             </p:sp>
           </mc:Choice>
-          <mc:Fallback>
+          <mc:Fallback xmlns="">
             <p:sp>
               <p:nvSpPr>
                 <p:cNvPr id="3090" name="TextBox 3089">
@@ -14094,10 +14098,10 @@
             <p:nvPr/>
           </p:nvPicPr>
           <p:blipFill>
-            <a:blip>
+            <a:blip r:embed="rId10">
               <a:extLst>
                 <a:ext uri="{96DAC541-7B7A-43D3-8B79-37D633B846F1}">
-                  <asvg:svgBlip xmlns:asvg="http://schemas.microsoft.com/office/drawing/2016/SVG/main" r:embed="rId10"/>
+                  <asvg:svgBlip xmlns:asvg="http://schemas.microsoft.com/office/drawing/2016/SVG/main" r:embed="rId11"/>
                 </a:ext>
               </a:extLst>
             </a:blip>
@@ -28226,6 +28230,82 @@
           </a:p>
         </p:txBody>
       </p:sp>
+      <p:pic>
+        <p:nvPicPr>
+          <p:cNvPr id="4" name="그림 3">
+            <a:extLst>
+              <a:ext uri="{FF2B5EF4-FFF2-40B4-BE49-F238E27FC236}">
+                <a16:creationId xmlns:a16="http://schemas.microsoft.com/office/drawing/2014/main" id="{0821650F-00C5-3449-5259-48FFAB06FA7F}"/>
+              </a:ext>
+            </a:extLst>
+          </p:cNvPr>
+          <p:cNvPicPr>
+            <a:picLocks noChangeAspect="1"/>
+          </p:cNvPicPr>
+          <p:nvPr/>
+        </p:nvPicPr>
+        <p:blipFill>
+          <a:blip r:embed="rId2">
+            <a:duotone>
+              <a:prstClr val="black"/>
+              <a:schemeClr val="accent5">
+                <a:tint val="45000"/>
+                <a:satMod val="400000"/>
+              </a:schemeClr>
+            </a:duotone>
+          </a:blip>
+          <a:stretch>
+            <a:fillRect/>
+          </a:stretch>
+        </p:blipFill>
+        <p:spPr>
+          <a:xfrm>
+            <a:off x="8084631" y="1063416"/>
+            <a:ext cx="1404705" cy="494248"/>
+          </a:xfrm>
+          <a:prstGeom prst="rect">
+            <a:avLst/>
+          </a:prstGeom>
+        </p:spPr>
+      </p:pic>
+      <p:pic>
+        <p:nvPicPr>
+          <p:cNvPr id="7" name="그림 6">
+            <a:extLst>
+              <a:ext uri="{FF2B5EF4-FFF2-40B4-BE49-F238E27FC236}">
+                <a16:creationId xmlns:a16="http://schemas.microsoft.com/office/drawing/2014/main" id="{C0128B04-3C98-D55D-B84F-2CE3686DA684}"/>
+              </a:ext>
+            </a:extLst>
+          </p:cNvPr>
+          <p:cNvPicPr>
+            <a:picLocks noChangeAspect="1"/>
+          </p:cNvPicPr>
+          <p:nvPr/>
+        </p:nvPicPr>
+        <p:blipFill>
+          <a:blip r:embed="rId3">
+            <a:duotone>
+              <a:prstClr val="black"/>
+              <a:schemeClr val="accent5">
+                <a:tint val="45000"/>
+                <a:satMod val="400000"/>
+              </a:schemeClr>
+            </a:duotone>
+          </a:blip>
+          <a:stretch>
+            <a:fillRect/>
+          </a:stretch>
+        </p:blipFill>
+        <p:spPr>
+          <a:xfrm>
+            <a:off x="8084631" y="1813197"/>
+            <a:ext cx="3726369" cy="461732"/>
+          </a:xfrm>
+          <a:prstGeom prst="rect">
+            <a:avLst/>
+          </a:prstGeom>
+        </p:spPr>
+      </p:pic>
     </p:spTree>
     <p:extLst>
       <p:ext uri="{BB962C8B-B14F-4D97-AF65-F5344CB8AC3E}">
@@ -28369,7 +28449,7 @@
         </p:blipFill>
         <p:spPr>
           <a:xfrm>
-            <a:off x="915383" y="2534544"/>
+            <a:off x="1210658" y="2886969"/>
             <a:ext cx="10428324" cy="3330546"/>
           </a:xfrm>
           <a:prstGeom prst="rect">
@@ -28392,7 +28472,7 @@
         <p:spPr>
           <a:xfrm>
             <a:off x="842210" y="1285138"/>
-            <a:ext cx="10860262" cy="869790"/>
+            <a:ext cx="10860262" cy="1285288"/>
           </a:xfrm>
           <a:prstGeom prst="rect">
             <a:avLst/>
@@ -28405,10 +28485,12 @@
           </a:bodyPr>
           <a:lstStyle/>
           <a:p>
-            <a:pPr>
+            <a:pPr marL="285750" indent="-285750">
               <a:lnSpc>
                 <a:spcPct val="150000"/>
               </a:lnSpc>
+              <a:buFont typeface="Wingdings" panose="05000000000000000000" pitchFamily="2" charset="2"/>
+              <a:buChar char="§"/>
             </a:pPr>
             <a:r>
               <a:rPr lang="ko-KR" altLang="en-US" dirty="0">
@@ -28514,6 +28596,129 @@
               </a:rPr>
               <a:t>는 것을 시각적으로 표현</a:t>
             </a:r>
+            <a:endParaRPr lang="en-US" altLang="ko-KR" dirty="0">
+              <a:latin typeface="맑은 고딕 Semilight" panose="020B0502040204020203" pitchFamily="50" charset="-127"/>
+              <a:ea typeface="맑은 고딕 Semilight" panose="020B0502040204020203" pitchFamily="50" charset="-127"/>
+              <a:cs typeface="맑은 고딕 Semilight" panose="020B0502040204020203" pitchFamily="50" charset="-127"/>
+            </a:endParaRPr>
+          </a:p>
+          <a:p>
+            <a:pPr marL="285750" indent="-285750">
+              <a:lnSpc>
+                <a:spcPct val="150000"/>
+              </a:lnSpc>
+              <a:buFont typeface="Wingdings" panose="05000000000000000000" pitchFamily="2" charset="2"/>
+              <a:buChar char="§"/>
+            </a:pPr>
+            <a:r>
+              <a:rPr lang="ko-KR" altLang="en-US" dirty="0" err="1">
+                <a:latin typeface="맑은 고딕 Semilight" panose="020B0502040204020203" pitchFamily="50" charset="-127"/>
+                <a:ea typeface="맑은 고딕 Semilight" panose="020B0502040204020203" pitchFamily="50" charset="-127"/>
+                <a:cs typeface="맑은 고딕 Semilight" panose="020B0502040204020203" pitchFamily="50" charset="-127"/>
+              </a:rPr>
+              <a:t>머신러닝의</a:t>
+            </a:r>
+            <a:r>
+              <a:rPr lang="ko-KR" altLang="en-US" dirty="0">
+                <a:latin typeface="맑은 고딕 Semilight" panose="020B0502040204020203" pitchFamily="50" charset="-127"/>
+                <a:ea typeface="맑은 고딕 Semilight" panose="020B0502040204020203" pitchFamily="50" charset="-127"/>
+                <a:cs typeface="맑은 고딕 Semilight" panose="020B0502040204020203" pitchFamily="50" charset="-127"/>
+              </a:rPr>
+              <a:t> 목적은 </a:t>
+            </a:r>
+            <a:r>
+              <a:rPr lang="en-US" altLang="ko-KR" dirty="0">
+                <a:latin typeface="맑은 고딕 Semilight" panose="020B0502040204020203" pitchFamily="50" charset="-127"/>
+                <a:ea typeface="맑은 고딕 Semilight" panose="020B0502040204020203" pitchFamily="50" charset="-127"/>
+                <a:cs typeface="맑은 고딕 Semilight" panose="020B0502040204020203" pitchFamily="50" charset="-127"/>
+              </a:rPr>
+              <a:t>fit</a:t>
+            </a:r>
+            <a:r>
+              <a:rPr lang="ko-KR" altLang="en-US" dirty="0">
+                <a:latin typeface="맑은 고딕 Semilight" panose="020B0502040204020203" pitchFamily="50" charset="-127"/>
+                <a:ea typeface="맑은 고딕 Semilight" panose="020B0502040204020203" pitchFamily="50" charset="-127"/>
+                <a:cs typeface="맑은 고딕 Semilight" panose="020B0502040204020203" pitchFamily="50" charset="-127"/>
+              </a:rPr>
+              <a:t>이 아니라 </a:t>
+            </a:r>
+            <a:r>
+              <a:rPr lang="en-US" altLang="ko-KR" dirty="0">
+                <a:latin typeface="맑은 고딕 Semilight" panose="020B0502040204020203" pitchFamily="50" charset="-127"/>
+                <a:ea typeface="맑은 고딕 Semilight" panose="020B0502040204020203" pitchFamily="50" charset="-127"/>
+                <a:cs typeface="맑은 고딕 Semilight" panose="020B0502040204020203" pitchFamily="50" charset="-127"/>
+              </a:rPr>
+              <a:t>predict</a:t>
+            </a:r>
+            <a:r>
+              <a:rPr lang="ko-KR" altLang="en-US" dirty="0">
+                <a:latin typeface="맑은 고딕 Semilight" panose="020B0502040204020203" pitchFamily="50" charset="-127"/>
+                <a:ea typeface="맑은 고딕 Semilight" panose="020B0502040204020203" pitchFamily="50" charset="-127"/>
+                <a:cs typeface="맑은 고딕 Semilight" panose="020B0502040204020203" pitchFamily="50" charset="-127"/>
+              </a:rPr>
+              <a:t> 임 </a:t>
+            </a:r>
+            <a:r>
+              <a:rPr lang="en-US" altLang="ko-KR" dirty="0">
+                <a:latin typeface="맑은 고딕 Semilight" panose="020B0502040204020203" pitchFamily="50" charset="-127"/>
+                <a:ea typeface="맑은 고딕 Semilight" panose="020B0502040204020203" pitchFamily="50" charset="-127"/>
+                <a:cs typeface="맑은 고딕 Semilight" panose="020B0502040204020203" pitchFamily="50" charset="-127"/>
+              </a:rPr>
+              <a:t>(</a:t>
+            </a:r>
+            <a:r>
+              <a:rPr lang="ko-KR" altLang="en-US" dirty="0">
+                <a:latin typeface="맑은 고딕 Semilight" panose="020B0502040204020203" pitchFamily="50" charset="-127"/>
+                <a:ea typeface="맑은 고딕 Semilight" panose="020B0502040204020203" pitchFamily="50" charset="-127"/>
+                <a:cs typeface="맑은 고딕 Semilight" panose="020B0502040204020203" pitchFamily="50" charset="-127"/>
+              </a:rPr>
+              <a:t>새로운 </a:t>
+            </a:r>
+            <a:r>
+              <a:rPr lang="en-US" altLang="ko-KR" dirty="0">
+                <a:latin typeface="맑은 고딕 Semilight" panose="020B0502040204020203" pitchFamily="50" charset="-127"/>
+                <a:ea typeface="맑은 고딕 Semilight" panose="020B0502040204020203" pitchFamily="50" charset="-127"/>
+                <a:cs typeface="맑은 고딕 Semilight" panose="020B0502040204020203" pitchFamily="50" charset="-127"/>
+              </a:rPr>
+              <a:t>X </a:t>
+            </a:r>
+            <a:r>
+              <a:rPr lang="ko-KR" altLang="en-US" dirty="0">
+                <a:latin typeface="맑은 고딕 Semilight" panose="020B0502040204020203" pitchFamily="50" charset="-127"/>
+                <a:ea typeface="맑은 고딕 Semilight" panose="020B0502040204020203" pitchFamily="50" charset="-127"/>
+                <a:cs typeface="맑은 고딕 Semilight" panose="020B0502040204020203" pitchFamily="50" charset="-127"/>
+              </a:rPr>
+              <a:t>값이 </a:t>
+            </a:r>
+            <a:r>
+              <a:rPr lang="en-US" altLang="ko-KR" dirty="0">
+                <a:latin typeface="맑은 고딕 Semilight" panose="020B0502040204020203" pitchFamily="50" charset="-127"/>
+                <a:ea typeface="맑은 고딕 Semilight" panose="020B0502040204020203" pitchFamily="50" charset="-127"/>
+                <a:cs typeface="맑은 고딕 Semilight" panose="020B0502040204020203" pitchFamily="50" charset="-127"/>
+              </a:rPr>
+              <a:t>11</a:t>
+            </a:r>
+            <a:r>
+              <a:rPr lang="ko-KR" altLang="en-US" dirty="0">
+                <a:latin typeface="맑은 고딕 Semilight" panose="020B0502040204020203" pitchFamily="50" charset="-127"/>
+                <a:ea typeface="맑은 고딕 Semilight" panose="020B0502040204020203" pitchFamily="50" charset="-127"/>
+                <a:cs typeface="맑은 고딕 Semilight" panose="020B0502040204020203" pitchFamily="50" charset="-127"/>
+              </a:rPr>
+              <a:t>일 때 각 모델의 예측 값은</a:t>
+            </a:r>
+            <a:r>
+              <a:rPr lang="en-US" altLang="ko-KR" dirty="0">
+                <a:latin typeface="맑은 고딕 Semilight" panose="020B0502040204020203" pitchFamily="50" charset="-127"/>
+                <a:ea typeface="맑은 고딕 Semilight" panose="020B0502040204020203" pitchFamily="50" charset="-127"/>
+                <a:cs typeface="맑은 고딕 Semilight" panose="020B0502040204020203" pitchFamily="50" charset="-127"/>
+              </a:rPr>
+              <a:t>?)</a:t>
+            </a:r>
+            <a:endParaRPr lang="ko-KR" altLang="en-US" dirty="0">
+              <a:latin typeface="맑은 고딕 Semilight" panose="020B0502040204020203" pitchFamily="50" charset="-127"/>
+              <a:ea typeface="맑은 고딕 Semilight" panose="020B0502040204020203" pitchFamily="50" charset="-127"/>
+              <a:cs typeface="맑은 고딕 Semilight" panose="020B0502040204020203" pitchFamily="50" charset="-127"/>
+            </a:endParaRPr>
           </a:p>
         </p:txBody>
       </p:sp>
@@ -28531,6 +28736,848 @@
 </file>
 
 <file path=ppt/slides/slide39.xml><?xml version="1.0" encoding="utf-8"?>
+<p:sld xmlns:a="http://schemas.openxmlformats.org/drawingml/2006/main" xmlns:r="http://schemas.openxmlformats.org/officeDocument/2006/relationships" xmlns:p="http://schemas.openxmlformats.org/presentationml/2006/main">
+  <p:cSld>
+    <p:spTree>
+      <p:nvGrpSpPr>
+        <p:cNvPr id="1" name="">
+          <a:extLst>
+            <a:ext uri="{FF2B5EF4-FFF2-40B4-BE49-F238E27FC236}">
+              <a16:creationId xmlns:a16="http://schemas.microsoft.com/office/drawing/2014/main" id="{54975C64-2C1F-ED10-2305-AC3FEFC21BF9}"/>
+            </a:ext>
+          </a:extLst>
+        </p:cNvPr>
+        <p:cNvGrpSpPr/>
+        <p:nvPr/>
+      </p:nvGrpSpPr>
+      <p:grpSpPr>
+        <a:xfrm>
+          <a:off x="0" y="0"/>
+          <a:ext cx="0" cy="0"/>
+          <a:chOff x="0" y="0"/>
+          <a:chExt cx="0" cy="0"/>
+        </a:xfrm>
+      </p:grpSpPr>
+      <p:sp>
+        <p:nvSpPr>
+          <p:cNvPr id="6" name="제목 1">
+            <a:extLst>
+              <a:ext uri="{FF2B5EF4-FFF2-40B4-BE49-F238E27FC236}">
+                <a16:creationId xmlns:a16="http://schemas.microsoft.com/office/drawing/2014/main" id="{296BFBFB-182E-BE0D-F6EC-3B5802EE866D}"/>
+              </a:ext>
+            </a:extLst>
+          </p:cNvPr>
+          <p:cNvSpPr>
+            <a:spLocks noGrp="1"/>
+          </p:cNvSpPr>
+          <p:nvPr>
+            <p:ph type="title"/>
+          </p:nvPr>
+        </p:nvSpPr>
+        <p:spPr>
+          <a:xfrm>
+            <a:off x="915383" y="139084"/>
+            <a:ext cx="10353762" cy="766439"/>
+          </a:xfrm>
+        </p:spPr>
+        <p:txBody>
+          <a:bodyPr>
+            <a:normAutofit/>
+          </a:bodyPr>
+          <a:lstStyle/>
+          <a:p>
+            <a:r>
+              <a:rPr lang="en-US" altLang="ko-KR" b="1" dirty="0">
+                <a:latin typeface="Times New Roman" panose="02020603050405020304" pitchFamily="18" charset="0"/>
+                <a:cs typeface="Times New Roman" panose="02020603050405020304" pitchFamily="18" charset="0"/>
+              </a:rPr>
+              <a:t>Optimization</a:t>
+            </a:r>
+            <a:r>
+              <a:rPr lang="ko-KR" altLang="en-US" b="1" dirty="0">
+                <a:latin typeface="Times New Roman" panose="02020603050405020304" pitchFamily="18" charset="0"/>
+                <a:cs typeface="Times New Roman" panose="02020603050405020304" pitchFamily="18" charset="0"/>
+              </a:rPr>
+              <a:t> </a:t>
+            </a:r>
+            <a:r>
+              <a:rPr lang="en-US" altLang="ko-KR" b="1" dirty="0">
+                <a:latin typeface="Times New Roman" panose="02020603050405020304" pitchFamily="18" charset="0"/>
+                <a:cs typeface="Times New Roman" panose="02020603050405020304" pitchFamily="18" charset="0"/>
+              </a:rPr>
+              <a:t>of Loss Function</a:t>
+            </a:r>
+            <a:endParaRPr lang="ko-KR" altLang="en-US" b="1" cap="none" dirty="0">
+              <a:latin typeface="Times New Roman" panose="02020603050405020304" pitchFamily="18" charset="0"/>
+              <a:cs typeface="Times New Roman" panose="02020603050405020304" pitchFamily="18" charset="0"/>
+            </a:endParaRPr>
+          </a:p>
+        </p:txBody>
+      </p:sp>
+      <p:sp>
+        <p:nvSpPr>
+          <p:cNvPr id="8" name="슬라이드 번호 개체 틀 7">
+            <a:extLst>
+              <a:ext uri="{FF2B5EF4-FFF2-40B4-BE49-F238E27FC236}">
+                <a16:creationId xmlns:a16="http://schemas.microsoft.com/office/drawing/2014/main" id="{EDD22321-8722-5365-0508-9396C40524A0}"/>
+              </a:ext>
+            </a:extLst>
+          </p:cNvPr>
+          <p:cNvSpPr>
+            <a:spLocks noGrp="1"/>
+          </p:cNvSpPr>
+          <p:nvPr>
+            <p:ph type="sldNum" sz="quarter" idx="12"/>
+          </p:nvPr>
+        </p:nvSpPr>
+        <p:spPr/>
+        <p:txBody>
+          <a:bodyPr/>
+          <a:lstStyle/>
+          <a:p>
+            <a:fld id="{D57F1E4F-1CFF-5643-939E-02111984F565}" type="slidenum">
+              <a:rPr lang="en-US" smtClean="0"/>
+              <a:t>39</a:t>
+            </a:fld>
+            <a:endParaRPr lang="en-US" dirty="0"/>
+          </a:p>
+        </p:txBody>
+      </p:sp>
+      <p:sp>
+        <p:nvSpPr>
+          <p:cNvPr id="4" name="TextBox 3">
+            <a:extLst>
+              <a:ext uri="{FF2B5EF4-FFF2-40B4-BE49-F238E27FC236}">
+                <a16:creationId xmlns:a16="http://schemas.microsoft.com/office/drawing/2014/main" id="{29C383C4-9714-B268-35CA-D128C720733C}"/>
+              </a:ext>
+            </a:extLst>
+          </p:cNvPr>
+          <p:cNvSpPr txBox="1"/>
+          <p:nvPr/>
+        </p:nvSpPr>
+        <p:spPr>
+          <a:xfrm>
+            <a:off x="842210" y="1285138"/>
+            <a:ext cx="10860262" cy="1285288"/>
+          </a:xfrm>
+          <a:prstGeom prst="rect">
+            <a:avLst/>
+          </a:prstGeom>
+          <a:noFill/>
+        </p:spPr>
+        <p:txBody>
+          <a:bodyPr wrap="square" rtlCol="0">
+            <a:spAutoFit/>
+          </a:bodyPr>
+          <a:lstStyle/>
+          <a:p>
+            <a:pPr marL="285750" indent="-285750">
+              <a:lnSpc>
+                <a:spcPct val="150000"/>
+              </a:lnSpc>
+              <a:buFont typeface="Wingdings" panose="05000000000000000000" pitchFamily="2" charset="2"/>
+              <a:buChar char="§"/>
+            </a:pPr>
+            <a:r>
+              <a:rPr lang="ko-KR" altLang="en-US" dirty="0">
+                <a:latin typeface="맑은 고딕 Semilight" panose="020B0502040204020203" pitchFamily="50" charset="-127"/>
+                <a:ea typeface="맑은 고딕 Semilight" panose="020B0502040204020203" pitchFamily="50" charset="-127"/>
+                <a:cs typeface="맑은 고딕 Semilight" panose="020B0502040204020203" pitchFamily="50" charset="-127"/>
+              </a:rPr>
+              <a:t>각 모델의 특징별</a:t>
+            </a:r>
+            <a:r>
+              <a:rPr lang="en-US" altLang="ko-KR" dirty="0">
+                <a:latin typeface="맑은 고딕 Semilight" panose="020B0502040204020203" pitchFamily="50" charset="-127"/>
+                <a:ea typeface="맑은 고딕 Semilight" panose="020B0502040204020203" pitchFamily="50" charset="-127"/>
+                <a:cs typeface="맑은 고딕 Semilight" panose="020B0502040204020203" pitchFamily="50" charset="-127"/>
+              </a:rPr>
+              <a:t>(Feature) </a:t>
+            </a:r>
+            <a:r>
+              <a:rPr lang="ko-KR" altLang="en-US" dirty="0">
+                <a:latin typeface="맑은 고딕 Semilight" panose="020B0502040204020203" pitchFamily="50" charset="-127"/>
+                <a:ea typeface="맑은 고딕 Semilight" panose="020B0502040204020203" pitchFamily="50" charset="-127"/>
+                <a:cs typeface="맑은 고딕 Semilight" panose="020B0502040204020203" pitchFamily="50" charset="-127"/>
+              </a:rPr>
+              <a:t>계수</a:t>
+            </a:r>
+            <a:r>
+              <a:rPr lang="en-US" altLang="ko-KR" dirty="0">
+                <a:latin typeface="맑은 고딕 Semilight" panose="020B0502040204020203" pitchFamily="50" charset="-127"/>
+                <a:ea typeface="맑은 고딕 Semilight" panose="020B0502040204020203" pitchFamily="50" charset="-127"/>
+                <a:cs typeface="맑은 고딕 Semilight" panose="020B0502040204020203" pitchFamily="50" charset="-127"/>
+              </a:rPr>
+              <a:t>(Coefficient) </a:t>
+            </a:r>
+            <a:r>
+              <a:rPr lang="ko-KR" altLang="en-US" dirty="0">
+                <a:latin typeface="맑은 고딕 Semilight" panose="020B0502040204020203" pitchFamily="50" charset="-127"/>
+                <a:ea typeface="맑은 고딕 Semilight" panose="020B0502040204020203" pitchFamily="50" charset="-127"/>
+                <a:cs typeface="맑은 고딕 Semilight" panose="020B0502040204020203" pitchFamily="50" charset="-127"/>
+              </a:rPr>
+              <a:t>값을 추출하여 아래와 같이 테이블을 생성하라</a:t>
+            </a:r>
+            <a:endParaRPr lang="en-US" altLang="ko-KR" dirty="0">
+              <a:latin typeface="맑은 고딕 Semilight" panose="020B0502040204020203" pitchFamily="50" charset="-127"/>
+              <a:ea typeface="맑은 고딕 Semilight" panose="020B0502040204020203" pitchFamily="50" charset="-127"/>
+              <a:cs typeface="맑은 고딕 Semilight" panose="020B0502040204020203" pitchFamily="50" charset="-127"/>
+            </a:endParaRPr>
+          </a:p>
+          <a:p>
+            <a:pPr marL="285750" indent="-285750">
+              <a:lnSpc>
+                <a:spcPct val="150000"/>
+              </a:lnSpc>
+              <a:buFont typeface="Wingdings" panose="05000000000000000000" pitchFamily="2" charset="2"/>
+              <a:buChar char="§"/>
+            </a:pPr>
+            <a:r>
+              <a:rPr lang="en-US" altLang="ko-KR" dirty="0">
+                <a:latin typeface="맑은 고딕 Semilight" panose="020B0502040204020203" pitchFamily="50" charset="-127"/>
+                <a:ea typeface="맑은 고딕 Semilight" panose="020B0502040204020203" pitchFamily="50" charset="-127"/>
+                <a:cs typeface="맑은 고딕 Semilight" panose="020B0502040204020203" pitchFamily="50" charset="-127"/>
+              </a:rPr>
+              <a:t>Linear</a:t>
+            </a:r>
+            <a:r>
+              <a:rPr lang="ko-KR" altLang="en-US" dirty="0">
+                <a:latin typeface="맑은 고딕 Semilight" panose="020B0502040204020203" pitchFamily="50" charset="-127"/>
+                <a:ea typeface="맑은 고딕 Semilight" panose="020B0502040204020203" pitchFamily="50" charset="-127"/>
+                <a:cs typeface="맑은 고딕 Semilight" panose="020B0502040204020203" pitchFamily="50" charset="-127"/>
+              </a:rPr>
+              <a:t> 모델은 단순회귀식으로 변수가 </a:t>
+            </a:r>
+            <a:r>
+              <a:rPr lang="en-US" altLang="ko-KR" dirty="0">
+                <a:latin typeface="맑은 고딕 Semilight" panose="020B0502040204020203" pitchFamily="50" charset="-127"/>
+                <a:ea typeface="맑은 고딕 Semilight" panose="020B0502040204020203" pitchFamily="50" charset="-127"/>
+                <a:cs typeface="맑은 고딕 Semilight" panose="020B0502040204020203" pitchFamily="50" charset="-127"/>
+              </a:rPr>
+              <a:t>1</a:t>
+            </a:r>
+            <a:r>
+              <a:rPr lang="ko-KR" altLang="en-US" dirty="0">
+                <a:latin typeface="맑은 고딕 Semilight" panose="020B0502040204020203" pitchFamily="50" charset="-127"/>
+                <a:ea typeface="맑은 고딕 Semilight" panose="020B0502040204020203" pitchFamily="50" charset="-127"/>
+                <a:cs typeface="맑은 고딕 Semilight" panose="020B0502040204020203" pitchFamily="50" charset="-127"/>
+              </a:rPr>
+              <a:t>개</a:t>
+            </a:r>
+            <a:endParaRPr lang="en-US" altLang="ko-KR" dirty="0">
+              <a:latin typeface="맑은 고딕 Semilight" panose="020B0502040204020203" pitchFamily="50" charset="-127"/>
+              <a:ea typeface="맑은 고딕 Semilight" panose="020B0502040204020203" pitchFamily="50" charset="-127"/>
+              <a:cs typeface="맑은 고딕 Semilight" panose="020B0502040204020203" pitchFamily="50" charset="-127"/>
+            </a:endParaRPr>
+          </a:p>
+          <a:p>
+            <a:pPr marL="285750" indent="-285750">
+              <a:lnSpc>
+                <a:spcPct val="150000"/>
+              </a:lnSpc>
+              <a:buFont typeface="Wingdings" panose="05000000000000000000" pitchFamily="2" charset="2"/>
+              <a:buChar char="§"/>
+            </a:pPr>
+            <a:r>
+              <a:rPr lang="en-US" altLang="ko-KR" dirty="0">
+                <a:latin typeface="맑은 고딕 Semilight" panose="020B0502040204020203" pitchFamily="50" charset="-127"/>
+                <a:ea typeface="맑은 고딕 Semilight" panose="020B0502040204020203" pitchFamily="50" charset="-127"/>
+                <a:cs typeface="맑은 고딕 Semilight" panose="020B0502040204020203" pitchFamily="50" charset="-127"/>
+              </a:rPr>
+              <a:t>Ridge</a:t>
+            </a:r>
+            <a:r>
+              <a:rPr lang="ko-KR" altLang="en-US" dirty="0">
+                <a:latin typeface="맑은 고딕 Semilight" panose="020B0502040204020203" pitchFamily="50" charset="-127"/>
+                <a:ea typeface="맑은 고딕 Semilight" panose="020B0502040204020203" pitchFamily="50" charset="-127"/>
+                <a:cs typeface="맑은 고딕 Semilight" panose="020B0502040204020203" pitchFamily="50" charset="-127"/>
+              </a:rPr>
+              <a:t>와 </a:t>
+            </a:r>
+            <a:r>
+              <a:rPr lang="en-US" altLang="ko-KR" dirty="0">
+                <a:latin typeface="맑은 고딕 Semilight" panose="020B0502040204020203" pitchFamily="50" charset="-127"/>
+                <a:ea typeface="맑은 고딕 Semilight" panose="020B0502040204020203" pitchFamily="50" charset="-127"/>
+                <a:cs typeface="맑은 고딕 Semilight" panose="020B0502040204020203" pitchFamily="50" charset="-127"/>
+              </a:rPr>
+              <a:t>Lasso</a:t>
+            </a:r>
+            <a:r>
+              <a:rPr lang="ko-KR" altLang="en-US" dirty="0">
+                <a:latin typeface="맑은 고딕 Semilight" panose="020B0502040204020203" pitchFamily="50" charset="-127"/>
+                <a:ea typeface="맑은 고딕 Semilight" panose="020B0502040204020203" pitchFamily="50" charset="-127"/>
+                <a:cs typeface="맑은 고딕 Semilight" panose="020B0502040204020203" pitchFamily="50" charset="-127"/>
+              </a:rPr>
+              <a:t>의 각</a:t>
+            </a:r>
+            <a:r>
+              <a:rPr lang="en-US" altLang="ko-KR" dirty="0">
+                <a:latin typeface="맑은 고딕 Semilight" panose="020B0502040204020203" pitchFamily="50" charset="-127"/>
+                <a:ea typeface="맑은 고딕 Semilight" panose="020B0502040204020203" pitchFamily="50" charset="-127"/>
+                <a:cs typeface="맑은 고딕 Semilight" panose="020B0502040204020203" pitchFamily="50" charset="-127"/>
+              </a:rPr>
+              <a:t> </a:t>
+            </a:r>
+            <a:r>
+              <a:rPr lang="ko-KR" altLang="en-US" dirty="0">
+                <a:latin typeface="맑은 고딕 Semilight" panose="020B0502040204020203" pitchFamily="50" charset="-127"/>
+                <a:ea typeface="맑은 고딕 Semilight" panose="020B0502040204020203" pitchFamily="50" charset="-127"/>
+                <a:cs typeface="맑은 고딕 Semilight" panose="020B0502040204020203" pitchFamily="50" charset="-127"/>
+              </a:rPr>
+              <a:t>변수</a:t>
+            </a:r>
+            <a:r>
+              <a:rPr lang="en-US" altLang="ko-KR" dirty="0">
+                <a:latin typeface="맑은 고딕 Semilight" panose="020B0502040204020203" pitchFamily="50" charset="-127"/>
+                <a:ea typeface="맑은 고딕 Semilight" panose="020B0502040204020203" pitchFamily="50" charset="-127"/>
+                <a:cs typeface="맑은 고딕 Semilight" panose="020B0502040204020203" pitchFamily="50" charset="-127"/>
+              </a:rPr>
+              <a:t>(Feature)</a:t>
+            </a:r>
+            <a:r>
+              <a:rPr lang="ko-KR" altLang="en-US" dirty="0">
+                <a:latin typeface="맑은 고딕 Semilight" panose="020B0502040204020203" pitchFamily="50" charset="-127"/>
+                <a:ea typeface="맑은 고딕 Semilight" panose="020B0502040204020203" pitchFamily="50" charset="-127"/>
+                <a:cs typeface="맑은 고딕 Semilight" panose="020B0502040204020203" pitchFamily="50" charset="-127"/>
+              </a:rPr>
+              <a:t>의 계수 값</a:t>
+            </a:r>
+            <a:r>
+              <a:rPr lang="en-US" altLang="ko-KR" dirty="0">
+                <a:latin typeface="맑은 고딕 Semilight" panose="020B0502040204020203" pitchFamily="50" charset="-127"/>
+                <a:ea typeface="맑은 고딕 Semilight" panose="020B0502040204020203" pitchFamily="50" charset="-127"/>
+                <a:cs typeface="맑은 고딕 Semilight" panose="020B0502040204020203" pitchFamily="50" charset="-127"/>
+              </a:rPr>
+              <a:t>(coefficient values)</a:t>
+            </a:r>
+            <a:r>
+              <a:rPr lang="ko-KR" altLang="en-US" dirty="0">
+                <a:latin typeface="맑은 고딕 Semilight" panose="020B0502040204020203" pitchFamily="50" charset="-127"/>
+                <a:ea typeface="맑은 고딕 Semilight" panose="020B0502040204020203" pitchFamily="50" charset="-127"/>
+                <a:cs typeface="맑은 고딕 Semilight" panose="020B0502040204020203" pitchFamily="50" charset="-127"/>
+              </a:rPr>
+              <a:t>을 비교하고 토론하라</a:t>
+            </a:r>
+          </a:p>
+        </p:txBody>
+      </p:sp>
+      <p:pic>
+        <p:nvPicPr>
+          <p:cNvPr id="5" name="그림 4">
+            <a:extLst>
+              <a:ext uri="{FF2B5EF4-FFF2-40B4-BE49-F238E27FC236}">
+                <a16:creationId xmlns:a16="http://schemas.microsoft.com/office/drawing/2014/main" id="{4F28B006-1902-0666-407A-741D1CE81BC6}"/>
+              </a:ext>
+            </a:extLst>
+          </p:cNvPr>
+          <p:cNvPicPr>
+            <a:picLocks noChangeAspect="1"/>
+          </p:cNvPicPr>
+          <p:nvPr/>
+        </p:nvPicPr>
+        <p:blipFill>
+          <a:blip r:embed="rId2"/>
+          <a:stretch>
+            <a:fillRect/>
+          </a:stretch>
+        </p:blipFill>
+        <p:spPr>
+          <a:xfrm>
+            <a:off x="1189171" y="3059353"/>
+            <a:ext cx="10079974" cy="2131772"/>
+          </a:xfrm>
+          <a:prstGeom prst="rect">
+            <a:avLst/>
+          </a:prstGeom>
+        </p:spPr>
+      </p:pic>
+      <p:sp>
+        <p:nvSpPr>
+          <p:cNvPr id="2" name="직사각형 1">
+            <a:extLst>
+              <a:ext uri="{FF2B5EF4-FFF2-40B4-BE49-F238E27FC236}">
+                <a16:creationId xmlns:a16="http://schemas.microsoft.com/office/drawing/2014/main" id="{D04883D6-624A-023C-D671-0E4B17F02936}"/>
+              </a:ext>
+            </a:extLst>
+          </p:cNvPr>
+          <p:cNvSpPr/>
+          <p:nvPr/>
+        </p:nvSpPr>
+        <p:spPr>
+          <a:xfrm>
+            <a:off x="842210" y="4267200"/>
+            <a:ext cx="10644940" cy="923925"/>
+          </a:xfrm>
+          <a:prstGeom prst="rect">
+            <a:avLst/>
+          </a:prstGeom>
+          <a:noFill/>
+          <a:ln w="28575">
+            <a:solidFill>
+              <a:srgbClr val="FF0000"/>
+            </a:solidFill>
+          </a:ln>
+        </p:spPr>
+        <p:style>
+          <a:lnRef idx="2">
+            <a:schemeClr val="accent1">
+              <a:shade val="15000"/>
+            </a:schemeClr>
+          </a:lnRef>
+          <a:fillRef idx="1">
+            <a:schemeClr val="accent1"/>
+          </a:fillRef>
+          <a:effectRef idx="0">
+            <a:schemeClr val="accent1"/>
+          </a:effectRef>
+          <a:fontRef idx="minor">
+            <a:schemeClr val="lt1"/>
+          </a:fontRef>
+        </p:style>
+        <p:txBody>
+          <a:bodyPr rtlCol="0" anchor="ctr"/>
+          <a:lstStyle/>
+          <a:p>
+            <a:pPr algn="ctr"/>
+            <a:endParaRPr lang="ko-KR" altLang="en-US" dirty="0"/>
+          </a:p>
+        </p:txBody>
+      </p:sp>
+    </p:spTree>
+    <p:extLst>
+      <p:ext uri="{BB962C8B-B14F-4D97-AF65-F5344CB8AC3E}">
+        <p14:creationId xmlns:p14="http://schemas.microsoft.com/office/powerpoint/2010/main" val="248164606"/>
+      </p:ext>
+    </p:extLst>
+  </p:cSld>
+  <p:clrMapOvr>
+    <a:masterClrMapping/>
+  </p:clrMapOvr>
+</p:sld>
+</file>
+
+<file path=ppt/slides/slide4.xml><?xml version="1.0" encoding="utf-8"?>
+<p:sld xmlns:a="http://schemas.openxmlformats.org/drawingml/2006/main" xmlns:r="http://schemas.openxmlformats.org/officeDocument/2006/relationships" xmlns:p="http://schemas.openxmlformats.org/presentationml/2006/main">
+  <p:cSld>
+    <p:spTree>
+      <p:nvGrpSpPr>
+        <p:cNvPr id="1" name="">
+          <a:extLst>
+            <a:ext uri="{FF2B5EF4-FFF2-40B4-BE49-F238E27FC236}">
+              <a16:creationId xmlns:a16="http://schemas.microsoft.com/office/drawing/2014/main" id="{3DF73C1C-752E-1492-75CD-9260CD39C196}"/>
+            </a:ext>
+          </a:extLst>
+        </p:cNvPr>
+        <p:cNvGrpSpPr/>
+        <p:nvPr/>
+      </p:nvGrpSpPr>
+      <p:grpSpPr>
+        <a:xfrm>
+          <a:off x="0" y="0"/>
+          <a:ext cx="0" cy="0"/>
+          <a:chOff x="0" y="0"/>
+          <a:chExt cx="0" cy="0"/>
+        </a:xfrm>
+      </p:grpSpPr>
+      <p:sp>
+        <p:nvSpPr>
+          <p:cNvPr id="6" name="제목 1">
+            <a:extLst>
+              <a:ext uri="{FF2B5EF4-FFF2-40B4-BE49-F238E27FC236}">
+                <a16:creationId xmlns:a16="http://schemas.microsoft.com/office/drawing/2014/main" id="{80209EB2-DA90-3A5C-9F40-6CC699307D43}"/>
+              </a:ext>
+            </a:extLst>
+          </p:cNvPr>
+          <p:cNvSpPr>
+            <a:spLocks noGrp="1"/>
+          </p:cNvSpPr>
+          <p:nvPr>
+            <p:ph type="title"/>
+          </p:nvPr>
+        </p:nvSpPr>
+        <p:spPr>
+          <a:xfrm>
+            <a:off x="915383" y="139084"/>
+            <a:ext cx="10353762" cy="766439"/>
+          </a:xfrm>
+        </p:spPr>
+        <p:txBody>
+          <a:bodyPr>
+            <a:normAutofit/>
+          </a:bodyPr>
+          <a:lstStyle/>
+          <a:p>
+            <a:r>
+              <a:rPr lang="en-US" altLang="ko-KR" b="1" dirty="0">
+                <a:latin typeface="Times New Roman" panose="02020603050405020304" pitchFamily="18" charset="0"/>
+                <a:cs typeface="Times New Roman" panose="02020603050405020304" pitchFamily="18" charset="0"/>
+              </a:rPr>
+              <a:t>Simulation</a:t>
+            </a:r>
+            <a:endParaRPr lang="ko-KR" altLang="en-US" b="1" cap="none" dirty="0">
+              <a:latin typeface="Times New Roman" panose="02020603050405020304" pitchFamily="18" charset="0"/>
+              <a:cs typeface="Times New Roman" panose="02020603050405020304" pitchFamily="18" charset="0"/>
+            </a:endParaRPr>
+          </a:p>
+        </p:txBody>
+      </p:sp>
+      <p:sp>
+        <p:nvSpPr>
+          <p:cNvPr id="8" name="슬라이드 번호 개체 틀 7">
+            <a:extLst>
+              <a:ext uri="{FF2B5EF4-FFF2-40B4-BE49-F238E27FC236}">
+                <a16:creationId xmlns:a16="http://schemas.microsoft.com/office/drawing/2014/main" id="{4E65A7FF-E730-2207-3FF2-2E5E8228A8EB}"/>
+              </a:ext>
+            </a:extLst>
+          </p:cNvPr>
+          <p:cNvSpPr>
+            <a:spLocks noGrp="1"/>
+          </p:cNvSpPr>
+          <p:nvPr>
+            <p:ph type="sldNum" sz="quarter" idx="12"/>
+          </p:nvPr>
+        </p:nvSpPr>
+        <p:spPr/>
+        <p:txBody>
+          <a:bodyPr/>
+          <a:lstStyle/>
+          <a:p>
+            <a:fld id="{D57F1E4F-1CFF-5643-939E-02111984F565}" type="slidenum">
+              <a:rPr lang="en-US" smtClean="0"/>
+              <a:t>4</a:t>
+            </a:fld>
+            <a:endParaRPr lang="en-US" dirty="0"/>
+          </a:p>
+        </p:txBody>
+      </p:sp>
+      <p:sp>
+        <p:nvSpPr>
+          <p:cNvPr id="7" name="내용 개체 틀 2">
+            <a:extLst>
+              <a:ext uri="{FF2B5EF4-FFF2-40B4-BE49-F238E27FC236}">
+                <a16:creationId xmlns:a16="http://schemas.microsoft.com/office/drawing/2014/main" id="{CF9EEEA1-E59F-8F64-113D-54452538E740}"/>
+              </a:ext>
+            </a:extLst>
+          </p:cNvPr>
+          <p:cNvSpPr>
+            <a:spLocks noGrp="1"/>
+          </p:cNvSpPr>
+          <p:nvPr>
+            <p:ph idx="1"/>
+          </p:nvPr>
+        </p:nvSpPr>
+        <p:spPr>
+          <a:xfrm>
+            <a:off x="657717" y="1661628"/>
+            <a:ext cx="10876566" cy="3936532"/>
+          </a:xfrm>
+        </p:spPr>
+        <p:txBody>
+          <a:bodyPr>
+            <a:normAutofit fontScale="92500" lnSpcReduction="10000"/>
+          </a:bodyPr>
+          <a:lstStyle/>
+          <a:p>
+            <a:pPr marL="285750" indent="-285750">
+              <a:lnSpc>
+                <a:spcPct val="150000"/>
+              </a:lnSpc>
+              <a:buFont typeface="Wingdings" panose="05000000000000000000" pitchFamily="2" charset="2"/>
+              <a:buChar char="v"/>
+            </a:pPr>
+            <a:r>
+              <a:rPr lang="ko-KR" altLang="en-US" dirty="0">
+                <a:latin typeface="맑은 고딕 Semilight" panose="020B0502040204020203" pitchFamily="50" charset="-127"/>
+                <a:ea typeface="맑은 고딕 Semilight" panose="020B0502040204020203" pitchFamily="50" charset="-127"/>
+                <a:cs typeface="맑은 고딕 Semilight" panose="020B0502040204020203" pitchFamily="50" charset="-127"/>
+              </a:rPr>
+              <a:t>불확실한 결과를 예측하기 위해 반복적인 무작위 추출을 사용하는 통계적 기법</a:t>
+            </a:r>
+            <a:endParaRPr lang="en-US" altLang="ko-KR" dirty="0">
+              <a:latin typeface="맑은 고딕 Semilight" panose="020B0502040204020203" pitchFamily="50" charset="-127"/>
+              <a:ea typeface="맑은 고딕 Semilight" panose="020B0502040204020203" pitchFamily="50" charset="-127"/>
+              <a:cs typeface="맑은 고딕 Semilight" panose="020B0502040204020203" pitchFamily="50" charset="-127"/>
+            </a:endParaRPr>
+          </a:p>
+          <a:p>
+            <a:pPr marL="285750" indent="-285750">
+              <a:lnSpc>
+                <a:spcPct val="150000"/>
+              </a:lnSpc>
+              <a:buFont typeface="Wingdings" panose="05000000000000000000" pitchFamily="2" charset="2"/>
+              <a:buChar char="v"/>
+            </a:pPr>
+            <a:r>
+              <a:rPr lang="ko-KR" altLang="en-US" dirty="0">
+                <a:latin typeface="맑은 고딕 Semilight" panose="020B0502040204020203" pitchFamily="50" charset="-127"/>
+                <a:ea typeface="맑은 고딕 Semilight" panose="020B0502040204020203" pitchFamily="50" charset="-127"/>
+                <a:cs typeface="맑은 고딕 Semilight" panose="020B0502040204020203" pitchFamily="50" charset="-127"/>
+              </a:rPr>
+              <a:t>결과가 확률에 의존하는 도박처럼</a:t>
+            </a:r>
+            <a:r>
+              <a:rPr lang="en-US" altLang="ko-KR" dirty="0">
+                <a:latin typeface="맑은 고딕 Semilight" panose="020B0502040204020203" pitchFamily="50" charset="-127"/>
+                <a:ea typeface="맑은 고딕 Semilight" panose="020B0502040204020203" pitchFamily="50" charset="-127"/>
+                <a:cs typeface="맑은 고딕 Semilight" panose="020B0502040204020203" pitchFamily="50" charset="-127"/>
+              </a:rPr>
+              <a:t>, </a:t>
+            </a:r>
+            <a:r>
+              <a:rPr lang="ko-KR" altLang="en-US" dirty="0">
+                <a:latin typeface="맑은 고딕 Semilight" panose="020B0502040204020203" pitchFamily="50" charset="-127"/>
+                <a:ea typeface="맑은 고딕 Semilight" panose="020B0502040204020203" pitchFamily="50" charset="-127"/>
+                <a:cs typeface="맑은 고딕 Semilight" panose="020B0502040204020203" pitchFamily="50" charset="-127"/>
+              </a:rPr>
+              <a:t>수학적으로 계산하기 너무 복잡한 문제들을 수만 번의 가상 실험을 통해 그 근삿값을 찾아내는 방식</a:t>
+            </a:r>
+            <a:endParaRPr lang="en-US" altLang="ko-KR" dirty="0">
+              <a:latin typeface="맑은 고딕 Semilight" panose="020B0502040204020203" pitchFamily="50" charset="-127"/>
+              <a:ea typeface="맑은 고딕 Semilight" panose="020B0502040204020203" pitchFamily="50" charset="-127"/>
+              <a:cs typeface="맑은 고딕 Semilight" panose="020B0502040204020203" pitchFamily="50" charset="-127"/>
+            </a:endParaRPr>
+          </a:p>
+          <a:p>
+            <a:pPr marL="285750" indent="-285750">
+              <a:lnSpc>
+                <a:spcPct val="150000"/>
+              </a:lnSpc>
+              <a:buFont typeface="Wingdings" panose="05000000000000000000" pitchFamily="2" charset="2"/>
+              <a:buChar char="v"/>
+            </a:pPr>
+            <a:r>
+              <a:rPr lang="ko-KR" altLang="en-US" b="1" dirty="0" err="1">
+                <a:latin typeface="맑은 고딕 Semilight" panose="020B0502040204020203" pitchFamily="50" charset="-127"/>
+                <a:ea typeface="맑은 고딕 Semilight" panose="020B0502040204020203" pitchFamily="50" charset="-127"/>
+                <a:cs typeface="맑은 고딕 Semilight" panose="020B0502040204020203" pitchFamily="50" charset="-127"/>
+              </a:rPr>
+              <a:t>몬테카를로의</a:t>
+            </a:r>
+            <a:r>
+              <a:rPr lang="ko-KR" altLang="en-US" b="1" dirty="0">
+                <a:latin typeface="맑은 고딕 Semilight" panose="020B0502040204020203" pitchFamily="50" charset="-127"/>
+                <a:ea typeface="맑은 고딕 Semilight" panose="020B0502040204020203" pitchFamily="50" charset="-127"/>
+                <a:cs typeface="맑은 고딕 Semilight" panose="020B0502040204020203" pitchFamily="50" charset="-127"/>
+              </a:rPr>
+              <a:t> 작동 원리</a:t>
+            </a:r>
+          </a:p>
+          <a:p>
+            <a:pPr marL="742950" lvl="1" indent="-285750">
+              <a:lnSpc>
+                <a:spcPct val="150000"/>
+              </a:lnSpc>
+              <a:buFont typeface="Wingdings" panose="05000000000000000000" pitchFamily="2" charset="2"/>
+              <a:buChar char="v"/>
+            </a:pPr>
+            <a:r>
+              <a:rPr lang="ko-KR" altLang="en-US" b="1" dirty="0">
+                <a:latin typeface="맑은 고딕 Semilight" panose="020B0502040204020203" pitchFamily="50" charset="-127"/>
+                <a:ea typeface="맑은 고딕 Semilight" panose="020B0502040204020203" pitchFamily="50" charset="-127"/>
+                <a:cs typeface="맑은 고딕 Semilight" panose="020B0502040204020203" pitchFamily="50" charset="-127"/>
+              </a:rPr>
+              <a:t>변수 정의</a:t>
+            </a:r>
+            <a:r>
+              <a:rPr lang="en-US" altLang="ko-KR" b="1" dirty="0">
+                <a:latin typeface="맑은 고딕 Semilight" panose="020B0502040204020203" pitchFamily="50" charset="-127"/>
+                <a:ea typeface="맑은 고딕 Semilight" panose="020B0502040204020203" pitchFamily="50" charset="-127"/>
+                <a:cs typeface="맑은 고딕 Semilight" panose="020B0502040204020203" pitchFamily="50" charset="-127"/>
+              </a:rPr>
+              <a:t>:</a:t>
+            </a:r>
+            <a:r>
+              <a:rPr lang="ko-KR" altLang="en-US" dirty="0">
+                <a:latin typeface="맑은 고딕 Semilight" panose="020B0502040204020203" pitchFamily="50" charset="-127"/>
+                <a:ea typeface="맑은 고딕 Semilight" panose="020B0502040204020203" pitchFamily="50" charset="-127"/>
+                <a:cs typeface="맑은 고딕 Semilight" panose="020B0502040204020203" pitchFamily="50" charset="-127"/>
+              </a:rPr>
+              <a:t> 결과에 영향을 주는 불확실한 요소들을 정의</a:t>
+            </a:r>
+            <a:endParaRPr lang="en-US" altLang="ko-KR" dirty="0">
+              <a:latin typeface="맑은 고딕 Semilight" panose="020B0502040204020203" pitchFamily="50" charset="-127"/>
+              <a:ea typeface="맑은 고딕 Semilight" panose="020B0502040204020203" pitchFamily="50" charset="-127"/>
+              <a:cs typeface="맑은 고딕 Semilight" panose="020B0502040204020203" pitchFamily="50" charset="-127"/>
+            </a:endParaRPr>
+          </a:p>
+          <a:p>
+            <a:pPr marL="742950" lvl="1" indent="-285750">
+              <a:lnSpc>
+                <a:spcPct val="150000"/>
+              </a:lnSpc>
+              <a:buFont typeface="Wingdings" panose="05000000000000000000" pitchFamily="2" charset="2"/>
+              <a:buChar char="v"/>
+            </a:pPr>
+            <a:r>
+              <a:rPr lang="ko-KR" altLang="en-US" b="1" dirty="0">
+                <a:latin typeface="맑은 고딕 Semilight" panose="020B0502040204020203" pitchFamily="50" charset="-127"/>
+                <a:ea typeface="맑은 고딕 Semilight" panose="020B0502040204020203" pitchFamily="50" charset="-127"/>
+                <a:cs typeface="맑은 고딕 Semilight" panose="020B0502040204020203" pitchFamily="50" charset="-127"/>
+              </a:rPr>
+              <a:t>확률 분포 할당</a:t>
+            </a:r>
+            <a:r>
+              <a:rPr lang="en-US" altLang="ko-KR" b="1" dirty="0">
+                <a:latin typeface="맑은 고딕 Semilight" panose="020B0502040204020203" pitchFamily="50" charset="-127"/>
+                <a:ea typeface="맑은 고딕 Semilight" panose="020B0502040204020203" pitchFamily="50" charset="-127"/>
+                <a:cs typeface="맑은 고딕 Semilight" panose="020B0502040204020203" pitchFamily="50" charset="-127"/>
+              </a:rPr>
+              <a:t>:</a:t>
+            </a:r>
+            <a:r>
+              <a:rPr lang="ko-KR" altLang="en-US" dirty="0">
+                <a:latin typeface="맑은 고딕 Semilight" panose="020B0502040204020203" pitchFamily="50" charset="-127"/>
+                <a:ea typeface="맑은 고딕 Semilight" panose="020B0502040204020203" pitchFamily="50" charset="-127"/>
+                <a:cs typeface="맑은 고딕 Semilight" panose="020B0502040204020203" pitchFamily="50" charset="-127"/>
+              </a:rPr>
+              <a:t> 각 변수가 가질 수 있는 값의 범위와 확률</a:t>
+            </a:r>
+            <a:r>
+              <a:rPr lang="en-US" altLang="ko-KR" dirty="0">
+                <a:latin typeface="맑은 고딕 Semilight" panose="020B0502040204020203" pitchFamily="50" charset="-127"/>
+                <a:ea typeface="맑은 고딕 Semilight" panose="020B0502040204020203" pitchFamily="50" charset="-127"/>
+                <a:cs typeface="맑은 고딕 Semilight" panose="020B0502040204020203" pitchFamily="50" charset="-127"/>
+              </a:rPr>
+              <a:t>(</a:t>
+            </a:r>
+            <a:r>
+              <a:rPr lang="ko-KR" altLang="en-US" dirty="0">
+                <a:latin typeface="맑은 고딕 Semilight" panose="020B0502040204020203" pitchFamily="50" charset="-127"/>
+                <a:ea typeface="맑은 고딕 Semilight" panose="020B0502040204020203" pitchFamily="50" charset="-127"/>
+                <a:cs typeface="맑은 고딕 Semilight" panose="020B0502040204020203" pitchFamily="50" charset="-127"/>
+              </a:rPr>
+              <a:t>정규분포 등</a:t>
+            </a:r>
+            <a:r>
+              <a:rPr lang="en-US" altLang="ko-KR" dirty="0">
+                <a:latin typeface="맑은 고딕 Semilight" panose="020B0502040204020203" pitchFamily="50" charset="-127"/>
+                <a:ea typeface="맑은 고딕 Semilight" panose="020B0502040204020203" pitchFamily="50" charset="-127"/>
+                <a:cs typeface="맑은 고딕 Semilight" panose="020B0502040204020203" pitchFamily="50" charset="-127"/>
+              </a:rPr>
+              <a:t>)</a:t>
+            </a:r>
+            <a:r>
+              <a:rPr lang="ko-KR" altLang="en-US" dirty="0">
+                <a:latin typeface="맑은 고딕 Semilight" panose="020B0502040204020203" pitchFamily="50" charset="-127"/>
+                <a:ea typeface="맑은 고딕 Semilight" panose="020B0502040204020203" pitchFamily="50" charset="-127"/>
+                <a:cs typeface="맑은 고딕 Semilight" panose="020B0502040204020203" pitchFamily="50" charset="-127"/>
+              </a:rPr>
+              <a:t>을 설정</a:t>
+            </a:r>
+            <a:endParaRPr lang="en-US" altLang="ko-KR" dirty="0">
+              <a:latin typeface="맑은 고딕 Semilight" panose="020B0502040204020203" pitchFamily="50" charset="-127"/>
+              <a:ea typeface="맑은 고딕 Semilight" panose="020B0502040204020203" pitchFamily="50" charset="-127"/>
+              <a:cs typeface="맑은 고딕 Semilight" panose="020B0502040204020203" pitchFamily="50" charset="-127"/>
+            </a:endParaRPr>
+          </a:p>
+          <a:p>
+            <a:pPr marL="742950" lvl="1" indent="-285750">
+              <a:lnSpc>
+                <a:spcPct val="150000"/>
+              </a:lnSpc>
+              <a:buFont typeface="Wingdings" panose="05000000000000000000" pitchFamily="2" charset="2"/>
+              <a:buChar char="v"/>
+            </a:pPr>
+            <a:r>
+              <a:rPr lang="ko-KR" altLang="en-US" b="1" dirty="0">
+                <a:latin typeface="맑은 고딕 Semilight" panose="020B0502040204020203" pitchFamily="50" charset="-127"/>
+                <a:ea typeface="맑은 고딕 Semilight" panose="020B0502040204020203" pitchFamily="50" charset="-127"/>
+                <a:cs typeface="맑은 고딕 Semilight" panose="020B0502040204020203" pitchFamily="50" charset="-127"/>
+              </a:rPr>
+              <a:t>반복 실험</a:t>
+            </a:r>
+            <a:r>
+              <a:rPr lang="en-US" altLang="ko-KR" b="1" dirty="0">
+                <a:latin typeface="맑은 고딕 Semilight" panose="020B0502040204020203" pitchFamily="50" charset="-127"/>
+                <a:ea typeface="맑은 고딕 Semilight" panose="020B0502040204020203" pitchFamily="50" charset="-127"/>
+                <a:cs typeface="맑은 고딕 Semilight" panose="020B0502040204020203" pitchFamily="50" charset="-127"/>
+              </a:rPr>
+              <a:t>:</a:t>
+            </a:r>
+            <a:r>
+              <a:rPr lang="ko-KR" altLang="en-US" dirty="0">
+                <a:latin typeface="맑은 고딕 Semilight" panose="020B0502040204020203" pitchFamily="50" charset="-127"/>
+                <a:ea typeface="맑은 고딕 Semilight" panose="020B0502040204020203" pitchFamily="50" charset="-127"/>
+                <a:cs typeface="맑은 고딕 Semilight" panose="020B0502040204020203" pitchFamily="50" charset="-127"/>
+              </a:rPr>
+              <a:t> 컴퓨터를 이용해 무작위 값을 입력하며 수천</a:t>
+            </a:r>
+            <a:r>
+              <a:rPr lang="en-US" altLang="ko-KR" dirty="0">
+                <a:latin typeface="맑은 고딕 Semilight" panose="020B0502040204020203" pitchFamily="50" charset="-127"/>
+                <a:ea typeface="맑은 고딕 Semilight" panose="020B0502040204020203" pitchFamily="50" charset="-127"/>
+                <a:cs typeface="맑은 고딕 Semilight" panose="020B0502040204020203" pitchFamily="50" charset="-127"/>
+              </a:rPr>
+              <a:t>, </a:t>
+            </a:r>
+            <a:r>
+              <a:rPr lang="ko-KR" altLang="en-US" dirty="0">
+                <a:latin typeface="맑은 고딕 Semilight" panose="020B0502040204020203" pitchFamily="50" charset="-127"/>
+                <a:ea typeface="맑은 고딕 Semilight" panose="020B0502040204020203" pitchFamily="50" charset="-127"/>
+                <a:cs typeface="맑은 고딕 Semilight" panose="020B0502040204020203" pitchFamily="50" charset="-127"/>
+              </a:rPr>
+              <a:t>수만 번의 시뮬레이션을 실행</a:t>
+            </a:r>
+            <a:endParaRPr lang="en-US" altLang="ko-KR" dirty="0">
+              <a:latin typeface="맑은 고딕 Semilight" panose="020B0502040204020203" pitchFamily="50" charset="-127"/>
+              <a:ea typeface="맑은 고딕 Semilight" panose="020B0502040204020203" pitchFamily="50" charset="-127"/>
+              <a:cs typeface="맑은 고딕 Semilight" panose="020B0502040204020203" pitchFamily="50" charset="-127"/>
+            </a:endParaRPr>
+          </a:p>
+          <a:p>
+            <a:pPr marL="742950" lvl="1" indent="-285750">
+              <a:lnSpc>
+                <a:spcPct val="150000"/>
+              </a:lnSpc>
+              <a:buFont typeface="Wingdings" panose="05000000000000000000" pitchFamily="2" charset="2"/>
+              <a:buChar char="v"/>
+            </a:pPr>
+            <a:r>
+              <a:rPr lang="ko-KR" altLang="en-US" b="1" dirty="0">
+                <a:latin typeface="맑은 고딕 Semilight" panose="020B0502040204020203" pitchFamily="50" charset="-127"/>
+                <a:ea typeface="맑은 고딕 Semilight" panose="020B0502040204020203" pitchFamily="50" charset="-127"/>
+                <a:cs typeface="맑은 고딕 Semilight" panose="020B0502040204020203" pitchFamily="50" charset="-127"/>
+              </a:rPr>
+              <a:t>결과 분석</a:t>
+            </a:r>
+            <a:r>
+              <a:rPr lang="en-US" altLang="ko-KR" b="1" dirty="0">
+                <a:latin typeface="맑은 고딕 Semilight" panose="020B0502040204020203" pitchFamily="50" charset="-127"/>
+                <a:ea typeface="맑은 고딕 Semilight" panose="020B0502040204020203" pitchFamily="50" charset="-127"/>
+                <a:cs typeface="맑은 고딕 Semilight" panose="020B0502040204020203" pitchFamily="50" charset="-127"/>
+              </a:rPr>
+              <a:t>:</a:t>
+            </a:r>
+            <a:r>
+              <a:rPr lang="ko-KR" altLang="en-US" dirty="0">
+                <a:latin typeface="맑은 고딕 Semilight" panose="020B0502040204020203" pitchFamily="50" charset="-127"/>
+                <a:ea typeface="맑은 고딕 Semilight" panose="020B0502040204020203" pitchFamily="50" charset="-127"/>
+                <a:cs typeface="맑은 고딕 Semilight" panose="020B0502040204020203" pitchFamily="50" charset="-127"/>
+              </a:rPr>
+              <a:t> 도출된 수많은 결과값의 평균이나 분포를 통해 최종 결과를 예측</a:t>
+            </a:r>
+            <a:endParaRPr lang="en-US" altLang="ko-KR" dirty="0">
+              <a:latin typeface="맑은 고딕 Semilight" panose="020B0502040204020203" pitchFamily="50" charset="-127"/>
+              <a:ea typeface="맑은 고딕 Semilight" panose="020B0502040204020203" pitchFamily="50" charset="-127"/>
+              <a:cs typeface="맑은 고딕 Semilight" panose="020B0502040204020203" pitchFamily="50" charset="-127"/>
+            </a:endParaRPr>
+          </a:p>
+        </p:txBody>
+      </p:sp>
+    </p:spTree>
+    <p:extLst>
+      <p:ext uri="{BB962C8B-B14F-4D97-AF65-F5344CB8AC3E}">
+        <p14:creationId xmlns:p14="http://schemas.microsoft.com/office/powerpoint/2010/main" val="3770714882"/>
+      </p:ext>
+    </p:extLst>
+  </p:cSld>
+  <p:clrMapOvr>
+    <a:masterClrMapping/>
+  </p:clrMapOvr>
+</p:sld>
+</file>
+
+<file path=ppt/slides/slide40.xml><?xml version="1.0" encoding="utf-8"?>
 <p:sld xmlns:a="http://schemas.openxmlformats.org/drawingml/2006/main" xmlns:r="http://schemas.openxmlformats.org/officeDocument/2006/relationships" xmlns:p="http://schemas.openxmlformats.org/presentationml/2006/main">
   <p:cSld>
     <p:spTree>
@@ -28632,7 +29679,7 @@
           <a:p>
             <a:fld id="{D57F1E4F-1CFF-5643-939E-02111984F565}" type="slidenum">
               <a:rPr lang="en-US" smtClean="0"/>
-              <a:t>39</a:t>
+              <a:t>40</a:t>
             </a:fld>
             <a:endParaRPr lang="en-US" dirty="0"/>
           </a:p>
@@ -29215,7 +30262,7 @@
 </p:sld>
 </file>
 
-<file path=ppt/slides/slide4.xml><?xml version="1.0" encoding="utf-8"?>
+<file path=ppt/slides/slide41.xml><?xml version="1.0" encoding="utf-8"?>
 <p:sld xmlns:a="http://schemas.openxmlformats.org/drawingml/2006/main" xmlns:r="http://schemas.openxmlformats.org/officeDocument/2006/relationships" xmlns:p="http://schemas.openxmlformats.org/presentationml/2006/main">
   <p:cSld>
     <p:spTree>
@@ -29223,7 +30270,7 @@
         <p:cNvPr id="1" name="">
           <a:extLst>
             <a:ext uri="{FF2B5EF4-FFF2-40B4-BE49-F238E27FC236}">
-              <a16:creationId xmlns:a16="http://schemas.microsoft.com/office/drawing/2014/main" id="{3DF73C1C-752E-1492-75CD-9260CD39C196}"/>
+              <a16:creationId xmlns:a16="http://schemas.microsoft.com/office/drawing/2014/main" id="{29ED0444-002E-FCBE-575E-38E8737D9616}"/>
             </a:ext>
           </a:extLst>
         </p:cNvPr>
@@ -29243,7 +30290,7 @@
           <p:cNvPr id="6" name="제목 1">
             <a:extLst>
               <a:ext uri="{FF2B5EF4-FFF2-40B4-BE49-F238E27FC236}">
-                <a16:creationId xmlns:a16="http://schemas.microsoft.com/office/drawing/2014/main" id="{80209EB2-DA90-3A5C-9F40-6CC699307D43}"/>
+                <a16:creationId xmlns:a16="http://schemas.microsoft.com/office/drawing/2014/main" id="{8AD03CC8-6144-796E-E068-ACC28125E11D}"/>
               </a:ext>
             </a:extLst>
           </p:cNvPr>
@@ -29271,7 +30318,21 @@
                 <a:latin typeface="Times New Roman" panose="02020603050405020304" pitchFamily="18" charset="0"/>
                 <a:cs typeface="Times New Roman" panose="02020603050405020304" pitchFamily="18" charset="0"/>
               </a:rPr>
-              <a:t>Simulation</a:t>
+              <a:t>Optimization</a:t>
+            </a:r>
+            <a:r>
+              <a:rPr lang="ko-KR" altLang="en-US" b="1" dirty="0">
+                <a:latin typeface="Times New Roman" panose="02020603050405020304" pitchFamily="18" charset="0"/>
+                <a:cs typeface="Times New Roman" panose="02020603050405020304" pitchFamily="18" charset="0"/>
+              </a:rPr>
+              <a:t> </a:t>
+            </a:r>
+            <a:r>
+              <a:rPr lang="en-US" altLang="ko-KR" b="1" dirty="0">
+                <a:latin typeface="Times New Roman" panose="02020603050405020304" pitchFamily="18" charset="0"/>
+                <a:cs typeface="Times New Roman" panose="02020603050405020304" pitchFamily="18" charset="0"/>
+              </a:rPr>
+              <a:t>of Loss Function</a:t>
             </a:r>
             <a:endParaRPr lang="ko-KR" altLang="en-US" b="1" cap="none" dirty="0">
               <a:latin typeface="Times New Roman" panose="02020603050405020304" pitchFamily="18" charset="0"/>
@@ -29285,7 +30346,7 @@
           <p:cNvPr id="8" name="슬라이드 번호 개체 틀 7">
             <a:extLst>
               <a:ext uri="{FF2B5EF4-FFF2-40B4-BE49-F238E27FC236}">
-                <a16:creationId xmlns:a16="http://schemas.microsoft.com/office/drawing/2014/main" id="{4E65A7FF-E730-2207-3FF2-2E5E8228A8EB}"/>
+                <a16:creationId xmlns:a16="http://schemas.microsoft.com/office/drawing/2014/main" id="{0B0C7EE4-D340-7AFF-980F-0C37C2D309ED}"/>
               </a:ext>
             </a:extLst>
           </p:cNvPr>
@@ -29303,76 +30364,547 @@
           <a:p>
             <a:fld id="{D57F1E4F-1CFF-5643-939E-02111984F565}" type="slidenum">
               <a:rPr lang="en-US" smtClean="0"/>
-              <a:t>4</a:t>
+              <a:t>41</a:t>
             </a:fld>
             <a:endParaRPr lang="en-US" dirty="0"/>
+          </a:p>
+        </p:txBody>
+      </p:sp>
+      <mc:AlternateContent xmlns:mc="http://schemas.openxmlformats.org/markup-compatibility/2006">
+        <mc:Choice xmlns:a14="http://schemas.microsoft.com/office/drawing/2010/main" Requires="a14">
+          <p:sp>
+            <p:nvSpPr>
+              <p:cNvPr id="4" name="TextBox 3">
+                <a:extLst>
+                  <a:ext uri="{FF2B5EF4-FFF2-40B4-BE49-F238E27FC236}">
+                    <a16:creationId xmlns:a16="http://schemas.microsoft.com/office/drawing/2014/main" id="{8147A21C-0B7C-8869-6CF3-90C1D6159AD5}"/>
+                  </a:ext>
+                </a:extLst>
+              </p:cNvPr>
+              <p:cNvSpPr txBox="1"/>
+              <p:nvPr/>
+            </p:nvSpPr>
+            <p:spPr>
+              <a:xfrm>
+                <a:off x="842210" y="1285138"/>
+                <a:ext cx="10860262" cy="956159"/>
+              </a:xfrm>
+              <a:prstGeom prst="rect">
+                <a:avLst/>
+              </a:prstGeom>
+              <a:noFill/>
+            </p:spPr>
+            <p:txBody>
+              <a:bodyPr wrap="square" rtlCol="0">
+                <a:spAutoFit/>
+              </a:bodyPr>
+              <a:lstStyle/>
+              <a:p>
+                <a:pPr marL="285750" indent="-285750">
+                  <a:lnSpc>
+                    <a:spcPct val="150000"/>
+                  </a:lnSpc>
+                  <a:buFont typeface="Wingdings" panose="05000000000000000000" pitchFamily="2" charset="2"/>
+                  <a:buChar char="§"/>
+                </a:pPr>
+                <a:r>
+                  <a:rPr lang="ko-KR" altLang="en-US" sz="2000" dirty="0">
+                    <a:solidFill>
+                      <a:schemeClr val="tx1"/>
+                    </a:solidFill>
+                    <a:latin typeface="맑은 고딕 Semilight" panose="020B0502040204020203" pitchFamily="50" charset="-127"/>
+                    <a:ea typeface="맑은 고딕 Semilight" panose="020B0502040204020203" pitchFamily="50" charset="-127"/>
+                    <a:cs typeface="맑은 고딕 Semilight" panose="020B0502040204020203" pitchFamily="50" charset="-127"/>
+                  </a:rPr>
+                  <a:t>손실함수</a:t>
+                </a:r>
+                <a:r>
+                  <a:rPr lang="en-US" altLang="ko-KR" sz="2000" dirty="0">
+                    <a:solidFill>
+                      <a:schemeClr val="tx1"/>
+                    </a:solidFill>
+                    <a:latin typeface="맑은 고딕 Semilight" panose="020B0502040204020203" pitchFamily="50" charset="-127"/>
+                    <a:ea typeface="맑은 고딕 Semilight" panose="020B0502040204020203" pitchFamily="50" charset="-127"/>
+                    <a:cs typeface="맑은 고딕 Semilight" panose="020B0502040204020203" pitchFamily="50" charset="-127"/>
+                  </a:rPr>
+                  <a:t>(Cost)</a:t>
+                </a:r>
+                <a:r>
+                  <a:rPr lang="ko-KR" altLang="en-US" sz="2000" dirty="0">
+                    <a:solidFill>
+                      <a:schemeClr val="tx1"/>
+                    </a:solidFill>
+                    <a:latin typeface="맑은 고딕 Semilight" panose="020B0502040204020203" pitchFamily="50" charset="-127"/>
+                    <a:ea typeface="맑은 고딕 Semilight" panose="020B0502040204020203" pitchFamily="50" charset="-127"/>
+                    <a:cs typeface="맑은 고딕 Semilight" panose="020B0502040204020203" pitchFamily="50" charset="-127"/>
+                  </a:rPr>
+                  <a:t>의 형태와 </a:t>
+                </a:r>
+                <a14:m>
+                  <m:oMath xmlns:m="http://schemas.openxmlformats.org/officeDocument/2006/math">
+                    <m:r>
+                      <a:rPr lang="ko-KR" altLang="en-US" sz="2000" i="1" smtClean="0">
+                        <a:solidFill>
+                          <a:schemeClr val="tx1"/>
+                        </a:solidFill>
+                        <a:latin typeface="Cambria Math" panose="02040503050406030204" pitchFamily="18" charset="0"/>
+                      </a:rPr>
+                      <m:t>𝛼</m:t>
+                    </m:r>
+                  </m:oMath>
+                </a14:m>
+                <a:r>
+                  <a:rPr lang="ko-KR" altLang="en-US" sz="2000" dirty="0">
+                    <a:solidFill>
+                      <a:schemeClr val="tx1"/>
+                    </a:solidFill>
+                    <a:latin typeface="맑은 고딕 Semilight" panose="020B0502040204020203" pitchFamily="50" charset="-127"/>
+                    <a:ea typeface="맑은 고딕 Semilight" panose="020B0502040204020203" pitchFamily="50" charset="-127"/>
+                    <a:cs typeface="맑은 고딕 Semilight" panose="020B0502040204020203" pitchFamily="50" charset="-127"/>
+                  </a:rPr>
+                  <a:t>에 대해 토론하라</a:t>
+                </a:r>
+                <a:endParaRPr lang="en-US" altLang="ko-KR" sz="2000" dirty="0">
+                  <a:solidFill>
+                    <a:schemeClr val="tx1"/>
+                  </a:solidFill>
+                  <a:latin typeface="맑은 고딕 Semilight" panose="020B0502040204020203" pitchFamily="50" charset="-127"/>
+                  <a:ea typeface="맑은 고딕 Semilight" panose="020B0502040204020203" pitchFamily="50" charset="-127"/>
+                  <a:cs typeface="맑은 고딕 Semilight" panose="020B0502040204020203" pitchFamily="50" charset="-127"/>
+                </a:endParaRPr>
+              </a:p>
+              <a:p>
+                <a:pPr marL="285750" indent="-285750">
+                  <a:lnSpc>
+                    <a:spcPct val="150000"/>
+                  </a:lnSpc>
+                  <a:buFont typeface="Wingdings" panose="05000000000000000000" pitchFamily="2" charset="2"/>
+                  <a:buChar char="§"/>
+                </a:pPr>
+                <a:r>
+                  <a:rPr lang="en-US" altLang="ko-KR" sz="2000" dirty="0">
+                    <a:solidFill>
+                      <a:schemeClr val="tx1"/>
+                    </a:solidFill>
+                    <a:latin typeface="맑은 고딕 Semilight" panose="020B0502040204020203" pitchFamily="50" charset="-127"/>
+                    <a:ea typeface="맑은 고딕 Semilight" panose="020B0502040204020203" pitchFamily="50" charset="-127"/>
+                    <a:cs typeface="맑은 고딕 Semilight" panose="020B0502040204020203" pitchFamily="50" charset="-127"/>
+                    <a:hlinkClick r:id="rId2">
+                      <a:extLst>
+                        <a:ext uri="{A12FA001-AC4F-418D-AE19-62706E023703}">
+                          <ahyp:hlinkClr xmlns:ahyp="http://schemas.microsoft.com/office/drawing/2018/hyperlinkcolor" val="tx"/>
+                        </a:ext>
+                      </a:extLst>
+                    </a:hlinkClick>
+                  </a:rPr>
+                  <a:t>wiki/</a:t>
+                </a:r>
+                <a:r>
+                  <a:rPr lang="en-US" altLang="ko-KR" sz="2000" dirty="0" err="1">
+                    <a:solidFill>
+                      <a:schemeClr val="tx1"/>
+                    </a:solidFill>
+                    <a:latin typeface="맑은 고딕 Semilight" panose="020B0502040204020203" pitchFamily="50" charset="-127"/>
+                    <a:ea typeface="맑은 고딕 Semilight" panose="020B0502040204020203" pitchFamily="50" charset="-127"/>
+                    <a:cs typeface="맑은 고딕 Semilight" panose="020B0502040204020203" pitchFamily="50" charset="-127"/>
+                    <a:hlinkClick r:id="rId2">
+                      <a:extLst>
+                        <a:ext uri="{A12FA001-AC4F-418D-AE19-62706E023703}">
+                          <ahyp:hlinkClr xmlns:ahyp="http://schemas.microsoft.com/office/drawing/2018/hyperlinkcolor" val="tx"/>
+                        </a:ext>
+                      </a:extLst>
+                    </a:hlinkClick>
+                  </a:rPr>
+                  <a:t>Linear_regression</a:t>
+                </a:r>
+                <a:r>
+                  <a:rPr lang="en-US" altLang="ko-KR" sz="2000" dirty="0">
+                    <a:solidFill>
+                      <a:schemeClr val="tx1"/>
+                    </a:solidFill>
+                    <a:latin typeface="맑은 고딕 Semilight" panose="020B0502040204020203" pitchFamily="50" charset="-127"/>
+                    <a:ea typeface="맑은 고딕 Semilight" panose="020B0502040204020203" pitchFamily="50" charset="-127"/>
+                    <a:cs typeface="맑은 고딕 Semilight" panose="020B0502040204020203" pitchFamily="50" charset="-127"/>
+                  </a:rPr>
+                  <a:t> </a:t>
+                </a:r>
+                <a:r>
+                  <a:rPr lang="ko-KR" altLang="en-US" sz="2000" dirty="0">
+                    <a:solidFill>
+                      <a:schemeClr val="tx1"/>
+                    </a:solidFill>
+                    <a:latin typeface="맑은 고딕 Semilight" panose="020B0502040204020203" pitchFamily="50" charset="-127"/>
+                    <a:ea typeface="맑은 고딕 Semilight" panose="020B0502040204020203" pitchFamily="50" charset="-127"/>
+                    <a:cs typeface="맑은 고딕 Semilight" panose="020B0502040204020203" pitchFamily="50" charset="-127"/>
+                  </a:rPr>
+                  <a:t>에서 행렬식의 회귀식에 대해 토론하라</a:t>
+                </a:r>
+              </a:p>
+            </p:txBody>
+          </p:sp>
+        </mc:Choice>
+        <mc:Fallback>
+          <p:sp>
+            <p:nvSpPr>
+              <p:cNvPr id="4" name="TextBox 3">
+                <a:extLst>
+                  <a:ext uri="{FF2B5EF4-FFF2-40B4-BE49-F238E27FC236}">
+                    <a16:creationId xmlns:a16="http://schemas.microsoft.com/office/drawing/2014/main" id="{8147A21C-0B7C-8869-6CF3-90C1D6159AD5}"/>
+                  </a:ext>
+                </a:extLst>
+              </p:cNvPr>
+              <p:cNvSpPr txBox="1">
+                <a:spLocks noRot="1" noChangeAspect="1" noMove="1" noResize="1" noEditPoints="1" noAdjustHandles="1" noChangeArrowheads="1" noChangeShapeType="1" noTextEdit="1"/>
+              </p:cNvSpPr>
+              <p:nvPr/>
+            </p:nvSpPr>
+            <p:spPr>
+              <a:xfrm>
+                <a:off x="842210" y="1285138"/>
+                <a:ext cx="10860262" cy="956159"/>
+              </a:xfrm>
+              <a:prstGeom prst="rect">
+                <a:avLst/>
+              </a:prstGeom>
+              <a:blipFill>
+                <a:blip r:embed="rId3"/>
+                <a:stretch>
+                  <a:fillRect l="-505" b="-10191"/>
+                </a:stretch>
+              </a:blipFill>
+            </p:spPr>
+            <p:txBody>
+              <a:bodyPr/>
+              <a:lstStyle/>
+              <a:p>
+                <a:r>
+                  <a:rPr lang="ko-KR" altLang="en-US">
+                    <a:noFill/>
+                  </a:rPr>
+                  <a:t> </a:t>
+                </a:r>
+              </a:p>
+            </p:txBody>
+          </p:sp>
+        </mc:Fallback>
+      </mc:AlternateContent>
+      <p:pic>
+        <p:nvPicPr>
+          <p:cNvPr id="7" name="그림 6">
+            <a:extLst>
+              <a:ext uri="{FF2B5EF4-FFF2-40B4-BE49-F238E27FC236}">
+                <a16:creationId xmlns:a16="http://schemas.microsoft.com/office/drawing/2014/main" id="{BE45A263-58DF-F964-7347-38E892628C38}"/>
+              </a:ext>
+            </a:extLst>
+          </p:cNvPr>
+          <p:cNvPicPr>
+            <a:picLocks noChangeAspect="1"/>
+          </p:cNvPicPr>
+          <p:nvPr/>
+        </p:nvPicPr>
+        <p:blipFill>
+          <a:blip r:embed="rId4">
+            <a:duotone>
+              <a:prstClr val="black"/>
+              <a:schemeClr val="accent1">
+                <a:tint val="45000"/>
+                <a:satMod val="400000"/>
+              </a:schemeClr>
+            </a:duotone>
+          </a:blip>
+          <a:stretch>
+            <a:fillRect/>
+          </a:stretch>
+        </p:blipFill>
+        <p:spPr>
+          <a:xfrm>
+            <a:off x="7539189" y="4386782"/>
+            <a:ext cx="3146672" cy="823089"/>
+          </a:xfrm>
+          <a:prstGeom prst="rect">
+            <a:avLst/>
+          </a:prstGeom>
+        </p:spPr>
+      </p:pic>
+      <p:pic>
+        <p:nvPicPr>
+          <p:cNvPr id="10" name="그림 9">
+            <a:extLst>
+              <a:ext uri="{FF2B5EF4-FFF2-40B4-BE49-F238E27FC236}">
+                <a16:creationId xmlns:a16="http://schemas.microsoft.com/office/drawing/2014/main" id="{D2368B17-A096-1719-6EA7-6E190E788631}"/>
+              </a:ext>
+            </a:extLst>
+          </p:cNvPr>
+          <p:cNvPicPr>
+            <a:picLocks noChangeAspect="1"/>
+          </p:cNvPicPr>
+          <p:nvPr/>
+        </p:nvPicPr>
+        <p:blipFill>
+          <a:blip r:embed="rId5">
+            <a:duotone>
+              <a:prstClr val="black"/>
+              <a:schemeClr val="accent1">
+                <a:tint val="45000"/>
+                <a:satMod val="400000"/>
+              </a:schemeClr>
+            </a:duotone>
+          </a:blip>
+          <a:stretch>
+            <a:fillRect/>
+          </a:stretch>
+        </p:blipFill>
+        <p:spPr>
+          <a:xfrm>
+            <a:off x="7539189" y="5373195"/>
+            <a:ext cx="3146672" cy="812488"/>
+          </a:xfrm>
+          <a:prstGeom prst="rect">
+            <a:avLst/>
+          </a:prstGeom>
+        </p:spPr>
+      </p:pic>
+      <p:pic>
+        <p:nvPicPr>
+          <p:cNvPr id="12" name="그림 11">
+            <a:extLst>
+              <a:ext uri="{FF2B5EF4-FFF2-40B4-BE49-F238E27FC236}">
+                <a16:creationId xmlns:a16="http://schemas.microsoft.com/office/drawing/2014/main" id="{DFD74CB3-01C8-09F0-9C2D-0ECD446FEF80}"/>
+              </a:ext>
+            </a:extLst>
+          </p:cNvPr>
+          <p:cNvPicPr>
+            <a:picLocks noChangeAspect="1"/>
+          </p:cNvPicPr>
+          <p:nvPr/>
+        </p:nvPicPr>
+        <p:blipFill>
+          <a:blip r:embed="rId6">
+            <a:duotone>
+              <a:prstClr val="black"/>
+              <a:schemeClr val="accent1">
+                <a:tint val="45000"/>
+                <a:satMod val="400000"/>
+              </a:schemeClr>
+            </a:duotone>
+          </a:blip>
+          <a:stretch>
+            <a:fillRect/>
+          </a:stretch>
+        </p:blipFill>
+        <p:spPr>
+          <a:xfrm>
+            <a:off x="7539189" y="3416592"/>
+            <a:ext cx="3146672" cy="816391"/>
+          </a:xfrm>
+          <a:prstGeom prst="rect">
+            <a:avLst/>
+          </a:prstGeom>
+        </p:spPr>
+      </p:pic>
+      <p:pic>
+        <p:nvPicPr>
+          <p:cNvPr id="13" name="그림 12">
+            <a:extLst>
+              <a:ext uri="{FF2B5EF4-FFF2-40B4-BE49-F238E27FC236}">
+                <a16:creationId xmlns:a16="http://schemas.microsoft.com/office/drawing/2014/main" id="{EA2F34F9-2651-37FB-82B9-C89F916BA142}"/>
+              </a:ext>
+            </a:extLst>
+          </p:cNvPr>
+          <p:cNvPicPr>
+            <a:picLocks noChangeAspect="1"/>
+          </p:cNvPicPr>
+          <p:nvPr/>
+        </p:nvPicPr>
+        <p:blipFill>
+          <a:blip r:embed="rId7">
+            <a:duotone>
+              <a:prstClr val="black"/>
+              <a:schemeClr val="accent5">
+                <a:tint val="45000"/>
+                <a:satMod val="400000"/>
+              </a:schemeClr>
+            </a:duotone>
+          </a:blip>
+          <a:stretch>
+            <a:fillRect/>
+          </a:stretch>
+        </p:blipFill>
+        <p:spPr>
+          <a:xfrm>
+            <a:off x="1347035" y="3264014"/>
+            <a:ext cx="1734074" cy="610137"/>
+          </a:xfrm>
+          <a:prstGeom prst="rect">
+            <a:avLst/>
+          </a:prstGeom>
+        </p:spPr>
+      </p:pic>
+      <p:pic>
+        <p:nvPicPr>
+          <p:cNvPr id="14" name="그림 13">
+            <a:extLst>
+              <a:ext uri="{FF2B5EF4-FFF2-40B4-BE49-F238E27FC236}">
+                <a16:creationId xmlns:a16="http://schemas.microsoft.com/office/drawing/2014/main" id="{D14DC66D-E0CC-98ED-4445-E081D4335434}"/>
+              </a:ext>
+            </a:extLst>
+          </p:cNvPr>
+          <p:cNvPicPr>
+            <a:picLocks noChangeAspect="1"/>
+          </p:cNvPicPr>
+          <p:nvPr/>
+        </p:nvPicPr>
+        <p:blipFill>
+          <a:blip r:embed="rId8">
+            <a:duotone>
+              <a:prstClr val="black"/>
+              <a:schemeClr val="accent5">
+                <a:tint val="45000"/>
+                <a:satMod val="400000"/>
+              </a:schemeClr>
+            </a:duotone>
+          </a:blip>
+          <a:stretch>
+            <a:fillRect/>
+          </a:stretch>
+        </p:blipFill>
+        <p:spPr>
+          <a:xfrm>
+            <a:off x="1347035" y="3874151"/>
+            <a:ext cx="4924060" cy="610137"/>
+          </a:xfrm>
+          <a:prstGeom prst="rect">
+            <a:avLst/>
+          </a:prstGeom>
+        </p:spPr>
+      </p:pic>
+      <p:sp>
+        <p:nvSpPr>
+          <p:cNvPr id="16" name="TextBox 15">
+            <a:extLst>
+              <a:ext uri="{FF2B5EF4-FFF2-40B4-BE49-F238E27FC236}">
+                <a16:creationId xmlns:a16="http://schemas.microsoft.com/office/drawing/2014/main" id="{837CF39F-F592-1877-0217-14EEDEB277D2}"/>
+              </a:ext>
+            </a:extLst>
+          </p:cNvPr>
+          <p:cNvSpPr txBox="1"/>
+          <p:nvPr/>
+        </p:nvSpPr>
+        <p:spPr>
+          <a:xfrm>
+            <a:off x="1347035" y="2637685"/>
+            <a:ext cx="6096000" cy="369332"/>
+          </a:xfrm>
+          <a:prstGeom prst="rect">
+            <a:avLst/>
+          </a:prstGeom>
+          <a:noFill/>
+        </p:spPr>
+        <p:txBody>
+          <a:bodyPr wrap="square">
+            <a:spAutoFit/>
+          </a:bodyPr>
+          <a:lstStyle/>
+          <a:p>
+            <a:r>
+              <a:rPr lang="ko-KR" altLang="en-US" sz="1800" dirty="0">
+                <a:solidFill>
+                  <a:schemeClr val="tx1"/>
+                </a:solidFill>
+                <a:latin typeface="맑은 고딕 Semilight" panose="020B0502040204020203" pitchFamily="50" charset="-127"/>
+                <a:ea typeface="맑은 고딕 Semilight" panose="020B0502040204020203" pitchFamily="50" charset="-127"/>
+                <a:cs typeface="맑은 고딕 Semilight" panose="020B0502040204020203" pitchFamily="50" charset="-127"/>
+              </a:rPr>
+              <a:t>모델</a:t>
+            </a:r>
+            <a:r>
+              <a:rPr lang="en-US" altLang="ko-KR" sz="1800" dirty="0">
+                <a:solidFill>
+                  <a:schemeClr val="tx1"/>
+                </a:solidFill>
+                <a:latin typeface="맑은 고딕 Semilight" panose="020B0502040204020203" pitchFamily="50" charset="-127"/>
+                <a:ea typeface="맑은 고딕 Semilight" panose="020B0502040204020203" pitchFamily="50" charset="-127"/>
+                <a:cs typeface="맑은 고딕 Semilight" panose="020B0502040204020203" pitchFamily="50" charset="-127"/>
+              </a:rPr>
+              <a:t>(Model)</a:t>
+            </a:r>
+            <a:endParaRPr lang="ko-KR" altLang="en-US" dirty="0"/>
           </a:p>
         </p:txBody>
       </p:sp>
       <p:sp>
         <p:nvSpPr>
-          <p:cNvPr id="7" name="내용 개체 틀 2">
+          <p:cNvPr id="17" name="TextBox 16">
             <a:extLst>
               <a:ext uri="{FF2B5EF4-FFF2-40B4-BE49-F238E27FC236}">
-                <a16:creationId xmlns:a16="http://schemas.microsoft.com/office/drawing/2014/main" id="{CF9EEEA1-E59F-8F64-113D-54452538E740}"/>
+                <a16:creationId xmlns:a16="http://schemas.microsoft.com/office/drawing/2014/main" id="{4969455C-4E5A-6884-2B5D-DDB2E3919742}"/>
               </a:ext>
             </a:extLst>
           </p:cNvPr>
-          <p:cNvSpPr>
-            <a:spLocks noGrp="1"/>
-          </p:cNvSpPr>
-          <p:nvPr>
-            <p:ph idx="1"/>
-          </p:nvPr>
+          <p:cNvSpPr txBox="1"/>
+          <p:nvPr/>
         </p:nvSpPr>
         <p:spPr>
           <a:xfrm>
-            <a:off x="657717" y="1661628"/>
-            <a:ext cx="10876566" cy="3936532"/>
+            <a:off x="7281110" y="2637685"/>
+            <a:ext cx="4691815" cy="369332"/>
           </a:xfrm>
+          <a:prstGeom prst="rect">
+            <a:avLst/>
+          </a:prstGeom>
+          <a:noFill/>
         </p:spPr>
         <p:txBody>
-          <a:bodyPr>
-            <a:normAutofit fontScale="92500" lnSpcReduction="10000"/>
+          <a:bodyPr wrap="square">
+            <a:spAutoFit/>
           </a:bodyPr>
           <a:lstStyle/>
           <a:p>
-            <a:pPr marL="285750" indent="-285750">
-              <a:lnSpc>
-                <a:spcPct val="150000"/>
-              </a:lnSpc>
-              <a:buFont typeface="Wingdings" panose="05000000000000000000" pitchFamily="2" charset="2"/>
-              <a:buChar char="v"/>
-            </a:pPr>
+            <a:r>
+              <a:rPr lang="ko-KR" altLang="en-US" sz="1800" dirty="0">
+                <a:solidFill>
+                  <a:schemeClr val="tx1"/>
+                </a:solidFill>
+                <a:latin typeface="맑은 고딕 Semilight" panose="020B0502040204020203" pitchFamily="50" charset="-127"/>
+                <a:ea typeface="맑은 고딕 Semilight" panose="020B0502040204020203" pitchFamily="50" charset="-127"/>
+                <a:cs typeface="맑은 고딕 Semilight" panose="020B0502040204020203" pitchFamily="50" charset="-127"/>
+              </a:rPr>
+              <a:t>최적화</a:t>
+            </a:r>
+            <a:r>
+              <a:rPr lang="en-US" altLang="ko-KR" dirty="0">
+                <a:latin typeface="맑은 고딕 Semilight" panose="020B0502040204020203" pitchFamily="50" charset="-127"/>
+                <a:ea typeface="맑은 고딕 Semilight" panose="020B0502040204020203" pitchFamily="50" charset="-127"/>
+                <a:cs typeface="맑은 고딕 Semilight" panose="020B0502040204020203" pitchFamily="50" charset="-127"/>
+              </a:rPr>
+              <a:t>(</a:t>
+            </a:r>
+            <a:r>
+              <a:rPr lang="en-US" altLang="ko-KR" sz="1800" dirty="0">
+                <a:solidFill>
+                  <a:schemeClr val="tx1"/>
+                </a:solidFill>
+                <a:latin typeface="맑은 고딕 Semilight" panose="020B0502040204020203" pitchFamily="50" charset="-127"/>
+                <a:ea typeface="맑은 고딕 Semilight" panose="020B0502040204020203" pitchFamily="50" charset="-127"/>
+                <a:cs typeface="맑은 고딕 Semilight" panose="020B0502040204020203" pitchFamily="50" charset="-127"/>
+              </a:rPr>
+              <a:t>Optimization, </a:t>
+            </a:r>
+            <a:r>
+              <a:rPr lang="en-US" altLang="ko-KR" dirty="0">
+                <a:latin typeface="맑은 고딕 Semilight" panose="020B0502040204020203" pitchFamily="50" charset="-127"/>
+                <a:ea typeface="맑은 고딕 Semilight" panose="020B0502040204020203" pitchFamily="50" charset="-127"/>
+                <a:cs typeface="맑은 고딕 Semilight" panose="020B0502040204020203" pitchFamily="50" charset="-127"/>
+              </a:rPr>
+              <a:t>Cost</a:t>
+            </a:r>
             <a:r>
               <a:rPr lang="ko-KR" altLang="en-US" dirty="0">
                 <a:latin typeface="맑은 고딕 Semilight" panose="020B0502040204020203" pitchFamily="50" charset="-127"/>
                 <a:ea typeface="맑은 고딕 Semilight" panose="020B0502040204020203" pitchFamily="50" charset="-127"/>
                 <a:cs typeface="맑은 고딕 Semilight" panose="020B0502040204020203" pitchFamily="50" charset="-127"/>
               </a:rPr>
-              <a:t>불확실한 결과를 예측하기 위해 반복적인 무작위 추출을 사용하는 통계적 기법</a:t>
-            </a:r>
-            <a:endParaRPr lang="en-US" altLang="ko-KR" dirty="0">
-              <a:latin typeface="맑은 고딕 Semilight" panose="020B0502040204020203" pitchFamily="50" charset="-127"/>
-              <a:ea typeface="맑은 고딕 Semilight" panose="020B0502040204020203" pitchFamily="50" charset="-127"/>
-              <a:cs typeface="맑은 고딕 Semilight" panose="020B0502040204020203" pitchFamily="50" charset="-127"/>
-            </a:endParaRPr>
-          </a:p>
-          <a:p>
-            <a:pPr marL="285750" indent="-285750">
-              <a:lnSpc>
-                <a:spcPct val="150000"/>
-              </a:lnSpc>
-              <a:buFont typeface="Wingdings" panose="05000000000000000000" pitchFamily="2" charset="2"/>
-              <a:buChar char="v"/>
-            </a:pPr>
-            <a:r>
-              <a:rPr lang="ko-KR" altLang="en-US" dirty="0">
-                <a:latin typeface="맑은 고딕 Semilight" panose="020B0502040204020203" pitchFamily="50" charset="-127"/>
-                <a:ea typeface="맑은 고딕 Semilight" panose="020B0502040204020203" pitchFamily="50" charset="-127"/>
-                <a:cs typeface="맑은 고딕 Semilight" panose="020B0502040204020203" pitchFamily="50" charset="-127"/>
-              </a:rPr>
-              <a:t>결과가 확률에 의존하는 도박처럼</a:t>
+              <a:t> </a:t>
             </a:r>
             <a:r>
               <a:rPr lang="en-US" altLang="ko-KR" dirty="0">
@@ -29380,253 +30912,16 @@
                 <a:ea typeface="맑은 고딕 Semilight" panose="020B0502040204020203" pitchFamily="50" charset="-127"/>
                 <a:cs typeface="맑은 고딕 Semilight" panose="020B0502040204020203" pitchFamily="50" charset="-127"/>
               </a:rPr>
-              <a:t>, </a:t>
-            </a:r>
-            <a:r>
-              <a:rPr lang="ko-KR" altLang="en-US" dirty="0">
-                <a:latin typeface="맑은 고딕 Semilight" panose="020B0502040204020203" pitchFamily="50" charset="-127"/>
-                <a:ea typeface="맑은 고딕 Semilight" panose="020B0502040204020203" pitchFamily="50" charset="-127"/>
-                <a:cs typeface="맑은 고딕 Semilight" panose="020B0502040204020203" pitchFamily="50" charset="-127"/>
-              </a:rPr>
-              <a:t>수학적으로 계산하기 너무 복잡한 문제들을 수만 번의 가상 실험을 통해 그 근삿값을 찾아내는 방식</a:t>
-            </a:r>
-            <a:endParaRPr lang="en-US" altLang="ko-KR" dirty="0">
-              <a:latin typeface="맑은 고딕 Semilight" panose="020B0502040204020203" pitchFamily="50" charset="-127"/>
-              <a:ea typeface="맑은 고딕 Semilight" panose="020B0502040204020203" pitchFamily="50" charset="-127"/>
-              <a:cs typeface="맑은 고딕 Semilight" panose="020B0502040204020203" pitchFamily="50" charset="-127"/>
-            </a:endParaRPr>
-          </a:p>
-          <a:p>
-            <a:pPr marL="285750" indent="-285750">
-              <a:lnSpc>
-                <a:spcPct val="150000"/>
-              </a:lnSpc>
-              <a:buFont typeface="Wingdings" panose="05000000000000000000" pitchFamily="2" charset="2"/>
-              <a:buChar char="v"/>
-            </a:pPr>
-            <a:r>
-              <a:rPr lang="ko-KR" altLang="en-US" b="1" dirty="0" err="1">
-                <a:latin typeface="맑은 고딕 Semilight" panose="020B0502040204020203" pitchFamily="50" charset="-127"/>
-                <a:ea typeface="맑은 고딕 Semilight" panose="020B0502040204020203" pitchFamily="50" charset="-127"/>
-                <a:cs typeface="맑은 고딕 Semilight" panose="020B0502040204020203" pitchFamily="50" charset="-127"/>
-              </a:rPr>
-              <a:t>몬테카를로의</a:t>
-            </a:r>
-            <a:r>
-              <a:rPr lang="ko-KR" altLang="en-US" b="1" dirty="0">
-                <a:latin typeface="맑은 고딕 Semilight" panose="020B0502040204020203" pitchFamily="50" charset="-127"/>
-                <a:ea typeface="맑은 고딕 Semilight" panose="020B0502040204020203" pitchFamily="50" charset="-127"/>
-                <a:cs typeface="맑은 고딕 Semilight" panose="020B0502040204020203" pitchFamily="50" charset="-127"/>
-              </a:rPr>
-              <a:t> 작동 원리</a:t>
-            </a:r>
-          </a:p>
-          <a:p>
-            <a:pPr marL="742950" lvl="1" indent="-285750">
-              <a:lnSpc>
-                <a:spcPct val="150000"/>
-              </a:lnSpc>
-              <a:buFont typeface="Wingdings" panose="05000000000000000000" pitchFamily="2" charset="2"/>
-              <a:buChar char="v"/>
-            </a:pPr>
-            <a:r>
-              <a:rPr lang="ko-KR" altLang="en-US" b="1" dirty="0">
-                <a:latin typeface="맑은 고딕 Semilight" panose="020B0502040204020203" pitchFamily="50" charset="-127"/>
-                <a:ea typeface="맑은 고딕 Semilight" panose="020B0502040204020203" pitchFamily="50" charset="-127"/>
-                <a:cs typeface="맑은 고딕 Semilight" panose="020B0502040204020203" pitchFamily="50" charset="-127"/>
-              </a:rPr>
-              <a:t>변수 정의</a:t>
-            </a:r>
-            <a:r>
-              <a:rPr lang="en-US" altLang="ko-KR" b="1" dirty="0">
-                <a:latin typeface="맑은 고딕 Semilight" panose="020B0502040204020203" pitchFamily="50" charset="-127"/>
-                <a:ea typeface="맑은 고딕 Semilight" panose="020B0502040204020203" pitchFamily="50" charset="-127"/>
-                <a:cs typeface="맑은 고딕 Semilight" panose="020B0502040204020203" pitchFamily="50" charset="-127"/>
-              </a:rPr>
-              <a:t>:</a:t>
-            </a:r>
-            <a:r>
-              <a:rPr lang="ko-KR" altLang="en-US" dirty="0">
-                <a:latin typeface="맑은 고딕 Semilight" panose="020B0502040204020203" pitchFamily="50" charset="-127"/>
-                <a:ea typeface="맑은 고딕 Semilight" panose="020B0502040204020203" pitchFamily="50" charset="-127"/>
-                <a:cs typeface="맑은 고딕 Semilight" panose="020B0502040204020203" pitchFamily="50" charset="-127"/>
-              </a:rPr>
-              <a:t> 결과에 영향을 주는 불확실한 요소들을 정의</a:t>
-            </a:r>
-            <a:endParaRPr lang="en-US" altLang="ko-KR" dirty="0">
-              <a:latin typeface="맑은 고딕 Semilight" panose="020B0502040204020203" pitchFamily="50" charset="-127"/>
-              <a:ea typeface="맑은 고딕 Semilight" panose="020B0502040204020203" pitchFamily="50" charset="-127"/>
-              <a:cs typeface="맑은 고딕 Semilight" panose="020B0502040204020203" pitchFamily="50" charset="-127"/>
-            </a:endParaRPr>
-          </a:p>
-          <a:p>
-            <a:pPr marL="742950" lvl="1" indent="-285750">
-              <a:lnSpc>
-                <a:spcPct val="150000"/>
-              </a:lnSpc>
-              <a:buFont typeface="Wingdings" panose="05000000000000000000" pitchFamily="2" charset="2"/>
-              <a:buChar char="v"/>
-            </a:pPr>
-            <a:r>
-              <a:rPr lang="ko-KR" altLang="en-US" b="1" dirty="0">
-                <a:latin typeface="맑은 고딕 Semilight" panose="020B0502040204020203" pitchFamily="50" charset="-127"/>
-                <a:ea typeface="맑은 고딕 Semilight" panose="020B0502040204020203" pitchFamily="50" charset="-127"/>
-                <a:cs typeface="맑은 고딕 Semilight" panose="020B0502040204020203" pitchFamily="50" charset="-127"/>
-              </a:rPr>
-              <a:t>확률 분포 할당</a:t>
-            </a:r>
-            <a:r>
-              <a:rPr lang="en-US" altLang="ko-KR" b="1" dirty="0">
-                <a:latin typeface="맑은 고딕 Semilight" panose="020B0502040204020203" pitchFamily="50" charset="-127"/>
-                <a:ea typeface="맑은 고딕 Semilight" panose="020B0502040204020203" pitchFamily="50" charset="-127"/>
-                <a:cs typeface="맑은 고딕 Semilight" panose="020B0502040204020203" pitchFamily="50" charset="-127"/>
-              </a:rPr>
-              <a:t>:</a:t>
-            </a:r>
-            <a:r>
-              <a:rPr lang="ko-KR" altLang="en-US" dirty="0">
-                <a:latin typeface="맑은 고딕 Semilight" panose="020B0502040204020203" pitchFamily="50" charset="-127"/>
-                <a:ea typeface="맑은 고딕 Semilight" panose="020B0502040204020203" pitchFamily="50" charset="-127"/>
-                <a:cs typeface="맑은 고딕 Semilight" panose="020B0502040204020203" pitchFamily="50" charset="-127"/>
-              </a:rPr>
-              <a:t> 각 변수가 가질 수 있는 값의 범위와 확률</a:t>
-            </a:r>
-            <a:r>
-              <a:rPr lang="en-US" altLang="ko-KR" dirty="0">
-                <a:latin typeface="맑은 고딕 Semilight" panose="020B0502040204020203" pitchFamily="50" charset="-127"/>
-                <a:ea typeface="맑은 고딕 Semilight" panose="020B0502040204020203" pitchFamily="50" charset="-127"/>
-                <a:cs typeface="맑은 고딕 Semilight" panose="020B0502040204020203" pitchFamily="50" charset="-127"/>
-              </a:rPr>
-              <a:t>(</a:t>
-            </a:r>
-            <a:r>
-              <a:rPr lang="ko-KR" altLang="en-US" dirty="0">
-                <a:latin typeface="맑은 고딕 Semilight" panose="020B0502040204020203" pitchFamily="50" charset="-127"/>
-                <a:ea typeface="맑은 고딕 Semilight" panose="020B0502040204020203" pitchFamily="50" charset="-127"/>
-                <a:cs typeface="맑은 고딕 Semilight" panose="020B0502040204020203" pitchFamily="50" charset="-127"/>
-              </a:rPr>
-              <a:t>정규분포 등</a:t>
-            </a:r>
-            <a:r>
-              <a:rPr lang="en-US" altLang="ko-KR" dirty="0">
-                <a:latin typeface="맑은 고딕 Semilight" panose="020B0502040204020203" pitchFamily="50" charset="-127"/>
-                <a:ea typeface="맑은 고딕 Semilight" panose="020B0502040204020203" pitchFamily="50" charset="-127"/>
-                <a:cs typeface="맑은 고딕 Semilight" panose="020B0502040204020203" pitchFamily="50" charset="-127"/>
-              </a:rPr>
-              <a:t>)</a:t>
-            </a:r>
-            <a:r>
-              <a:rPr lang="ko-KR" altLang="en-US" dirty="0">
-                <a:latin typeface="맑은 고딕 Semilight" panose="020B0502040204020203" pitchFamily="50" charset="-127"/>
-                <a:ea typeface="맑은 고딕 Semilight" panose="020B0502040204020203" pitchFamily="50" charset="-127"/>
-                <a:cs typeface="맑은 고딕 Semilight" panose="020B0502040204020203" pitchFamily="50" charset="-127"/>
-              </a:rPr>
-              <a:t>을 설정</a:t>
-            </a:r>
-            <a:endParaRPr lang="en-US" altLang="ko-KR" dirty="0">
-              <a:latin typeface="맑은 고딕 Semilight" panose="020B0502040204020203" pitchFamily="50" charset="-127"/>
-              <a:ea typeface="맑은 고딕 Semilight" panose="020B0502040204020203" pitchFamily="50" charset="-127"/>
-              <a:cs typeface="맑은 고딕 Semilight" panose="020B0502040204020203" pitchFamily="50" charset="-127"/>
-            </a:endParaRPr>
-          </a:p>
-          <a:p>
-            <a:pPr marL="742950" lvl="1" indent="-285750">
-              <a:lnSpc>
-                <a:spcPct val="150000"/>
-              </a:lnSpc>
-              <a:buFont typeface="Wingdings" panose="05000000000000000000" pitchFamily="2" charset="2"/>
-              <a:buChar char="v"/>
-            </a:pPr>
-            <a:r>
-              <a:rPr lang="ko-KR" altLang="en-US" b="1" dirty="0">
-                <a:latin typeface="맑은 고딕 Semilight" panose="020B0502040204020203" pitchFamily="50" charset="-127"/>
-                <a:ea typeface="맑은 고딕 Semilight" panose="020B0502040204020203" pitchFamily="50" charset="-127"/>
-                <a:cs typeface="맑은 고딕 Semilight" panose="020B0502040204020203" pitchFamily="50" charset="-127"/>
-              </a:rPr>
-              <a:t>반복 실험</a:t>
-            </a:r>
-            <a:r>
-              <a:rPr lang="en-US" altLang="ko-KR" b="1" dirty="0">
-                <a:latin typeface="맑은 고딕 Semilight" panose="020B0502040204020203" pitchFamily="50" charset="-127"/>
-                <a:ea typeface="맑은 고딕 Semilight" panose="020B0502040204020203" pitchFamily="50" charset="-127"/>
-                <a:cs typeface="맑은 고딕 Semilight" panose="020B0502040204020203" pitchFamily="50" charset="-127"/>
-              </a:rPr>
-              <a:t>:</a:t>
-            </a:r>
-            <a:r>
-              <a:rPr lang="ko-KR" altLang="en-US" dirty="0">
-                <a:latin typeface="맑은 고딕 Semilight" panose="020B0502040204020203" pitchFamily="50" charset="-127"/>
-                <a:ea typeface="맑은 고딕 Semilight" panose="020B0502040204020203" pitchFamily="50" charset="-127"/>
-                <a:cs typeface="맑은 고딕 Semilight" panose="020B0502040204020203" pitchFamily="50" charset="-127"/>
-              </a:rPr>
-              <a:t> 컴퓨터를 이용해 무작위 값을 입력하며 수천</a:t>
-            </a:r>
-            <a:r>
-              <a:rPr lang="en-US" altLang="ko-KR" dirty="0">
-                <a:latin typeface="맑은 고딕 Semilight" panose="020B0502040204020203" pitchFamily="50" charset="-127"/>
-                <a:ea typeface="맑은 고딕 Semilight" panose="020B0502040204020203" pitchFamily="50" charset="-127"/>
-                <a:cs typeface="맑은 고딕 Semilight" panose="020B0502040204020203" pitchFamily="50" charset="-127"/>
-              </a:rPr>
-              <a:t>, </a:t>
-            </a:r>
-            <a:r>
-              <a:rPr lang="ko-KR" altLang="en-US" dirty="0">
-                <a:latin typeface="맑은 고딕 Semilight" panose="020B0502040204020203" pitchFamily="50" charset="-127"/>
-                <a:ea typeface="맑은 고딕 Semilight" panose="020B0502040204020203" pitchFamily="50" charset="-127"/>
-                <a:cs typeface="맑은 고딕 Semilight" panose="020B0502040204020203" pitchFamily="50" charset="-127"/>
-              </a:rPr>
-              <a:t>수만 번의 시뮬레이션을 실행</a:t>
-            </a:r>
-            <a:endParaRPr lang="en-US" altLang="ko-KR" dirty="0">
-              <a:latin typeface="맑은 고딕 Semilight" panose="020B0502040204020203" pitchFamily="50" charset="-127"/>
-              <a:ea typeface="맑은 고딕 Semilight" panose="020B0502040204020203" pitchFamily="50" charset="-127"/>
-              <a:cs typeface="맑은 고딕 Semilight" panose="020B0502040204020203" pitchFamily="50" charset="-127"/>
-            </a:endParaRPr>
-          </a:p>
-          <a:p>
-            <a:pPr marL="742950" lvl="1" indent="-285750">
-              <a:lnSpc>
-                <a:spcPct val="150000"/>
-              </a:lnSpc>
-              <a:buFont typeface="Wingdings" panose="05000000000000000000" pitchFamily="2" charset="2"/>
-              <a:buChar char="v"/>
-            </a:pPr>
-            <a:r>
-              <a:rPr lang="ko-KR" altLang="en-US" b="1" dirty="0">
-                <a:latin typeface="맑은 고딕 Semilight" panose="020B0502040204020203" pitchFamily="50" charset="-127"/>
-                <a:ea typeface="맑은 고딕 Semilight" panose="020B0502040204020203" pitchFamily="50" charset="-127"/>
-                <a:cs typeface="맑은 고딕 Semilight" panose="020B0502040204020203" pitchFamily="50" charset="-127"/>
-              </a:rPr>
-              <a:t>결과 분석</a:t>
-            </a:r>
-            <a:r>
-              <a:rPr lang="en-US" altLang="ko-KR" b="1" dirty="0">
-                <a:latin typeface="맑은 고딕 Semilight" panose="020B0502040204020203" pitchFamily="50" charset="-127"/>
-                <a:ea typeface="맑은 고딕 Semilight" panose="020B0502040204020203" pitchFamily="50" charset="-127"/>
-                <a:cs typeface="맑은 고딕 Semilight" panose="020B0502040204020203" pitchFamily="50" charset="-127"/>
-              </a:rPr>
-              <a:t>:</a:t>
-            </a:r>
-            <a:r>
-              <a:rPr lang="ko-KR" altLang="en-US" dirty="0">
-                <a:latin typeface="맑은 고딕 Semilight" panose="020B0502040204020203" pitchFamily="50" charset="-127"/>
-                <a:ea typeface="맑은 고딕 Semilight" panose="020B0502040204020203" pitchFamily="50" charset="-127"/>
-                <a:cs typeface="맑은 고딕 Semilight" panose="020B0502040204020203" pitchFamily="50" charset="-127"/>
-              </a:rPr>
-              <a:t> 도출된 수많은 결과값의 평균이나 분포를 통해 최종 결과를 예측</a:t>
-            </a:r>
-            <a:endParaRPr lang="en-US" altLang="ko-KR" dirty="0">
-              <a:latin typeface="맑은 고딕 Semilight" panose="020B0502040204020203" pitchFamily="50" charset="-127"/>
-              <a:ea typeface="맑은 고딕 Semilight" panose="020B0502040204020203" pitchFamily="50" charset="-127"/>
-              <a:cs typeface="맑은 고딕 Semilight" panose="020B0502040204020203" pitchFamily="50" charset="-127"/>
-            </a:endParaRPr>
+              <a:t>Minimization)</a:t>
+            </a:r>
+            <a:endParaRPr lang="ko-KR" altLang="en-US" dirty="0"/>
           </a:p>
         </p:txBody>
       </p:sp>
     </p:spTree>
     <p:extLst>
       <p:ext uri="{BB962C8B-B14F-4D97-AF65-F5344CB8AC3E}">
-        <p14:creationId xmlns:p14="http://schemas.microsoft.com/office/powerpoint/2010/main" val="3770714882"/>
+        <p14:creationId xmlns:p14="http://schemas.microsoft.com/office/powerpoint/2010/main" val="3952515720"/>
       </p:ext>
     </p:extLst>
   </p:cSld>
@@ -29636,7 +30931,2698 @@
 </p:sld>
 </file>
 
-<file path=ppt/slides/slide40.xml><?xml version="1.0" encoding="utf-8"?>
+<file path=ppt/slides/slide42.xml><?xml version="1.0" encoding="utf-8"?>
+<p:sld xmlns:a="http://schemas.openxmlformats.org/drawingml/2006/main" xmlns:r="http://schemas.openxmlformats.org/officeDocument/2006/relationships" xmlns:p="http://schemas.openxmlformats.org/presentationml/2006/main">
+  <p:cSld>
+    <p:spTree>
+      <p:nvGrpSpPr>
+        <p:cNvPr id="1" name="">
+          <a:extLst>
+            <a:ext uri="{FF2B5EF4-FFF2-40B4-BE49-F238E27FC236}">
+              <a16:creationId xmlns:a16="http://schemas.microsoft.com/office/drawing/2014/main" id="{27296476-D1BC-93EE-AD7F-698D18F9F4EF}"/>
+            </a:ext>
+          </a:extLst>
+        </p:cNvPr>
+        <p:cNvGrpSpPr/>
+        <p:nvPr/>
+      </p:nvGrpSpPr>
+      <p:grpSpPr>
+        <a:xfrm>
+          <a:off x="0" y="0"/>
+          <a:ext cx="0" cy="0"/>
+          <a:chOff x="0" y="0"/>
+          <a:chExt cx="0" cy="0"/>
+        </a:xfrm>
+      </p:grpSpPr>
+      <p:sp>
+        <p:nvSpPr>
+          <p:cNvPr id="6" name="제목 1">
+            <a:extLst>
+              <a:ext uri="{FF2B5EF4-FFF2-40B4-BE49-F238E27FC236}">
+                <a16:creationId xmlns:a16="http://schemas.microsoft.com/office/drawing/2014/main" id="{C5E5055A-FEDA-CD90-6842-D10AD41D658A}"/>
+              </a:ext>
+            </a:extLst>
+          </p:cNvPr>
+          <p:cNvSpPr>
+            <a:spLocks noGrp="1"/>
+          </p:cNvSpPr>
+          <p:nvPr>
+            <p:ph type="title"/>
+          </p:nvPr>
+        </p:nvSpPr>
+        <p:spPr>
+          <a:xfrm>
+            <a:off x="915383" y="139084"/>
+            <a:ext cx="10353762" cy="766439"/>
+          </a:xfrm>
+        </p:spPr>
+        <p:txBody>
+          <a:bodyPr>
+            <a:normAutofit/>
+          </a:bodyPr>
+          <a:lstStyle/>
+          <a:p>
+            <a:r>
+              <a:rPr lang="en-US" altLang="ko-KR" b="1" dirty="0">
+                <a:latin typeface="Times New Roman" panose="02020603050405020304" pitchFamily="18" charset="0"/>
+                <a:cs typeface="Times New Roman" panose="02020603050405020304" pitchFamily="18" charset="0"/>
+              </a:rPr>
+              <a:t>Optimization</a:t>
+            </a:r>
+            <a:r>
+              <a:rPr lang="ko-KR" altLang="en-US" b="1" dirty="0">
+                <a:latin typeface="Times New Roman" panose="02020603050405020304" pitchFamily="18" charset="0"/>
+                <a:cs typeface="Times New Roman" panose="02020603050405020304" pitchFamily="18" charset="0"/>
+              </a:rPr>
+              <a:t> </a:t>
+            </a:r>
+            <a:r>
+              <a:rPr lang="en-US" altLang="ko-KR" b="1" dirty="0">
+                <a:latin typeface="Times New Roman" panose="02020603050405020304" pitchFamily="18" charset="0"/>
+                <a:cs typeface="Times New Roman" panose="02020603050405020304" pitchFamily="18" charset="0"/>
+              </a:rPr>
+              <a:t>of Loss Function</a:t>
+            </a:r>
+            <a:endParaRPr lang="ko-KR" altLang="en-US" b="1" cap="none" dirty="0">
+              <a:latin typeface="Times New Roman" panose="02020603050405020304" pitchFamily="18" charset="0"/>
+              <a:cs typeface="Times New Roman" panose="02020603050405020304" pitchFamily="18" charset="0"/>
+            </a:endParaRPr>
+          </a:p>
+        </p:txBody>
+      </p:sp>
+      <p:sp>
+        <p:nvSpPr>
+          <p:cNvPr id="8" name="슬라이드 번호 개체 틀 7">
+            <a:extLst>
+              <a:ext uri="{FF2B5EF4-FFF2-40B4-BE49-F238E27FC236}">
+                <a16:creationId xmlns:a16="http://schemas.microsoft.com/office/drawing/2014/main" id="{7CF6EC08-194F-8A13-AF31-10653AAA61A9}"/>
+              </a:ext>
+            </a:extLst>
+          </p:cNvPr>
+          <p:cNvSpPr>
+            <a:spLocks noGrp="1"/>
+          </p:cNvSpPr>
+          <p:nvPr>
+            <p:ph type="sldNum" sz="quarter" idx="12"/>
+          </p:nvPr>
+        </p:nvSpPr>
+        <p:spPr/>
+        <p:txBody>
+          <a:bodyPr/>
+          <a:lstStyle/>
+          <a:p>
+            <a:fld id="{D57F1E4F-1CFF-5643-939E-02111984F565}" type="slidenum">
+              <a:rPr lang="en-US" smtClean="0"/>
+              <a:t>42</a:t>
+            </a:fld>
+            <a:endParaRPr lang="en-US" dirty="0"/>
+          </a:p>
+        </p:txBody>
+      </p:sp>
+      <p:sp>
+        <p:nvSpPr>
+          <p:cNvPr id="4" name="TextBox 3">
+            <a:extLst>
+              <a:ext uri="{FF2B5EF4-FFF2-40B4-BE49-F238E27FC236}">
+                <a16:creationId xmlns:a16="http://schemas.microsoft.com/office/drawing/2014/main" id="{D9F9F7DB-E7BE-3414-0C44-424E16526041}"/>
+              </a:ext>
+            </a:extLst>
+          </p:cNvPr>
+          <p:cNvSpPr txBox="1"/>
+          <p:nvPr/>
+        </p:nvSpPr>
+        <p:spPr>
+          <a:xfrm>
+            <a:off x="842210" y="1285138"/>
+            <a:ext cx="10860262" cy="3363678"/>
+          </a:xfrm>
+          <a:prstGeom prst="rect">
+            <a:avLst/>
+          </a:prstGeom>
+          <a:noFill/>
+        </p:spPr>
+        <p:txBody>
+          <a:bodyPr wrap="square" rtlCol="0">
+            <a:spAutoFit/>
+          </a:bodyPr>
+          <a:lstStyle/>
+          <a:p>
+            <a:pPr marL="285750" indent="-285750">
+              <a:lnSpc>
+                <a:spcPct val="150000"/>
+              </a:lnSpc>
+              <a:buFont typeface="Wingdings" panose="05000000000000000000" pitchFamily="2" charset="2"/>
+              <a:buChar char="§"/>
+            </a:pPr>
+            <a:r>
+              <a:rPr lang="en-US" altLang="ko-KR" dirty="0"/>
+              <a:t>Scikit-learn</a:t>
+            </a:r>
+            <a:r>
+              <a:rPr lang="ko-KR" altLang="en-US" dirty="0"/>
+              <a:t>의 선형모델</a:t>
+            </a:r>
+            <a:r>
+              <a:rPr lang="en-US" altLang="ko-KR" dirty="0"/>
+              <a:t>(</a:t>
+            </a:r>
+            <a:r>
+              <a:rPr lang="en-US" altLang="ko-KR" dirty="0" err="1">
+                <a:hlinkClick r:id="rId2">
+                  <a:extLst>
+                    <a:ext uri="{A12FA001-AC4F-418D-AE19-62706E023703}">
+                      <ahyp:hlinkClr xmlns:ahyp="http://schemas.microsoft.com/office/drawing/2018/hyperlinkcolor" val="tx"/>
+                    </a:ext>
+                  </a:extLst>
+                </a:hlinkClick>
+              </a:rPr>
+              <a:t>linear_model</a:t>
+            </a:r>
+            <a:r>
+              <a:rPr lang="en-US" altLang="ko-KR" dirty="0"/>
+              <a:t>)</a:t>
+            </a:r>
+            <a:r>
+              <a:rPr lang="ko-KR" altLang="en-US" dirty="0"/>
+              <a:t>의 수식</a:t>
+            </a:r>
+            <a:r>
+              <a:rPr lang="en-US" altLang="ko-KR" dirty="0"/>
+              <a:t>(L2 norm</a:t>
+            </a:r>
+            <a:r>
+              <a:rPr lang="ko-KR" altLang="en-US" dirty="0"/>
+              <a:t>을 제곱</a:t>
+            </a:r>
+            <a:r>
+              <a:rPr lang="en-US" altLang="ko-KR" dirty="0"/>
+              <a:t>)</a:t>
+            </a:r>
+            <a:r>
+              <a:rPr lang="ko-KR" altLang="en-US" dirty="0"/>
+              <a:t>에 대해 토론하라</a:t>
+            </a:r>
+            <a:endParaRPr lang="en-US" altLang="ko-KR" dirty="0"/>
+          </a:p>
+          <a:p>
+            <a:pPr marL="285750" indent="-285750">
+              <a:lnSpc>
+                <a:spcPct val="150000"/>
+              </a:lnSpc>
+              <a:buFont typeface="Wingdings" panose="05000000000000000000" pitchFamily="2" charset="2"/>
+              <a:buChar char="§"/>
+            </a:pPr>
+            <a:r>
+              <a:rPr lang="ko-KR" altLang="en-US" dirty="0"/>
+              <a:t>선형회귀</a:t>
+            </a:r>
+            <a:r>
+              <a:rPr lang="en-US" altLang="ko-KR" dirty="0"/>
+              <a:t>, </a:t>
+            </a:r>
+            <a:r>
+              <a:rPr lang="ko-KR" altLang="en-US" dirty="0"/>
+              <a:t>기하학적</a:t>
+            </a:r>
+            <a:r>
+              <a:rPr lang="en-US" altLang="ko-KR" dirty="0"/>
+              <a:t> </a:t>
+            </a:r>
+            <a:r>
+              <a:rPr lang="ko-KR" altLang="en-US" dirty="0"/>
+              <a:t>투영</a:t>
+            </a:r>
+            <a:r>
+              <a:rPr lang="en-US" altLang="ko-KR" dirty="0"/>
+              <a:t>(projection), </a:t>
+            </a:r>
+            <a:r>
+              <a:rPr lang="ko-KR" altLang="en-US" dirty="0"/>
+              <a:t>미분</a:t>
+            </a:r>
+            <a:r>
+              <a:rPr lang="en-US" altLang="ko-KR" dirty="0"/>
+              <a:t>(derivative) </a:t>
+            </a:r>
+            <a:r>
+              <a:rPr lang="ko-KR" altLang="en-US" dirty="0"/>
+              <a:t>등 각각의 관점에 대해 토론하자</a:t>
+            </a:r>
+            <a:endParaRPr lang="en-US" altLang="ko-KR" dirty="0"/>
+          </a:p>
+          <a:p>
+            <a:pPr marL="285750" indent="-285750">
+              <a:lnSpc>
+                <a:spcPct val="150000"/>
+              </a:lnSpc>
+              <a:buFont typeface="Wingdings" panose="05000000000000000000" pitchFamily="2" charset="2"/>
+              <a:buChar char="§"/>
+            </a:pPr>
+            <a:r>
+              <a:rPr lang="en-US" altLang="ko-KR" dirty="0"/>
+              <a:t>Scikit-learn</a:t>
+            </a:r>
+            <a:r>
+              <a:rPr lang="ko-KR" altLang="en-US" dirty="0"/>
+              <a:t>의 </a:t>
+            </a:r>
+            <a:r>
+              <a:rPr lang="en-US" altLang="ko-KR" dirty="0" err="1"/>
+              <a:t>load_diabetes</a:t>
+            </a:r>
+            <a:r>
+              <a:rPr lang="en-US" altLang="ko-KR" dirty="0"/>
+              <a:t> </a:t>
+            </a:r>
+            <a:r>
+              <a:rPr lang="ko-KR" altLang="en-US" dirty="0"/>
+              <a:t>를 바탕으로 </a:t>
+            </a:r>
+            <a:r>
+              <a:rPr lang="en-US" altLang="ko-KR" dirty="0" err="1"/>
+              <a:t>train_test_split</a:t>
+            </a:r>
+            <a:r>
+              <a:rPr lang="ko-KR" altLang="en-US" dirty="0"/>
+              <a:t>를 통해 아래 </a:t>
+            </a:r>
+            <a:r>
+              <a:rPr lang="en-US" altLang="ko-KR" dirty="0"/>
+              <a:t>3</a:t>
+            </a:r>
+            <a:r>
+              <a:rPr lang="ko-KR" altLang="en-US" dirty="0"/>
+              <a:t>가지 방법으로 </a:t>
+            </a:r>
+            <a:r>
+              <a:rPr lang="en-US" altLang="ko-KR" dirty="0"/>
+              <a:t>parameters</a:t>
+            </a:r>
+            <a:r>
+              <a:rPr lang="ko-KR" altLang="en-US" dirty="0"/>
+              <a:t>를 구하고 비교하라</a:t>
+            </a:r>
+            <a:endParaRPr lang="en-US" altLang="ko-KR" dirty="0"/>
+          </a:p>
+          <a:p>
+            <a:pPr marL="800100" lvl="1" indent="-342900">
+              <a:lnSpc>
+                <a:spcPct val="150000"/>
+              </a:lnSpc>
+              <a:buFont typeface="+mj-lt"/>
+              <a:buAutoNum type="arabicPeriod"/>
+            </a:pPr>
+            <a:r>
+              <a:rPr lang="en-US" altLang="ko-KR" dirty="0"/>
+              <a:t>from </a:t>
+            </a:r>
+            <a:r>
+              <a:rPr lang="en-US" altLang="ko-KR" dirty="0" err="1"/>
+              <a:t>sklearn.linear_model</a:t>
+            </a:r>
+            <a:r>
+              <a:rPr lang="en-US" altLang="ko-KR" dirty="0"/>
+              <a:t> import </a:t>
+            </a:r>
+            <a:r>
+              <a:rPr lang="en-US" altLang="ko-KR" dirty="0" err="1"/>
+              <a:t>LinearRegression</a:t>
+            </a:r>
+            <a:endParaRPr lang="en-US" altLang="ko-KR" dirty="0"/>
+          </a:p>
+          <a:p>
+            <a:pPr marL="800100" lvl="1" indent="-342900">
+              <a:lnSpc>
+                <a:spcPct val="150000"/>
+              </a:lnSpc>
+              <a:buFont typeface="+mj-lt"/>
+              <a:buAutoNum type="arabicPeriod"/>
+            </a:pPr>
+            <a:r>
+              <a:rPr lang="en-US" altLang="ko-KR" dirty="0"/>
+              <a:t>import </a:t>
+            </a:r>
+            <a:r>
+              <a:rPr lang="en-US" altLang="ko-KR" dirty="0" err="1"/>
+              <a:t>statsmodels.api</a:t>
+            </a:r>
+            <a:r>
+              <a:rPr lang="en-US" altLang="ko-KR" dirty="0"/>
+              <a:t> as </a:t>
+            </a:r>
+            <a:r>
+              <a:rPr lang="en-US" altLang="ko-KR" dirty="0" err="1"/>
+              <a:t>sm</a:t>
+            </a:r>
+            <a:endParaRPr lang="en-US" altLang="ko-KR" dirty="0"/>
+          </a:p>
+          <a:p>
+            <a:pPr marL="800100" lvl="1" indent="-342900">
+              <a:lnSpc>
+                <a:spcPct val="150000"/>
+              </a:lnSpc>
+              <a:buFont typeface="+mj-lt"/>
+              <a:buAutoNum type="arabicPeriod"/>
+            </a:pPr>
+            <a:r>
+              <a:rPr lang="en-US" altLang="ko-KR" dirty="0"/>
+              <a:t>import</a:t>
+            </a:r>
+            <a:r>
+              <a:rPr lang="ko-KR" altLang="en-US" dirty="0"/>
+              <a:t> </a:t>
+            </a:r>
+            <a:r>
+              <a:rPr lang="en-US" altLang="ko-KR" dirty="0" err="1"/>
+              <a:t>numpy</a:t>
+            </a:r>
+            <a:r>
+              <a:rPr lang="ko-KR" altLang="en-US" dirty="0"/>
+              <a:t> </a:t>
+            </a:r>
+            <a:r>
+              <a:rPr lang="en-US" altLang="ko-KR" dirty="0"/>
+              <a:t>as</a:t>
+            </a:r>
+            <a:r>
+              <a:rPr lang="ko-KR" altLang="en-US" dirty="0"/>
+              <a:t> </a:t>
+            </a:r>
+            <a:r>
+              <a:rPr lang="en-US" altLang="ko-KR" dirty="0"/>
+              <a:t>np </a:t>
+            </a:r>
+          </a:p>
+          <a:p>
+            <a:pPr marL="742950" lvl="1" indent="-285750">
+              <a:lnSpc>
+                <a:spcPct val="150000"/>
+              </a:lnSpc>
+              <a:buFont typeface="Wingdings" panose="05000000000000000000" pitchFamily="2" charset="2"/>
+              <a:buChar char="§"/>
+            </a:pPr>
+            <a:endParaRPr lang="ko-KR" altLang="en-US" dirty="0"/>
+          </a:p>
+        </p:txBody>
+      </p:sp>
+      <p:sp>
+        <p:nvSpPr>
+          <p:cNvPr id="3" name="TextBox 2">
+            <a:extLst>
+              <a:ext uri="{FF2B5EF4-FFF2-40B4-BE49-F238E27FC236}">
+                <a16:creationId xmlns:a16="http://schemas.microsoft.com/office/drawing/2014/main" id="{06C0602C-5DA9-D570-FF09-907AA9270D7D}"/>
+              </a:ext>
+            </a:extLst>
+          </p:cNvPr>
+          <p:cNvSpPr txBox="1"/>
+          <p:nvPr/>
+        </p:nvSpPr>
+        <p:spPr>
+          <a:xfrm>
+            <a:off x="4017505" y="5293023"/>
+            <a:ext cx="3114675" cy="338554"/>
+          </a:xfrm>
+          <a:prstGeom prst="rect">
+            <a:avLst/>
+          </a:prstGeom>
+          <a:noFill/>
+        </p:spPr>
+        <p:txBody>
+          <a:bodyPr wrap="square">
+            <a:spAutoFit/>
+          </a:bodyPr>
+          <a:lstStyle/>
+          <a:p>
+            <a:r>
+              <a:rPr lang="en-US" altLang="ko-KR" sz="1600" dirty="0">
+                <a:latin typeface="맑은 고딕 Semilight" panose="020B0502040204020203" pitchFamily="50" charset="-127"/>
+                <a:ea typeface="맑은 고딕 Semilight" panose="020B0502040204020203" pitchFamily="50" charset="-127"/>
+                <a:cs typeface="맑은 고딕 Semilight" panose="020B0502040204020203" pitchFamily="50" charset="-127"/>
+                <a:hlinkClick r:id="rId3">
+                  <a:extLst>
+                    <a:ext uri="{A12FA001-AC4F-418D-AE19-62706E023703}">
+                      <ahyp:hlinkClr xmlns:ahyp="http://schemas.microsoft.com/office/drawing/2018/hyperlinkcolor" val="tx"/>
+                    </a:ext>
+                  </a:extLst>
+                </a:hlinkClick>
+              </a:rPr>
+              <a:t>lectures/lecturenote08.html</a:t>
+            </a:r>
+            <a:endParaRPr lang="ko-KR" altLang="en-US" sz="1600" dirty="0"/>
+          </a:p>
+        </p:txBody>
+      </p:sp>
+      <p:pic>
+        <p:nvPicPr>
+          <p:cNvPr id="9" name="그림 8">
+            <a:extLst>
+              <a:ext uri="{FF2B5EF4-FFF2-40B4-BE49-F238E27FC236}">
+                <a16:creationId xmlns:a16="http://schemas.microsoft.com/office/drawing/2014/main" id="{763E79C3-FF2D-57CF-E818-B8E082950711}"/>
+              </a:ext>
+            </a:extLst>
+          </p:cNvPr>
+          <p:cNvPicPr>
+            <a:picLocks noChangeAspect="1"/>
+          </p:cNvPicPr>
+          <p:nvPr/>
+        </p:nvPicPr>
+        <p:blipFill>
+          <a:blip r:embed="rId4"/>
+          <a:stretch>
+            <a:fillRect/>
+          </a:stretch>
+        </p:blipFill>
+        <p:spPr>
+          <a:xfrm>
+            <a:off x="2371421" y="5164195"/>
+            <a:ext cx="1557334" cy="438807"/>
+          </a:xfrm>
+          <a:prstGeom prst="rect">
+            <a:avLst/>
+          </a:prstGeom>
+        </p:spPr>
+      </p:pic>
+      <p:pic>
+        <p:nvPicPr>
+          <p:cNvPr id="15" name="그림 14">
+            <a:extLst>
+              <a:ext uri="{FF2B5EF4-FFF2-40B4-BE49-F238E27FC236}">
+                <a16:creationId xmlns:a16="http://schemas.microsoft.com/office/drawing/2014/main" id="{EF696029-D14D-AE60-8266-EDE568763B82}"/>
+              </a:ext>
+            </a:extLst>
+          </p:cNvPr>
+          <p:cNvPicPr>
+            <a:picLocks noChangeAspect="1"/>
+          </p:cNvPicPr>
+          <p:nvPr/>
+        </p:nvPicPr>
+        <p:blipFill>
+          <a:blip r:embed="rId5"/>
+          <a:stretch>
+            <a:fillRect/>
+          </a:stretch>
+        </p:blipFill>
+        <p:spPr>
+          <a:xfrm>
+            <a:off x="2371421" y="4311361"/>
+            <a:ext cx="4114860" cy="438808"/>
+          </a:xfrm>
+          <a:prstGeom prst="rect">
+            <a:avLst/>
+          </a:prstGeom>
+        </p:spPr>
+      </p:pic>
+      <p:pic>
+        <p:nvPicPr>
+          <p:cNvPr id="19" name="그림 18">
+            <a:extLst>
+              <a:ext uri="{FF2B5EF4-FFF2-40B4-BE49-F238E27FC236}">
+                <a16:creationId xmlns:a16="http://schemas.microsoft.com/office/drawing/2014/main" id="{1B22D6C6-4F06-FD9A-0DC6-9F8423CA4816}"/>
+              </a:ext>
+            </a:extLst>
+          </p:cNvPr>
+          <p:cNvPicPr>
+            <a:picLocks noChangeAspect="1"/>
+          </p:cNvPicPr>
+          <p:nvPr/>
+        </p:nvPicPr>
+        <p:blipFill>
+          <a:blip r:embed="rId6"/>
+          <a:stretch>
+            <a:fillRect/>
+          </a:stretch>
+        </p:blipFill>
+        <p:spPr>
+          <a:xfrm>
+            <a:off x="2371421" y="4725388"/>
+            <a:ext cx="1996140" cy="438807"/>
+          </a:xfrm>
+          <a:prstGeom prst="rect">
+            <a:avLst/>
+          </a:prstGeom>
+        </p:spPr>
+      </p:pic>
+    </p:spTree>
+    <p:extLst>
+      <p:ext uri="{BB962C8B-B14F-4D97-AF65-F5344CB8AC3E}">
+        <p14:creationId xmlns:p14="http://schemas.microsoft.com/office/powerpoint/2010/main" val="1787740103"/>
+      </p:ext>
+    </p:extLst>
+  </p:cSld>
+  <p:clrMapOvr>
+    <a:masterClrMapping/>
+  </p:clrMapOvr>
+</p:sld>
+</file>
+
+<file path=ppt/slides/slide43.xml><?xml version="1.0" encoding="utf-8"?>
+<p:sld xmlns:a="http://schemas.openxmlformats.org/drawingml/2006/main" xmlns:r="http://schemas.openxmlformats.org/officeDocument/2006/relationships" xmlns:p="http://schemas.openxmlformats.org/presentationml/2006/main">
+  <p:cSld>
+    <p:spTree>
+      <p:nvGrpSpPr>
+        <p:cNvPr id="1" name="">
+          <a:extLst>
+            <a:ext uri="{FF2B5EF4-FFF2-40B4-BE49-F238E27FC236}">
+              <a16:creationId xmlns:a16="http://schemas.microsoft.com/office/drawing/2014/main" id="{2A31F8B4-A99B-88EE-75C1-6CEF82FB501B}"/>
+            </a:ext>
+          </a:extLst>
+        </p:cNvPr>
+        <p:cNvGrpSpPr/>
+        <p:nvPr/>
+      </p:nvGrpSpPr>
+      <p:grpSpPr>
+        <a:xfrm>
+          <a:off x="0" y="0"/>
+          <a:ext cx="0" cy="0"/>
+          <a:chOff x="0" y="0"/>
+          <a:chExt cx="0" cy="0"/>
+        </a:xfrm>
+      </p:grpSpPr>
+      <p:sp>
+        <p:nvSpPr>
+          <p:cNvPr id="6" name="제목 1">
+            <a:extLst>
+              <a:ext uri="{FF2B5EF4-FFF2-40B4-BE49-F238E27FC236}">
+                <a16:creationId xmlns:a16="http://schemas.microsoft.com/office/drawing/2014/main" id="{590521C8-7C2C-7319-FE80-5CB704F46DD4}"/>
+              </a:ext>
+            </a:extLst>
+          </p:cNvPr>
+          <p:cNvSpPr>
+            <a:spLocks noGrp="1"/>
+          </p:cNvSpPr>
+          <p:nvPr>
+            <p:ph type="title"/>
+          </p:nvPr>
+        </p:nvSpPr>
+        <p:spPr>
+          <a:xfrm>
+            <a:off x="915383" y="139084"/>
+            <a:ext cx="10353762" cy="766439"/>
+          </a:xfrm>
+        </p:spPr>
+        <p:txBody>
+          <a:bodyPr>
+            <a:normAutofit/>
+          </a:bodyPr>
+          <a:lstStyle/>
+          <a:p>
+            <a:r>
+              <a:rPr lang="en-US" altLang="ko-KR" b="1" dirty="0">
+                <a:latin typeface="Times New Roman" panose="02020603050405020304" pitchFamily="18" charset="0"/>
+                <a:cs typeface="Times New Roman" panose="02020603050405020304" pitchFamily="18" charset="0"/>
+              </a:rPr>
+              <a:t>Optimization</a:t>
+            </a:r>
+            <a:r>
+              <a:rPr lang="ko-KR" altLang="en-US" b="1" dirty="0">
+                <a:latin typeface="Times New Roman" panose="02020603050405020304" pitchFamily="18" charset="0"/>
+                <a:cs typeface="Times New Roman" panose="02020603050405020304" pitchFamily="18" charset="0"/>
+              </a:rPr>
+              <a:t> </a:t>
+            </a:r>
+            <a:r>
+              <a:rPr lang="en-US" altLang="ko-KR" b="1" dirty="0">
+                <a:latin typeface="Times New Roman" panose="02020603050405020304" pitchFamily="18" charset="0"/>
+                <a:cs typeface="Times New Roman" panose="02020603050405020304" pitchFamily="18" charset="0"/>
+              </a:rPr>
+              <a:t>of Loss Function</a:t>
+            </a:r>
+            <a:endParaRPr lang="ko-KR" altLang="en-US" b="1" cap="none" dirty="0">
+              <a:latin typeface="Times New Roman" panose="02020603050405020304" pitchFamily="18" charset="0"/>
+              <a:cs typeface="Times New Roman" panose="02020603050405020304" pitchFamily="18" charset="0"/>
+            </a:endParaRPr>
+          </a:p>
+        </p:txBody>
+      </p:sp>
+      <p:sp>
+        <p:nvSpPr>
+          <p:cNvPr id="8" name="슬라이드 번호 개체 틀 7">
+            <a:extLst>
+              <a:ext uri="{FF2B5EF4-FFF2-40B4-BE49-F238E27FC236}">
+                <a16:creationId xmlns:a16="http://schemas.microsoft.com/office/drawing/2014/main" id="{B5053BC1-A3BE-48A2-D122-B726B63A8D76}"/>
+              </a:ext>
+            </a:extLst>
+          </p:cNvPr>
+          <p:cNvSpPr>
+            <a:spLocks noGrp="1"/>
+          </p:cNvSpPr>
+          <p:nvPr>
+            <p:ph type="sldNum" sz="quarter" idx="12"/>
+          </p:nvPr>
+        </p:nvSpPr>
+        <p:spPr/>
+        <p:txBody>
+          <a:bodyPr/>
+          <a:lstStyle/>
+          <a:p>
+            <a:fld id="{D57F1E4F-1CFF-5643-939E-02111984F565}" type="slidenum">
+              <a:rPr lang="en-US" smtClean="0"/>
+              <a:t>43</a:t>
+            </a:fld>
+            <a:endParaRPr lang="en-US" dirty="0"/>
+          </a:p>
+        </p:txBody>
+      </p:sp>
+      <p:sp>
+        <p:nvSpPr>
+          <p:cNvPr id="7" name="TextBox 6">
+            <a:extLst>
+              <a:ext uri="{FF2B5EF4-FFF2-40B4-BE49-F238E27FC236}">
+                <a16:creationId xmlns:a16="http://schemas.microsoft.com/office/drawing/2014/main" id="{55122338-7AAF-EE81-32F5-A4761D443AA3}"/>
+              </a:ext>
+            </a:extLst>
+          </p:cNvPr>
+          <p:cNvSpPr txBox="1"/>
+          <p:nvPr/>
+        </p:nvSpPr>
+        <p:spPr>
+          <a:xfrm>
+            <a:off x="1020158" y="1143755"/>
+            <a:ext cx="10866889" cy="5401479"/>
+          </a:xfrm>
+          <a:prstGeom prst="rect">
+            <a:avLst/>
+          </a:prstGeom>
+          <a:solidFill>
+            <a:srgbClr val="00B0F0"/>
+          </a:solidFill>
+        </p:spPr>
+        <p:txBody>
+          <a:bodyPr wrap="square">
+            <a:spAutoFit/>
+          </a:bodyPr>
+          <a:lstStyle/>
+          <a:p>
+            <a:r>
+              <a:rPr lang="en-US" altLang="ko-KR" sz="1500" dirty="0">
+                <a:solidFill>
+                  <a:schemeClr val="bg1"/>
+                </a:solidFill>
+                <a:latin typeface="D2Coding" panose="020B0609020101020101" pitchFamily="49" charset="-127"/>
+                <a:ea typeface="D2Coding" panose="020B0609020101020101" pitchFamily="49" charset="-127"/>
+              </a:rPr>
+              <a:t>from </a:t>
+            </a:r>
+            <a:r>
+              <a:rPr lang="en-US" altLang="ko-KR" sz="1500" dirty="0" err="1">
+                <a:solidFill>
+                  <a:schemeClr val="bg1"/>
+                </a:solidFill>
+                <a:latin typeface="D2Coding" panose="020B0609020101020101" pitchFamily="49" charset="-127"/>
+                <a:ea typeface="D2Coding" panose="020B0609020101020101" pitchFamily="49" charset="-127"/>
+              </a:rPr>
+              <a:t>sklearn.datasets</a:t>
+            </a:r>
+            <a:r>
+              <a:rPr lang="en-US" altLang="ko-KR" sz="1500" dirty="0">
+                <a:solidFill>
+                  <a:schemeClr val="bg1"/>
+                </a:solidFill>
+                <a:latin typeface="D2Coding" panose="020B0609020101020101" pitchFamily="49" charset="-127"/>
+                <a:ea typeface="D2Coding" panose="020B0609020101020101" pitchFamily="49" charset="-127"/>
+              </a:rPr>
+              <a:t> import </a:t>
+            </a:r>
+            <a:r>
+              <a:rPr lang="en-US" altLang="ko-KR" sz="1500" dirty="0" err="1">
+                <a:solidFill>
+                  <a:schemeClr val="bg1"/>
+                </a:solidFill>
+                <a:latin typeface="D2Coding" panose="020B0609020101020101" pitchFamily="49" charset="-127"/>
+                <a:ea typeface="D2Coding" panose="020B0609020101020101" pitchFamily="49" charset="-127"/>
+              </a:rPr>
+              <a:t>load_diabetes</a:t>
+            </a:r>
+            <a:endParaRPr lang="en-US" altLang="ko-KR" sz="1500" dirty="0">
+              <a:solidFill>
+                <a:schemeClr val="bg1"/>
+              </a:solidFill>
+              <a:latin typeface="D2Coding" panose="020B0609020101020101" pitchFamily="49" charset="-127"/>
+              <a:ea typeface="D2Coding" panose="020B0609020101020101" pitchFamily="49" charset="-127"/>
+            </a:endParaRPr>
+          </a:p>
+          <a:p>
+            <a:r>
+              <a:rPr lang="en-US" altLang="ko-KR" sz="1500" dirty="0">
+                <a:solidFill>
+                  <a:schemeClr val="bg1"/>
+                </a:solidFill>
+                <a:latin typeface="D2Coding" panose="020B0609020101020101" pitchFamily="49" charset="-127"/>
+                <a:ea typeface="D2Coding" panose="020B0609020101020101" pitchFamily="49" charset="-127"/>
+              </a:rPr>
+              <a:t>from </a:t>
+            </a:r>
+            <a:r>
+              <a:rPr lang="en-US" altLang="ko-KR" sz="1500" dirty="0" err="1">
+                <a:solidFill>
+                  <a:schemeClr val="bg1"/>
+                </a:solidFill>
+                <a:latin typeface="D2Coding" panose="020B0609020101020101" pitchFamily="49" charset="-127"/>
+                <a:ea typeface="D2Coding" panose="020B0609020101020101" pitchFamily="49" charset="-127"/>
+              </a:rPr>
+              <a:t>sklearn.model_selection</a:t>
+            </a:r>
+            <a:r>
+              <a:rPr lang="en-US" altLang="ko-KR" sz="1500" dirty="0">
+                <a:solidFill>
+                  <a:schemeClr val="bg1"/>
+                </a:solidFill>
+                <a:latin typeface="D2Coding" panose="020B0609020101020101" pitchFamily="49" charset="-127"/>
+                <a:ea typeface="D2Coding" panose="020B0609020101020101" pitchFamily="49" charset="-127"/>
+              </a:rPr>
+              <a:t> import </a:t>
+            </a:r>
+            <a:r>
+              <a:rPr lang="en-US" altLang="ko-KR" sz="1500" dirty="0" err="1">
+                <a:solidFill>
+                  <a:schemeClr val="bg1"/>
+                </a:solidFill>
+                <a:latin typeface="D2Coding" panose="020B0609020101020101" pitchFamily="49" charset="-127"/>
+                <a:ea typeface="D2Coding" panose="020B0609020101020101" pitchFamily="49" charset="-127"/>
+              </a:rPr>
+              <a:t>train_test_split</a:t>
+            </a:r>
+            <a:endParaRPr lang="en-US" altLang="ko-KR" sz="1500" dirty="0">
+              <a:solidFill>
+                <a:schemeClr val="bg1"/>
+              </a:solidFill>
+              <a:latin typeface="D2Coding" panose="020B0609020101020101" pitchFamily="49" charset="-127"/>
+              <a:ea typeface="D2Coding" panose="020B0609020101020101" pitchFamily="49" charset="-127"/>
+            </a:endParaRPr>
+          </a:p>
+          <a:p>
+            <a:r>
+              <a:rPr lang="en-US" altLang="ko-KR" sz="1500" dirty="0">
+                <a:solidFill>
+                  <a:schemeClr val="bg1"/>
+                </a:solidFill>
+                <a:latin typeface="D2Coding" panose="020B0609020101020101" pitchFamily="49" charset="-127"/>
+                <a:ea typeface="D2Coding" panose="020B0609020101020101" pitchFamily="49" charset="-127"/>
+              </a:rPr>
+              <a:t>from </a:t>
+            </a:r>
+            <a:r>
+              <a:rPr lang="en-US" altLang="ko-KR" sz="1500" dirty="0" err="1">
+                <a:solidFill>
+                  <a:schemeClr val="bg1"/>
+                </a:solidFill>
+                <a:latin typeface="D2Coding" panose="020B0609020101020101" pitchFamily="49" charset="-127"/>
+                <a:ea typeface="D2Coding" panose="020B0609020101020101" pitchFamily="49" charset="-127"/>
+              </a:rPr>
+              <a:t>sklearn.linear_model</a:t>
+            </a:r>
+            <a:r>
+              <a:rPr lang="en-US" altLang="ko-KR" sz="1500" dirty="0">
+                <a:solidFill>
+                  <a:schemeClr val="bg1"/>
+                </a:solidFill>
+                <a:latin typeface="D2Coding" panose="020B0609020101020101" pitchFamily="49" charset="-127"/>
+                <a:ea typeface="D2Coding" panose="020B0609020101020101" pitchFamily="49" charset="-127"/>
+              </a:rPr>
+              <a:t> import </a:t>
+            </a:r>
+            <a:r>
+              <a:rPr lang="en-US" altLang="ko-KR" sz="1500" dirty="0" err="1">
+                <a:solidFill>
+                  <a:schemeClr val="bg1"/>
+                </a:solidFill>
+                <a:latin typeface="D2Coding" panose="020B0609020101020101" pitchFamily="49" charset="-127"/>
+                <a:ea typeface="D2Coding" panose="020B0609020101020101" pitchFamily="49" charset="-127"/>
+              </a:rPr>
+              <a:t>LinearRegression</a:t>
+            </a:r>
+            <a:endParaRPr lang="en-US" altLang="ko-KR" sz="1500" dirty="0">
+              <a:solidFill>
+                <a:schemeClr val="bg1"/>
+              </a:solidFill>
+              <a:latin typeface="D2Coding" panose="020B0609020101020101" pitchFamily="49" charset="-127"/>
+              <a:ea typeface="D2Coding" panose="020B0609020101020101" pitchFamily="49" charset="-127"/>
+            </a:endParaRPr>
+          </a:p>
+          <a:p>
+            <a:r>
+              <a:rPr lang="en-US" altLang="ko-KR" sz="1500" dirty="0">
+                <a:solidFill>
+                  <a:schemeClr val="bg1"/>
+                </a:solidFill>
+                <a:latin typeface="D2Coding" panose="020B0609020101020101" pitchFamily="49" charset="-127"/>
+                <a:ea typeface="D2Coding" panose="020B0609020101020101" pitchFamily="49" charset="-127"/>
+              </a:rPr>
+              <a:t>import </a:t>
+            </a:r>
+            <a:r>
+              <a:rPr lang="en-US" altLang="ko-KR" sz="1500" dirty="0" err="1">
+                <a:solidFill>
+                  <a:schemeClr val="bg1"/>
+                </a:solidFill>
+                <a:latin typeface="D2Coding" panose="020B0609020101020101" pitchFamily="49" charset="-127"/>
+                <a:ea typeface="D2Coding" panose="020B0609020101020101" pitchFamily="49" charset="-127"/>
+              </a:rPr>
+              <a:t>statsmodels.api</a:t>
+            </a:r>
+            <a:r>
+              <a:rPr lang="en-US" altLang="ko-KR" sz="1500" dirty="0">
+                <a:solidFill>
+                  <a:schemeClr val="bg1"/>
+                </a:solidFill>
+                <a:latin typeface="D2Coding" panose="020B0609020101020101" pitchFamily="49" charset="-127"/>
+                <a:ea typeface="D2Coding" panose="020B0609020101020101" pitchFamily="49" charset="-127"/>
+              </a:rPr>
+              <a:t> as </a:t>
+            </a:r>
+            <a:r>
+              <a:rPr lang="en-US" altLang="ko-KR" sz="1500" dirty="0" err="1">
+                <a:solidFill>
+                  <a:schemeClr val="bg1"/>
+                </a:solidFill>
+                <a:latin typeface="D2Coding" panose="020B0609020101020101" pitchFamily="49" charset="-127"/>
+                <a:ea typeface="D2Coding" panose="020B0609020101020101" pitchFamily="49" charset="-127"/>
+              </a:rPr>
+              <a:t>sm</a:t>
+            </a:r>
+            <a:endParaRPr lang="en-US" altLang="ko-KR" sz="1500" dirty="0">
+              <a:solidFill>
+                <a:schemeClr val="bg1"/>
+              </a:solidFill>
+              <a:latin typeface="D2Coding" panose="020B0609020101020101" pitchFamily="49" charset="-127"/>
+              <a:ea typeface="D2Coding" panose="020B0609020101020101" pitchFamily="49" charset="-127"/>
+            </a:endParaRPr>
+          </a:p>
+          <a:p>
+            <a:r>
+              <a:rPr lang="en-US" altLang="ko-KR" sz="1500" dirty="0">
+                <a:solidFill>
+                  <a:schemeClr val="bg1"/>
+                </a:solidFill>
+                <a:latin typeface="D2Coding" panose="020B0609020101020101" pitchFamily="49" charset="-127"/>
+                <a:ea typeface="D2Coding" panose="020B0609020101020101" pitchFamily="49" charset="-127"/>
+              </a:rPr>
+              <a:t>import </a:t>
+            </a:r>
+            <a:r>
+              <a:rPr lang="en-US" altLang="ko-KR" sz="1500" dirty="0" err="1">
+                <a:solidFill>
+                  <a:schemeClr val="bg1"/>
+                </a:solidFill>
+                <a:latin typeface="D2Coding" panose="020B0609020101020101" pitchFamily="49" charset="-127"/>
+                <a:ea typeface="D2Coding" panose="020B0609020101020101" pitchFamily="49" charset="-127"/>
+              </a:rPr>
+              <a:t>numpy</a:t>
+            </a:r>
+            <a:r>
+              <a:rPr lang="en-US" altLang="ko-KR" sz="1500" dirty="0">
+                <a:solidFill>
+                  <a:schemeClr val="bg1"/>
+                </a:solidFill>
+                <a:latin typeface="D2Coding" panose="020B0609020101020101" pitchFamily="49" charset="-127"/>
+                <a:ea typeface="D2Coding" panose="020B0609020101020101" pitchFamily="49" charset="-127"/>
+              </a:rPr>
+              <a:t> as np</a:t>
+            </a:r>
+          </a:p>
+          <a:p>
+            <a:r>
+              <a:rPr lang="en-US" altLang="ko-KR" sz="1500" dirty="0">
+                <a:solidFill>
+                  <a:schemeClr val="bg1"/>
+                </a:solidFill>
+                <a:latin typeface="D2Coding" panose="020B0609020101020101" pitchFamily="49" charset="-127"/>
+                <a:ea typeface="D2Coding" panose="020B0609020101020101" pitchFamily="49" charset="-127"/>
+              </a:rPr>
+              <a:t>import pandas as pd</a:t>
+            </a:r>
+          </a:p>
+          <a:p>
+            <a:r>
+              <a:rPr lang="en-US" altLang="ko-KR" sz="1500" dirty="0">
+                <a:solidFill>
+                  <a:schemeClr val="bg1"/>
+                </a:solidFill>
+                <a:latin typeface="D2Coding" panose="020B0609020101020101" pitchFamily="49" charset="-127"/>
+                <a:ea typeface="D2Coding" panose="020B0609020101020101" pitchFamily="49" charset="-127"/>
+              </a:rPr>
+              <a:t>diabetes = </a:t>
+            </a:r>
+            <a:r>
+              <a:rPr lang="en-US" altLang="ko-KR" sz="1500" dirty="0" err="1">
+                <a:solidFill>
+                  <a:schemeClr val="bg1"/>
+                </a:solidFill>
+                <a:latin typeface="D2Coding" panose="020B0609020101020101" pitchFamily="49" charset="-127"/>
+                <a:ea typeface="D2Coding" panose="020B0609020101020101" pitchFamily="49" charset="-127"/>
+              </a:rPr>
+              <a:t>load_diabetes</a:t>
+            </a:r>
+            <a:r>
+              <a:rPr lang="en-US" altLang="ko-KR" sz="1500" dirty="0">
+                <a:solidFill>
+                  <a:schemeClr val="bg1"/>
+                </a:solidFill>
+                <a:latin typeface="D2Coding" panose="020B0609020101020101" pitchFamily="49" charset="-127"/>
+                <a:ea typeface="D2Coding" panose="020B0609020101020101" pitchFamily="49" charset="-127"/>
+              </a:rPr>
+              <a:t>()</a:t>
+            </a:r>
+          </a:p>
+          <a:p>
+            <a:r>
+              <a:rPr lang="en-US" altLang="ko-KR" sz="1500" dirty="0">
+                <a:solidFill>
+                  <a:schemeClr val="bg1"/>
+                </a:solidFill>
+                <a:latin typeface="D2Coding" panose="020B0609020101020101" pitchFamily="49" charset="-127"/>
+                <a:ea typeface="D2Coding" panose="020B0609020101020101" pitchFamily="49" charset="-127"/>
+              </a:rPr>
+              <a:t>X, y = </a:t>
+            </a:r>
+            <a:r>
+              <a:rPr lang="en-US" altLang="ko-KR" sz="1500" dirty="0" err="1">
+                <a:solidFill>
+                  <a:schemeClr val="bg1"/>
+                </a:solidFill>
+                <a:latin typeface="D2Coding" panose="020B0609020101020101" pitchFamily="49" charset="-127"/>
+                <a:ea typeface="D2Coding" panose="020B0609020101020101" pitchFamily="49" charset="-127"/>
+              </a:rPr>
+              <a:t>diabetes.data</a:t>
+            </a:r>
+            <a:r>
+              <a:rPr lang="en-US" altLang="ko-KR" sz="1500" dirty="0">
+                <a:solidFill>
+                  <a:schemeClr val="bg1"/>
+                </a:solidFill>
+                <a:latin typeface="D2Coding" panose="020B0609020101020101" pitchFamily="49" charset="-127"/>
+                <a:ea typeface="D2Coding" panose="020B0609020101020101" pitchFamily="49" charset="-127"/>
+              </a:rPr>
+              <a:t>, </a:t>
+            </a:r>
+            <a:r>
+              <a:rPr lang="en-US" altLang="ko-KR" sz="1500" dirty="0" err="1">
+                <a:solidFill>
+                  <a:schemeClr val="bg1"/>
+                </a:solidFill>
+                <a:latin typeface="D2Coding" panose="020B0609020101020101" pitchFamily="49" charset="-127"/>
+                <a:ea typeface="D2Coding" panose="020B0609020101020101" pitchFamily="49" charset="-127"/>
+              </a:rPr>
+              <a:t>diabetes.target</a:t>
+            </a:r>
+            <a:endParaRPr lang="en-US" altLang="ko-KR" sz="1500" dirty="0">
+              <a:solidFill>
+                <a:schemeClr val="bg1"/>
+              </a:solidFill>
+              <a:latin typeface="D2Coding" panose="020B0609020101020101" pitchFamily="49" charset="-127"/>
+              <a:ea typeface="D2Coding" panose="020B0609020101020101" pitchFamily="49" charset="-127"/>
+            </a:endParaRPr>
+          </a:p>
+          <a:p>
+            <a:r>
+              <a:rPr lang="en-US" altLang="ko-KR" sz="1500" dirty="0" err="1">
+                <a:solidFill>
+                  <a:schemeClr val="bg1"/>
+                </a:solidFill>
+                <a:latin typeface="D2Coding" panose="020B0609020101020101" pitchFamily="49" charset="-127"/>
+                <a:ea typeface="D2Coding" panose="020B0609020101020101" pitchFamily="49" charset="-127"/>
+              </a:rPr>
+              <a:t>feature_names</a:t>
+            </a:r>
+            <a:r>
+              <a:rPr lang="en-US" altLang="ko-KR" sz="1500" dirty="0">
+                <a:solidFill>
+                  <a:schemeClr val="bg1"/>
+                </a:solidFill>
+                <a:latin typeface="D2Coding" panose="020B0609020101020101" pitchFamily="49" charset="-127"/>
+                <a:ea typeface="D2Coding" panose="020B0609020101020101" pitchFamily="49" charset="-127"/>
+              </a:rPr>
+              <a:t> = </a:t>
+            </a:r>
+            <a:r>
+              <a:rPr lang="en-US" altLang="ko-KR" sz="1500" dirty="0" err="1">
+                <a:solidFill>
+                  <a:schemeClr val="bg1"/>
+                </a:solidFill>
+                <a:latin typeface="D2Coding" panose="020B0609020101020101" pitchFamily="49" charset="-127"/>
+                <a:ea typeface="D2Coding" panose="020B0609020101020101" pitchFamily="49" charset="-127"/>
+              </a:rPr>
+              <a:t>diabetes.feature_names</a:t>
+            </a:r>
+            <a:endParaRPr lang="en-US" altLang="ko-KR" sz="1500" dirty="0">
+              <a:solidFill>
+                <a:schemeClr val="bg1"/>
+              </a:solidFill>
+              <a:latin typeface="D2Coding" panose="020B0609020101020101" pitchFamily="49" charset="-127"/>
+              <a:ea typeface="D2Coding" panose="020B0609020101020101" pitchFamily="49" charset="-127"/>
+            </a:endParaRPr>
+          </a:p>
+          <a:p>
+            <a:endParaRPr lang="en-US" altLang="ko-KR" sz="1500" dirty="0">
+              <a:solidFill>
+                <a:schemeClr val="bg1"/>
+              </a:solidFill>
+              <a:latin typeface="D2Coding" panose="020B0609020101020101" pitchFamily="49" charset="-127"/>
+              <a:ea typeface="D2Coding" panose="020B0609020101020101" pitchFamily="49" charset="-127"/>
+            </a:endParaRPr>
+          </a:p>
+          <a:p>
+            <a:r>
+              <a:rPr lang="en-US" altLang="ko-KR" sz="1500" dirty="0" err="1">
+                <a:solidFill>
+                  <a:schemeClr val="bg1"/>
+                </a:solidFill>
+                <a:latin typeface="D2Coding" panose="020B0609020101020101" pitchFamily="49" charset="-127"/>
+                <a:ea typeface="D2Coding" panose="020B0609020101020101" pitchFamily="49" charset="-127"/>
+              </a:rPr>
+              <a:t>X_train</a:t>
+            </a:r>
+            <a:r>
+              <a:rPr lang="en-US" altLang="ko-KR" sz="1500" dirty="0">
+                <a:solidFill>
+                  <a:schemeClr val="bg1"/>
+                </a:solidFill>
+                <a:latin typeface="D2Coding" panose="020B0609020101020101" pitchFamily="49" charset="-127"/>
+                <a:ea typeface="D2Coding" panose="020B0609020101020101" pitchFamily="49" charset="-127"/>
+              </a:rPr>
+              <a:t>, </a:t>
+            </a:r>
+            <a:r>
+              <a:rPr lang="en-US" altLang="ko-KR" sz="1500" dirty="0" err="1">
+                <a:solidFill>
+                  <a:schemeClr val="bg1"/>
+                </a:solidFill>
+                <a:latin typeface="D2Coding" panose="020B0609020101020101" pitchFamily="49" charset="-127"/>
+                <a:ea typeface="D2Coding" panose="020B0609020101020101" pitchFamily="49" charset="-127"/>
+              </a:rPr>
+              <a:t>X_test</a:t>
+            </a:r>
+            <a:r>
+              <a:rPr lang="en-US" altLang="ko-KR" sz="1500" dirty="0">
+                <a:solidFill>
+                  <a:schemeClr val="bg1"/>
+                </a:solidFill>
+                <a:latin typeface="D2Coding" panose="020B0609020101020101" pitchFamily="49" charset="-127"/>
+                <a:ea typeface="D2Coding" panose="020B0609020101020101" pitchFamily="49" charset="-127"/>
+              </a:rPr>
+              <a:t>, </a:t>
+            </a:r>
+            <a:r>
+              <a:rPr lang="en-US" altLang="ko-KR" sz="1500" dirty="0" err="1">
+                <a:solidFill>
+                  <a:schemeClr val="bg1"/>
+                </a:solidFill>
+                <a:latin typeface="D2Coding" panose="020B0609020101020101" pitchFamily="49" charset="-127"/>
+                <a:ea typeface="D2Coding" panose="020B0609020101020101" pitchFamily="49" charset="-127"/>
+              </a:rPr>
+              <a:t>y_train</a:t>
+            </a:r>
+            <a:r>
+              <a:rPr lang="en-US" altLang="ko-KR" sz="1500" dirty="0">
+                <a:solidFill>
+                  <a:schemeClr val="bg1"/>
+                </a:solidFill>
+                <a:latin typeface="D2Coding" panose="020B0609020101020101" pitchFamily="49" charset="-127"/>
+                <a:ea typeface="D2Coding" panose="020B0609020101020101" pitchFamily="49" charset="-127"/>
+              </a:rPr>
+              <a:t>, </a:t>
+            </a:r>
+            <a:r>
+              <a:rPr lang="en-US" altLang="ko-KR" sz="1500" dirty="0" err="1">
+                <a:solidFill>
+                  <a:schemeClr val="bg1"/>
+                </a:solidFill>
+                <a:latin typeface="D2Coding" panose="020B0609020101020101" pitchFamily="49" charset="-127"/>
+                <a:ea typeface="D2Coding" panose="020B0609020101020101" pitchFamily="49" charset="-127"/>
+              </a:rPr>
+              <a:t>y_test</a:t>
+            </a:r>
+            <a:r>
+              <a:rPr lang="en-US" altLang="ko-KR" sz="1500" dirty="0">
+                <a:solidFill>
+                  <a:schemeClr val="bg1"/>
+                </a:solidFill>
+                <a:latin typeface="D2Coding" panose="020B0609020101020101" pitchFamily="49" charset="-127"/>
+                <a:ea typeface="D2Coding" panose="020B0609020101020101" pitchFamily="49" charset="-127"/>
+              </a:rPr>
+              <a:t> = </a:t>
+            </a:r>
+            <a:r>
+              <a:rPr lang="en-US" altLang="ko-KR" sz="1500" dirty="0" err="1">
+                <a:solidFill>
+                  <a:schemeClr val="bg1"/>
+                </a:solidFill>
+                <a:latin typeface="D2Coding" panose="020B0609020101020101" pitchFamily="49" charset="-127"/>
+                <a:ea typeface="D2Coding" panose="020B0609020101020101" pitchFamily="49" charset="-127"/>
+              </a:rPr>
+              <a:t>train_test_split</a:t>
+            </a:r>
+            <a:r>
+              <a:rPr lang="en-US" altLang="ko-KR" sz="1500" dirty="0">
+                <a:solidFill>
+                  <a:schemeClr val="bg1"/>
+                </a:solidFill>
+                <a:latin typeface="D2Coding" panose="020B0609020101020101" pitchFamily="49" charset="-127"/>
+                <a:ea typeface="D2Coding" panose="020B0609020101020101" pitchFamily="49" charset="-127"/>
+              </a:rPr>
+              <a:t>(X, y, </a:t>
+            </a:r>
+            <a:r>
+              <a:rPr lang="en-US" altLang="ko-KR" sz="1500" dirty="0" err="1">
+                <a:solidFill>
+                  <a:schemeClr val="bg1"/>
+                </a:solidFill>
+                <a:latin typeface="D2Coding" panose="020B0609020101020101" pitchFamily="49" charset="-127"/>
+                <a:ea typeface="D2Coding" panose="020B0609020101020101" pitchFamily="49" charset="-127"/>
+              </a:rPr>
+              <a:t>test_size</a:t>
+            </a:r>
+            <a:r>
+              <a:rPr lang="en-US" altLang="ko-KR" sz="1500" dirty="0">
+                <a:solidFill>
+                  <a:schemeClr val="bg1"/>
+                </a:solidFill>
+                <a:latin typeface="D2Coding" panose="020B0609020101020101" pitchFamily="49" charset="-127"/>
+                <a:ea typeface="D2Coding" panose="020B0609020101020101" pitchFamily="49" charset="-127"/>
+              </a:rPr>
+              <a:t>=0.2, </a:t>
+            </a:r>
+            <a:r>
+              <a:rPr lang="en-US" altLang="ko-KR" sz="1500" dirty="0" err="1">
+                <a:solidFill>
+                  <a:schemeClr val="bg1"/>
+                </a:solidFill>
+                <a:latin typeface="D2Coding" panose="020B0609020101020101" pitchFamily="49" charset="-127"/>
+                <a:ea typeface="D2Coding" panose="020B0609020101020101" pitchFamily="49" charset="-127"/>
+              </a:rPr>
+              <a:t>random_state</a:t>
+            </a:r>
+            <a:r>
+              <a:rPr lang="en-US" altLang="ko-KR" sz="1500" dirty="0">
+                <a:solidFill>
+                  <a:schemeClr val="bg1"/>
+                </a:solidFill>
+                <a:latin typeface="D2Coding" panose="020B0609020101020101" pitchFamily="49" charset="-127"/>
+                <a:ea typeface="D2Coding" panose="020B0609020101020101" pitchFamily="49" charset="-127"/>
+              </a:rPr>
+              <a:t>=42)</a:t>
+            </a:r>
+          </a:p>
+          <a:p>
+            <a:endParaRPr lang="en-US" altLang="ko-KR" sz="1500" dirty="0">
+              <a:solidFill>
+                <a:schemeClr val="bg1"/>
+              </a:solidFill>
+              <a:latin typeface="D2Coding" panose="020B0609020101020101" pitchFamily="49" charset="-127"/>
+              <a:ea typeface="D2Coding" panose="020B0609020101020101" pitchFamily="49" charset="-127"/>
+            </a:endParaRPr>
+          </a:p>
+          <a:p>
+            <a:r>
+              <a:rPr lang="en-US" altLang="ko-KR" sz="1500" dirty="0" err="1">
+                <a:solidFill>
+                  <a:schemeClr val="bg1"/>
+                </a:solidFill>
+                <a:latin typeface="D2Coding" panose="020B0609020101020101" pitchFamily="49" charset="-127"/>
+                <a:ea typeface="D2Coding" panose="020B0609020101020101" pitchFamily="49" charset="-127"/>
+              </a:rPr>
+              <a:t>lr</a:t>
+            </a:r>
+            <a:r>
+              <a:rPr lang="en-US" altLang="ko-KR" sz="1500" dirty="0">
+                <a:solidFill>
+                  <a:schemeClr val="bg1"/>
+                </a:solidFill>
+                <a:latin typeface="D2Coding" panose="020B0609020101020101" pitchFamily="49" charset="-127"/>
+                <a:ea typeface="D2Coding" panose="020B0609020101020101" pitchFamily="49" charset="-127"/>
+              </a:rPr>
+              <a:t> = </a:t>
+            </a:r>
+            <a:r>
+              <a:rPr lang="en-US" altLang="ko-KR" sz="1500" dirty="0" err="1">
+                <a:solidFill>
+                  <a:schemeClr val="bg1"/>
+                </a:solidFill>
+                <a:latin typeface="D2Coding" panose="020B0609020101020101" pitchFamily="49" charset="-127"/>
+                <a:ea typeface="D2Coding" panose="020B0609020101020101" pitchFamily="49" charset="-127"/>
+              </a:rPr>
+              <a:t>LinearRegression</a:t>
+            </a:r>
+            <a:r>
+              <a:rPr lang="en-US" altLang="ko-KR" sz="1500" dirty="0">
+                <a:solidFill>
+                  <a:schemeClr val="bg1"/>
+                </a:solidFill>
+                <a:latin typeface="D2Coding" panose="020B0609020101020101" pitchFamily="49" charset="-127"/>
+                <a:ea typeface="D2Coding" panose="020B0609020101020101" pitchFamily="49" charset="-127"/>
+              </a:rPr>
+              <a:t>()</a:t>
+            </a:r>
+          </a:p>
+          <a:p>
+            <a:r>
+              <a:rPr lang="en-US" altLang="ko-KR" sz="1500" dirty="0" err="1">
+                <a:solidFill>
+                  <a:schemeClr val="bg1"/>
+                </a:solidFill>
+                <a:latin typeface="D2Coding" panose="020B0609020101020101" pitchFamily="49" charset="-127"/>
+                <a:ea typeface="D2Coding" panose="020B0609020101020101" pitchFamily="49" charset="-127"/>
+              </a:rPr>
+              <a:t>lr.fit</a:t>
+            </a:r>
+            <a:r>
+              <a:rPr lang="en-US" altLang="ko-KR" sz="1500" dirty="0">
+                <a:solidFill>
+                  <a:schemeClr val="bg1"/>
+                </a:solidFill>
+                <a:latin typeface="D2Coding" panose="020B0609020101020101" pitchFamily="49" charset="-127"/>
+                <a:ea typeface="D2Coding" panose="020B0609020101020101" pitchFamily="49" charset="-127"/>
+              </a:rPr>
+              <a:t>(</a:t>
+            </a:r>
+            <a:r>
+              <a:rPr lang="en-US" altLang="ko-KR" sz="1500" dirty="0" err="1">
+                <a:solidFill>
+                  <a:schemeClr val="bg1"/>
+                </a:solidFill>
+                <a:latin typeface="D2Coding" panose="020B0609020101020101" pitchFamily="49" charset="-127"/>
+                <a:ea typeface="D2Coding" panose="020B0609020101020101" pitchFamily="49" charset="-127"/>
+              </a:rPr>
+              <a:t>X_train</a:t>
+            </a:r>
+            <a:r>
+              <a:rPr lang="en-US" altLang="ko-KR" sz="1500" dirty="0">
+                <a:solidFill>
+                  <a:schemeClr val="bg1"/>
+                </a:solidFill>
+                <a:latin typeface="D2Coding" panose="020B0609020101020101" pitchFamily="49" charset="-127"/>
+                <a:ea typeface="D2Coding" panose="020B0609020101020101" pitchFamily="49" charset="-127"/>
+              </a:rPr>
+              <a:t>, </a:t>
+            </a:r>
+            <a:r>
+              <a:rPr lang="en-US" altLang="ko-KR" sz="1500" dirty="0" err="1">
+                <a:solidFill>
+                  <a:schemeClr val="bg1"/>
+                </a:solidFill>
+                <a:latin typeface="D2Coding" panose="020B0609020101020101" pitchFamily="49" charset="-127"/>
+                <a:ea typeface="D2Coding" panose="020B0609020101020101" pitchFamily="49" charset="-127"/>
+              </a:rPr>
+              <a:t>y_train</a:t>
+            </a:r>
+            <a:r>
+              <a:rPr lang="en-US" altLang="ko-KR" sz="1500" dirty="0">
+                <a:solidFill>
+                  <a:schemeClr val="bg1"/>
+                </a:solidFill>
+                <a:latin typeface="D2Coding" panose="020B0609020101020101" pitchFamily="49" charset="-127"/>
+                <a:ea typeface="D2Coding" panose="020B0609020101020101" pitchFamily="49" charset="-127"/>
+              </a:rPr>
+              <a:t>)</a:t>
+            </a:r>
+          </a:p>
+          <a:p>
+            <a:r>
+              <a:rPr lang="en-US" altLang="ko-KR" sz="1500" dirty="0" err="1">
+                <a:solidFill>
+                  <a:schemeClr val="bg1"/>
+                </a:solidFill>
+                <a:latin typeface="D2Coding" panose="020B0609020101020101" pitchFamily="49" charset="-127"/>
+                <a:ea typeface="D2Coding" panose="020B0609020101020101" pitchFamily="49" charset="-127"/>
+              </a:rPr>
+              <a:t>sk_coef</a:t>
+            </a:r>
+            <a:r>
+              <a:rPr lang="en-US" altLang="ko-KR" sz="1500" dirty="0">
+                <a:solidFill>
+                  <a:schemeClr val="bg1"/>
+                </a:solidFill>
+                <a:latin typeface="D2Coding" panose="020B0609020101020101" pitchFamily="49" charset="-127"/>
+                <a:ea typeface="D2Coding" panose="020B0609020101020101" pitchFamily="49" charset="-127"/>
+              </a:rPr>
+              <a:t> = </a:t>
+            </a:r>
+            <a:r>
+              <a:rPr lang="en-US" altLang="ko-KR" sz="1500" dirty="0" err="1">
+                <a:solidFill>
+                  <a:schemeClr val="bg1"/>
+                </a:solidFill>
+                <a:latin typeface="D2Coding" panose="020B0609020101020101" pitchFamily="49" charset="-127"/>
+                <a:ea typeface="D2Coding" panose="020B0609020101020101" pitchFamily="49" charset="-127"/>
+              </a:rPr>
+              <a:t>np.insert</a:t>
+            </a:r>
+            <a:r>
+              <a:rPr lang="en-US" altLang="ko-KR" sz="1500" dirty="0">
+                <a:solidFill>
+                  <a:schemeClr val="bg1"/>
+                </a:solidFill>
+                <a:latin typeface="D2Coding" panose="020B0609020101020101" pitchFamily="49" charset="-127"/>
+                <a:ea typeface="D2Coding" panose="020B0609020101020101" pitchFamily="49" charset="-127"/>
+              </a:rPr>
+              <a:t>(</a:t>
+            </a:r>
+            <a:r>
+              <a:rPr lang="en-US" altLang="ko-KR" sz="1500" dirty="0" err="1">
+                <a:solidFill>
+                  <a:schemeClr val="bg1"/>
+                </a:solidFill>
+                <a:latin typeface="D2Coding" panose="020B0609020101020101" pitchFamily="49" charset="-127"/>
+                <a:ea typeface="D2Coding" panose="020B0609020101020101" pitchFamily="49" charset="-127"/>
+              </a:rPr>
+              <a:t>lr.coef</a:t>
+            </a:r>
+            <a:r>
+              <a:rPr lang="en-US" altLang="ko-KR" sz="1500" dirty="0">
+                <a:solidFill>
+                  <a:schemeClr val="bg1"/>
+                </a:solidFill>
+                <a:latin typeface="D2Coding" panose="020B0609020101020101" pitchFamily="49" charset="-127"/>
+                <a:ea typeface="D2Coding" panose="020B0609020101020101" pitchFamily="49" charset="-127"/>
+              </a:rPr>
+              <a:t>_, 0, </a:t>
+            </a:r>
+            <a:r>
+              <a:rPr lang="en-US" altLang="ko-KR" sz="1500" dirty="0" err="1">
+                <a:solidFill>
+                  <a:schemeClr val="bg1"/>
+                </a:solidFill>
+                <a:latin typeface="D2Coding" panose="020B0609020101020101" pitchFamily="49" charset="-127"/>
+                <a:ea typeface="D2Coding" panose="020B0609020101020101" pitchFamily="49" charset="-127"/>
+              </a:rPr>
+              <a:t>lr.intercept</a:t>
+            </a:r>
+            <a:r>
+              <a:rPr lang="en-US" altLang="ko-KR" sz="1500" dirty="0">
+                <a:solidFill>
+                  <a:schemeClr val="bg1"/>
+                </a:solidFill>
+                <a:latin typeface="D2Coding" panose="020B0609020101020101" pitchFamily="49" charset="-127"/>
+                <a:ea typeface="D2Coding" panose="020B0609020101020101" pitchFamily="49" charset="-127"/>
+              </a:rPr>
+              <a:t>_)</a:t>
+            </a:r>
+          </a:p>
+          <a:p>
+            <a:endParaRPr lang="en-US" altLang="ko-KR" sz="1500" dirty="0">
+              <a:solidFill>
+                <a:schemeClr val="bg1"/>
+              </a:solidFill>
+              <a:latin typeface="D2Coding" panose="020B0609020101020101" pitchFamily="49" charset="-127"/>
+              <a:ea typeface="D2Coding" panose="020B0609020101020101" pitchFamily="49" charset="-127"/>
+            </a:endParaRPr>
+          </a:p>
+          <a:p>
+            <a:r>
+              <a:rPr lang="en-US" altLang="ko-KR" sz="1500" dirty="0" err="1">
+                <a:solidFill>
+                  <a:schemeClr val="bg1"/>
+                </a:solidFill>
+                <a:latin typeface="D2Coding" panose="020B0609020101020101" pitchFamily="49" charset="-127"/>
+                <a:ea typeface="D2Coding" panose="020B0609020101020101" pitchFamily="49" charset="-127"/>
+              </a:rPr>
+              <a:t>X_train_bias</a:t>
+            </a:r>
+            <a:r>
+              <a:rPr lang="en-US" altLang="ko-KR" sz="1500" dirty="0">
+                <a:solidFill>
+                  <a:schemeClr val="bg1"/>
+                </a:solidFill>
+                <a:latin typeface="D2Coding" panose="020B0609020101020101" pitchFamily="49" charset="-127"/>
+                <a:ea typeface="D2Coding" panose="020B0609020101020101" pitchFamily="49" charset="-127"/>
+              </a:rPr>
+              <a:t> = </a:t>
+            </a:r>
+            <a:r>
+              <a:rPr lang="en-US" altLang="ko-KR" sz="1500" dirty="0" err="1">
+                <a:solidFill>
+                  <a:schemeClr val="bg1"/>
+                </a:solidFill>
+                <a:latin typeface="D2Coding" panose="020B0609020101020101" pitchFamily="49" charset="-127"/>
+                <a:ea typeface="D2Coding" panose="020B0609020101020101" pitchFamily="49" charset="-127"/>
+              </a:rPr>
+              <a:t>np.c</a:t>
+            </a:r>
+            <a:r>
+              <a:rPr lang="en-US" altLang="ko-KR" sz="1500" dirty="0">
+                <a:solidFill>
+                  <a:schemeClr val="bg1"/>
+                </a:solidFill>
+                <a:latin typeface="D2Coding" panose="020B0609020101020101" pitchFamily="49" charset="-127"/>
+                <a:ea typeface="D2Coding" panose="020B0609020101020101" pitchFamily="49" charset="-127"/>
+              </a:rPr>
+              <a:t>_[</a:t>
+            </a:r>
+            <a:r>
+              <a:rPr lang="en-US" altLang="ko-KR" sz="1500" dirty="0" err="1">
+                <a:solidFill>
+                  <a:schemeClr val="bg1"/>
+                </a:solidFill>
+                <a:latin typeface="D2Coding" panose="020B0609020101020101" pitchFamily="49" charset="-127"/>
+                <a:ea typeface="D2Coding" panose="020B0609020101020101" pitchFamily="49" charset="-127"/>
+              </a:rPr>
+              <a:t>np.ones</a:t>
+            </a:r>
+            <a:r>
+              <a:rPr lang="en-US" altLang="ko-KR" sz="1500" dirty="0">
+                <a:solidFill>
+                  <a:schemeClr val="bg1"/>
+                </a:solidFill>
+                <a:latin typeface="D2Coding" panose="020B0609020101020101" pitchFamily="49" charset="-127"/>
+                <a:ea typeface="D2Coding" panose="020B0609020101020101" pitchFamily="49" charset="-127"/>
+              </a:rPr>
+              <a:t>((</a:t>
+            </a:r>
+            <a:r>
+              <a:rPr lang="en-US" altLang="ko-KR" sz="1500" dirty="0" err="1">
+                <a:solidFill>
+                  <a:schemeClr val="bg1"/>
+                </a:solidFill>
+                <a:latin typeface="D2Coding" panose="020B0609020101020101" pitchFamily="49" charset="-127"/>
+                <a:ea typeface="D2Coding" panose="020B0609020101020101" pitchFamily="49" charset="-127"/>
+              </a:rPr>
+              <a:t>X_train.shape</a:t>
+            </a:r>
+            <a:r>
+              <a:rPr lang="en-US" altLang="ko-KR" sz="1500" dirty="0">
+                <a:solidFill>
+                  <a:schemeClr val="bg1"/>
+                </a:solidFill>
+                <a:latin typeface="D2Coding" panose="020B0609020101020101" pitchFamily="49" charset="-127"/>
+                <a:ea typeface="D2Coding" panose="020B0609020101020101" pitchFamily="49" charset="-127"/>
+              </a:rPr>
+              <a:t>[0], 1)), </a:t>
+            </a:r>
+            <a:r>
+              <a:rPr lang="en-US" altLang="ko-KR" sz="1500" dirty="0" err="1">
+                <a:solidFill>
+                  <a:schemeClr val="bg1"/>
+                </a:solidFill>
+                <a:latin typeface="D2Coding" panose="020B0609020101020101" pitchFamily="49" charset="-127"/>
+                <a:ea typeface="D2Coding" panose="020B0609020101020101" pitchFamily="49" charset="-127"/>
+              </a:rPr>
+              <a:t>X_train</a:t>
+            </a:r>
+            <a:r>
+              <a:rPr lang="en-US" altLang="ko-KR" sz="1500" dirty="0">
+                <a:solidFill>
+                  <a:schemeClr val="bg1"/>
+                </a:solidFill>
+                <a:latin typeface="D2Coding" panose="020B0609020101020101" pitchFamily="49" charset="-127"/>
+                <a:ea typeface="D2Coding" panose="020B0609020101020101" pitchFamily="49" charset="-127"/>
+              </a:rPr>
+              <a:t>]</a:t>
+            </a:r>
+          </a:p>
+          <a:p>
+            <a:r>
+              <a:rPr lang="en-US" altLang="ko-KR" sz="1500" dirty="0">
+                <a:solidFill>
+                  <a:schemeClr val="bg1"/>
+                </a:solidFill>
+                <a:latin typeface="D2Coding" panose="020B0609020101020101" pitchFamily="49" charset="-127"/>
+                <a:ea typeface="D2Coding" panose="020B0609020101020101" pitchFamily="49" charset="-127"/>
+              </a:rPr>
+              <a:t>results = </a:t>
+            </a:r>
+            <a:r>
+              <a:rPr lang="en-US" altLang="ko-KR" sz="1500" dirty="0" err="1">
+                <a:solidFill>
+                  <a:schemeClr val="bg1"/>
+                </a:solidFill>
+                <a:latin typeface="D2Coding" panose="020B0609020101020101" pitchFamily="49" charset="-127"/>
+                <a:ea typeface="D2Coding" panose="020B0609020101020101" pitchFamily="49" charset="-127"/>
+              </a:rPr>
+              <a:t>sm.OLS</a:t>
+            </a:r>
+            <a:r>
+              <a:rPr lang="en-US" altLang="ko-KR" sz="1500" dirty="0">
+                <a:solidFill>
+                  <a:schemeClr val="bg1"/>
+                </a:solidFill>
+                <a:latin typeface="D2Coding" panose="020B0609020101020101" pitchFamily="49" charset="-127"/>
+                <a:ea typeface="D2Coding" panose="020B0609020101020101" pitchFamily="49" charset="-127"/>
+              </a:rPr>
+              <a:t>(</a:t>
+            </a:r>
+            <a:r>
+              <a:rPr lang="en-US" altLang="ko-KR" sz="1500" dirty="0" err="1">
+                <a:solidFill>
+                  <a:schemeClr val="bg1"/>
+                </a:solidFill>
+                <a:latin typeface="D2Coding" panose="020B0609020101020101" pitchFamily="49" charset="-127"/>
+                <a:ea typeface="D2Coding" panose="020B0609020101020101" pitchFamily="49" charset="-127"/>
+              </a:rPr>
+              <a:t>y_train</a:t>
+            </a:r>
+            <a:r>
+              <a:rPr lang="en-US" altLang="ko-KR" sz="1500" dirty="0">
+                <a:solidFill>
+                  <a:schemeClr val="bg1"/>
+                </a:solidFill>
+                <a:latin typeface="D2Coding" panose="020B0609020101020101" pitchFamily="49" charset="-127"/>
+                <a:ea typeface="D2Coding" panose="020B0609020101020101" pitchFamily="49" charset="-127"/>
+              </a:rPr>
+              <a:t>, </a:t>
+            </a:r>
+            <a:r>
+              <a:rPr lang="en-US" altLang="ko-KR" sz="1500" dirty="0" err="1">
+                <a:solidFill>
+                  <a:schemeClr val="bg1"/>
+                </a:solidFill>
+                <a:latin typeface="D2Coding" panose="020B0609020101020101" pitchFamily="49" charset="-127"/>
+                <a:ea typeface="D2Coding" panose="020B0609020101020101" pitchFamily="49" charset="-127"/>
+              </a:rPr>
+              <a:t>X_train_bias</a:t>
+            </a:r>
+            <a:r>
+              <a:rPr lang="en-US" altLang="ko-KR" sz="1500" dirty="0">
+                <a:solidFill>
+                  <a:schemeClr val="bg1"/>
+                </a:solidFill>
+                <a:latin typeface="D2Coding" panose="020B0609020101020101" pitchFamily="49" charset="-127"/>
+                <a:ea typeface="D2Coding" panose="020B0609020101020101" pitchFamily="49" charset="-127"/>
+              </a:rPr>
+              <a:t>).fit()</a:t>
+            </a:r>
+          </a:p>
+          <a:p>
+            <a:r>
+              <a:rPr lang="en-US" altLang="ko-KR" sz="1500" dirty="0">
+                <a:solidFill>
+                  <a:schemeClr val="bg1"/>
+                </a:solidFill>
+                <a:latin typeface="D2Coding" panose="020B0609020101020101" pitchFamily="49" charset="-127"/>
+                <a:ea typeface="D2Coding" panose="020B0609020101020101" pitchFamily="49" charset="-127"/>
+              </a:rPr>
+              <a:t>print(</a:t>
+            </a:r>
+            <a:r>
+              <a:rPr lang="en-US" altLang="ko-KR" sz="1500" dirty="0" err="1">
+                <a:solidFill>
+                  <a:schemeClr val="bg1"/>
+                </a:solidFill>
+                <a:latin typeface="D2Coding" panose="020B0609020101020101" pitchFamily="49" charset="-127"/>
+                <a:ea typeface="D2Coding" panose="020B0609020101020101" pitchFamily="49" charset="-127"/>
+              </a:rPr>
+              <a:t>results.summary</a:t>
+            </a:r>
+            <a:r>
+              <a:rPr lang="en-US" altLang="ko-KR" sz="1500" dirty="0">
+                <a:solidFill>
+                  <a:schemeClr val="bg1"/>
+                </a:solidFill>
+                <a:latin typeface="D2Coding" panose="020B0609020101020101" pitchFamily="49" charset="-127"/>
+                <a:ea typeface="D2Coding" panose="020B0609020101020101" pitchFamily="49" charset="-127"/>
+              </a:rPr>
+              <a:t>(</a:t>
+            </a:r>
+            <a:r>
+              <a:rPr lang="en-US" altLang="ko-KR" sz="1500" dirty="0" err="1">
+                <a:solidFill>
+                  <a:schemeClr val="bg1"/>
+                </a:solidFill>
+                <a:latin typeface="D2Coding" panose="020B0609020101020101" pitchFamily="49" charset="-127"/>
+                <a:ea typeface="D2Coding" panose="020B0609020101020101" pitchFamily="49" charset="-127"/>
+              </a:rPr>
+              <a:t>xname</a:t>
+            </a:r>
+            <a:r>
+              <a:rPr lang="en-US" altLang="ko-KR" sz="1500" dirty="0">
+                <a:solidFill>
+                  <a:schemeClr val="bg1"/>
+                </a:solidFill>
+                <a:latin typeface="D2Coding" panose="020B0609020101020101" pitchFamily="49" charset="-127"/>
+                <a:ea typeface="D2Coding" panose="020B0609020101020101" pitchFamily="49" charset="-127"/>
+              </a:rPr>
+              <a:t>=['Intercept'] + </a:t>
+            </a:r>
+            <a:r>
+              <a:rPr lang="en-US" altLang="ko-KR" sz="1500" dirty="0" err="1">
+                <a:solidFill>
+                  <a:schemeClr val="bg1"/>
+                </a:solidFill>
+                <a:latin typeface="D2Coding" panose="020B0609020101020101" pitchFamily="49" charset="-127"/>
+                <a:ea typeface="D2Coding" panose="020B0609020101020101" pitchFamily="49" charset="-127"/>
+              </a:rPr>
+              <a:t>feature_names</a:t>
+            </a:r>
+            <a:r>
+              <a:rPr lang="en-US" altLang="ko-KR" sz="1500" dirty="0">
+                <a:solidFill>
+                  <a:schemeClr val="bg1"/>
+                </a:solidFill>
+                <a:latin typeface="D2Coding" panose="020B0609020101020101" pitchFamily="49" charset="-127"/>
+                <a:ea typeface="D2Coding" panose="020B0609020101020101" pitchFamily="49" charset="-127"/>
+              </a:rPr>
+              <a:t>))</a:t>
+            </a:r>
+          </a:p>
+          <a:p>
+            <a:endParaRPr lang="en-US" altLang="ko-KR" sz="1500" dirty="0">
+              <a:solidFill>
+                <a:schemeClr val="bg1"/>
+              </a:solidFill>
+              <a:latin typeface="D2Coding" panose="020B0609020101020101" pitchFamily="49" charset="-127"/>
+              <a:ea typeface="D2Coding" panose="020B0609020101020101" pitchFamily="49" charset="-127"/>
+            </a:endParaRPr>
+          </a:p>
+          <a:p>
+            <a:r>
+              <a:rPr lang="en-US" altLang="ko-KR" sz="1500" dirty="0" err="1">
+                <a:solidFill>
+                  <a:schemeClr val="bg1"/>
+                </a:solidFill>
+                <a:latin typeface="D2Coding" panose="020B0609020101020101" pitchFamily="49" charset="-127"/>
+                <a:ea typeface="D2Coding" panose="020B0609020101020101" pitchFamily="49" charset="-127"/>
+              </a:rPr>
+              <a:t>beta_hat</a:t>
+            </a:r>
+            <a:r>
+              <a:rPr lang="en-US" altLang="ko-KR" sz="1500" dirty="0">
+                <a:solidFill>
+                  <a:schemeClr val="bg1"/>
+                </a:solidFill>
+                <a:latin typeface="D2Coding" panose="020B0609020101020101" pitchFamily="49" charset="-127"/>
+                <a:ea typeface="D2Coding" panose="020B0609020101020101" pitchFamily="49" charset="-127"/>
+              </a:rPr>
+              <a:t> = </a:t>
+            </a:r>
+            <a:r>
+              <a:rPr lang="en-US" altLang="ko-KR" sz="1500" dirty="0" err="1">
+                <a:solidFill>
+                  <a:schemeClr val="bg1"/>
+                </a:solidFill>
+                <a:latin typeface="D2Coding" panose="020B0609020101020101" pitchFamily="49" charset="-127"/>
+                <a:ea typeface="D2Coding" panose="020B0609020101020101" pitchFamily="49" charset="-127"/>
+              </a:rPr>
+              <a:t>np.linalg.inv</a:t>
+            </a:r>
+            <a:r>
+              <a:rPr lang="en-US" altLang="ko-KR" sz="1500" dirty="0">
+                <a:solidFill>
+                  <a:schemeClr val="bg1"/>
+                </a:solidFill>
+                <a:latin typeface="D2Coding" panose="020B0609020101020101" pitchFamily="49" charset="-127"/>
+                <a:ea typeface="D2Coding" panose="020B0609020101020101" pitchFamily="49" charset="-127"/>
+              </a:rPr>
+              <a:t>(</a:t>
+            </a:r>
+            <a:r>
+              <a:rPr lang="en-US" altLang="ko-KR" sz="1500" dirty="0" err="1">
+                <a:solidFill>
+                  <a:schemeClr val="bg1"/>
+                </a:solidFill>
+                <a:latin typeface="D2Coding" panose="020B0609020101020101" pitchFamily="49" charset="-127"/>
+                <a:ea typeface="D2Coding" panose="020B0609020101020101" pitchFamily="49" charset="-127"/>
+              </a:rPr>
+              <a:t>X_train_bias.T</a:t>
+            </a:r>
+            <a:r>
+              <a:rPr lang="en-US" altLang="ko-KR" sz="1500" dirty="0">
+                <a:solidFill>
+                  <a:schemeClr val="bg1"/>
+                </a:solidFill>
+                <a:latin typeface="D2Coding" panose="020B0609020101020101" pitchFamily="49" charset="-127"/>
+                <a:ea typeface="D2Coding" panose="020B0609020101020101" pitchFamily="49" charset="-127"/>
+              </a:rPr>
+              <a:t> @ </a:t>
+            </a:r>
+            <a:r>
+              <a:rPr lang="en-US" altLang="ko-KR" sz="1500" dirty="0" err="1">
+                <a:solidFill>
+                  <a:schemeClr val="bg1"/>
+                </a:solidFill>
+                <a:latin typeface="D2Coding" panose="020B0609020101020101" pitchFamily="49" charset="-127"/>
+                <a:ea typeface="D2Coding" panose="020B0609020101020101" pitchFamily="49" charset="-127"/>
+              </a:rPr>
+              <a:t>X_train_bias</a:t>
+            </a:r>
+            <a:r>
+              <a:rPr lang="en-US" altLang="ko-KR" sz="1500" dirty="0">
+                <a:solidFill>
+                  <a:schemeClr val="bg1"/>
+                </a:solidFill>
+                <a:latin typeface="D2Coding" panose="020B0609020101020101" pitchFamily="49" charset="-127"/>
+                <a:ea typeface="D2Coding" panose="020B0609020101020101" pitchFamily="49" charset="-127"/>
+              </a:rPr>
+              <a:t>) @ </a:t>
+            </a:r>
+            <a:r>
+              <a:rPr lang="en-US" altLang="ko-KR" sz="1500" dirty="0" err="1">
+                <a:solidFill>
+                  <a:schemeClr val="bg1"/>
+                </a:solidFill>
+                <a:latin typeface="D2Coding" panose="020B0609020101020101" pitchFamily="49" charset="-127"/>
+                <a:ea typeface="D2Coding" panose="020B0609020101020101" pitchFamily="49" charset="-127"/>
+              </a:rPr>
+              <a:t>X_train_bias.T</a:t>
+            </a:r>
+            <a:r>
+              <a:rPr lang="en-US" altLang="ko-KR" sz="1500" dirty="0">
+                <a:solidFill>
+                  <a:schemeClr val="bg1"/>
+                </a:solidFill>
+                <a:latin typeface="D2Coding" panose="020B0609020101020101" pitchFamily="49" charset="-127"/>
+                <a:ea typeface="D2Coding" panose="020B0609020101020101" pitchFamily="49" charset="-127"/>
+              </a:rPr>
+              <a:t> @ </a:t>
+            </a:r>
+            <a:r>
+              <a:rPr lang="en-US" altLang="ko-KR" sz="1500" dirty="0" err="1">
+                <a:solidFill>
+                  <a:schemeClr val="bg1"/>
+                </a:solidFill>
+                <a:latin typeface="D2Coding" panose="020B0609020101020101" pitchFamily="49" charset="-127"/>
+                <a:ea typeface="D2Coding" panose="020B0609020101020101" pitchFamily="49" charset="-127"/>
+              </a:rPr>
+              <a:t>y_train</a:t>
+            </a:r>
+            <a:endParaRPr lang="en-US" altLang="ko-KR" sz="1500" dirty="0">
+              <a:solidFill>
+                <a:schemeClr val="bg1"/>
+              </a:solidFill>
+              <a:latin typeface="D2Coding" panose="020B0609020101020101" pitchFamily="49" charset="-127"/>
+              <a:ea typeface="D2Coding" panose="020B0609020101020101" pitchFamily="49" charset="-127"/>
+            </a:endParaRPr>
+          </a:p>
+          <a:p>
+            <a:endParaRPr lang="en-US" altLang="ko-KR" sz="1500" dirty="0">
+              <a:solidFill>
+                <a:schemeClr val="bg1"/>
+              </a:solidFill>
+              <a:latin typeface="D2Coding" panose="020B0609020101020101" pitchFamily="49" charset="-127"/>
+              <a:ea typeface="D2Coding" panose="020B0609020101020101" pitchFamily="49" charset="-127"/>
+            </a:endParaRPr>
+          </a:p>
+          <a:p>
+            <a:r>
+              <a:rPr lang="en-US" altLang="ko-KR" sz="1500" dirty="0" err="1">
+                <a:solidFill>
+                  <a:schemeClr val="bg1"/>
+                </a:solidFill>
+                <a:latin typeface="D2Coding" panose="020B0609020101020101" pitchFamily="49" charset="-127"/>
+                <a:ea typeface="D2Coding" panose="020B0609020101020101" pitchFamily="49" charset="-127"/>
+              </a:rPr>
+              <a:t>df</a:t>
+            </a:r>
+            <a:r>
+              <a:rPr lang="en-US" altLang="ko-KR" sz="1500" dirty="0">
+                <a:solidFill>
+                  <a:schemeClr val="bg1"/>
+                </a:solidFill>
+                <a:latin typeface="D2Coding" panose="020B0609020101020101" pitchFamily="49" charset="-127"/>
+                <a:ea typeface="D2Coding" panose="020B0609020101020101" pitchFamily="49" charset="-127"/>
+              </a:rPr>
+              <a:t> = </a:t>
+            </a:r>
+            <a:r>
+              <a:rPr lang="en-US" altLang="ko-KR" sz="1500" dirty="0" err="1">
+                <a:solidFill>
+                  <a:schemeClr val="bg1"/>
+                </a:solidFill>
+                <a:latin typeface="D2Coding" panose="020B0609020101020101" pitchFamily="49" charset="-127"/>
+                <a:ea typeface="D2Coding" panose="020B0609020101020101" pitchFamily="49" charset="-127"/>
+              </a:rPr>
+              <a:t>pd.DataFrame</a:t>
+            </a:r>
+            <a:r>
+              <a:rPr lang="en-US" altLang="ko-KR" sz="1500" dirty="0">
+                <a:solidFill>
+                  <a:schemeClr val="bg1"/>
+                </a:solidFill>
+                <a:latin typeface="D2Coding" panose="020B0609020101020101" pitchFamily="49" charset="-127"/>
+                <a:ea typeface="D2Coding" panose="020B0609020101020101" pitchFamily="49" charset="-127"/>
+              </a:rPr>
+              <a:t>({'Feature': ['Intercept'] + </a:t>
+            </a:r>
+            <a:r>
+              <a:rPr lang="en-US" altLang="ko-KR" sz="1500" dirty="0" err="1">
+                <a:solidFill>
+                  <a:schemeClr val="bg1"/>
+                </a:solidFill>
+                <a:latin typeface="D2Coding" panose="020B0609020101020101" pitchFamily="49" charset="-127"/>
+                <a:ea typeface="D2Coding" panose="020B0609020101020101" pitchFamily="49" charset="-127"/>
+              </a:rPr>
+              <a:t>feature_names</a:t>
+            </a:r>
+            <a:r>
+              <a:rPr lang="en-US" altLang="ko-KR" sz="1500" dirty="0">
+                <a:solidFill>
+                  <a:schemeClr val="bg1"/>
+                </a:solidFill>
+                <a:latin typeface="D2Coding" panose="020B0609020101020101" pitchFamily="49" charset="-127"/>
+                <a:ea typeface="D2Coding" panose="020B0609020101020101" pitchFamily="49" charset="-127"/>
+              </a:rPr>
+              <a:t>, '</a:t>
+            </a:r>
+            <a:r>
+              <a:rPr lang="ko-KR" altLang="en-US" sz="1500" dirty="0">
+                <a:solidFill>
+                  <a:schemeClr val="bg1"/>
+                </a:solidFill>
+                <a:latin typeface="D2Coding" panose="020B0609020101020101" pitchFamily="49" charset="-127"/>
+                <a:ea typeface="D2Coding" panose="020B0609020101020101" pitchFamily="49" charset="-127"/>
+              </a:rPr>
+              <a:t>정규 방정식</a:t>
+            </a:r>
+            <a:r>
+              <a:rPr lang="en-US" altLang="ko-KR" sz="1500" dirty="0">
+                <a:solidFill>
+                  <a:schemeClr val="bg1"/>
+                </a:solidFill>
+                <a:latin typeface="D2Coding" panose="020B0609020101020101" pitchFamily="49" charset="-127"/>
+                <a:ea typeface="D2Coding" panose="020B0609020101020101" pitchFamily="49" charset="-127"/>
+              </a:rPr>
+              <a:t>':</a:t>
+            </a:r>
+            <a:r>
+              <a:rPr lang="ko-KR" altLang="en-US" sz="1500" dirty="0">
+                <a:solidFill>
+                  <a:schemeClr val="bg1"/>
+                </a:solidFill>
+                <a:latin typeface="D2Coding" panose="020B0609020101020101" pitchFamily="49" charset="-127"/>
+                <a:ea typeface="D2Coding" panose="020B0609020101020101" pitchFamily="49" charset="-127"/>
+              </a:rPr>
+              <a:t> </a:t>
+            </a:r>
+            <a:r>
+              <a:rPr lang="en-US" altLang="ko-KR" sz="1500" dirty="0" err="1">
+                <a:solidFill>
+                  <a:schemeClr val="bg1"/>
+                </a:solidFill>
+                <a:latin typeface="D2Coding" panose="020B0609020101020101" pitchFamily="49" charset="-127"/>
+                <a:ea typeface="D2Coding" panose="020B0609020101020101" pitchFamily="49" charset="-127"/>
+              </a:rPr>
+              <a:t>beta_hat</a:t>
+            </a:r>
+            <a:r>
+              <a:rPr lang="en-US" altLang="ko-KR" sz="1500" dirty="0">
+                <a:solidFill>
+                  <a:schemeClr val="bg1"/>
+                </a:solidFill>
+                <a:latin typeface="D2Coding" panose="020B0609020101020101" pitchFamily="49" charset="-127"/>
+                <a:ea typeface="D2Coding" panose="020B0609020101020101" pitchFamily="49" charset="-127"/>
+              </a:rPr>
+              <a:t>, '</a:t>
+            </a:r>
+            <a:r>
+              <a:rPr lang="en-US" altLang="ko-KR" sz="1500" dirty="0" err="1">
+                <a:solidFill>
+                  <a:schemeClr val="bg1"/>
+                </a:solidFill>
+                <a:latin typeface="D2Coding" panose="020B0609020101020101" pitchFamily="49" charset="-127"/>
+                <a:ea typeface="D2Coding" panose="020B0609020101020101" pitchFamily="49" charset="-127"/>
+              </a:rPr>
+              <a:t>Sklearn</a:t>
+            </a:r>
+            <a:r>
+              <a:rPr lang="en-US" altLang="ko-KR" sz="1500" dirty="0">
+                <a:solidFill>
+                  <a:schemeClr val="bg1"/>
+                </a:solidFill>
+                <a:latin typeface="D2Coding" panose="020B0609020101020101" pitchFamily="49" charset="-127"/>
+                <a:ea typeface="D2Coding" panose="020B0609020101020101" pitchFamily="49" charset="-127"/>
+              </a:rPr>
+              <a:t>': </a:t>
+            </a:r>
+            <a:r>
+              <a:rPr lang="en-US" altLang="ko-KR" sz="1500" dirty="0" err="1">
+                <a:solidFill>
+                  <a:schemeClr val="bg1"/>
+                </a:solidFill>
+                <a:latin typeface="D2Coding" panose="020B0609020101020101" pitchFamily="49" charset="-127"/>
+                <a:ea typeface="D2Coding" panose="020B0609020101020101" pitchFamily="49" charset="-127"/>
+              </a:rPr>
+              <a:t>sk_coef</a:t>
+            </a:r>
+            <a:r>
+              <a:rPr lang="en-US" altLang="ko-KR" sz="1500" dirty="0">
+                <a:solidFill>
+                  <a:schemeClr val="bg1"/>
+                </a:solidFill>
+                <a:latin typeface="D2Coding" panose="020B0609020101020101" pitchFamily="49" charset="-127"/>
+                <a:ea typeface="D2Coding" panose="020B0609020101020101" pitchFamily="49" charset="-127"/>
+              </a:rPr>
+              <a:t>})</a:t>
+            </a:r>
+          </a:p>
+        </p:txBody>
+      </p:sp>
+      <p:pic>
+        <p:nvPicPr>
+          <p:cNvPr id="10" name="그림 9">
+            <a:extLst>
+              <a:ext uri="{FF2B5EF4-FFF2-40B4-BE49-F238E27FC236}">
+                <a16:creationId xmlns:a16="http://schemas.microsoft.com/office/drawing/2014/main" id="{0511E096-1FAC-C38C-D1F6-878AFA652007}"/>
+              </a:ext>
+            </a:extLst>
+          </p:cNvPr>
+          <p:cNvPicPr>
+            <a:picLocks noChangeAspect="1"/>
+          </p:cNvPicPr>
+          <p:nvPr/>
+        </p:nvPicPr>
+        <p:blipFill>
+          <a:blip r:embed="rId2"/>
+          <a:stretch>
+            <a:fillRect/>
+          </a:stretch>
+        </p:blipFill>
+        <p:spPr>
+          <a:xfrm>
+            <a:off x="9481005" y="5666620"/>
+            <a:ext cx="1557334" cy="438807"/>
+          </a:xfrm>
+          <a:prstGeom prst="rect">
+            <a:avLst/>
+          </a:prstGeom>
+          <a:ln w="28575">
+            <a:solidFill>
+              <a:srgbClr val="00B050"/>
+            </a:solidFill>
+          </a:ln>
+        </p:spPr>
+      </p:pic>
+      <p:sp>
+        <p:nvSpPr>
+          <p:cNvPr id="11" name="직사각형 10">
+            <a:extLst>
+              <a:ext uri="{FF2B5EF4-FFF2-40B4-BE49-F238E27FC236}">
+                <a16:creationId xmlns:a16="http://schemas.microsoft.com/office/drawing/2014/main" id="{34DACF2A-F3AC-276D-6B10-A239E42DF8EB}"/>
+              </a:ext>
+            </a:extLst>
+          </p:cNvPr>
+          <p:cNvSpPr/>
+          <p:nvPr/>
+        </p:nvSpPr>
+        <p:spPr>
+          <a:xfrm>
+            <a:off x="666750" y="3895724"/>
+            <a:ext cx="8610600" cy="766439"/>
+          </a:xfrm>
+          <a:prstGeom prst="rect">
+            <a:avLst/>
+          </a:prstGeom>
+          <a:noFill/>
+          <a:ln w="28575">
+            <a:solidFill>
+              <a:srgbClr val="FF0000"/>
+            </a:solidFill>
+          </a:ln>
+        </p:spPr>
+        <p:style>
+          <a:lnRef idx="2">
+            <a:schemeClr val="accent1">
+              <a:shade val="15000"/>
+            </a:schemeClr>
+          </a:lnRef>
+          <a:fillRef idx="1">
+            <a:schemeClr val="accent1"/>
+          </a:fillRef>
+          <a:effectRef idx="0">
+            <a:schemeClr val="accent1"/>
+          </a:effectRef>
+          <a:fontRef idx="minor">
+            <a:schemeClr val="lt1"/>
+          </a:fontRef>
+        </p:style>
+        <p:txBody>
+          <a:bodyPr rtlCol="0" anchor="ctr"/>
+          <a:lstStyle/>
+          <a:p>
+            <a:pPr algn="ctr"/>
+            <a:endParaRPr lang="ko-KR" altLang="en-US"/>
+          </a:p>
+        </p:txBody>
+      </p:sp>
+      <p:sp>
+        <p:nvSpPr>
+          <p:cNvPr id="12" name="직사각형 11">
+            <a:extLst>
+              <a:ext uri="{FF2B5EF4-FFF2-40B4-BE49-F238E27FC236}">
+                <a16:creationId xmlns:a16="http://schemas.microsoft.com/office/drawing/2014/main" id="{EC7A19D3-0152-5C07-0663-6AC650D0DAF9}"/>
+              </a:ext>
+            </a:extLst>
+          </p:cNvPr>
+          <p:cNvSpPr/>
+          <p:nvPr/>
+        </p:nvSpPr>
+        <p:spPr>
+          <a:xfrm>
+            <a:off x="666750" y="4791074"/>
+            <a:ext cx="8610600" cy="766439"/>
+          </a:xfrm>
+          <a:prstGeom prst="rect">
+            <a:avLst/>
+          </a:prstGeom>
+          <a:noFill/>
+          <a:ln w="28575">
+            <a:solidFill>
+              <a:srgbClr val="FFFF00"/>
+            </a:solidFill>
+          </a:ln>
+        </p:spPr>
+        <p:style>
+          <a:lnRef idx="2">
+            <a:schemeClr val="accent1">
+              <a:shade val="15000"/>
+            </a:schemeClr>
+          </a:lnRef>
+          <a:fillRef idx="1">
+            <a:schemeClr val="accent1"/>
+          </a:fillRef>
+          <a:effectRef idx="0">
+            <a:schemeClr val="accent1"/>
+          </a:effectRef>
+          <a:fontRef idx="minor">
+            <a:schemeClr val="lt1"/>
+          </a:fontRef>
+        </p:style>
+        <p:txBody>
+          <a:bodyPr rtlCol="0" anchor="ctr"/>
+          <a:lstStyle/>
+          <a:p>
+            <a:pPr algn="ctr"/>
+            <a:endParaRPr lang="ko-KR" altLang="en-US"/>
+          </a:p>
+        </p:txBody>
+      </p:sp>
+      <p:sp>
+        <p:nvSpPr>
+          <p:cNvPr id="13" name="직사각형 12">
+            <a:extLst>
+              <a:ext uri="{FF2B5EF4-FFF2-40B4-BE49-F238E27FC236}">
+                <a16:creationId xmlns:a16="http://schemas.microsoft.com/office/drawing/2014/main" id="{5AF85A64-1293-53D7-E18B-43F362D66343}"/>
+              </a:ext>
+            </a:extLst>
+          </p:cNvPr>
+          <p:cNvSpPr/>
+          <p:nvPr/>
+        </p:nvSpPr>
+        <p:spPr>
+          <a:xfrm>
+            <a:off x="666750" y="5657095"/>
+            <a:ext cx="8610600" cy="457858"/>
+          </a:xfrm>
+          <a:prstGeom prst="rect">
+            <a:avLst/>
+          </a:prstGeom>
+          <a:noFill/>
+          <a:ln w="28575">
+            <a:solidFill>
+              <a:srgbClr val="00B050"/>
+            </a:solidFill>
+          </a:ln>
+        </p:spPr>
+        <p:style>
+          <a:lnRef idx="2">
+            <a:schemeClr val="accent1">
+              <a:shade val="15000"/>
+            </a:schemeClr>
+          </a:lnRef>
+          <a:fillRef idx="1">
+            <a:schemeClr val="accent1"/>
+          </a:fillRef>
+          <a:effectRef idx="0">
+            <a:schemeClr val="accent1"/>
+          </a:effectRef>
+          <a:fontRef idx="minor">
+            <a:schemeClr val="lt1"/>
+          </a:fontRef>
+        </p:style>
+        <p:txBody>
+          <a:bodyPr rtlCol="0" anchor="ctr"/>
+          <a:lstStyle/>
+          <a:p>
+            <a:pPr algn="ctr"/>
+            <a:endParaRPr lang="ko-KR" altLang="en-US"/>
+          </a:p>
+        </p:txBody>
+      </p:sp>
+      <p:sp>
+        <p:nvSpPr>
+          <p:cNvPr id="18" name="직사각형 17">
+            <a:extLst>
+              <a:ext uri="{FF2B5EF4-FFF2-40B4-BE49-F238E27FC236}">
+                <a16:creationId xmlns:a16="http://schemas.microsoft.com/office/drawing/2014/main" id="{91ADA89B-7896-8D38-D27A-94A67FD3F725}"/>
+              </a:ext>
+            </a:extLst>
+          </p:cNvPr>
+          <p:cNvSpPr/>
+          <p:nvPr/>
+        </p:nvSpPr>
+        <p:spPr>
+          <a:xfrm>
+            <a:off x="627380" y="1643723"/>
+            <a:ext cx="8610600" cy="195473"/>
+          </a:xfrm>
+          <a:prstGeom prst="rect">
+            <a:avLst/>
+          </a:prstGeom>
+          <a:noFill/>
+          <a:ln w="28575">
+            <a:solidFill>
+              <a:srgbClr val="FF0000"/>
+            </a:solidFill>
+          </a:ln>
+        </p:spPr>
+        <p:style>
+          <a:lnRef idx="2">
+            <a:schemeClr val="accent1">
+              <a:shade val="15000"/>
+            </a:schemeClr>
+          </a:lnRef>
+          <a:fillRef idx="1">
+            <a:schemeClr val="accent1"/>
+          </a:fillRef>
+          <a:effectRef idx="0">
+            <a:schemeClr val="accent1"/>
+          </a:effectRef>
+          <a:fontRef idx="minor">
+            <a:schemeClr val="lt1"/>
+          </a:fontRef>
+        </p:style>
+        <p:txBody>
+          <a:bodyPr rtlCol="0" anchor="ctr"/>
+          <a:lstStyle/>
+          <a:p>
+            <a:pPr algn="ctr"/>
+            <a:endParaRPr lang="ko-KR" altLang="en-US"/>
+          </a:p>
+        </p:txBody>
+      </p:sp>
+      <p:sp>
+        <p:nvSpPr>
+          <p:cNvPr id="20" name="직사각형 19">
+            <a:extLst>
+              <a:ext uri="{FF2B5EF4-FFF2-40B4-BE49-F238E27FC236}">
+                <a16:creationId xmlns:a16="http://schemas.microsoft.com/office/drawing/2014/main" id="{1BA7B5E5-2514-7ABA-6369-6A0B0BF68B8F}"/>
+              </a:ext>
+            </a:extLst>
+          </p:cNvPr>
+          <p:cNvSpPr/>
+          <p:nvPr/>
+        </p:nvSpPr>
+        <p:spPr>
+          <a:xfrm>
+            <a:off x="627380" y="1873740"/>
+            <a:ext cx="8610600" cy="195473"/>
+          </a:xfrm>
+          <a:prstGeom prst="rect">
+            <a:avLst/>
+          </a:prstGeom>
+          <a:noFill/>
+          <a:ln w="28575">
+            <a:solidFill>
+              <a:srgbClr val="FFFF00"/>
+            </a:solidFill>
+          </a:ln>
+        </p:spPr>
+        <p:style>
+          <a:lnRef idx="2">
+            <a:schemeClr val="accent1">
+              <a:shade val="15000"/>
+            </a:schemeClr>
+          </a:lnRef>
+          <a:fillRef idx="1">
+            <a:schemeClr val="accent1"/>
+          </a:fillRef>
+          <a:effectRef idx="0">
+            <a:schemeClr val="accent1"/>
+          </a:effectRef>
+          <a:fontRef idx="minor">
+            <a:schemeClr val="lt1"/>
+          </a:fontRef>
+        </p:style>
+        <p:txBody>
+          <a:bodyPr rtlCol="0" anchor="ctr"/>
+          <a:lstStyle/>
+          <a:p>
+            <a:pPr algn="ctr"/>
+            <a:endParaRPr lang="ko-KR" altLang="en-US"/>
+          </a:p>
+        </p:txBody>
+      </p:sp>
+      <p:sp>
+        <p:nvSpPr>
+          <p:cNvPr id="21" name="직사각형 20">
+            <a:extLst>
+              <a:ext uri="{FF2B5EF4-FFF2-40B4-BE49-F238E27FC236}">
+                <a16:creationId xmlns:a16="http://schemas.microsoft.com/office/drawing/2014/main" id="{5C46D3C9-B628-D706-7DA8-A1956DCD6FB3}"/>
+              </a:ext>
+            </a:extLst>
+          </p:cNvPr>
+          <p:cNvSpPr/>
+          <p:nvPr/>
+        </p:nvSpPr>
+        <p:spPr>
+          <a:xfrm>
+            <a:off x="627380" y="2111113"/>
+            <a:ext cx="8610600" cy="195473"/>
+          </a:xfrm>
+          <a:prstGeom prst="rect">
+            <a:avLst/>
+          </a:prstGeom>
+          <a:noFill/>
+          <a:ln w="28575">
+            <a:solidFill>
+              <a:srgbClr val="00B050"/>
+            </a:solidFill>
+          </a:ln>
+        </p:spPr>
+        <p:style>
+          <a:lnRef idx="2">
+            <a:schemeClr val="accent1">
+              <a:shade val="15000"/>
+            </a:schemeClr>
+          </a:lnRef>
+          <a:fillRef idx="1">
+            <a:schemeClr val="accent1"/>
+          </a:fillRef>
+          <a:effectRef idx="0">
+            <a:schemeClr val="accent1"/>
+          </a:effectRef>
+          <a:fontRef idx="minor">
+            <a:schemeClr val="lt1"/>
+          </a:fontRef>
+        </p:style>
+        <p:txBody>
+          <a:bodyPr rtlCol="0" anchor="ctr"/>
+          <a:lstStyle/>
+          <a:p>
+            <a:pPr algn="ctr"/>
+            <a:endParaRPr lang="ko-KR" altLang="en-US"/>
+          </a:p>
+        </p:txBody>
+      </p:sp>
+      <p:sp>
+        <p:nvSpPr>
+          <p:cNvPr id="22" name="TextBox 21">
+            <a:extLst>
+              <a:ext uri="{FF2B5EF4-FFF2-40B4-BE49-F238E27FC236}">
+                <a16:creationId xmlns:a16="http://schemas.microsoft.com/office/drawing/2014/main" id="{74A99CD8-83C9-9A44-E48F-1843A01A2F01}"/>
+              </a:ext>
+            </a:extLst>
+          </p:cNvPr>
+          <p:cNvSpPr txBox="1"/>
+          <p:nvPr/>
+        </p:nvSpPr>
+        <p:spPr>
+          <a:xfrm>
+            <a:off x="9481005" y="4804961"/>
+            <a:ext cx="2139815" cy="738664"/>
+          </a:xfrm>
+          <a:prstGeom prst="rect">
+            <a:avLst/>
+          </a:prstGeom>
+          <a:noFill/>
+        </p:spPr>
+        <p:txBody>
+          <a:bodyPr wrap="square" rtlCol="0">
+            <a:spAutoFit/>
+          </a:bodyPr>
+          <a:lstStyle/>
+          <a:p>
+            <a:r>
+              <a:rPr lang="ko-KR" altLang="en-US" sz="1400" dirty="0" err="1">
+                <a:solidFill>
+                  <a:srgbClr val="FFFF00"/>
+                </a:solidFill>
+                <a:latin typeface="D2Coding" panose="020B0609020101020101" pitchFamily="49" charset="-127"/>
+                <a:ea typeface="D2Coding" panose="020B0609020101020101" pitchFamily="49" charset="-127"/>
+                <a:cs typeface="맑은 고딕 Semilight" panose="020B0502040204020203" pitchFamily="50" charset="-127"/>
+              </a:rPr>
+              <a:t>머신러닝은</a:t>
+            </a:r>
+            <a:r>
+              <a:rPr lang="ko-KR" altLang="en-US" sz="1400" dirty="0">
+                <a:solidFill>
+                  <a:srgbClr val="FFFF00"/>
+                </a:solidFill>
+                <a:latin typeface="D2Coding" panose="020B0609020101020101" pitchFamily="49" charset="-127"/>
+                <a:ea typeface="D2Coding" panose="020B0609020101020101" pitchFamily="49" charset="-127"/>
+                <a:cs typeface="맑은 고딕 Semilight" panose="020B0502040204020203" pitchFamily="50" charset="-127"/>
+              </a:rPr>
+              <a:t> 예측이 목적이지 통계적 의미는 별 관심이 없음</a:t>
+            </a:r>
+          </a:p>
+        </p:txBody>
+      </p:sp>
+    </p:spTree>
+    <p:extLst>
+      <p:ext uri="{BB962C8B-B14F-4D97-AF65-F5344CB8AC3E}">
+        <p14:creationId xmlns:p14="http://schemas.microsoft.com/office/powerpoint/2010/main" val="1325515738"/>
+      </p:ext>
+    </p:extLst>
+  </p:cSld>
+  <p:clrMapOvr>
+    <a:masterClrMapping/>
+  </p:clrMapOvr>
+  <p:timing>
+    <p:tnLst>
+      <p:par>
+        <p:cTn id="1" dur="indefinite" restart="never" nodeType="tmRoot">
+          <p:childTnLst>
+            <p:seq concurrent="1" nextAc="seek">
+              <p:cTn id="2" dur="indefinite" nodeType="mainSeq">
+                <p:childTnLst>
+                  <p:par>
+                    <p:cTn id="3" fill="hold">
+                      <p:stCondLst>
+                        <p:cond delay="indefinite"/>
+                      </p:stCondLst>
+                      <p:childTnLst>
+                        <p:par>
+                          <p:cTn id="4" fill="hold">
+                            <p:stCondLst>
+                              <p:cond delay="0"/>
+                            </p:stCondLst>
+                            <p:childTnLst>
+                              <p:par>
+                                <p:cTn id="5" presetID="1" presetClass="entr" presetSubtype="0" fill="hold" grpId="0" nodeType="clickEffect">
+                                  <p:stCondLst>
+                                    <p:cond delay="0"/>
+                                  </p:stCondLst>
+                                  <p:childTnLst>
+                                    <p:set>
+                                      <p:cBhvr>
+                                        <p:cTn id="6" dur="1" fill="hold">
+                                          <p:stCondLst>
+                                            <p:cond delay="0"/>
+                                          </p:stCondLst>
+                                        </p:cTn>
+                                        <p:tgtEl>
+                                          <p:spTgt spid="18"/>
+                                        </p:tgtEl>
+                                        <p:attrNameLst>
+                                          <p:attrName>style.visibility</p:attrName>
+                                        </p:attrNameLst>
+                                      </p:cBhvr>
+                                      <p:to>
+                                        <p:strVal val="visible"/>
+                                      </p:to>
+                                    </p:set>
+                                  </p:childTnLst>
+                                </p:cTn>
+                              </p:par>
+                              <p:par>
+                                <p:cTn id="7" presetID="1" presetClass="entr" presetSubtype="0" fill="hold" grpId="0" nodeType="withEffect">
+                                  <p:stCondLst>
+                                    <p:cond delay="0"/>
+                                  </p:stCondLst>
+                                  <p:childTnLst>
+                                    <p:set>
+                                      <p:cBhvr>
+                                        <p:cTn id="8" dur="1" fill="hold">
+                                          <p:stCondLst>
+                                            <p:cond delay="0"/>
+                                          </p:stCondLst>
+                                        </p:cTn>
+                                        <p:tgtEl>
+                                          <p:spTgt spid="11"/>
+                                        </p:tgtEl>
+                                        <p:attrNameLst>
+                                          <p:attrName>style.visibility</p:attrName>
+                                        </p:attrNameLst>
+                                      </p:cBhvr>
+                                      <p:to>
+                                        <p:strVal val="visible"/>
+                                      </p:to>
+                                    </p:set>
+                                  </p:childTnLst>
+                                </p:cTn>
+                              </p:par>
+                            </p:childTnLst>
+                          </p:cTn>
+                        </p:par>
+                      </p:childTnLst>
+                    </p:cTn>
+                  </p:par>
+                  <p:par>
+                    <p:cTn id="9" fill="hold">
+                      <p:stCondLst>
+                        <p:cond delay="indefinite"/>
+                      </p:stCondLst>
+                      <p:childTnLst>
+                        <p:par>
+                          <p:cTn id="10" fill="hold">
+                            <p:stCondLst>
+                              <p:cond delay="0"/>
+                            </p:stCondLst>
+                            <p:childTnLst>
+                              <p:par>
+                                <p:cTn id="11" presetID="1" presetClass="entr" presetSubtype="0" fill="hold" grpId="0" nodeType="clickEffect">
+                                  <p:stCondLst>
+                                    <p:cond delay="0"/>
+                                  </p:stCondLst>
+                                  <p:childTnLst>
+                                    <p:set>
+                                      <p:cBhvr>
+                                        <p:cTn id="12" dur="1" fill="hold">
+                                          <p:stCondLst>
+                                            <p:cond delay="0"/>
+                                          </p:stCondLst>
+                                        </p:cTn>
+                                        <p:tgtEl>
+                                          <p:spTgt spid="20"/>
+                                        </p:tgtEl>
+                                        <p:attrNameLst>
+                                          <p:attrName>style.visibility</p:attrName>
+                                        </p:attrNameLst>
+                                      </p:cBhvr>
+                                      <p:to>
+                                        <p:strVal val="visible"/>
+                                      </p:to>
+                                    </p:set>
+                                  </p:childTnLst>
+                                </p:cTn>
+                              </p:par>
+                              <p:par>
+                                <p:cTn id="13" presetID="1" presetClass="entr" presetSubtype="0" fill="hold" grpId="0" nodeType="withEffect">
+                                  <p:stCondLst>
+                                    <p:cond delay="0"/>
+                                  </p:stCondLst>
+                                  <p:childTnLst>
+                                    <p:set>
+                                      <p:cBhvr>
+                                        <p:cTn id="14" dur="1" fill="hold">
+                                          <p:stCondLst>
+                                            <p:cond delay="0"/>
+                                          </p:stCondLst>
+                                        </p:cTn>
+                                        <p:tgtEl>
+                                          <p:spTgt spid="12"/>
+                                        </p:tgtEl>
+                                        <p:attrNameLst>
+                                          <p:attrName>style.visibility</p:attrName>
+                                        </p:attrNameLst>
+                                      </p:cBhvr>
+                                      <p:to>
+                                        <p:strVal val="visible"/>
+                                      </p:to>
+                                    </p:set>
+                                  </p:childTnLst>
+                                </p:cTn>
+                              </p:par>
+                            </p:childTnLst>
+                          </p:cTn>
+                        </p:par>
+                      </p:childTnLst>
+                    </p:cTn>
+                  </p:par>
+                  <p:par>
+                    <p:cTn id="15" fill="hold">
+                      <p:stCondLst>
+                        <p:cond delay="indefinite"/>
+                      </p:stCondLst>
+                      <p:childTnLst>
+                        <p:par>
+                          <p:cTn id="16" fill="hold">
+                            <p:stCondLst>
+                              <p:cond delay="0"/>
+                            </p:stCondLst>
+                            <p:childTnLst>
+                              <p:par>
+                                <p:cTn id="17" presetID="1" presetClass="entr" presetSubtype="0" fill="hold" grpId="0" nodeType="clickEffect">
+                                  <p:stCondLst>
+                                    <p:cond delay="0"/>
+                                  </p:stCondLst>
+                                  <p:childTnLst>
+                                    <p:set>
+                                      <p:cBhvr>
+                                        <p:cTn id="18" dur="1" fill="hold">
+                                          <p:stCondLst>
+                                            <p:cond delay="0"/>
+                                          </p:stCondLst>
+                                        </p:cTn>
+                                        <p:tgtEl>
+                                          <p:spTgt spid="21"/>
+                                        </p:tgtEl>
+                                        <p:attrNameLst>
+                                          <p:attrName>style.visibility</p:attrName>
+                                        </p:attrNameLst>
+                                      </p:cBhvr>
+                                      <p:to>
+                                        <p:strVal val="visible"/>
+                                      </p:to>
+                                    </p:set>
+                                  </p:childTnLst>
+                                </p:cTn>
+                              </p:par>
+                              <p:par>
+                                <p:cTn id="19" presetID="1" presetClass="entr" presetSubtype="0" fill="hold" grpId="0" nodeType="withEffect">
+                                  <p:stCondLst>
+                                    <p:cond delay="0"/>
+                                  </p:stCondLst>
+                                  <p:childTnLst>
+                                    <p:set>
+                                      <p:cBhvr>
+                                        <p:cTn id="20" dur="1" fill="hold">
+                                          <p:stCondLst>
+                                            <p:cond delay="0"/>
+                                          </p:stCondLst>
+                                        </p:cTn>
+                                        <p:tgtEl>
+                                          <p:spTgt spid="13"/>
+                                        </p:tgtEl>
+                                        <p:attrNameLst>
+                                          <p:attrName>style.visibility</p:attrName>
+                                        </p:attrNameLst>
+                                      </p:cBhvr>
+                                      <p:to>
+                                        <p:strVal val="visible"/>
+                                      </p:to>
+                                    </p:set>
+                                  </p:childTnLst>
+                                </p:cTn>
+                              </p:par>
+                            </p:childTnLst>
+                          </p:cTn>
+                        </p:par>
+                      </p:childTnLst>
+                    </p:cTn>
+                  </p:par>
+                  <p:par>
+                    <p:cTn id="21" fill="hold">
+                      <p:stCondLst>
+                        <p:cond delay="indefinite"/>
+                      </p:stCondLst>
+                      <p:childTnLst>
+                        <p:par>
+                          <p:cTn id="22" fill="hold">
+                            <p:stCondLst>
+                              <p:cond delay="0"/>
+                            </p:stCondLst>
+                            <p:childTnLst>
+                              <p:par>
+                                <p:cTn id="23" presetID="1" presetClass="entr" presetSubtype="0" fill="hold" nodeType="clickEffect">
+                                  <p:stCondLst>
+                                    <p:cond delay="0"/>
+                                  </p:stCondLst>
+                                  <p:childTnLst>
+                                    <p:set>
+                                      <p:cBhvr>
+                                        <p:cTn id="24" dur="1" fill="hold">
+                                          <p:stCondLst>
+                                            <p:cond delay="0"/>
+                                          </p:stCondLst>
+                                        </p:cTn>
+                                        <p:tgtEl>
+                                          <p:spTgt spid="10"/>
+                                        </p:tgtEl>
+                                        <p:attrNameLst>
+                                          <p:attrName>style.visibility</p:attrName>
+                                        </p:attrNameLst>
+                                      </p:cBhvr>
+                                      <p:to>
+                                        <p:strVal val="visible"/>
+                                      </p:to>
+                                    </p:set>
+                                  </p:childTnLst>
+                                </p:cTn>
+                              </p:par>
+                            </p:childTnLst>
+                          </p:cTn>
+                        </p:par>
+                      </p:childTnLst>
+                    </p:cTn>
+                  </p:par>
+                  <p:par>
+                    <p:cTn id="25" fill="hold">
+                      <p:stCondLst>
+                        <p:cond delay="indefinite"/>
+                      </p:stCondLst>
+                      <p:childTnLst>
+                        <p:par>
+                          <p:cTn id="26" fill="hold">
+                            <p:stCondLst>
+                              <p:cond delay="0"/>
+                            </p:stCondLst>
+                            <p:childTnLst>
+                              <p:par>
+                                <p:cTn id="27" presetID="1" presetClass="entr" presetSubtype="0" fill="hold" grpId="0" nodeType="clickEffect">
+                                  <p:stCondLst>
+                                    <p:cond delay="0"/>
+                                  </p:stCondLst>
+                                  <p:childTnLst>
+                                    <p:set>
+                                      <p:cBhvr>
+                                        <p:cTn id="28" dur="1" fill="hold">
+                                          <p:stCondLst>
+                                            <p:cond delay="0"/>
+                                          </p:stCondLst>
+                                        </p:cTn>
+                                        <p:tgtEl>
+                                          <p:spTgt spid="22"/>
+                                        </p:tgtEl>
+                                        <p:attrNameLst>
+                                          <p:attrName>style.visibility</p:attrName>
+                                        </p:attrNameLst>
+                                      </p:cBhvr>
+                                      <p:to>
+                                        <p:strVal val="visible"/>
+                                      </p:to>
+                                    </p:set>
+                                  </p:childTnLst>
+                                </p:cTn>
+                              </p:par>
+                            </p:childTnLst>
+                          </p:cTn>
+                        </p:par>
+                      </p:childTnLst>
+                    </p:cTn>
+                  </p:par>
+                </p:childTnLst>
+              </p:cTn>
+              <p:prevCondLst>
+                <p:cond evt="onPrev" delay="0">
+                  <p:tgtEl>
+                    <p:sldTgt/>
+                  </p:tgtEl>
+                </p:cond>
+              </p:prevCondLst>
+              <p:nextCondLst>
+                <p:cond evt="onNext" delay="0">
+                  <p:tgtEl>
+                    <p:sldTgt/>
+                  </p:tgtEl>
+                </p:cond>
+              </p:nextCondLst>
+            </p:seq>
+          </p:childTnLst>
+        </p:cTn>
+      </p:par>
+    </p:tnLst>
+    <p:bldLst>
+      <p:bldP spid="11" grpId="0" animBg="1"/>
+      <p:bldP spid="12" grpId="0" animBg="1"/>
+      <p:bldP spid="13" grpId="0" animBg="1"/>
+      <p:bldP spid="18" grpId="0" animBg="1"/>
+      <p:bldP spid="20" grpId="0" animBg="1"/>
+      <p:bldP spid="21" grpId="0" animBg="1"/>
+      <p:bldP spid="22" grpId="0"/>
+    </p:bldLst>
+  </p:timing>
+</p:sld>
+</file>
+
+<file path=ppt/slides/slide44.xml><?xml version="1.0" encoding="utf-8"?>
 <p:sld xmlns:a="http://schemas.openxmlformats.org/drawingml/2006/main" xmlns:r="http://schemas.openxmlformats.org/officeDocument/2006/relationships" xmlns:p="http://schemas.openxmlformats.org/presentationml/2006/main">
   <p:cSld>
     <p:spTree>
@@ -29724,7 +33710,7 @@
           <a:p>
             <a:fld id="{D57F1E4F-1CFF-5643-939E-02111984F565}" type="slidenum">
               <a:rPr lang="en-US" smtClean="0"/>
-              <a:t>40</a:t>
+              <a:t>44</a:t>
             </a:fld>
             <a:endParaRPr lang="en-US" dirty="0"/>
           </a:p>
@@ -29918,7 +33904,7 @@
 </p:sld>
 </file>
 
-<file path=ppt/slides/slide41.xml><?xml version="1.0" encoding="utf-8"?>
+<file path=ppt/slides/slide45.xml><?xml version="1.0" encoding="utf-8"?>
 <p:sld xmlns:a="http://schemas.openxmlformats.org/drawingml/2006/main" xmlns:r="http://schemas.openxmlformats.org/officeDocument/2006/relationships" xmlns:p="http://schemas.openxmlformats.org/presentationml/2006/main">
   <p:cSld>
     <p:spTree>
@@ -30006,7 +33992,7 @@
           <a:p>
             <a:fld id="{D57F1E4F-1CFF-5643-939E-02111984F565}" type="slidenum">
               <a:rPr lang="en-US" smtClean="0"/>
-              <a:t>41</a:t>
+              <a:t>45</a:t>
             </a:fld>
             <a:endParaRPr lang="en-US" dirty="0"/>
           </a:p>
@@ -30185,7 +34171,7 @@
 </p:sld>
 </file>
 
-<file path=ppt/slides/slide42.xml><?xml version="1.0" encoding="utf-8"?>
+<file path=ppt/slides/slide46.xml><?xml version="1.0" encoding="utf-8"?>
 <p:sld xmlns:a="http://schemas.openxmlformats.org/drawingml/2006/main" xmlns:r="http://schemas.openxmlformats.org/officeDocument/2006/relationships" xmlns:p="http://schemas.openxmlformats.org/presentationml/2006/main">
   <p:cSld>
     <p:spTree>
@@ -30674,7 +34660,7 @@
 </p:sld>
 </file>
 
-<file path=ppt/slides/slide43.xml><?xml version="1.0" encoding="utf-8"?>
+<file path=ppt/slides/slide47.xml><?xml version="1.0" encoding="utf-8"?>
 <p:sld xmlns:a="http://schemas.openxmlformats.org/drawingml/2006/main" xmlns:r="http://schemas.openxmlformats.org/officeDocument/2006/relationships" xmlns:p="http://schemas.openxmlformats.org/presentationml/2006/main">
   <p:cSld>
     <p:spTree>
@@ -30820,7 +34806,7 @@
           <a:p>
             <a:fld id="{D57F1E4F-1CFF-5643-939E-02111984F565}" type="slidenum">
               <a:rPr lang="en-US" smtClean="0"/>
-              <a:t>43</a:t>
+              <a:t>47</a:t>
             </a:fld>
             <a:endParaRPr lang="en-US" dirty="0"/>
           </a:p>
@@ -32130,7 +36116,7 @@
 </p:sld>
 </file>
 
-<file path=ppt/slides/slide44.xml><?xml version="1.0" encoding="utf-8"?>
+<file path=ppt/slides/slide48.xml><?xml version="1.0" encoding="utf-8"?>
 <p:sld xmlns:a="http://schemas.openxmlformats.org/drawingml/2006/main" xmlns:r="http://schemas.openxmlformats.org/officeDocument/2006/relationships" xmlns:p="http://schemas.openxmlformats.org/presentationml/2006/main">
   <p:cSld>
     <p:spTree>
@@ -32246,7 +36232,7 @@
           <a:p>
             <a:fld id="{D57F1E4F-1CFF-5643-939E-02111984F565}" type="slidenum">
               <a:rPr lang="en-US" smtClean="0"/>
-              <a:t>44</a:t>
+              <a:t>48</a:t>
             </a:fld>
             <a:endParaRPr lang="en-US" dirty="0"/>
           </a:p>
@@ -32552,7 +36538,7 @@
 </p:sld>
 </file>
 
-<file path=ppt/slides/slide45.xml><?xml version="1.0" encoding="utf-8"?>
+<file path=ppt/slides/slide49.xml><?xml version="1.0" encoding="utf-8"?>
 <p:sld xmlns:a="http://schemas.openxmlformats.org/drawingml/2006/main" xmlns:r="http://schemas.openxmlformats.org/officeDocument/2006/relationships" xmlns:p="http://schemas.openxmlformats.org/presentationml/2006/main">
   <p:cSld>
     <p:spTree>
@@ -32668,7 +36654,7 @@
           <a:p>
             <a:fld id="{D57F1E4F-1CFF-5643-939E-02111984F565}" type="slidenum">
               <a:rPr lang="en-US" smtClean="0"/>
-              <a:t>45</a:t>
+              <a:t>49</a:t>
             </a:fld>
             <a:endParaRPr lang="en-US" dirty="0"/>
           </a:p>
@@ -34018,2107 +38004,6 @@
 </p:sld>
 </file>
 
-<file path=ppt/slides/slide46.xml><?xml version="1.0" encoding="utf-8"?>
-<p:sld xmlns:a="http://schemas.openxmlformats.org/drawingml/2006/main" xmlns:r="http://schemas.openxmlformats.org/officeDocument/2006/relationships" xmlns:p="http://schemas.openxmlformats.org/presentationml/2006/main">
-  <p:cSld>
-    <p:spTree>
-      <p:nvGrpSpPr>
-        <p:cNvPr id="1" name="">
-          <a:extLst>
-            <a:ext uri="{FF2B5EF4-FFF2-40B4-BE49-F238E27FC236}">
-              <a16:creationId xmlns:a16="http://schemas.microsoft.com/office/drawing/2014/main" id="{A2D9FF93-4513-A3F5-1057-7397261E76BE}"/>
-            </a:ext>
-          </a:extLst>
-        </p:cNvPr>
-        <p:cNvGrpSpPr/>
-        <p:nvPr/>
-      </p:nvGrpSpPr>
-      <p:grpSpPr>
-        <a:xfrm>
-          <a:off x="0" y="0"/>
-          <a:ext cx="0" cy="0"/>
-          <a:chOff x="0" y="0"/>
-          <a:chExt cx="0" cy="0"/>
-        </a:xfrm>
-      </p:grpSpPr>
-      <p:sp>
-        <p:nvSpPr>
-          <p:cNvPr id="6" name="제목 1">
-            <a:extLst>
-              <a:ext uri="{FF2B5EF4-FFF2-40B4-BE49-F238E27FC236}">
-                <a16:creationId xmlns:a16="http://schemas.microsoft.com/office/drawing/2014/main" id="{59F9F3E4-C9A2-3AEF-54FD-9E0EBAB10B45}"/>
-              </a:ext>
-            </a:extLst>
-          </p:cNvPr>
-          <p:cNvSpPr>
-            <a:spLocks noGrp="1"/>
-          </p:cNvSpPr>
-          <p:nvPr>
-            <p:ph type="title"/>
-          </p:nvPr>
-        </p:nvSpPr>
-        <p:spPr>
-          <a:xfrm>
-            <a:off x="915383" y="139084"/>
-            <a:ext cx="10353762" cy="766439"/>
-          </a:xfrm>
-        </p:spPr>
-        <p:txBody>
-          <a:bodyPr>
-            <a:normAutofit/>
-          </a:bodyPr>
-          <a:lstStyle/>
-          <a:p>
-            <a:r>
-              <a:rPr lang="en-US" altLang="ko-KR" b="1" cap="none" dirty="0">
-                <a:latin typeface="Times New Roman" panose="02020603050405020304" pitchFamily="18" charset="0"/>
-                <a:cs typeface="Times New Roman" panose="02020603050405020304" pitchFamily="18" charset="0"/>
-              </a:rPr>
-              <a:t>Short</a:t>
-            </a:r>
-            <a:r>
-              <a:rPr lang="en-US" altLang="ko-KR" b="1" dirty="0">
-                <a:latin typeface="Times New Roman" panose="02020603050405020304" pitchFamily="18" charset="0"/>
-                <a:cs typeface="Times New Roman" panose="02020603050405020304" pitchFamily="18" charset="0"/>
-              </a:rPr>
-              <a:t>-</a:t>
-            </a:r>
-            <a:r>
-              <a:rPr lang="en-US" altLang="ko-KR" b="1" cap="none" dirty="0">
-                <a:latin typeface="Times New Roman" panose="02020603050405020304" pitchFamily="18" charset="0"/>
-                <a:cs typeface="Times New Roman" panose="02020603050405020304" pitchFamily="18" charset="0"/>
-              </a:rPr>
-              <a:t>Cut</a:t>
-            </a:r>
-            <a:r>
-              <a:rPr lang="ko-KR" altLang="en-US" b="1" cap="none" dirty="0">
-                <a:latin typeface="Times New Roman" panose="02020603050405020304" pitchFamily="18" charset="0"/>
-                <a:cs typeface="Times New Roman" panose="02020603050405020304" pitchFamily="18" charset="0"/>
-              </a:rPr>
-              <a:t> </a:t>
-            </a:r>
-            <a:r>
-              <a:rPr lang="en-US" altLang="ko-KR" b="1" cap="none" dirty="0">
-                <a:latin typeface="Times New Roman" panose="02020603050405020304" pitchFamily="18" charset="0"/>
-                <a:cs typeface="Times New Roman" panose="02020603050405020304" pitchFamily="18" charset="0"/>
-              </a:rPr>
-              <a:t>algorithm</a:t>
-            </a:r>
-            <a:endParaRPr lang="ko-KR" altLang="en-US" b="1" cap="none" dirty="0">
-              <a:latin typeface="Times New Roman" panose="02020603050405020304" pitchFamily="18" charset="0"/>
-              <a:cs typeface="Times New Roman" panose="02020603050405020304" pitchFamily="18" charset="0"/>
-            </a:endParaRPr>
-          </a:p>
-        </p:txBody>
-      </p:sp>
-      <p:sp>
-        <p:nvSpPr>
-          <p:cNvPr id="8" name="슬라이드 번호 개체 틀 7">
-            <a:extLst>
-              <a:ext uri="{FF2B5EF4-FFF2-40B4-BE49-F238E27FC236}">
-                <a16:creationId xmlns:a16="http://schemas.microsoft.com/office/drawing/2014/main" id="{1FF4D8F7-7729-834F-4D77-1D80CFE254FE}"/>
-              </a:ext>
-            </a:extLst>
-          </p:cNvPr>
-          <p:cNvSpPr>
-            <a:spLocks noGrp="1"/>
-          </p:cNvSpPr>
-          <p:nvPr>
-            <p:ph type="sldNum" sz="quarter" idx="12"/>
-          </p:nvPr>
-        </p:nvSpPr>
-        <p:spPr/>
-        <p:txBody>
-          <a:bodyPr/>
-          <a:lstStyle/>
-          <a:p>
-            <a:fld id="{D57F1E4F-1CFF-5643-939E-02111984F565}" type="slidenum">
-              <a:rPr lang="en-US" smtClean="0"/>
-              <a:t>46</a:t>
-            </a:fld>
-            <a:endParaRPr lang="en-US" dirty="0"/>
-          </a:p>
-        </p:txBody>
-      </p:sp>
-      <p:sp>
-        <p:nvSpPr>
-          <p:cNvPr id="9" name="TextBox 8">
-            <a:extLst>
-              <a:ext uri="{FF2B5EF4-FFF2-40B4-BE49-F238E27FC236}">
-                <a16:creationId xmlns:a16="http://schemas.microsoft.com/office/drawing/2014/main" id="{70B770CA-B7CA-4928-3BA9-613BC7EF3674}"/>
-              </a:ext>
-            </a:extLst>
-          </p:cNvPr>
-          <p:cNvSpPr txBox="1"/>
-          <p:nvPr/>
-        </p:nvSpPr>
-        <p:spPr>
-          <a:xfrm>
-            <a:off x="535712" y="2790002"/>
-            <a:ext cx="2336800" cy="646331"/>
-          </a:xfrm>
-          <a:prstGeom prst="rect">
-            <a:avLst/>
-          </a:prstGeom>
-          <a:noFill/>
-        </p:spPr>
-        <p:txBody>
-          <a:bodyPr wrap="square">
-            <a:spAutoFit/>
-          </a:bodyPr>
-          <a:lstStyle/>
-          <a:p>
-            <a:pPr algn="ctr"/>
-            <a:r>
-              <a:rPr lang="en-US" altLang="ko-KR" dirty="0">
-                <a:latin typeface="맑은 고딕 Semilight" panose="020B0502040204020203" pitchFamily="50" charset="-127"/>
-                <a:ea typeface="맑은 고딕 Semilight" panose="020B0502040204020203" pitchFamily="50" charset="-127"/>
-                <a:cs typeface="맑은 고딕 Semilight" panose="020B0502040204020203" pitchFamily="50" charset="-127"/>
-              </a:rPr>
-              <a:t>Adjacency Matrix</a:t>
-            </a:r>
-          </a:p>
-          <a:p>
-            <a:pPr algn="ctr"/>
-            <a:r>
-              <a:rPr lang="en-US" altLang="ko-KR" dirty="0">
-                <a:latin typeface="맑은 고딕 Semilight" panose="020B0502040204020203" pitchFamily="50" charset="-127"/>
-                <a:ea typeface="맑은 고딕 Semilight" panose="020B0502040204020203" pitchFamily="50" charset="-127"/>
-                <a:cs typeface="맑은 고딕 Semilight" panose="020B0502040204020203" pitchFamily="50" charset="-127"/>
-              </a:rPr>
-              <a:t>(8, 8)</a:t>
-            </a:r>
-            <a:endParaRPr lang="ko-KR" altLang="en-US" dirty="0">
-              <a:latin typeface="맑은 고딕 Semilight" panose="020B0502040204020203" pitchFamily="50" charset="-127"/>
-              <a:ea typeface="맑은 고딕 Semilight" panose="020B0502040204020203" pitchFamily="50" charset="-127"/>
-              <a:cs typeface="맑은 고딕 Semilight" panose="020B0502040204020203" pitchFamily="50" charset="-127"/>
-            </a:endParaRPr>
-          </a:p>
-        </p:txBody>
-      </p:sp>
-      <p:sp>
-        <p:nvSpPr>
-          <p:cNvPr id="10" name="TextBox 9">
-            <a:extLst>
-              <a:ext uri="{FF2B5EF4-FFF2-40B4-BE49-F238E27FC236}">
-                <a16:creationId xmlns:a16="http://schemas.microsoft.com/office/drawing/2014/main" id="{75D549DF-AE9C-BFCB-7ADB-4C61096744E4}"/>
-              </a:ext>
-            </a:extLst>
-          </p:cNvPr>
-          <p:cNvSpPr txBox="1"/>
-          <p:nvPr/>
-        </p:nvSpPr>
-        <p:spPr>
-          <a:xfrm>
-            <a:off x="4416959" y="2790001"/>
-            <a:ext cx="1810327" cy="646331"/>
-          </a:xfrm>
-          <a:prstGeom prst="rect">
-            <a:avLst/>
-          </a:prstGeom>
-          <a:noFill/>
-        </p:spPr>
-        <p:txBody>
-          <a:bodyPr wrap="square">
-            <a:spAutoFit/>
-          </a:bodyPr>
-          <a:lstStyle/>
-          <a:p>
-            <a:pPr algn="ctr"/>
-            <a:r>
-              <a:rPr lang="ko-KR" altLang="en-US" dirty="0">
-                <a:latin typeface="맑은 고딕 Semilight" panose="020B0502040204020203" pitchFamily="50" charset="-127"/>
-                <a:ea typeface="맑은 고딕 Semilight" panose="020B0502040204020203" pitchFamily="50" charset="-127"/>
-                <a:cs typeface="맑은 고딕 Semilight" panose="020B0502040204020203" pitchFamily="50" charset="-127"/>
-              </a:rPr>
-              <a:t>도시간 </a:t>
-            </a:r>
-            <a:r>
-              <a:rPr lang="en-US" altLang="ko-KR" dirty="0">
-                <a:latin typeface="맑은 고딕 Semilight" panose="020B0502040204020203" pitchFamily="50" charset="-127"/>
-                <a:ea typeface="맑은 고딕 Semilight" panose="020B0502040204020203" pitchFamily="50" charset="-127"/>
-                <a:cs typeface="맑은 고딕 Semilight" panose="020B0502040204020203" pitchFamily="50" charset="-127"/>
-              </a:rPr>
-              <a:t>L2</a:t>
-            </a:r>
-            <a:r>
-              <a:rPr lang="ko-KR" altLang="en-US" dirty="0">
-                <a:latin typeface="맑은 고딕 Semilight" panose="020B0502040204020203" pitchFamily="50" charset="-127"/>
-                <a:ea typeface="맑은 고딕 Semilight" panose="020B0502040204020203" pitchFamily="50" charset="-127"/>
-                <a:cs typeface="맑은 고딕 Semilight" panose="020B0502040204020203" pitchFamily="50" charset="-127"/>
-              </a:rPr>
-              <a:t> 거리</a:t>
-            </a:r>
-            <a:endParaRPr lang="en-US" altLang="ko-KR" dirty="0">
-              <a:latin typeface="맑은 고딕 Semilight" panose="020B0502040204020203" pitchFamily="50" charset="-127"/>
-              <a:ea typeface="맑은 고딕 Semilight" panose="020B0502040204020203" pitchFamily="50" charset="-127"/>
-              <a:cs typeface="맑은 고딕 Semilight" panose="020B0502040204020203" pitchFamily="50" charset="-127"/>
-            </a:endParaRPr>
-          </a:p>
-          <a:p>
-            <a:pPr algn="ctr"/>
-            <a:r>
-              <a:rPr lang="en-US" altLang="ko-KR" dirty="0">
-                <a:latin typeface="맑은 고딕 Semilight" panose="020B0502040204020203" pitchFamily="50" charset="-127"/>
-                <a:ea typeface="맑은 고딕 Semilight" panose="020B0502040204020203" pitchFamily="50" charset="-127"/>
-                <a:cs typeface="맑은 고딕 Semilight" panose="020B0502040204020203" pitchFamily="50" charset="-127"/>
-              </a:rPr>
-              <a:t>(8, 8)</a:t>
-            </a:r>
-          </a:p>
-        </p:txBody>
-      </p:sp>
-      <p:pic>
-        <p:nvPicPr>
-          <p:cNvPr id="14" name="그림 13">
-            <a:extLst>
-              <a:ext uri="{FF2B5EF4-FFF2-40B4-BE49-F238E27FC236}">
-                <a16:creationId xmlns:a16="http://schemas.microsoft.com/office/drawing/2014/main" id="{1C57B053-1D05-D974-6448-2D17C6725D9D}"/>
-              </a:ext>
-            </a:extLst>
-          </p:cNvPr>
-          <p:cNvPicPr>
-            <a:picLocks noChangeAspect="1"/>
-          </p:cNvPicPr>
-          <p:nvPr/>
-        </p:nvPicPr>
-        <p:blipFill>
-          <a:blip r:embed="rId2">
-            <a:duotone>
-              <a:schemeClr val="accent2">
-                <a:shade val="45000"/>
-                <a:satMod val="135000"/>
-              </a:schemeClr>
-              <a:prstClr val="white"/>
-            </a:duotone>
-          </a:blip>
-          <a:stretch>
-            <a:fillRect/>
-          </a:stretch>
-        </p:blipFill>
-        <p:spPr>
-          <a:xfrm>
-            <a:off x="446252" y="3886150"/>
-            <a:ext cx="2667011" cy="2198547"/>
-          </a:xfrm>
-          <a:prstGeom prst="rect">
-            <a:avLst/>
-          </a:prstGeom>
-        </p:spPr>
-      </p:pic>
-      <p:pic>
-        <p:nvPicPr>
-          <p:cNvPr id="16" name="그림 15">
-            <a:extLst>
-              <a:ext uri="{FF2B5EF4-FFF2-40B4-BE49-F238E27FC236}">
-                <a16:creationId xmlns:a16="http://schemas.microsoft.com/office/drawing/2014/main" id="{8647D088-3BCA-FE95-1AF8-EA1A13161837}"/>
-              </a:ext>
-            </a:extLst>
-          </p:cNvPr>
-          <p:cNvPicPr>
-            <a:picLocks noChangeAspect="1"/>
-          </p:cNvPicPr>
-          <p:nvPr/>
-        </p:nvPicPr>
-        <p:blipFill>
-          <a:blip r:embed="rId3">
-            <a:duotone>
-              <a:schemeClr val="accent3">
-                <a:shade val="45000"/>
-                <a:satMod val="135000"/>
-              </a:schemeClr>
-              <a:prstClr val="white"/>
-            </a:duotone>
-          </a:blip>
-          <a:stretch>
-            <a:fillRect/>
-          </a:stretch>
-        </p:blipFill>
-        <p:spPr>
-          <a:xfrm>
-            <a:off x="3483280" y="3886150"/>
-            <a:ext cx="3898859" cy="2198547"/>
-          </a:xfrm>
-          <a:prstGeom prst="rect">
-            <a:avLst/>
-          </a:prstGeom>
-        </p:spPr>
-      </p:pic>
-      <p:sp>
-        <p:nvSpPr>
-          <p:cNvPr id="17" name="TextBox 16">
-            <a:extLst>
-              <a:ext uri="{FF2B5EF4-FFF2-40B4-BE49-F238E27FC236}">
-                <a16:creationId xmlns:a16="http://schemas.microsoft.com/office/drawing/2014/main" id="{9420B1AC-58BB-401D-30EB-38ED0ED86CD3}"/>
-              </a:ext>
-            </a:extLst>
-          </p:cNvPr>
-          <p:cNvSpPr txBox="1"/>
-          <p:nvPr/>
-        </p:nvSpPr>
-        <p:spPr>
-          <a:xfrm>
-            <a:off x="3061295" y="4309580"/>
-            <a:ext cx="385042" cy="369332"/>
-          </a:xfrm>
-          <a:prstGeom prst="rect">
-            <a:avLst/>
-          </a:prstGeom>
-          <a:noFill/>
-        </p:spPr>
-        <p:txBody>
-          <a:bodyPr wrap="none" rtlCol="0">
-            <a:spAutoFit/>
-          </a:bodyPr>
-          <a:lstStyle/>
-          <a:p>
-            <a:r>
-              <a:rPr lang="en-US" altLang="ko-KR" dirty="0"/>
-              <a:t>@</a:t>
-            </a:r>
-            <a:endParaRPr lang="ko-KR" altLang="en-US" dirty="0"/>
-          </a:p>
-        </p:txBody>
-      </p:sp>
-      <p:sp>
-        <p:nvSpPr>
-          <p:cNvPr id="18" name="TextBox 17">
-            <a:extLst>
-              <a:ext uri="{FF2B5EF4-FFF2-40B4-BE49-F238E27FC236}">
-                <a16:creationId xmlns:a16="http://schemas.microsoft.com/office/drawing/2014/main" id="{D3740C12-D167-6F95-8461-C890BFDAA6D6}"/>
-              </a:ext>
-            </a:extLst>
-          </p:cNvPr>
-          <p:cNvSpPr txBox="1"/>
-          <p:nvPr/>
-        </p:nvSpPr>
-        <p:spPr>
-          <a:xfrm>
-            <a:off x="3040208" y="2799766"/>
-            <a:ext cx="385042" cy="369332"/>
-          </a:xfrm>
-          <a:prstGeom prst="rect">
-            <a:avLst/>
-          </a:prstGeom>
-          <a:noFill/>
-        </p:spPr>
-        <p:txBody>
-          <a:bodyPr wrap="none" rtlCol="0">
-            <a:spAutoFit/>
-          </a:bodyPr>
-          <a:lstStyle/>
-          <a:p>
-            <a:r>
-              <a:rPr lang="en-US" altLang="ko-KR" dirty="0"/>
-              <a:t>@</a:t>
-            </a:r>
-            <a:endParaRPr lang="ko-KR" altLang="en-US" dirty="0"/>
-          </a:p>
-        </p:txBody>
-      </p:sp>
-      <p:pic>
-        <p:nvPicPr>
-          <p:cNvPr id="22" name="그림 21">
-            <a:extLst>
-              <a:ext uri="{FF2B5EF4-FFF2-40B4-BE49-F238E27FC236}">
-                <a16:creationId xmlns:a16="http://schemas.microsoft.com/office/drawing/2014/main" id="{671F5277-2813-C525-26A7-1C7870DC7EA7}"/>
-              </a:ext>
-            </a:extLst>
-          </p:cNvPr>
-          <p:cNvPicPr>
-            <a:picLocks noChangeAspect="1"/>
-          </p:cNvPicPr>
-          <p:nvPr/>
-        </p:nvPicPr>
-        <p:blipFill>
-          <a:blip r:embed="rId4">
-            <a:duotone>
-              <a:schemeClr val="accent6">
-                <a:shade val="45000"/>
-                <a:satMod val="135000"/>
-              </a:schemeClr>
-              <a:prstClr val="white"/>
-            </a:duotone>
-          </a:blip>
-          <a:stretch>
-            <a:fillRect/>
-          </a:stretch>
-        </p:blipFill>
-        <p:spPr>
-          <a:xfrm>
-            <a:off x="7961745" y="3886150"/>
-            <a:ext cx="3307400" cy="2191374"/>
-          </a:xfrm>
-          <a:prstGeom prst="rect">
-            <a:avLst/>
-          </a:prstGeom>
-        </p:spPr>
-      </p:pic>
-      <p:sp>
-        <p:nvSpPr>
-          <p:cNvPr id="23" name="TextBox 22">
-            <a:extLst>
-              <a:ext uri="{FF2B5EF4-FFF2-40B4-BE49-F238E27FC236}">
-                <a16:creationId xmlns:a16="http://schemas.microsoft.com/office/drawing/2014/main" id="{98C9E7E7-5514-B0CE-8091-E24848223919}"/>
-              </a:ext>
-            </a:extLst>
-          </p:cNvPr>
-          <p:cNvSpPr txBox="1"/>
-          <p:nvPr/>
-        </p:nvSpPr>
-        <p:spPr>
-          <a:xfrm>
-            <a:off x="7437494" y="4309580"/>
-            <a:ext cx="324128" cy="369332"/>
-          </a:xfrm>
-          <a:prstGeom prst="rect">
-            <a:avLst/>
-          </a:prstGeom>
-          <a:noFill/>
-        </p:spPr>
-        <p:txBody>
-          <a:bodyPr wrap="none" rtlCol="0">
-            <a:spAutoFit/>
-          </a:bodyPr>
-          <a:lstStyle/>
-          <a:p>
-            <a:r>
-              <a:rPr lang="en-US" altLang="ko-KR" dirty="0"/>
-              <a:t>=</a:t>
-            </a:r>
-            <a:endParaRPr lang="ko-KR" altLang="en-US" dirty="0"/>
-          </a:p>
-        </p:txBody>
-      </p:sp>
-      <p:sp>
-        <p:nvSpPr>
-          <p:cNvPr id="24" name="TextBox 23">
-            <a:extLst>
-              <a:ext uri="{FF2B5EF4-FFF2-40B4-BE49-F238E27FC236}">
-                <a16:creationId xmlns:a16="http://schemas.microsoft.com/office/drawing/2014/main" id="{823EB724-F3FC-938C-1727-FDA20A822FCA}"/>
-              </a:ext>
-            </a:extLst>
-          </p:cNvPr>
-          <p:cNvSpPr txBox="1"/>
-          <p:nvPr/>
-        </p:nvSpPr>
-        <p:spPr>
-          <a:xfrm>
-            <a:off x="7437494" y="2799766"/>
-            <a:ext cx="324128" cy="369332"/>
-          </a:xfrm>
-          <a:prstGeom prst="rect">
-            <a:avLst/>
-          </a:prstGeom>
-          <a:noFill/>
-        </p:spPr>
-        <p:txBody>
-          <a:bodyPr wrap="none" rtlCol="0">
-            <a:spAutoFit/>
-          </a:bodyPr>
-          <a:lstStyle/>
-          <a:p>
-            <a:r>
-              <a:rPr lang="en-US" altLang="ko-KR" dirty="0"/>
-              <a:t>=</a:t>
-            </a:r>
-            <a:endParaRPr lang="ko-KR" altLang="en-US" dirty="0"/>
-          </a:p>
-        </p:txBody>
-      </p:sp>
-      <p:sp>
-        <p:nvSpPr>
-          <p:cNvPr id="26" name="TextBox 25">
-            <a:extLst>
-              <a:ext uri="{FF2B5EF4-FFF2-40B4-BE49-F238E27FC236}">
-                <a16:creationId xmlns:a16="http://schemas.microsoft.com/office/drawing/2014/main" id="{673BA7E5-90FF-0EAE-F46B-CAFEF29402C3}"/>
-              </a:ext>
-            </a:extLst>
-          </p:cNvPr>
-          <p:cNvSpPr txBox="1"/>
-          <p:nvPr/>
-        </p:nvSpPr>
-        <p:spPr>
-          <a:xfrm>
-            <a:off x="7961745" y="2799766"/>
-            <a:ext cx="4156364" cy="369332"/>
-          </a:xfrm>
-          <a:prstGeom prst="rect">
-            <a:avLst/>
-          </a:prstGeom>
-          <a:noFill/>
-        </p:spPr>
-        <p:txBody>
-          <a:bodyPr wrap="square">
-            <a:spAutoFit/>
-          </a:bodyPr>
-          <a:lstStyle/>
-          <a:p>
-            <a:r>
-              <a:rPr lang="ko-KR" altLang="en-US" dirty="0"/>
-              <a:t>이웃 거리의 합산 → 최단 경로와 무관</a:t>
-            </a:r>
-          </a:p>
-        </p:txBody>
-      </p:sp>
-      <p:cxnSp>
-        <p:nvCxnSpPr>
-          <p:cNvPr id="28" name="직선 연결선 27">
-            <a:extLst>
-              <a:ext uri="{FF2B5EF4-FFF2-40B4-BE49-F238E27FC236}">
-                <a16:creationId xmlns:a16="http://schemas.microsoft.com/office/drawing/2014/main" id="{2E25907B-0F24-80B1-C6B2-CE219D9B3D83}"/>
-              </a:ext>
-            </a:extLst>
-          </p:cNvPr>
-          <p:cNvCxnSpPr/>
-          <p:nvPr/>
-        </p:nvCxnSpPr>
-        <p:spPr>
-          <a:xfrm>
-            <a:off x="701964" y="3583707"/>
-            <a:ext cx="11203709" cy="0"/>
-          </a:xfrm>
-          <a:prstGeom prst="line">
-            <a:avLst/>
-          </a:prstGeom>
-          <a:ln>
-            <a:solidFill>
-              <a:schemeClr val="tx1"/>
-            </a:solidFill>
-          </a:ln>
-        </p:spPr>
-        <p:style>
-          <a:lnRef idx="1">
-            <a:schemeClr val="accent1"/>
-          </a:lnRef>
-          <a:fillRef idx="0">
-            <a:schemeClr val="accent1"/>
-          </a:fillRef>
-          <a:effectRef idx="0">
-            <a:schemeClr val="accent1"/>
-          </a:effectRef>
-          <a:fontRef idx="minor">
-            <a:schemeClr val="tx1"/>
-          </a:fontRef>
-        </p:style>
-      </p:cxnSp>
-      <p:sp>
-        <p:nvSpPr>
-          <p:cNvPr id="29" name="직사각형 28">
-            <a:extLst>
-              <a:ext uri="{FF2B5EF4-FFF2-40B4-BE49-F238E27FC236}">
-                <a16:creationId xmlns:a16="http://schemas.microsoft.com/office/drawing/2014/main" id="{C818162E-858C-9B1B-8924-FD719D8EA231}"/>
-              </a:ext>
-            </a:extLst>
-          </p:cNvPr>
-          <p:cNvSpPr/>
-          <p:nvPr/>
-        </p:nvSpPr>
-        <p:spPr>
-          <a:xfrm>
-            <a:off x="7761622" y="3894970"/>
-            <a:ext cx="3898859" cy="277091"/>
-          </a:xfrm>
-          <a:prstGeom prst="rect">
-            <a:avLst/>
-          </a:prstGeom>
-          <a:noFill/>
-          <a:ln w="28575">
-            <a:solidFill>
-              <a:srgbClr val="FFFF00"/>
-            </a:solidFill>
-          </a:ln>
-        </p:spPr>
-        <p:style>
-          <a:lnRef idx="2">
-            <a:schemeClr val="accent1">
-              <a:shade val="15000"/>
-            </a:schemeClr>
-          </a:lnRef>
-          <a:fillRef idx="1">
-            <a:schemeClr val="accent1"/>
-          </a:fillRef>
-          <a:effectRef idx="0">
-            <a:schemeClr val="accent1"/>
-          </a:effectRef>
-          <a:fontRef idx="minor">
-            <a:schemeClr val="lt1"/>
-          </a:fontRef>
-        </p:style>
-        <p:txBody>
-          <a:bodyPr rtlCol="0" anchor="ctr"/>
-          <a:lstStyle/>
-          <a:p>
-            <a:pPr algn="ctr"/>
-            <a:endParaRPr lang="ko-KR" altLang="en-US" dirty="0"/>
-          </a:p>
-        </p:txBody>
-      </p:sp>
-      <p:sp>
-        <p:nvSpPr>
-          <p:cNvPr id="30" name="TextBox 29">
-            <a:extLst>
-              <a:ext uri="{FF2B5EF4-FFF2-40B4-BE49-F238E27FC236}">
-                <a16:creationId xmlns:a16="http://schemas.microsoft.com/office/drawing/2014/main" id="{74D55AB2-EFF2-2AFE-2018-5E3263607681}"/>
-              </a:ext>
-            </a:extLst>
-          </p:cNvPr>
-          <p:cNvSpPr txBox="1"/>
-          <p:nvPr/>
-        </p:nvSpPr>
-        <p:spPr>
-          <a:xfrm>
-            <a:off x="535712" y="1420336"/>
-            <a:ext cx="11124769" cy="870495"/>
-          </a:xfrm>
-          <a:prstGeom prst="rect">
-            <a:avLst/>
-          </a:prstGeom>
-          <a:noFill/>
-        </p:spPr>
-        <p:txBody>
-          <a:bodyPr wrap="square" rtlCol="0">
-            <a:spAutoFit/>
-          </a:bodyPr>
-          <a:lstStyle/>
-          <a:p>
-            <a:pPr>
-              <a:lnSpc>
-                <a:spcPct val="150000"/>
-              </a:lnSpc>
-            </a:pPr>
-            <a:r>
-              <a:rPr lang="ko-KR" altLang="en-US" dirty="0"/>
-              <a:t>인접행렬과 도시간 거리 행렬을 </a:t>
-            </a:r>
-            <a:r>
-              <a:rPr lang="ko-KR" altLang="en-US" dirty="0" err="1"/>
-              <a:t>내적하면</a:t>
-            </a:r>
-            <a:r>
-              <a:rPr lang="ko-KR" altLang="en-US" dirty="0"/>
-              <a:t> 각 행은 출발도시에서 각 열 도시까지의 도달하는데 가능한 모든 경로에 해당되는 누적 거리</a:t>
-            </a:r>
-            <a:r>
-              <a:rPr lang="en-US" altLang="ko-KR" dirty="0"/>
-              <a:t>, </a:t>
-            </a:r>
-            <a:r>
-              <a:rPr lang="ko-KR" altLang="en-US" dirty="0"/>
-              <a:t>노란색 박스는 서울</a:t>
-            </a:r>
-            <a:r>
-              <a:rPr lang="en-US" altLang="ko-KR" dirty="0"/>
-              <a:t>(Node a)</a:t>
-            </a:r>
-            <a:r>
-              <a:rPr lang="ko-KR" altLang="en-US" dirty="0"/>
-              <a:t>에서 각 도시까지 가는데 걸리는 누적합산 거리</a:t>
-            </a:r>
-          </a:p>
-        </p:txBody>
-      </p:sp>
-    </p:spTree>
-    <p:extLst>
-      <p:ext uri="{BB962C8B-B14F-4D97-AF65-F5344CB8AC3E}">
-        <p14:creationId xmlns:p14="http://schemas.microsoft.com/office/powerpoint/2010/main" val="2590360119"/>
-      </p:ext>
-    </p:extLst>
-  </p:cSld>
-  <p:clrMapOvr>
-    <a:masterClrMapping/>
-  </p:clrMapOvr>
-</p:sld>
-</file>
-
-<file path=ppt/slides/slide47.xml><?xml version="1.0" encoding="utf-8"?>
-<p:sld xmlns:a="http://schemas.openxmlformats.org/drawingml/2006/main" xmlns:r="http://schemas.openxmlformats.org/officeDocument/2006/relationships" xmlns:p="http://schemas.openxmlformats.org/presentationml/2006/main">
-  <p:cSld>
-    <p:spTree>
-      <p:nvGrpSpPr>
-        <p:cNvPr id="1" name="">
-          <a:extLst>
-            <a:ext uri="{FF2B5EF4-FFF2-40B4-BE49-F238E27FC236}">
-              <a16:creationId xmlns:a16="http://schemas.microsoft.com/office/drawing/2014/main" id="{7D62CB3B-9AF7-4213-B5A1-6605D2A4A645}"/>
-            </a:ext>
-          </a:extLst>
-        </p:cNvPr>
-        <p:cNvGrpSpPr/>
-        <p:nvPr/>
-      </p:nvGrpSpPr>
-      <p:grpSpPr>
-        <a:xfrm>
-          <a:off x="0" y="0"/>
-          <a:ext cx="0" cy="0"/>
-          <a:chOff x="0" y="0"/>
-          <a:chExt cx="0" cy="0"/>
-        </a:xfrm>
-      </p:grpSpPr>
-      <p:sp>
-        <p:nvSpPr>
-          <p:cNvPr id="5" name="직사각형 4">
-            <a:extLst>
-              <a:ext uri="{FF2B5EF4-FFF2-40B4-BE49-F238E27FC236}">
-                <a16:creationId xmlns:a16="http://schemas.microsoft.com/office/drawing/2014/main" id="{8418055A-86BD-4F58-4EFC-13F9ED3D8CE7}"/>
-              </a:ext>
-            </a:extLst>
-          </p:cNvPr>
-          <p:cNvSpPr/>
-          <p:nvPr/>
-        </p:nvSpPr>
-        <p:spPr>
-          <a:xfrm>
-            <a:off x="1104901" y="5784946"/>
-            <a:ext cx="5124450" cy="478335"/>
-          </a:xfrm>
-          <a:prstGeom prst="rect">
-            <a:avLst/>
-          </a:prstGeom>
-          <a:solidFill>
-            <a:schemeClr val="accent2">
-              <a:lumMod val="50000"/>
-            </a:schemeClr>
-          </a:solidFill>
-          <a:ln>
-            <a:noFill/>
-          </a:ln>
-        </p:spPr>
-        <p:style>
-          <a:lnRef idx="2">
-            <a:schemeClr val="accent1">
-              <a:shade val="15000"/>
-            </a:schemeClr>
-          </a:lnRef>
-          <a:fillRef idx="1">
-            <a:schemeClr val="accent1"/>
-          </a:fillRef>
-          <a:effectRef idx="0">
-            <a:schemeClr val="accent1"/>
-          </a:effectRef>
-          <a:fontRef idx="minor">
-            <a:schemeClr val="lt1"/>
-          </a:fontRef>
-        </p:style>
-        <p:txBody>
-          <a:bodyPr rtlCol="0" anchor="ctr"/>
-          <a:lstStyle/>
-          <a:p>
-            <a:pPr algn="ctr"/>
-            <a:endParaRPr lang="ko-KR" altLang="en-US" dirty="0"/>
-          </a:p>
-        </p:txBody>
-      </p:sp>
-      <p:sp>
-        <p:nvSpPr>
-          <p:cNvPr id="2" name="제목 1">
-            <a:extLst>
-              <a:ext uri="{FF2B5EF4-FFF2-40B4-BE49-F238E27FC236}">
-                <a16:creationId xmlns:a16="http://schemas.microsoft.com/office/drawing/2014/main" id="{5743E8A7-5FD7-0FB3-9ADD-A997BF3E2B76}"/>
-              </a:ext>
-            </a:extLst>
-          </p:cNvPr>
-          <p:cNvSpPr>
-            <a:spLocks noGrp="1"/>
-          </p:cNvSpPr>
-          <p:nvPr>
-            <p:ph type="ctrTitle"/>
-          </p:nvPr>
-        </p:nvSpPr>
-        <p:spPr>
-          <a:xfrm>
-            <a:off x="612030" y="586381"/>
-            <a:ext cx="8825658" cy="609600"/>
-          </a:xfrm>
-        </p:spPr>
-        <p:txBody>
-          <a:bodyPr/>
-          <a:lstStyle/>
-          <a:p>
-            <a:r>
-              <a:rPr lang="en-US" altLang="ko-KR" sz="4400" dirty="0"/>
-              <a:t>Contents</a:t>
-            </a:r>
-            <a:endParaRPr lang="ko-KR" altLang="en-US" sz="4400" dirty="0"/>
-          </a:p>
-        </p:txBody>
-      </p:sp>
-      <p:sp>
-        <p:nvSpPr>
-          <p:cNvPr id="3" name="부제목 2">
-            <a:extLst>
-              <a:ext uri="{FF2B5EF4-FFF2-40B4-BE49-F238E27FC236}">
-                <a16:creationId xmlns:a16="http://schemas.microsoft.com/office/drawing/2014/main" id="{22FD3175-6A14-24B3-BEB8-7E122FE63F8B}"/>
-              </a:ext>
-            </a:extLst>
-          </p:cNvPr>
-          <p:cNvSpPr>
-            <a:spLocks noGrp="1"/>
-          </p:cNvSpPr>
-          <p:nvPr>
-            <p:ph type="subTitle" idx="1"/>
-          </p:nvPr>
-        </p:nvSpPr>
-        <p:spPr>
-          <a:xfrm>
-            <a:off x="1574055" y="1452837"/>
-            <a:ext cx="4855321" cy="3650160"/>
-          </a:xfrm>
-        </p:spPr>
-        <p:txBody>
-          <a:bodyPr>
-            <a:noAutofit/>
-          </a:bodyPr>
-          <a:lstStyle/>
-          <a:p>
-            <a:pPr marL="514350" indent="-514350">
-              <a:lnSpc>
-                <a:spcPct val="150000"/>
-              </a:lnSpc>
-              <a:buSzPct val="100000"/>
-              <a:buAutoNum type="arabicPeriod"/>
-            </a:pPr>
-            <a:r>
-              <a:rPr lang="en-US" altLang="ko-KR" sz="1800" cap="none" dirty="0">
-                <a:solidFill>
-                  <a:schemeClr val="tx1"/>
-                </a:solidFill>
-              </a:rPr>
-              <a:t>What</a:t>
-            </a:r>
-            <a:r>
-              <a:rPr lang="ko-KR" altLang="en-US" sz="1800" cap="none" dirty="0">
-                <a:solidFill>
-                  <a:schemeClr val="tx1"/>
-                </a:solidFill>
-              </a:rPr>
-              <a:t> </a:t>
-            </a:r>
-            <a:r>
-              <a:rPr lang="en-US" altLang="ko-KR" sz="1800" cap="none" dirty="0">
-                <a:solidFill>
-                  <a:schemeClr val="tx1"/>
-                </a:solidFill>
-              </a:rPr>
-              <a:t>is Modeling? </a:t>
-            </a:r>
-          </a:p>
-          <a:p>
-            <a:pPr marL="514350" indent="-514350">
-              <a:lnSpc>
-                <a:spcPct val="150000"/>
-              </a:lnSpc>
-              <a:buSzPct val="100000"/>
-              <a:buAutoNum type="arabicPeriod"/>
-            </a:pPr>
-            <a:r>
-              <a:rPr lang="en-US" altLang="ko-KR" sz="1800" cap="none" dirty="0">
-                <a:solidFill>
-                  <a:schemeClr val="tx1"/>
-                </a:solidFill>
-              </a:rPr>
-              <a:t>Python</a:t>
-            </a:r>
-            <a:r>
-              <a:rPr lang="ko-KR" altLang="en-US" sz="1800" cap="none" dirty="0">
-                <a:solidFill>
-                  <a:schemeClr val="tx1"/>
-                </a:solidFill>
-              </a:rPr>
-              <a:t> </a:t>
-            </a:r>
-            <a:r>
-              <a:rPr lang="en-US" altLang="ko-KR" sz="1800" cap="none" dirty="0" err="1">
-                <a:solidFill>
-                  <a:schemeClr val="tx1"/>
-                </a:solidFill>
-              </a:rPr>
-              <a:t>sympy</a:t>
-            </a:r>
-            <a:endParaRPr lang="en-US" altLang="ko-KR" sz="1800" cap="none" dirty="0">
-              <a:solidFill>
-                <a:schemeClr val="tx1"/>
-              </a:solidFill>
-            </a:endParaRPr>
-          </a:p>
-          <a:p>
-            <a:pPr marL="514350" indent="-514350">
-              <a:lnSpc>
-                <a:spcPct val="150000"/>
-              </a:lnSpc>
-              <a:buSzPct val="100000"/>
-              <a:buAutoNum type="arabicPeriod"/>
-            </a:pPr>
-            <a:r>
-              <a:rPr lang="en-US" altLang="ko-KR" sz="1800" cap="none" dirty="0">
-                <a:solidFill>
-                  <a:schemeClr val="tx1"/>
-                </a:solidFill>
-              </a:rPr>
-              <a:t>Derivative</a:t>
-            </a:r>
-          </a:p>
-          <a:p>
-            <a:pPr marL="514350" indent="-514350">
-              <a:lnSpc>
-                <a:spcPct val="150000"/>
-              </a:lnSpc>
-              <a:buSzPct val="100000"/>
-              <a:buAutoNum type="arabicPeriod"/>
-            </a:pPr>
-            <a:r>
-              <a:rPr lang="en-US" altLang="ko-KR" sz="1800" cap="none" dirty="0">
-                <a:solidFill>
-                  <a:schemeClr val="tx1"/>
-                </a:solidFill>
-              </a:rPr>
-              <a:t>Time &amp; Space (w1)</a:t>
-            </a:r>
-          </a:p>
-          <a:p>
-            <a:pPr marL="514350" indent="-514350">
-              <a:lnSpc>
-                <a:spcPct val="150000"/>
-              </a:lnSpc>
-              <a:buSzPct val="100000"/>
-              <a:buAutoNum type="arabicPeriod"/>
-            </a:pPr>
-            <a:r>
-              <a:rPr lang="en-US" altLang="ko-KR" sz="1800" cap="none" dirty="0">
-                <a:solidFill>
-                  <a:schemeClr val="tx1"/>
-                </a:solidFill>
-              </a:rPr>
-              <a:t>Optimization (w2)</a:t>
-            </a:r>
-          </a:p>
-          <a:p>
-            <a:pPr marL="514350" indent="-514350">
-              <a:lnSpc>
-                <a:spcPct val="150000"/>
-              </a:lnSpc>
-              <a:buSzPct val="100000"/>
-              <a:buAutoNum type="arabicPeriod"/>
-            </a:pPr>
-            <a:r>
-              <a:rPr lang="en-US" altLang="ko-KR" sz="1800" cap="none" dirty="0">
-                <a:solidFill>
-                  <a:schemeClr val="tx1"/>
-                </a:solidFill>
-              </a:rPr>
-              <a:t>Linear Regression (w3) (w4)</a:t>
-            </a:r>
-          </a:p>
-          <a:p>
-            <a:pPr marL="514350" indent="-514350">
-              <a:lnSpc>
-                <a:spcPct val="150000"/>
-              </a:lnSpc>
-              <a:buSzPct val="100000"/>
-              <a:buAutoNum type="arabicPeriod"/>
-            </a:pPr>
-            <a:r>
-              <a:rPr lang="en-US" altLang="ko-KR" sz="1800" cap="none" dirty="0">
-                <a:solidFill>
-                  <a:schemeClr val="tx1"/>
-                </a:solidFill>
-              </a:rPr>
-              <a:t>Optimization of loss function (L1, L2)</a:t>
-            </a:r>
-          </a:p>
-          <a:p>
-            <a:pPr marL="514350" indent="-514350">
-              <a:lnSpc>
-                <a:spcPct val="150000"/>
-              </a:lnSpc>
-              <a:buSzPct val="100000"/>
-              <a:buAutoNum type="arabicPeriod"/>
-            </a:pPr>
-            <a:r>
-              <a:rPr lang="en-US" altLang="ko-KR" sz="1800" cap="none" dirty="0">
-                <a:solidFill>
-                  <a:schemeClr val="tx1"/>
-                </a:solidFill>
-              </a:rPr>
-              <a:t>Short cut algorithm</a:t>
-            </a:r>
-          </a:p>
-          <a:p>
-            <a:pPr marL="514350" indent="-514350">
-              <a:lnSpc>
-                <a:spcPct val="150000"/>
-              </a:lnSpc>
-              <a:buSzPct val="100000"/>
-              <a:buAutoNum type="arabicPeriod"/>
-            </a:pPr>
-            <a:r>
-              <a:rPr lang="en-US" altLang="ko-KR" sz="1800" cap="none" dirty="0">
-                <a:solidFill>
-                  <a:schemeClr val="tx1"/>
-                </a:solidFill>
-              </a:rPr>
-              <a:t>Linear Programming</a:t>
-            </a:r>
-            <a:endParaRPr lang="en-US" altLang="ko-KR" sz="1800" cap="none" dirty="0"/>
-          </a:p>
-          <a:p>
-            <a:pPr marL="514350" indent="-514350">
-              <a:lnSpc>
-                <a:spcPct val="150000"/>
-              </a:lnSpc>
-              <a:buSzPct val="100000"/>
-              <a:buAutoNum type="arabicPeriod"/>
-            </a:pPr>
-            <a:endParaRPr lang="en-US" altLang="ko-KR" sz="1800" cap="none" dirty="0"/>
-          </a:p>
-          <a:p>
-            <a:pPr marL="514350" indent="-514350">
-              <a:lnSpc>
-                <a:spcPct val="150000"/>
-              </a:lnSpc>
-              <a:buSzPct val="100000"/>
-              <a:buAutoNum type="arabicPeriod"/>
-            </a:pPr>
-            <a:endParaRPr lang="ko-KR" altLang="en-US" sz="1800" cap="none" dirty="0"/>
-          </a:p>
-        </p:txBody>
-      </p:sp>
-      <p:sp>
-        <p:nvSpPr>
-          <p:cNvPr id="6" name="TextBox 5">
-            <a:extLst>
-              <a:ext uri="{FF2B5EF4-FFF2-40B4-BE49-F238E27FC236}">
-                <a16:creationId xmlns:a16="http://schemas.microsoft.com/office/drawing/2014/main" id="{0983F7B7-5C7A-3281-2C9C-2E6E60F23F68}"/>
-              </a:ext>
-            </a:extLst>
-          </p:cNvPr>
-          <p:cNvSpPr txBox="1"/>
-          <p:nvPr/>
-        </p:nvSpPr>
-        <p:spPr>
-          <a:xfrm>
-            <a:off x="7239000" y="1338537"/>
-            <a:ext cx="4400550" cy="3329053"/>
-          </a:xfrm>
-          <a:prstGeom prst="rect">
-            <a:avLst/>
-          </a:prstGeom>
-          <a:noFill/>
-        </p:spPr>
-        <p:txBody>
-          <a:bodyPr wrap="square">
-            <a:spAutoFit/>
-          </a:bodyPr>
-          <a:lstStyle/>
-          <a:p>
-            <a:pPr marL="514350" indent="-514350">
-              <a:lnSpc>
-                <a:spcPct val="200000"/>
-              </a:lnSpc>
-              <a:buClr>
-                <a:srgbClr val="FFC000"/>
-              </a:buClr>
-              <a:buFont typeface="+mj-lt"/>
-              <a:buAutoNum type="arabicPeriod" startAt="9"/>
-            </a:pPr>
-            <a:r>
-              <a:rPr lang="en-US" altLang="ko-KR" dirty="0"/>
-              <a:t>Transportation Problem</a:t>
-            </a:r>
-          </a:p>
-          <a:p>
-            <a:pPr marL="514350" indent="-514350">
-              <a:lnSpc>
-                <a:spcPct val="200000"/>
-              </a:lnSpc>
-              <a:buClr>
-                <a:srgbClr val="FFC000"/>
-              </a:buClr>
-              <a:buFont typeface="+mj-lt"/>
-              <a:buAutoNum type="arabicPeriod" startAt="9"/>
-            </a:pPr>
-            <a:r>
-              <a:rPr lang="en-US" altLang="ko-KR" dirty="0"/>
-              <a:t>Montecarlo simulation</a:t>
-            </a:r>
-          </a:p>
-          <a:p>
-            <a:pPr marL="514350" indent="-514350">
-              <a:lnSpc>
-                <a:spcPct val="200000"/>
-              </a:lnSpc>
-              <a:buClr>
-                <a:srgbClr val="FFC000"/>
-              </a:buClr>
-              <a:buFont typeface="+mj-lt"/>
-              <a:buAutoNum type="arabicPeriod" startAt="9"/>
-            </a:pPr>
-            <a:r>
-              <a:rPr lang="en-US" altLang="ko-KR" dirty="0"/>
-              <a:t>Random walk simulation</a:t>
-            </a:r>
-          </a:p>
-          <a:p>
-            <a:pPr marL="514350" indent="-514350">
-              <a:lnSpc>
-                <a:spcPct val="200000"/>
-              </a:lnSpc>
-              <a:buClr>
-                <a:srgbClr val="FFC000"/>
-              </a:buClr>
-              <a:buFont typeface="+mj-lt"/>
-              <a:buAutoNum type="arabicPeriod" startAt="9"/>
-            </a:pPr>
-            <a:r>
-              <a:rPr lang="en-US" altLang="ko-KR" dirty="0"/>
-              <a:t>Bootstrap</a:t>
-            </a:r>
-          </a:p>
-          <a:p>
-            <a:pPr marL="514350" indent="-514350">
-              <a:lnSpc>
-                <a:spcPct val="200000"/>
-              </a:lnSpc>
-              <a:buClr>
-                <a:srgbClr val="FFC000"/>
-              </a:buClr>
-              <a:buFont typeface="+mj-lt"/>
-              <a:buAutoNum type="arabicPeriod" startAt="9"/>
-            </a:pPr>
-            <a:r>
-              <a:rPr lang="en-US" altLang="ko-KR" dirty="0"/>
-              <a:t>Central limit theorem</a:t>
-            </a:r>
-          </a:p>
-          <a:p>
-            <a:pPr marL="514350" indent="-514350">
-              <a:lnSpc>
-                <a:spcPct val="200000"/>
-              </a:lnSpc>
-              <a:buClr>
-                <a:srgbClr val="FFC000"/>
-              </a:buClr>
-              <a:buFont typeface="+mj-lt"/>
-              <a:buAutoNum type="arabicPeriod" startAt="9"/>
-            </a:pPr>
-            <a:r>
-              <a:rPr lang="en-US" altLang="ko-KR" dirty="0"/>
-              <a:t>Random projection</a:t>
-            </a:r>
-          </a:p>
-        </p:txBody>
-      </p:sp>
-    </p:spTree>
-    <p:extLst>
-      <p:ext uri="{BB962C8B-B14F-4D97-AF65-F5344CB8AC3E}">
-        <p14:creationId xmlns:p14="http://schemas.microsoft.com/office/powerpoint/2010/main" val="1184269747"/>
-      </p:ext>
-    </p:extLst>
-  </p:cSld>
-  <p:clrMapOvr>
-    <a:masterClrMapping/>
-  </p:clrMapOvr>
-</p:sld>
-</file>
-
-<file path=ppt/slides/slide48.xml><?xml version="1.0" encoding="utf-8"?>
-<p:sld xmlns:a="http://schemas.openxmlformats.org/drawingml/2006/main" xmlns:r="http://schemas.openxmlformats.org/officeDocument/2006/relationships" xmlns:p="http://schemas.openxmlformats.org/presentationml/2006/main">
-  <p:cSld>
-    <p:spTree>
-      <p:nvGrpSpPr>
-        <p:cNvPr id="1" name="">
-          <a:extLst>
-            <a:ext uri="{FF2B5EF4-FFF2-40B4-BE49-F238E27FC236}">
-              <a16:creationId xmlns:a16="http://schemas.microsoft.com/office/drawing/2014/main" id="{F8570E3F-5EEC-F1A6-FAA6-F087DE60ECE5}"/>
-            </a:ext>
-          </a:extLst>
-        </p:cNvPr>
-        <p:cNvGrpSpPr/>
-        <p:nvPr/>
-      </p:nvGrpSpPr>
-      <p:grpSpPr>
-        <a:xfrm>
-          <a:off x="0" y="0"/>
-          <a:ext cx="0" cy="0"/>
-          <a:chOff x="0" y="0"/>
-          <a:chExt cx="0" cy="0"/>
-        </a:xfrm>
-      </p:grpSpPr>
-      <p:sp>
-        <p:nvSpPr>
-          <p:cNvPr id="6" name="제목 1">
-            <a:extLst>
-              <a:ext uri="{FF2B5EF4-FFF2-40B4-BE49-F238E27FC236}">
-                <a16:creationId xmlns:a16="http://schemas.microsoft.com/office/drawing/2014/main" id="{3A98E502-D2A8-03BA-7C44-261709BCB2FF}"/>
-              </a:ext>
-            </a:extLst>
-          </p:cNvPr>
-          <p:cNvSpPr>
-            <a:spLocks noGrp="1"/>
-          </p:cNvSpPr>
-          <p:nvPr>
-            <p:ph type="title"/>
-          </p:nvPr>
-        </p:nvSpPr>
-        <p:spPr>
-          <a:xfrm>
-            <a:off x="915383" y="139084"/>
-            <a:ext cx="10353762" cy="766439"/>
-          </a:xfrm>
-        </p:spPr>
-        <p:txBody>
-          <a:bodyPr>
-            <a:normAutofit/>
-          </a:bodyPr>
-          <a:lstStyle/>
-          <a:p>
-            <a:r>
-              <a:rPr lang="en-US" altLang="ko-KR" b="1" dirty="0">
-                <a:latin typeface="Times New Roman" panose="02020603050405020304" pitchFamily="18" charset="0"/>
-                <a:cs typeface="Times New Roman" panose="02020603050405020304" pitchFamily="18" charset="0"/>
-              </a:rPr>
-              <a:t>Linear Programming</a:t>
-            </a:r>
-            <a:endParaRPr lang="ko-KR" altLang="en-US" b="1" cap="none" dirty="0">
-              <a:latin typeface="Times New Roman" panose="02020603050405020304" pitchFamily="18" charset="0"/>
-              <a:cs typeface="Times New Roman" panose="02020603050405020304" pitchFamily="18" charset="0"/>
-            </a:endParaRPr>
-          </a:p>
-        </p:txBody>
-      </p:sp>
-      <p:sp>
-        <p:nvSpPr>
-          <p:cNvPr id="8" name="슬라이드 번호 개체 틀 7">
-            <a:extLst>
-              <a:ext uri="{FF2B5EF4-FFF2-40B4-BE49-F238E27FC236}">
-                <a16:creationId xmlns:a16="http://schemas.microsoft.com/office/drawing/2014/main" id="{2797A6E5-801E-04CF-7599-F1B28EB95EA7}"/>
-              </a:ext>
-            </a:extLst>
-          </p:cNvPr>
-          <p:cNvSpPr>
-            <a:spLocks noGrp="1"/>
-          </p:cNvSpPr>
-          <p:nvPr>
-            <p:ph type="sldNum" sz="quarter" idx="12"/>
-          </p:nvPr>
-        </p:nvSpPr>
-        <p:spPr/>
-        <p:txBody>
-          <a:bodyPr/>
-          <a:lstStyle/>
-          <a:p>
-            <a:fld id="{D57F1E4F-1CFF-5643-939E-02111984F565}" type="slidenum">
-              <a:rPr lang="en-US" smtClean="0"/>
-              <a:t>48</a:t>
-            </a:fld>
-            <a:endParaRPr lang="en-US" dirty="0"/>
-          </a:p>
-        </p:txBody>
-      </p:sp>
-      <p:sp>
-        <p:nvSpPr>
-          <p:cNvPr id="3" name="직사각형 2">
-            <a:extLst>
-              <a:ext uri="{FF2B5EF4-FFF2-40B4-BE49-F238E27FC236}">
-                <a16:creationId xmlns:a16="http://schemas.microsoft.com/office/drawing/2014/main" id="{69F3237E-DE96-394F-6719-57C4AE5790F0}"/>
-              </a:ext>
-            </a:extLst>
-          </p:cNvPr>
-          <p:cNvSpPr/>
-          <p:nvPr/>
-        </p:nvSpPr>
-        <p:spPr>
-          <a:xfrm>
-            <a:off x="535712" y="2286000"/>
-            <a:ext cx="10218013" cy="4276271"/>
-          </a:xfrm>
-          <a:prstGeom prst="rect">
-            <a:avLst/>
-          </a:prstGeom>
-          <a:solidFill>
-            <a:schemeClr val="bg1">
-              <a:lumMod val="75000"/>
-              <a:lumOff val="25000"/>
-            </a:schemeClr>
-          </a:solidFill>
-        </p:spPr>
-        <p:style>
-          <a:lnRef idx="2">
-            <a:schemeClr val="accent1">
-              <a:shade val="15000"/>
-            </a:schemeClr>
-          </a:lnRef>
-          <a:fillRef idx="1">
-            <a:schemeClr val="accent1"/>
-          </a:fillRef>
-          <a:effectRef idx="0">
-            <a:schemeClr val="accent1"/>
-          </a:effectRef>
-          <a:fontRef idx="minor">
-            <a:schemeClr val="lt1"/>
-          </a:fontRef>
-        </p:style>
-        <p:txBody>
-          <a:bodyPr rtlCol="0" anchor="ctr"/>
-          <a:lstStyle/>
-          <a:p>
-            <a:pPr algn="ctr"/>
-            <a:endParaRPr lang="ko-KR" altLang="en-US" dirty="0"/>
-          </a:p>
-        </p:txBody>
-      </p:sp>
-      <p:sp>
-        <p:nvSpPr>
-          <p:cNvPr id="30" name="TextBox 29">
-            <a:extLst>
-              <a:ext uri="{FF2B5EF4-FFF2-40B4-BE49-F238E27FC236}">
-                <a16:creationId xmlns:a16="http://schemas.microsoft.com/office/drawing/2014/main" id="{D77CEBF4-443F-B850-DC6E-5B092470F7FF}"/>
-              </a:ext>
-            </a:extLst>
-          </p:cNvPr>
-          <p:cNvSpPr txBox="1"/>
-          <p:nvPr/>
-        </p:nvSpPr>
-        <p:spPr>
-          <a:xfrm>
-            <a:off x="535712" y="1420336"/>
-            <a:ext cx="10655027" cy="4932441"/>
-          </a:xfrm>
-          <a:prstGeom prst="rect">
-            <a:avLst/>
-          </a:prstGeom>
-          <a:noFill/>
-        </p:spPr>
-        <p:txBody>
-          <a:bodyPr wrap="square" rtlCol="0">
-            <a:spAutoFit/>
-          </a:bodyPr>
-          <a:lstStyle/>
-          <a:p>
-            <a:pPr>
-              <a:lnSpc>
-                <a:spcPct val="150000"/>
-              </a:lnSpc>
-            </a:pPr>
-            <a:r>
-              <a:rPr lang="ko-KR" altLang="en-US" sz="2400" dirty="0">
-                <a:latin typeface="맑은 고딕 Semilight" panose="020B0502040204020203" pitchFamily="50" charset="-127"/>
-                <a:ea typeface="맑은 고딕 Semilight" panose="020B0502040204020203" pitchFamily="50" charset="-127"/>
-                <a:cs typeface="맑은 고딕 Semilight" panose="020B0502040204020203" pitchFamily="50" charset="-127"/>
-              </a:rPr>
-              <a:t>아래</a:t>
-            </a:r>
-            <a:r>
-              <a:rPr lang="en-US" altLang="ko-KR" sz="2400" dirty="0">
-                <a:latin typeface="맑은 고딕 Semilight" panose="020B0502040204020203" pitchFamily="50" charset="-127"/>
-                <a:ea typeface="맑은 고딕 Semilight" panose="020B0502040204020203" pitchFamily="50" charset="-127"/>
-                <a:cs typeface="맑은 고딕 Semilight" panose="020B0502040204020203" pitchFamily="50" charset="-127"/>
-              </a:rPr>
-              <a:t> </a:t>
-            </a:r>
-            <a:r>
-              <a:rPr lang="ko-KR" altLang="en-US" sz="2400" dirty="0">
-                <a:latin typeface="맑은 고딕 Semilight" panose="020B0502040204020203" pitchFamily="50" charset="-127"/>
-                <a:ea typeface="맑은 고딕 Semilight" panose="020B0502040204020203" pitchFamily="50" charset="-127"/>
-                <a:cs typeface="맑은 고딕 Semilight" panose="020B0502040204020203" pitchFamily="50" charset="-127"/>
-              </a:rPr>
-              <a:t>문제 </a:t>
-            </a:r>
-            <a:r>
-              <a:rPr lang="en-US" altLang="ko-KR" sz="2400" dirty="0">
-                <a:latin typeface="맑은 고딕 Semilight" panose="020B0502040204020203" pitchFamily="50" charset="-127"/>
-                <a:ea typeface="맑은 고딕 Semilight" panose="020B0502040204020203" pitchFamily="50" charset="-127"/>
-                <a:cs typeface="맑은 고딕 Semilight" panose="020B0502040204020203" pitchFamily="50" charset="-127"/>
-                <a:sym typeface="Wingdings" panose="05000000000000000000" pitchFamily="2" charset="2"/>
-              </a:rPr>
-              <a:t></a:t>
-            </a:r>
-            <a:r>
-              <a:rPr lang="en-US" altLang="ko-KR" sz="2400" dirty="0">
-                <a:latin typeface="맑은 고딕 Semilight" panose="020B0502040204020203" pitchFamily="50" charset="-127"/>
-                <a:ea typeface="맑은 고딕 Semilight" panose="020B0502040204020203" pitchFamily="50" charset="-127"/>
-                <a:cs typeface="맑은 고딕 Semilight" panose="020B0502040204020203" pitchFamily="50" charset="-127"/>
-              </a:rPr>
-              <a:t> </a:t>
-            </a:r>
-            <a:r>
-              <a:rPr lang="ko-KR" altLang="en-US" sz="2400" dirty="0">
-                <a:latin typeface="맑은 고딕 Semilight" panose="020B0502040204020203" pitchFamily="50" charset="-127"/>
-                <a:ea typeface="맑은 고딕 Semilight" panose="020B0502040204020203" pitchFamily="50" charset="-127"/>
-                <a:cs typeface="맑은 고딕 Semilight" panose="020B0502040204020203" pitchFamily="50" charset="-127"/>
-              </a:rPr>
-              <a:t>선형계획법으로</a:t>
-            </a:r>
-            <a:r>
-              <a:rPr lang="en-US" altLang="ko-KR" sz="2400" dirty="0">
-                <a:latin typeface="맑은 고딕 Semilight" panose="020B0502040204020203" pitchFamily="50" charset="-127"/>
-                <a:ea typeface="맑은 고딕 Semilight" panose="020B0502040204020203" pitchFamily="50" charset="-127"/>
-                <a:cs typeface="맑은 고딕 Semilight" panose="020B0502040204020203" pitchFamily="50" charset="-127"/>
-              </a:rPr>
-              <a:t> </a:t>
-            </a:r>
-            <a:r>
-              <a:rPr lang="ko-KR" altLang="en-US" sz="2400" dirty="0">
-                <a:latin typeface="맑은 고딕 Semilight" panose="020B0502040204020203" pitchFamily="50" charset="-127"/>
-                <a:ea typeface="맑은 고딕 Semilight" panose="020B0502040204020203" pitchFamily="50" charset="-127"/>
-                <a:cs typeface="맑은 고딕 Semilight" panose="020B0502040204020203" pitchFamily="50" charset="-127"/>
-              </a:rPr>
-              <a:t>이익을 최대화하는 </a:t>
-            </a:r>
-            <a:r>
-              <a:rPr lang="en-US" altLang="ko-KR" sz="2400" dirty="0">
-                <a:latin typeface="맑은 고딕 Semilight" panose="020B0502040204020203" pitchFamily="50" charset="-127"/>
-                <a:ea typeface="맑은 고딕 Semilight" panose="020B0502040204020203" pitchFamily="50" charset="-127"/>
-                <a:cs typeface="맑은 고딕 Semilight" panose="020B0502040204020203" pitchFamily="50" charset="-127"/>
-              </a:rPr>
-              <a:t>Optimization</a:t>
-            </a:r>
-          </a:p>
-          <a:p>
-            <a:pPr marL="342900" indent="-342900">
-              <a:lnSpc>
-                <a:spcPct val="150000"/>
-              </a:lnSpc>
-              <a:buFont typeface="Wingdings" panose="05000000000000000000" pitchFamily="2" charset="2"/>
-              <a:buChar char="§"/>
-            </a:pPr>
-            <a:endParaRPr lang="en-US" altLang="ko-KR" sz="2000" b="1" dirty="0">
-              <a:latin typeface="맑은 고딕 Semilight" panose="020B0502040204020203" pitchFamily="50" charset="-127"/>
-              <a:ea typeface="맑은 고딕 Semilight" panose="020B0502040204020203" pitchFamily="50" charset="-127"/>
-              <a:cs typeface="맑은 고딕 Semilight" panose="020B0502040204020203" pitchFamily="50" charset="-127"/>
-            </a:endParaRPr>
-          </a:p>
-          <a:p>
-            <a:pPr marL="342900" indent="-342900">
-              <a:lnSpc>
-                <a:spcPct val="150000"/>
-              </a:lnSpc>
-              <a:buFont typeface="Wingdings" panose="05000000000000000000" pitchFamily="2" charset="2"/>
-              <a:buChar char="§"/>
-            </a:pPr>
-            <a:r>
-              <a:rPr lang="ko-KR" altLang="en-US" sz="2000" b="1" dirty="0">
-                <a:latin typeface="맑은 고딕 Semilight" panose="020B0502040204020203" pitchFamily="50" charset="-127"/>
-                <a:ea typeface="맑은 고딕 Semilight" panose="020B0502040204020203" pitchFamily="50" charset="-127"/>
-                <a:cs typeface="맑은 고딕 Semilight" panose="020B0502040204020203" pitchFamily="50" charset="-127"/>
-              </a:rPr>
-              <a:t>목표</a:t>
-            </a:r>
-            <a:r>
-              <a:rPr lang="en-US" altLang="ko-KR" sz="2000" b="1" dirty="0">
-                <a:latin typeface="맑은 고딕 Semilight" panose="020B0502040204020203" pitchFamily="50" charset="-127"/>
-                <a:ea typeface="맑은 고딕 Semilight" panose="020B0502040204020203" pitchFamily="50" charset="-127"/>
-                <a:cs typeface="맑은 고딕 Semilight" panose="020B0502040204020203" pitchFamily="50" charset="-127"/>
-              </a:rPr>
-              <a:t>: </a:t>
-            </a:r>
-          </a:p>
-          <a:p>
-            <a:pPr marL="800100" lvl="1" indent="-342900">
-              <a:lnSpc>
-                <a:spcPct val="150000"/>
-              </a:lnSpc>
-              <a:buFont typeface="Wingdings" panose="05000000000000000000" pitchFamily="2" charset="2"/>
-              <a:buChar char="§"/>
-            </a:pPr>
-            <a:r>
-              <a:rPr lang="ko-KR" altLang="en-US" b="1" dirty="0">
-                <a:latin typeface="맑은 고딕 Semilight" panose="020B0502040204020203" pitchFamily="50" charset="-127"/>
-                <a:ea typeface="맑은 고딕 Semilight" panose="020B0502040204020203" pitchFamily="50" charset="-127"/>
-                <a:cs typeface="맑은 고딕 Semilight" panose="020B0502040204020203" pitchFamily="50" charset="-127"/>
-              </a:rPr>
-              <a:t>의자</a:t>
-            </a:r>
-            <a:r>
-              <a:rPr lang="en-US" altLang="ko-KR" b="1" dirty="0">
-                <a:latin typeface="맑은 고딕 Semilight" panose="020B0502040204020203" pitchFamily="50" charset="-127"/>
-                <a:ea typeface="맑은 고딕 Semilight" panose="020B0502040204020203" pitchFamily="50" charset="-127"/>
-                <a:cs typeface="맑은 고딕 Semilight" panose="020B0502040204020203" pitchFamily="50" charset="-127"/>
-              </a:rPr>
-              <a:t>(x1)</a:t>
-            </a:r>
-            <a:r>
-              <a:rPr lang="ko-KR" altLang="en-US" b="1" dirty="0">
-                <a:latin typeface="맑은 고딕 Semilight" panose="020B0502040204020203" pitchFamily="50" charset="-127"/>
-                <a:ea typeface="맑은 고딕 Semilight" panose="020B0502040204020203" pitchFamily="50" charset="-127"/>
-                <a:cs typeface="맑은 고딕 Semilight" panose="020B0502040204020203" pitchFamily="50" charset="-127"/>
-              </a:rPr>
-              <a:t>와 책상</a:t>
-            </a:r>
-            <a:r>
-              <a:rPr lang="en-US" altLang="ko-KR" b="1" dirty="0">
-                <a:latin typeface="맑은 고딕 Semilight" panose="020B0502040204020203" pitchFamily="50" charset="-127"/>
-                <a:ea typeface="맑은 고딕 Semilight" panose="020B0502040204020203" pitchFamily="50" charset="-127"/>
-                <a:cs typeface="맑은 고딕 Semilight" panose="020B0502040204020203" pitchFamily="50" charset="-127"/>
-              </a:rPr>
-              <a:t>(x2)</a:t>
-            </a:r>
-            <a:r>
-              <a:rPr lang="ko-KR" altLang="en-US" b="1" dirty="0">
-                <a:latin typeface="맑은 고딕 Semilight" panose="020B0502040204020203" pitchFamily="50" charset="-127"/>
-                <a:ea typeface="맑은 고딕 Semilight" panose="020B0502040204020203" pitchFamily="50" charset="-127"/>
-                <a:cs typeface="맑은 고딕 Semilight" panose="020B0502040204020203" pitchFamily="50" charset="-127"/>
-              </a:rPr>
-              <a:t>을 생산하는 공장에서 이익을 최대화하는 의자와 책상의 생산량은</a:t>
-            </a:r>
-            <a:r>
-              <a:rPr lang="en-US" altLang="ko-KR" b="1" dirty="0">
-                <a:latin typeface="맑은 고딕 Semilight" panose="020B0502040204020203" pitchFamily="50" charset="-127"/>
-                <a:ea typeface="맑은 고딕 Semilight" panose="020B0502040204020203" pitchFamily="50" charset="-127"/>
-                <a:cs typeface="맑은 고딕 Semilight" panose="020B0502040204020203" pitchFamily="50" charset="-127"/>
-              </a:rPr>
-              <a:t>?</a:t>
-            </a:r>
-          </a:p>
-          <a:p>
-            <a:pPr marL="342900" indent="-342900">
-              <a:lnSpc>
-                <a:spcPct val="150000"/>
-              </a:lnSpc>
-              <a:buFont typeface="Wingdings" panose="05000000000000000000" pitchFamily="2" charset="2"/>
-              <a:buChar char="§"/>
-            </a:pPr>
-            <a:endParaRPr lang="en-US" altLang="ko-KR" b="1" dirty="0">
-              <a:latin typeface="맑은 고딕 Semilight" panose="020B0502040204020203" pitchFamily="50" charset="-127"/>
-              <a:ea typeface="맑은 고딕 Semilight" panose="020B0502040204020203" pitchFamily="50" charset="-127"/>
-              <a:cs typeface="맑은 고딕 Semilight" panose="020B0502040204020203" pitchFamily="50" charset="-127"/>
-            </a:endParaRPr>
-          </a:p>
-          <a:p>
-            <a:pPr marL="342900" indent="-342900">
-              <a:lnSpc>
-                <a:spcPct val="150000"/>
-              </a:lnSpc>
-              <a:buFont typeface="Wingdings" panose="05000000000000000000" pitchFamily="2" charset="2"/>
-              <a:buChar char="§"/>
-            </a:pPr>
-            <a:r>
-              <a:rPr lang="ko-KR" altLang="en-US" sz="2000" b="1" dirty="0">
-                <a:latin typeface="맑은 고딕 Semilight" panose="020B0502040204020203" pitchFamily="50" charset="-127"/>
-                <a:ea typeface="맑은 고딕 Semilight" panose="020B0502040204020203" pitchFamily="50" charset="-127"/>
-                <a:cs typeface="맑은 고딕 Semilight" panose="020B0502040204020203" pitchFamily="50" charset="-127"/>
-              </a:rPr>
-              <a:t>이익</a:t>
-            </a:r>
-            <a:r>
-              <a:rPr lang="en-US" altLang="ko-KR" sz="2000" b="1" dirty="0">
-                <a:latin typeface="맑은 고딕 Semilight" panose="020B0502040204020203" pitchFamily="50" charset="-127"/>
-                <a:ea typeface="맑은 고딕 Semilight" panose="020B0502040204020203" pitchFamily="50" charset="-127"/>
-                <a:cs typeface="맑은 고딕 Semilight" panose="020B0502040204020203" pitchFamily="50" charset="-127"/>
-              </a:rPr>
-              <a:t>: </a:t>
-            </a:r>
-          </a:p>
-          <a:p>
-            <a:pPr marL="800100" lvl="1" indent="-342900">
-              <a:lnSpc>
-                <a:spcPct val="150000"/>
-              </a:lnSpc>
-              <a:buFont typeface="Wingdings" panose="05000000000000000000" pitchFamily="2" charset="2"/>
-              <a:buChar char="§"/>
-            </a:pPr>
-            <a:r>
-              <a:rPr lang="ko-KR" altLang="en-US" b="1" dirty="0">
-                <a:latin typeface="맑은 고딕 Semilight" panose="020B0502040204020203" pitchFamily="50" charset="-127"/>
-                <a:ea typeface="맑은 고딕 Semilight" panose="020B0502040204020203" pitchFamily="50" charset="-127"/>
-                <a:cs typeface="맑은 고딕 Semilight" panose="020B0502040204020203" pitchFamily="50" charset="-127"/>
-              </a:rPr>
-              <a:t>의자 한 개당 </a:t>
-            </a:r>
-            <a:r>
-              <a:rPr lang="en-US" altLang="ko-KR" b="1" dirty="0">
-                <a:latin typeface="맑은 고딕 Semilight" panose="020B0502040204020203" pitchFamily="50" charset="-127"/>
-                <a:ea typeface="맑은 고딕 Semilight" panose="020B0502040204020203" pitchFamily="50" charset="-127"/>
-                <a:cs typeface="맑은 고딕 Semilight" panose="020B0502040204020203" pitchFamily="50" charset="-127"/>
-              </a:rPr>
-              <a:t>3</a:t>
-            </a:r>
-            <a:r>
-              <a:rPr lang="ko-KR" altLang="en-US" b="1" dirty="0">
-                <a:latin typeface="맑은 고딕 Semilight" panose="020B0502040204020203" pitchFamily="50" charset="-127"/>
-                <a:ea typeface="맑은 고딕 Semilight" panose="020B0502040204020203" pitchFamily="50" charset="-127"/>
-                <a:cs typeface="맑은 고딕 Semilight" panose="020B0502040204020203" pitchFamily="50" charset="-127"/>
-              </a:rPr>
-              <a:t>만 원</a:t>
-            </a:r>
-            <a:r>
-              <a:rPr lang="en-US" altLang="ko-KR" b="1" dirty="0">
-                <a:latin typeface="맑은 고딕 Semilight" panose="020B0502040204020203" pitchFamily="50" charset="-127"/>
-                <a:ea typeface="맑은 고딕 Semilight" panose="020B0502040204020203" pitchFamily="50" charset="-127"/>
-                <a:cs typeface="맑은 고딕 Semilight" panose="020B0502040204020203" pitchFamily="50" charset="-127"/>
-              </a:rPr>
-              <a:t>, </a:t>
-            </a:r>
-            <a:r>
-              <a:rPr lang="ko-KR" altLang="en-US" b="1" dirty="0">
-                <a:latin typeface="맑은 고딕 Semilight" panose="020B0502040204020203" pitchFamily="50" charset="-127"/>
-                <a:ea typeface="맑은 고딕 Semilight" panose="020B0502040204020203" pitchFamily="50" charset="-127"/>
-                <a:cs typeface="맑은 고딕 Semilight" panose="020B0502040204020203" pitchFamily="50" charset="-127"/>
-              </a:rPr>
-              <a:t>책상 한 개당 </a:t>
-            </a:r>
-            <a:r>
-              <a:rPr lang="en-US" altLang="ko-KR" b="1" dirty="0">
-                <a:latin typeface="맑은 고딕 Semilight" panose="020B0502040204020203" pitchFamily="50" charset="-127"/>
-                <a:ea typeface="맑은 고딕 Semilight" panose="020B0502040204020203" pitchFamily="50" charset="-127"/>
-                <a:cs typeface="맑은 고딕 Semilight" panose="020B0502040204020203" pitchFamily="50" charset="-127"/>
-              </a:rPr>
-              <a:t>5</a:t>
-            </a:r>
-            <a:r>
-              <a:rPr lang="ko-KR" altLang="en-US" b="1" dirty="0">
-                <a:latin typeface="맑은 고딕 Semilight" panose="020B0502040204020203" pitchFamily="50" charset="-127"/>
-                <a:ea typeface="맑은 고딕 Semilight" panose="020B0502040204020203" pitchFamily="50" charset="-127"/>
-                <a:cs typeface="맑은 고딕 Semilight" panose="020B0502040204020203" pitchFamily="50" charset="-127"/>
-              </a:rPr>
-              <a:t>만 원의 이익</a:t>
-            </a:r>
-            <a:endParaRPr lang="en-US" altLang="ko-KR" b="1" dirty="0">
-              <a:latin typeface="맑은 고딕 Semilight" panose="020B0502040204020203" pitchFamily="50" charset="-127"/>
-              <a:ea typeface="맑은 고딕 Semilight" panose="020B0502040204020203" pitchFamily="50" charset="-127"/>
-              <a:cs typeface="맑은 고딕 Semilight" panose="020B0502040204020203" pitchFamily="50" charset="-127"/>
-            </a:endParaRPr>
-          </a:p>
-          <a:p>
-            <a:pPr marL="342900" indent="-342900">
-              <a:lnSpc>
-                <a:spcPct val="150000"/>
-              </a:lnSpc>
-              <a:buFont typeface="Wingdings" panose="05000000000000000000" pitchFamily="2" charset="2"/>
-              <a:buChar char="§"/>
-            </a:pPr>
-            <a:endParaRPr lang="en-US" altLang="ko-KR" b="1" dirty="0">
-              <a:latin typeface="맑은 고딕 Semilight" panose="020B0502040204020203" pitchFamily="50" charset="-127"/>
-              <a:ea typeface="맑은 고딕 Semilight" panose="020B0502040204020203" pitchFamily="50" charset="-127"/>
-              <a:cs typeface="맑은 고딕 Semilight" panose="020B0502040204020203" pitchFamily="50" charset="-127"/>
-            </a:endParaRPr>
-          </a:p>
-          <a:p>
-            <a:pPr marL="342900" indent="-342900">
-              <a:lnSpc>
-                <a:spcPct val="150000"/>
-              </a:lnSpc>
-              <a:buFont typeface="Wingdings" panose="05000000000000000000" pitchFamily="2" charset="2"/>
-              <a:buChar char="§"/>
-            </a:pPr>
-            <a:r>
-              <a:rPr lang="ko-KR" altLang="en-US" sz="2000" b="1" dirty="0">
-                <a:latin typeface="맑은 고딕 Semilight" panose="020B0502040204020203" pitchFamily="50" charset="-127"/>
-                <a:ea typeface="맑은 고딕 Semilight" panose="020B0502040204020203" pitchFamily="50" charset="-127"/>
-                <a:cs typeface="맑은 고딕 Semilight" panose="020B0502040204020203" pitchFamily="50" charset="-127"/>
-              </a:rPr>
-              <a:t>자원 제약</a:t>
-            </a:r>
-            <a:r>
-              <a:rPr lang="en-US" altLang="ko-KR" sz="2000" b="1" dirty="0">
-                <a:latin typeface="맑은 고딕 Semilight" panose="020B0502040204020203" pitchFamily="50" charset="-127"/>
-                <a:ea typeface="맑은 고딕 Semilight" panose="020B0502040204020203" pitchFamily="50" charset="-127"/>
-                <a:cs typeface="맑은 고딕 Semilight" panose="020B0502040204020203" pitchFamily="50" charset="-127"/>
-              </a:rPr>
-              <a:t>:</a:t>
-            </a:r>
-          </a:p>
-          <a:p>
-            <a:pPr marL="800100" lvl="1" indent="-342900">
-              <a:lnSpc>
-                <a:spcPct val="150000"/>
-              </a:lnSpc>
-              <a:buFont typeface="Wingdings" panose="05000000000000000000" pitchFamily="2" charset="2"/>
-              <a:buChar char="§"/>
-            </a:pPr>
-            <a:r>
-              <a:rPr lang="ko-KR" altLang="en-US" b="1" dirty="0">
-                <a:latin typeface="맑은 고딕 Semilight" panose="020B0502040204020203" pitchFamily="50" charset="-127"/>
-                <a:ea typeface="맑은 고딕 Semilight" panose="020B0502040204020203" pitchFamily="50" charset="-127"/>
-                <a:cs typeface="맑은 고딕 Semilight" panose="020B0502040204020203" pitchFamily="50" charset="-127"/>
-              </a:rPr>
-              <a:t>목재</a:t>
-            </a:r>
-            <a:r>
-              <a:rPr lang="en-US" altLang="ko-KR" b="1" dirty="0">
-                <a:latin typeface="맑은 고딕 Semilight" panose="020B0502040204020203" pitchFamily="50" charset="-127"/>
-                <a:ea typeface="맑은 고딕 Semilight" panose="020B0502040204020203" pitchFamily="50" charset="-127"/>
-                <a:cs typeface="맑은 고딕 Semilight" panose="020B0502040204020203" pitchFamily="50" charset="-127"/>
-              </a:rPr>
-              <a:t>: </a:t>
-            </a:r>
-            <a:r>
-              <a:rPr lang="ko-KR" altLang="en-US" b="1" dirty="0">
-                <a:latin typeface="맑은 고딕 Semilight" panose="020B0502040204020203" pitchFamily="50" charset="-127"/>
-                <a:ea typeface="맑은 고딕 Semilight" panose="020B0502040204020203" pitchFamily="50" charset="-127"/>
-                <a:cs typeface="맑은 고딕 Semilight" panose="020B0502040204020203" pitchFamily="50" charset="-127"/>
-              </a:rPr>
-              <a:t>의자는 </a:t>
-            </a:r>
-            <a:r>
-              <a:rPr lang="en-US" altLang="ko-KR" b="1" dirty="0">
-                <a:latin typeface="맑은 고딕 Semilight" panose="020B0502040204020203" pitchFamily="50" charset="-127"/>
-                <a:ea typeface="맑은 고딕 Semilight" panose="020B0502040204020203" pitchFamily="50" charset="-127"/>
-                <a:cs typeface="맑은 고딕 Semilight" panose="020B0502040204020203" pitchFamily="50" charset="-127"/>
-              </a:rPr>
-              <a:t>2</a:t>
-            </a:r>
-            <a:r>
-              <a:rPr lang="ko-KR" altLang="en-US" b="1" dirty="0">
-                <a:latin typeface="맑은 고딕 Semilight" panose="020B0502040204020203" pitchFamily="50" charset="-127"/>
-                <a:ea typeface="맑은 고딕 Semilight" panose="020B0502040204020203" pitchFamily="50" charset="-127"/>
-                <a:cs typeface="맑은 고딕 Semilight" panose="020B0502040204020203" pitchFamily="50" charset="-127"/>
-              </a:rPr>
-              <a:t>단위</a:t>
-            </a:r>
-            <a:r>
-              <a:rPr lang="en-US" altLang="ko-KR" b="1" dirty="0">
-                <a:latin typeface="맑은 고딕 Semilight" panose="020B0502040204020203" pitchFamily="50" charset="-127"/>
-                <a:ea typeface="맑은 고딕 Semilight" panose="020B0502040204020203" pitchFamily="50" charset="-127"/>
-                <a:cs typeface="맑은 고딕 Semilight" panose="020B0502040204020203" pitchFamily="50" charset="-127"/>
-              </a:rPr>
-              <a:t>, </a:t>
-            </a:r>
-            <a:r>
-              <a:rPr lang="ko-KR" altLang="en-US" b="1" dirty="0">
-                <a:latin typeface="맑은 고딕 Semilight" panose="020B0502040204020203" pitchFamily="50" charset="-127"/>
-                <a:ea typeface="맑은 고딕 Semilight" panose="020B0502040204020203" pitchFamily="50" charset="-127"/>
-                <a:cs typeface="맑은 고딕 Semilight" panose="020B0502040204020203" pitchFamily="50" charset="-127"/>
-              </a:rPr>
-              <a:t>책상은 </a:t>
-            </a:r>
-            <a:r>
-              <a:rPr lang="en-US" altLang="ko-KR" b="1" dirty="0">
-                <a:latin typeface="맑은 고딕 Semilight" panose="020B0502040204020203" pitchFamily="50" charset="-127"/>
-                <a:ea typeface="맑은 고딕 Semilight" panose="020B0502040204020203" pitchFamily="50" charset="-127"/>
-                <a:cs typeface="맑은 고딕 Semilight" panose="020B0502040204020203" pitchFamily="50" charset="-127"/>
-              </a:rPr>
-              <a:t>3</a:t>
-            </a:r>
-            <a:r>
-              <a:rPr lang="ko-KR" altLang="en-US" b="1" dirty="0">
-                <a:latin typeface="맑은 고딕 Semilight" panose="020B0502040204020203" pitchFamily="50" charset="-127"/>
-                <a:ea typeface="맑은 고딕 Semilight" panose="020B0502040204020203" pitchFamily="50" charset="-127"/>
-                <a:cs typeface="맑은 고딕 Semilight" panose="020B0502040204020203" pitchFamily="50" charset="-127"/>
-              </a:rPr>
-              <a:t>단위가 필요하며 총 </a:t>
-            </a:r>
-            <a:r>
-              <a:rPr lang="en-US" altLang="ko-KR" b="1" dirty="0">
-                <a:latin typeface="맑은 고딕 Semilight" panose="020B0502040204020203" pitchFamily="50" charset="-127"/>
-                <a:ea typeface="맑은 고딕 Semilight" panose="020B0502040204020203" pitchFamily="50" charset="-127"/>
-                <a:cs typeface="맑은 고딕 Semilight" panose="020B0502040204020203" pitchFamily="50" charset="-127"/>
-              </a:rPr>
-              <a:t>30</a:t>
-            </a:r>
-            <a:r>
-              <a:rPr lang="ko-KR" altLang="en-US" b="1" dirty="0">
-                <a:latin typeface="맑은 고딕 Semilight" panose="020B0502040204020203" pitchFamily="50" charset="-127"/>
-                <a:ea typeface="맑은 고딕 Semilight" panose="020B0502040204020203" pitchFamily="50" charset="-127"/>
-                <a:cs typeface="맑은 고딕 Semilight" panose="020B0502040204020203" pitchFamily="50" charset="-127"/>
-              </a:rPr>
-              <a:t>단위 까지만 사용 가능</a:t>
-            </a:r>
-            <a:endParaRPr lang="en-US" altLang="ko-KR" b="1" dirty="0">
-              <a:latin typeface="맑은 고딕 Semilight" panose="020B0502040204020203" pitchFamily="50" charset="-127"/>
-              <a:ea typeface="맑은 고딕 Semilight" panose="020B0502040204020203" pitchFamily="50" charset="-127"/>
-              <a:cs typeface="맑은 고딕 Semilight" panose="020B0502040204020203" pitchFamily="50" charset="-127"/>
-            </a:endParaRPr>
-          </a:p>
-          <a:p>
-            <a:pPr marL="800100" lvl="1" indent="-342900">
-              <a:lnSpc>
-                <a:spcPct val="150000"/>
-              </a:lnSpc>
-              <a:buFont typeface="Wingdings" panose="05000000000000000000" pitchFamily="2" charset="2"/>
-              <a:buChar char="§"/>
-            </a:pPr>
-            <a:r>
-              <a:rPr lang="ko-KR" altLang="en-US" b="1" dirty="0">
-                <a:latin typeface="맑은 고딕 Semilight" panose="020B0502040204020203" pitchFamily="50" charset="-127"/>
-                <a:ea typeface="맑은 고딕 Semilight" panose="020B0502040204020203" pitchFamily="50" charset="-127"/>
-                <a:cs typeface="맑은 고딕 Semilight" panose="020B0502040204020203" pitchFamily="50" charset="-127"/>
-              </a:rPr>
-              <a:t>노동 시간</a:t>
-            </a:r>
-            <a:r>
-              <a:rPr lang="en-US" altLang="ko-KR" b="1" dirty="0">
-                <a:latin typeface="맑은 고딕 Semilight" panose="020B0502040204020203" pitchFamily="50" charset="-127"/>
-                <a:ea typeface="맑은 고딕 Semilight" panose="020B0502040204020203" pitchFamily="50" charset="-127"/>
-                <a:cs typeface="맑은 고딕 Semilight" panose="020B0502040204020203" pitchFamily="50" charset="-127"/>
-              </a:rPr>
-              <a:t>: </a:t>
-            </a:r>
-            <a:r>
-              <a:rPr lang="ko-KR" altLang="en-US" b="1" dirty="0">
-                <a:latin typeface="맑은 고딕 Semilight" panose="020B0502040204020203" pitchFamily="50" charset="-127"/>
-                <a:ea typeface="맑은 고딕 Semilight" panose="020B0502040204020203" pitchFamily="50" charset="-127"/>
-                <a:cs typeface="맑은 고딕 Semilight" panose="020B0502040204020203" pitchFamily="50" charset="-127"/>
-              </a:rPr>
-              <a:t>의자는 </a:t>
-            </a:r>
-            <a:r>
-              <a:rPr lang="en-US" altLang="ko-KR" b="1" dirty="0">
-                <a:latin typeface="맑은 고딕 Semilight" panose="020B0502040204020203" pitchFamily="50" charset="-127"/>
-                <a:ea typeface="맑은 고딕 Semilight" panose="020B0502040204020203" pitchFamily="50" charset="-127"/>
-                <a:cs typeface="맑은 고딕 Semilight" panose="020B0502040204020203" pitchFamily="50" charset="-127"/>
-              </a:rPr>
-              <a:t>1</a:t>
-            </a:r>
-            <a:r>
-              <a:rPr lang="ko-KR" altLang="en-US" b="1" dirty="0">
-                <a:latin typeface="맑은 고딕 Semilight" panose="020B0502040204020203" pitchFamily="50" charset="-127"/>
-                <a:ea typeface="맑은 고딕 Semilight" panose="020B0502040204020203" pitchFamily="50" charset="-127"/>
-                <a:cs typeface="맑은 고딕 Semilight" panose="020B0502040204020203" pitchFamily="50" charset="-127"/>
-              </a:rPr>
-              <a:t>시간</a:t>
-            </a:r>
-            <a:r>
-              <a:rPr lang="en-US" altLang="ko-KR" b="1" dirty="0">
-                <a:latin typeface="맑은 고딕 Semilight" panose="020B0502040204020203" pitchFamily="50" charset="-127"/>
-                <a:ea typeface="맑은 고딕 Semilight" panose="020B0502040204020203" pitchFamily="50" charset="-127"/>
-                <a:cs typeface="맑은 고딕 Semilight" panose="020B0502040204020203" pitchFamily="50" charset="-127"/>
-              </a:rPr>
-              <a:t>, </a:t>
-            </a:r>
-            <a:r>
-              <a:rPr lang="ko-KR" altLang="en-US" b="1" dirty="0">
-                <a:latin typeface="맑은 고딕 Semilight" panose="020B0502040204020203" pitchFamily="50" charset="-127"/>
-                <a:ea typeface="맑은 고딕 Semilight" panose="020B0502040204020203" pitchFamily="50" charset="-127"/>
-                <a:cs typeface="맑은 고딕 Semilight" panose="020B0502040204020203" pitchFamily="50" charset="-127"/>
-              </a:rPr>
-              <a:t>책상은 </a:t>
-            </a:r>
-            <a:r>
-              <a:rPr lang="en-US" altLang="ko-KR" b="1" dirty="0">
-                <a:latin typeface="맑은 고딕 Semilight" panose="020B0502040204020203" pitchFamily="50" charset="-127"/>
-                <a:ea typeface="맑은 고딕 Semilight" panose="020B0502040204020203" pitchFamily="50" charset="-127"/>
-                <a:cs typeface="맑은 고딕 Semilight" panose="020B0502040204020203" pitchFamily="50" charset="-127"/>
-              </a:rPr>
-              <a:t>2</a:t>
-            </a:r>
-            <a:r>
-              <a:rPr lang="ko-KR" altLang="en-US" b="1" dirty="0">
-                <a:latin typeface="맑은 고딕 Semilight" panose="020B0502040204020203" pitchFamily="50" charset="-127"/>
-                <a:ea typeface="맑은 고딕 Semilight" panose="020B0502040204020203" pitchFamily="50" charset="-127"/>
-                <a:cs typeface="맑은 고딕 Semilight" panose="020B0502040204020203" pitchFamily="50" charset="-127"/>
-              </a:rPr>
-              <a:t>시간이 필요하며 총 </a:t>
-            </a:r>
-            <a:r>
-              <a:rPr lang="en-US" altLang="ko-KR" b="1" dirty="0">
-                <a:latin typeface="맑은 고딕 Semilight" panose="020B0502040204020203" pitchFamily="50" charset="-127"/>
-                <a:ea typeface="맑은 고딕 Semilight" panose="020B0502040204020203" pitchFamily="50" charset="-127"/>
-                <a:cs typeface="맑은 고딕 Semilight" panose="020B0502040204020203" pitchFamily="50" charset="-127"/>
-              </a:rPr>
-              <a:t>16</a:t>
-            </a:r>
-            <a:r>
-              <a:rPr lang="ko-KR" altLang="en-US" b="1" dirty="0">
-                <a:latin typeface="맑은 고딕 Semilight" panose="020B0502040204020203" pitchFamily="50" charset="-127"/>
-                <a:ea typeface="맑은 고딕 Semilight" panose="020B0502040204020203" pitchFamily="50" charset="-127"/>
-                <a:cs typeface="맑은 고딕 Semilight" panose="020B0502040204020203" pitchFamily="50" charset="-127"/>
-              </a:rPr>
-              <a:t>시간 까지만 가능</a:t>
-            </a:r>
-            <a:endParaRPr lang="en-US" altLang="ko-KR" b="1" dirty="0">
-              <a:latin typeface="맑은 고딕 Semilight" panose="020B0502040204020203" pitchFamily="50" charset="-127"/>
-              <a:ea typeface="맑은 고딕 Semilight" panose="020B0502040204020203" pitchFamily="50" charset="-127"/>
-              <a:cs typeface="맑은 고딕 Semilight" panose="020B0502040204020203" pitchFamily="50" charset="-127"/>
-            </a:endParaRPr>
-          </a:p>
-        </p:txBody>
-      </p:sp>
-    </p:spTree>
-    <p:extLst>
-      <p:ext uri="{BB962C8B-B14F-4D97-AF65-F5344CB8AC3E}">
-        <p14:creationId xmlns:p14="http://schemas.microsoft.com/office/powerpoint/2010/main" val="3119823322"/>
-      </p:ext>
-    </p:extLst>
-  </p:cSld>
-  <p:clrMapOvr>
-    <a:masterClrMapping/>
-  </p:clrMapOvr>
-</p:sld>
-</file>
-
-<file path=ppt/slides/slide49.xml><?xml version="1.0" encoding="utf-8"?>
-<p:sld xmlns:a="http://schemas.openxmlformats.org/drawingml/2006/main" xmlns:r="http://schemas.openxmlformats.org/officeDocument/2006/relationships" xmlns:p="http://schemas.openxmlformats.org/presentationml/2006/main">
-  <p:cSld>
-    <p:spTree>
-      <p:nvGrpSpPr>
-        <p:cNvPr id="1" name="">
-          <a:extLst>
-            <a:ext uri="{FF2B5EF4-FFF2-40B4-BE49-F238E27FC236}">
-              <a16:creationId xmlns:a16="http://schemas.microsoft.com/office/drawing/2014/main" id="{A090CFB8-C82A-C9EC-8C92-54F29EACEF99}"/>
-            </a:ext>
-          </a:extLst>
-        </p:cNvPr>
-        <p:cNvGrpSpPr/>
-        <p:nvPr/>
-      </p:nvGrpSpPr>
-      <p:grpSpPr>
-        <a:xfrm>
-          <a:off x="0" y="0"/>
-          <a:ext cx="0" cy="0"/>
-          <a:chOff x="0" y="0"/>
-          <a:chExt cx="0" cy="0"/>
-        </a:xfrm>
-      </p:grpSpPr>
-      <p:sp>
-        <p:nvSpPr>
-          <p:cNvPr id="6" name="제목 1">
-            <a:extLst>
-              <a:ext uri="{FF2B5EF4-FFF2-40B4-BE49-F238E27FC236}">
-                <a16:creationId xmlns:a16="http://schemas.microsoft.com/office/drawing/2014/main" id="{C880B0E6-0815-D986-2AED-FC39C14BD467}"/>
-              </a:ext>
-            </a:extLst>
-          </p:cNvPr>
-          <p:cNvSpPr>
-            <a:spLocks noGrp="1"/>
-          </p:cNvSpPr>
-          <p:nvPr>
-            <p:ph type="title"/>
-          </p:nvPr>
-        </p:nvSpPr>
-        <p:spPr>
-          <a:xfrm>
-            <a:off x="915383" y="139084"/>
-            <a:ext cx="10353762" cy="766439"/>
-          </a:xfrm>
-        </p:spPr>
-        <p:txBody>
-          <a:bodyPr>
-            <a:normAutofit/>
-          </a:bodyPr>
-          <a:lstStyle/>
-          <a:p>
-            <a:r>
-              <a:rPr lang="en-US" altLang="ko-KR" b="1" dirty="0">
-                <a:latin typeface="Times New Roman" panose="02020603050405020304" pitchFamily="18" charset="0"/>
-                <a:cs typeface="Times New Roman" panose="02020603050405020304" pitchFamily="18" charset="0"/>
-              </a:rPr>
-              <a:t>Linear Programming</a:t>
-            </a:r>
-            <a:endParaRPr lang="ko-KR" altLang="en-US" b="1" cap="none" dirty="0">
-              <a:latin typeface="Times New Roman" panose="02020603050405020304" pitchFamily="18" charset="0"/>
-              <a:cs typeface="Times New Roman" panose="02020603050405020304" pitchFamily="18" charset="0"/>
-            </a:endParaRPr>
-          </a:p>
-        </p:txBody>
-      </p:sp>
-      <p:sp>
-        <p:nvSpPr>
-          <p:cNvPr id="8" name="슬라이드 번호 개체 틀 7">
-            <a:extLst>
-              <a:ext uri="{FF2B5EF4-FFF2-40B4-BE49-F238E27FC236}">
-                <a16:creationId xmlns:a16="http://schemas.microsoft.com/office/drawing/2014/main" id="{5473C62C-0AC1-9AC7-F526-A8401B466BE6}"/>
-              </a:ext>
-            </a:extLst>
-          </p:cNvPr>
-          <p:cNvSpPr>
-            <a:spLocks noGrp="1"/>
-          </p:cNvSpPr>
-          <p:nvPr>
-            <p:ph type="sldNum" sz="quarter" idx="12"/>
-          </p:nvPr>
-        </p:nvSpPr>
-        <p:spPr/>
-        <p:txBody>
-          <a:bodyPr/>
-          <a:lstStyle/>
-          <a:p>
-            <a:fld id="{D57F1E4F-1CFF-5643-939E-02111984F565}" type="slidenum">
-              <a:rPr lang="en-US" smtClean="0"/>
-              <a:t>49</a:t>
-            </a:fld>
-            <a:endParaRPr lang="en-US" dirty="0"/>
-          </a:p>
-        </p:txBody>
-      </p:sp>
-      <p:pic>
-        <p:nvPicPr>
-          <p:cNvPr id="3" name="그림 2">
-            <a:extLst>
-              <a:ext uri="{FF2B5EF4-FFF2-40B4-BE49-F238E27FC236}">
-                <a16:creationId xmlns:a16="http://schemas.microsoft.com/office/drawing/2014/main" id="{13C13FC1-D6FB-5231-32F7-05813662EBCA}"/>
-              </a:ext>
-            </a:extLst>
-          </p:cNvPr>
-          <p:cNvPicPr>
-            <a:picLocks noChangeAspect="1"/>
-          </p:cNvPicPr>
-          <p:nvPr/>
-        </p:nvPicPr>
-        <p:blipFill>
-          <a:blip r:embed="rId2">
-            <a:duotone>
-              <a:prstClr val="black"/>
-              <a:schemeClr val="accent6">
-                <a:tint val="45000"/>
-                <a:satMod val="400000"/>
-              </a:schemeClr>
-            </a:duotone>
-          </a:blip>
-          <a:stretch>
-            <a:fillRect/>
-          </a:stretch>
-        </p:blipFill>
-        <p:spPr>
-          <a:xfrm>
-            <a:off x="1135221" y="1897275"/>
-            <a:ext cx="4877970" cy="3208125"/>
-          </a:xfrm>
-          <a:prstGeom prst="rect">
-            <a:avLst/>
-          </a:prstGeom>
-        </p:spPr>
-      </p:pic>
-      <p:pic>
-        <p:nvPicPr>
-          <p:cNvPr id="5" name="그림 4">
-            <a:extLst>
-              <a:ext uri="{FF2B5EF4-FFF2-40B4-BE49-F238E27FC236}">
-                <a16:creationId xmlns:a16="http://schemas.microsoft.com/office/drawing/2014/main" id="{CFF4F533-BD65-29C3-2F21-91D9A1A84FD8}"/>
-              </a:ext>
-            </a:extLst>
-          </p:cNvPr>
-          <p:cNvPicPr>
-            <a:picLocks noChangeAspect="1"/>
-          </p:cNvPicPr>
-          <p:nvPr/>
-        </p:nvPicPr>
-        <p:blipFill>
-          <a:blip r:embed="rId3">
-            <a:duotone>
-              <a:prstClr val="black"/>
-              <a:schemeClr val="accent5">
-                <a:tint val="45000"/>
-                <a:satMod val="400000"/>
-              </a:schemeClr>
-            </a:duotone>
-          </a:blip>
-          <a:stretch>
-            <a:fillRect/>
-          </a:stretch>
-        </p:blipFill>
-        <p:spPr>
-          <a:xfrm>
-            <a:off x="6920767" y="1897275"/>
-            <a:ext cx="3624446" cy="3208125"/>
-          </a:xfrm>
-          <a:prstGeom prst="rect">
-            <a:avLst/>
-          </a:prstGeom>
-        </p:spPr>
-      </p:pic>
-    </p:spTree>
-    <p:extLst>
-      <p:ext uri="{BB962C8B-B14F-4D97-AF65-F5344CB8AC3E}">
-        <p14:creationId xmlns:p14="http://schemas.microsoft.com/office/powerpoint/2010/main" val="4171524521"/>
-      </p:ext>
-    </p:extLst>
-  </p:cSld>
-  <p:clrMapOvr>
-    <a:masterClrMapping/>
-  </p:clrMapOvr>
-</p:sld>
-</file>
-
 <file path=ppt/slides/slide5.xml><?xml version="1.0" encoding="utf-8"?>
 <p:sld xmlns:a="http://schemas.openxmlformats.org/drawingml/2006/main" xmlns:r="http://schemas.openxmlformats.org/officeDocument/2006/relationships" xmlns:p="http://schemas.openxmlformats.org/presentationml/2006/main">
   <p:cSld>
@@ -37084,6 +38969,2107 @@
         <p:cNvPr id="1" name="">
           <a:extLst>
             <a:ext uri="{FF2B5EF4-FFF2-40B4-BE49-F238E27FC236}">
+              <a16:creationId xmlns:a16="http://schemas.microsoft.com/office/drawing/2014/main" id="{A2D9FF93-4513-A3F5-1057-7397261E76BE}"/>
+            </a:ext>
+          </a:extLst>
+        </p:cNvPr>
+        <p:cNvGrpSpPr/>
+        <p:nvPr/>
+      </p:nvGrpSpPr>
+      <p:grpSpPr>
+        <a:xfrm>
+          <a:off x="0" y="0"/>
+          <a:ext cx="0" cy="0"/>
+          <a:chOff x="0" y="0"/>
+          <a:chExt cx="0" cy="0"/>
+        </a:xfrm>
+      </p:grpSpPr>
+      <p:sp>
+        <p:nvSpPr>
+          <p:cNvPr id="6" name="제목 1">
+            <a:extLst>
+              <a:ext uri="{FF2B5EF4-FFF2-40B4-BE49-F238E27FC236}">
+                <a16:creationId xmlns:a16="http://schemas.microsoft.com/office/drawing/2014/main" id="{59F9F3E4-C9A2-3AEF-54FD-9E0EBAB10B45}"/>
+              </a:ext>
+            </a:extLst>
+          </p:cNvPr>
+          <p:cNvSpPr>
+            <a:spLocks noGrp="1"/>
+          </p:cNvSpPr>
+          <p:nvPr>
+            <p:ph type="title"/>
+          </p:nvPr>
+        </p:nvSpPr>
+        <p:spPr>
+          <a:xfrm>
+            <a:off x="915383" y="139084"/>
+            <a:ext cx="10353762" cy="766439"/>
+          </a:xfrm>
+        </p:spPr>
+        <p:txBody>
+          <a:bodyPr>
+            <a:normAutofit/>
+          </a:bodyPr>
+          <a:lstStyle/>
+          <a:p>
+            <a:r>
+              <a:rPr lang="en-US" altLang="ko-KR" b="1" cap="none" dirty="0">
+                <a:latin typeface="Times New Roman" panose="02020603050405020304" pitchFamily="18" charset="0"/>
+                <a:cs typeface="Times New Roman" panose="02020603050405020304" pitchFamily="18" charset="0"/>
+              </a:rPr>
+              <a:t>Short</a:t>
+            </a:r>
+            <a:r>
+              <a:rPr lang="en-US" altLang="ko-KR" b="1" dirty="0">
+                <a:latin typeface="Times New Roman" panose="02020603050405020304" pitchFamily="18" charset="0"/>
+                <a:cs typeface="Times New Roman" panose="02020603050405020304" pitchFamily="18" charset="0"/>
+              </a:rPr>
+              <a:t>-</a:t>
+            </a:r>
+            <a:r>
+              <a:rPr lang="en-US" altLang="ko-KR" b="1" cap="none" dirty="0">
+                <a:latin typeface="Times New Roman" panose="02020603050405020304" pitchFamily="18" charset="0"/>
+                <a:cs typeface="Times New Roman" panose="02020603050405020304" pitchFamily="18" charset="0"/>
+              </a:rPr>
+              <a:t>Cut</a:t>
+            </a:r>
+            <a:r>
+              <a:rPr lang="ko-KR" altLang="en-US" b="1" cap="none" dirty="0">
+                <a:latin typeface="Times New Roman" panose="02020603050405020304" pitchFamily="18" charset="0"/>
+                <a:cs typeface="Times New Roman" panose="02020603050405020304" pitchFamily="18" charset="0"/>
+              </a:rPr>
+              <a:t> </a:t>
+            </a:r>
+            <a:r>
+              <a:rPr lang="en-US" altLang="ko-KR" b="1" cap="none" dirty="0">
+                <a:latin typeface="Times New Roman" panose="02020603050405020304" pitchFamily="18" charset="0"/>
+                <a:cs typeface="Times New Roman" panose="02020603050405020304" pitchFamily="18" charset="0"/>
+              </a:rPr>
+              <a:t>algorithm</a:t>
+            </a:r>
+            <a:endParaRPr lang="ko-KR" altLang="en-US" b="1" cap="none" dirty="0">
+              <a:latin typeface="Times New Roman" panose="02020603050405020304" pitchFamily="18" charset="0"/>
+              <a:cs typeface="Times New Roman" panose="02020603050405020304" pitchFamily="18" charset="0"/>
+            </a:endParaRPr>
+          </a:p>
+        </p:txBody>
+      </p:sp>
+      <p:sp>
+        <p:nvSpPr>
+          <p:cNvPr id="8" name="슬라이드 번호 개체 틀 7">
+            <a:extLst>
+              <a:ext uri="{FF2B5EF4-FFF2-40B4-BE49-F238E27FC236}">
+                <a16:creationId xmlns:a16="http://schemas.microsoft.com/office/drawing/2014/main" id="{1FF4D8F7-7729-834F-4D77-1D80CFE254FE}"/>
+              </a:ext>
+            </a:extLst>
+          </p:cNvPr>
+          <p:cNvSpPr>
+            <a:spLocks noGrp="1"/>
+          </p:cNvSpPr>
+          <p:nvPr>
+            <p:ph type="sldNum" sz="quarter" idx="12"/>
+          </p:nvPr>
+        </p:nvSpPr>
+        <p:spPr/>
+        <p:txBody>
+          <a:bodyPr/>
+          <a:lstStyle/>
+          <a:p>
+            <a:fld id="{D57F1E4F-1CFF-5643-939E-02111984F565}" type="slidenum">
+              <a:rPr lang="en-US" smtClean="0"/>
+              <a:t>50</a:t>
+            </a:fld>
+            <a:endParaRPr lang="en-US" dirty="0"/>
+          </a:p>
+        </p:txBody>
+      </p:sp>
+      <p:sp>
+        <p:nvSpPr>
+          <p:cNvPr id="9" name="TextBox 8">
+            <a:extLst>
+              <a:ext uri="{FF2B5EF4-FFF2-40B4-BE49-F238E27FC236}">
+                <a16:creationId xmlns:a16="http://schemas.microsoft.com/office/drawing/2014/main" id="{70B770CA-B7CA-4928-3BA9-613BC7EF3674}"/>
+              </a:ext>
+            </a:extLst>
+          </p:cNvPr>
+          <p:cNvSpPr txBox="1"/>
+          <p:nvPr/>
+        </p:nvSpPr>
+        <p:spPr>
+          <a:xfrm>
+            <a:off x="535712" y="2790002"/>
+            <a:ext cx="2336800" cy="646331"/>
+          </a:xfrm>
+          <a:prstGeom prst="rect">
+            <a:avLst/>
+          </a:prstGeom>
+          <a:noFill/>
+        </p:spPr>
+        <p:txBody>
+          <a:bodyPr wrap="square">
+            <a:spAutoFit/>
+          </a:bodyPr>
+          <a:lstStyle/>
+          <a:p>
+            <a:pPr algn="ctr"/>
+            <a:r>
+              <a:rPr lang="en-US" altLang="ko-KR" dirty="0">
+                <a:latin typeface="맑은 고딕 Semilight" panose="020B0502040204020203" pitchFamily="50" charset="-127"/>
+                <a:ea typeface="맑은 고딕 Semilight" panose="020B0502040204020203" pitchFamily="50" charset="-127"/>
+                <a:cs typeface="맑은 고딕 Semilight" panose="020B0502040204020203" pitchFamily="50" charset="-127"/>
+              </a:rPr>
+              <a:t>Adjacency Matrix</a:t>
+            </a:r>
+          </a:p>
+          <a:p>
+            <a:pPr algn="ctr"/>
+            <a:r>
+              <a:rPr lang="en-US" altLang="ko-KR" dirty="0">
+                <a:latin typeface="맑은 고딕 Semilight" panose="020B0502040204020203" pitchFamily="50" charset="-127"/>
+                <a:ea typeface="맑은 고딕 Semilight" panose="020B0502040204020203" pitchFamily="50" charset="-127"/>
+                <a:cs typeface="맑은 고딕 Semilight" panose="020B0502040204020203" pitchFamily="50" charset="-127"/>
+              </a:rPr>
+              <a:t>(8, 8)</a:t>
+            </a:r>
+            <a:endParaRPr lang="ko-KR" altLang="en-US" dirty="0">
+              <a:latin typeface="맑은 고딕 Semilight" panose="020B0502040204020203" pitchFamily="50" charset="-127"/>
+              <a:ea typeface="맑은 고딕 Semilight" panose="020B0502040204020203" pitchFamily="50" charset="-127"/>
+              <a:cs typeface="맑은 고딕 Semilight" panose="020B0502040204020203" pitchFamily="50" charset="-127"/>
+            </a:endParaRPr>
+          </a:p>
+        </p:txBody>
+      </p:sp>
+      <p:sp>
+        <p:nvSpPr>
+          <p:cNvPr id="10" name="TextBox 9">
+            <a:extLst>
+              <a:ext uri="{FF2B5EF4-FFF2-40B4-BE49-F238E27FC236}">
+                <a16:creationId xmlns:a16="http://schemas.microsoft.com/office/drawing/2014/main" id="{75D549DF-AE9C-BFCB-7ADB-4C61096744E4}"/>
+              </a:ext>
+            </a:extLst>
+          </p:cNvPr>
+          <p:cNvSpPr txBox="1"/>
+          <p:nvPr/>
+        </p:nvSpPr>
+        <p:spPr>
+          <a:xfrm>
+            <a:off x="4416959" y="2790001"/>
+            <a:ext cx="1810327" cy="646331"/>
+          </a:xfrm>
+          <a:prstGeom prst="rect">
+            <a:avLst/>
+          </a:prstGeom>
+          <a:noFill/>
+        </p:spPr>
+        <p:txBody>
+          <a:bodyPr wrap="square">
+            <a:spAutoFit/>
+          </a:bodyPr>
+          <a:lstStyle/>
+          <a:p>
+            <a:pPr algn="ctr"/>
+            <a:r>
+              <a:rPr lang="ko-KR" altLang="en-US" dirty="0">
+                <a:latin typeface="맑은 고딕 Semilight" panose="020B0502040204020203" pitchFamily="50" charset="-127"/>
+                <a:ea typeface="맑은 고딕 Semilight" panose="020B0502040204020203" pitchFamily="50" charset="-127"/>
+                <a:cs typeface="맑은 고딕 Semilight" panose="020B0502040204020203" pitchFamily="50" charset="-127"/>
+              </a:rPr>
+              <a:t>도시간 </a:t>
+            </a:r>
+            <a:r>
+              <a:rPr lang="en-US" altLang="ko-KR" dirty="0">
+                <a:latin typeface="맑은 고딕 Semilight" panose="020B0502040204020203" pitchFamily="50" charset="-127"/>
+                <a:ea typeface="맑은 고딕 Semilight" panose="020B0502040204020203" pitchFamily="50" charset="-127"/>
+                <a:cs typeface="맑은 고딕 Semilight" panose="020B0502040204020203" pitchFamily="50" charset="-127"/>
+              </a:rPr>
+              <a:t>L2</a:t>
+            </a:r>
+            <a:r>
+              <a:rPr lang="ko-KR" altLang="en-US" dirty="0">
+                <a:latin typeface="맑은 고딕 Semilight" panose="020B0502040204020203" pitchFamily="50" charset="-127"/>
+                <a:ea typeface="맑은 고딕 Semilight" panose="020B0502040204020203" pitchFamily="50" charset="-127"/>
+                <a:cs typeface="맑은 고딕 Semilight" panose="020B0502040204020203" pitchFamily="50" charset="-127"/>
+              </a:rPr>
+              <a:t> 거리</a:t>
+            </a:r>
+            <a:endParaRPr lang="en-US" altLang="ko-KR" dirty="0">
+              <a:latin typeface="맑은 고딕 Semilight" panose="020B0502040204020203" pitchFamily="50" charset="-127"/>
+              <a:ea typeface="맑은 고딕 Semilight" panose="020B0502040204020203" pitchFamily="50" charset="-127"/>
+              <a:cs typeface="맑은 고딕 Semilight" panose="020B0502040204020203" pitchFamily="50" charset="-127"/>
+            </a:endParaRPr>
+          </a:p>
+          <a:p>
+            <a:pPr algn="ctr"/>
+            <a:r>
+              <a:rPr lang="en-US" altLang="ko-KR" dirty="0">
+                <a:latin typeface="맑은 고딕 Semilight" panose="020B0502040204020203" pitchFamily="50" charset="-127"/>
+                <a:ea typeface="맑은 고딕 Semilight" panose="020B0502040204020203" pitchFamily="50" charset="-127"/>
+                <a:cs typeface="맑은 고딕 Semilight" panose="020B0502040204020203" pitchFamily="50" charset="-127"/>
+              </a:rPr>
+              <a:t>(8, 8)</a:t>
+            </a:r>
+          </a:p>
+        </p:txBody>
+      </p:sp>
+      <p:pic>
+        <p:nvPicPr>
+          <p:cNvPr id="14" name="그림 13">
+            <a:extLst>
+              <a:ext uri="{FF2B5EF4-FFF2-40B4-BE49-F238E27FC236}">
+                <a16:creationId xmlns:a16="http://schemas.microsoft.com/office/drawing/2014/main" id="{1C57B053-1D05-D974-6448-2D17C6725D9D}"/>
+              </a:ext>
+            </a:extLst>
+          </p:cNvPr>
+          <p:cNvPicPr>
+            <a:picLocks noChangeAspect="1"/>
+          </p:cNvPicPr>
+          <p:nvPr/>
+        </p:nvPicPr>
+        <p:blipFill>
+          <a:blip r:embed="rId2">
+            <a:duotone>
+              <a:schemeClr val="accent2">
+                <a:shade val="45000"/>
+                <a:satMod val="135000"/>
+              </a:schemeClr>
+              <a:prstClr val="white"/>
+            </a:duotone>
+          </a:blip>
+          <a:stretch>
+            <a:fillRect/>
+          </a:stretch>
+        </p:blipFill>
+        <p:spPr>
+          <a:xfrm>
+            <a:off x="446252" y="3886150"/>
+            <a:ext cx="2667011" cy="2198547"/>
+          </a:xfrm>
+          <a:prstGeom prst="rect">
+            <a:avLst/>
+          </a:prstGeom>
+        </p:spPr>
+      </p:pic>
+      <p:pic>
+        <p:nvPicPr>
+          <p:cNvPr id="16" name="그림 15">
+            <a:extLst>
+              <a:ext uri="{FF2B5EF4-FFF2-40B4-BE49-F238E27FC236}">
+                <a16:creationId xmlns:a16="http://schemas.microsoft.com/office/drawing/2014/main" id="{8647D088-3BCA-FE95-1AF8-EA1A13161837}"/>
+              </a:ext>
+            </a:extLst>
+          </p:cNvPr>
+          <p:cNvPicPr>
+            <a:picLocks noChangeAspect="1"/>
+          </p:cNvPicPr>
+          <p:nvPr/>
+        </p:nvPicPr>
+        <p:blipFill>
+          <a:blip r:embed="rId3">
+            <a:duotone>
+              <a:schemeClr val="accent3">
+                <a:shade val="45000"/>
+                <a:satMod val="135000"/>
+              </a:schemeClr>
+              <a:prstClr val="white"/>
+            </a:duotone>
+          </a:blip>
+          <a:stretch>
+            <a:fillRect/>
+          </a:stretch>
+        </p:blipFill>
+        <p:spPr>
+          <a:xfrm>
+            <a:off x="3483280" y="3886150"/>
+            <a:ext cx="3898859" cy="2198547"/>
+          </a:xfrm>
+          <a:prstGeom prst="rect">
+            <a:avLst/>
+          </a:prstGeom>
+        </p:spPr>
+      </p:pic>
+      <p:sp>
+        <p:nvSpPr>
+          <p:cNvPr id="17" name="TextBox 16">
+            <a:extLst>
+              <a:ext uri="{FF2B5EF4-FFF2-40B4-BE49-F238E27FC236}">
+                <a16:creationId xmlns:a16="http://schemas.microsoft.com/office/drawing/2014/main" id="{9420B1AC-58BB-401D-30EB-38ED0ED86CD3}"/>
+              </a:ext>
+            </a:extLst>
+          </p:cNvPr>
+          <p:cNvSpPr txBox="1"/>
+          <p:nvPr/>
+        </p:nvSpPr>
+        <p:spPr>
+          <a:xfrm>
+            <a:off x="3061295" y="4309580"/>
+            <a:ext cx="385042" cy="369332"/>
+          </a:xfrm>
+          <a:prstGeom prst="rect">
+            <a:avLst/>
+          </a:prstGeom>
+          <a:noFill/>
+        </p:spPr>
+        <p:txBody>
+          <a:bodyPr wrap="none" rtlCol="0">
+            <a:spAutoFit/>
+          </a:bodyPr>
+          <a:lstStyle/>
+          <a:p>
+            <a:r>
+              <a:rPr lang="en-US" altLang="ko-KR" dirty="0"/>
+              <a:t>@</a:t>
+            </a:r>
+            <a:endParaRPr lang="ko-KR" altLang="en-US" dirty="0"/>
+          </a:p>
+        </p:txBody>
+      </p:sp>
+      <p:sp>
+        <p:nvSpPr>
+          <p:cNvPr id="18" name="TextBox 17">
+            <a:extLst>
+              <a:ext uri="{FF2B5EF4-FFF2-40B4-BE49-F238E27FC236}">
+                <a16:creationId xmlns:a16="http://schemas.microsoft.com/office/drawing/2014/main" id="{D3740C12-D167-6F95-8461-C890BFDAA6D6}"/>
+              </a:ext>
+            </a:extLst>
+          </p:cNvPr>
+          <p:cNvSpPr txBox="1"/>
+          <p:nvPr/>
+        </p:nvSpPr>
+        <p:spPr>
+          <a:xfrm>
+            <a:off x="3040208" y="2799766"/>
+            <a:ext cx="385042" cy="369332"/>
+          </a:xfrm>
+          <a:prstGeom prst="rect">
+            <a:avLst/>
+          </a:prstGeom>
+          <a:noFill/>
+        </p:spPr>
+        <p:txBody>
+          <a:bodyPr wrap="none" rtlCol="0">
+            <a:spAutoFit/>
+          </a:bodyPr>
+          <a:lstStyle/>
+          <a:p>
+            <a:r>
+              <a:rPr lang="en-US" altLang="ko-KR" dirty="0"/>
+              <a:t>@</a:t>
+            </a:r>
+            <a:endParaRPr lang="ko-KR" altLang="en-US" dirty="0"/>
+          </a:p>
+        </p:txBody>
+      </p:sp>
+      <p:pic>
+        <p:nvPicPr>
+          <p:cNvPr id="22" name="그림 21">
+            <a:extLst>
+              <a:ext uri="{FF2B5EF4-FFF2-40B4-BE49-F238E27FC236}">
+                <a16:creationId xmlns:a16="http://schemas.microsoft.com/office/drawing/2014/main" id="{671F5277-2813-C525-26A7-1C7870DC7EA7}"/>
+              </a:ext>
+            </a:extLst>
+          </p:cNvPr>
+          <p:cNvPicPr>
+            <a:picLocks noChangeAspect="1"/>
+          </p:cNvPicPr>
+          <p:nvPr/>
+        </p:nvPicPr>
+        <p:blipFill>
+          <a:blip r:embed="rId4">
+            <a:duotone>
+              <a:schemeClr val="accent6">
+                <a:shade val="45000"/>
+                <a:satMod val="135000"/>
+              </a:schemeClr>
+              <a:prstClr val="white"/>
+            </a:duotone>
+          </a:blip>
+          <a:stretch>
+            <a:fillRect/>
+          </a:stretch>
+        </p:blipFill>
+        <p:spPr>
+          <a:xfrm>
+            <a:off x="7961745" y="3886150"/>
+            <a:ext cx="3307400" cy="2191374"/>
+          </a:xfrm>
+          <a:prstGeom prst="rect">
+            <a:avLst/>
+          </a:prstGeom>
+        </p:spPr>
+      </p:pic>
+      <p:sp>
+        <p:nvSpPr>
+          <p:cNvPr id="23" name="TextBox 22">
+            <a:extLst>
+              <a:ext uri="{FF2B5EF4-FFF2-40B4-BE49-F238E27FC236}">
+                <a16:creationId xmlns:a16="http://schemas.microsoft.com/office/drawing/2014/main" id="{98C9E7E7-5514-B0CE-8091-E24848223919}"/>
+              </a:ext>
+            </a:extLst>
+          </p:cNvPr>
+          <p:cNvSpPr txBox="1"/>
+          <p:nvPr/>
+        </p:nvSpPr>
+        <p:spPr>
+          <a:xfrm>
+            <a:off x="7437494" y="4309580"/>
+            <a:ext cx="324128" cy="369332"/>
+          </a:xfrm>
+          <a:prstGeom prst="rect">
+            <a:avLst/>
+          </a:prstGeom>
+          <a:noFill/>
+        </p:spPr>
+        <p:txBody>
+          <a:bodyPr wrap="none" rtlCol="0">
+            <a:spAutoFit/>
+          </a:bodyPr>
+          <a:lstStyle/>
+          <a:p>
+            <a:r>
+              <a:rPr lang="en-US" altLang="ko-KR" dirty="0"/>
+              <a:t>=</a:t>
+            </a:r>
+            <a:endParaRPr lang="ko-KR" altLang="en-US" dirty="0"/>
+          </a:p>
+        </p:txBody>
+      </p:sp>
+      <p:sp>
+        <p:nvSpPr>
+          <p:cNvPr id="24" name="TextBox 23">
+            <a:extLst>
+              <a:ext uri="{FF2B5EF4-FFF2-40B4-BE49-F238E27FC236}">
+                <a16:creationId xmlns:a16="http://schemas.microsoft.com/office/drawing/2014/main" id="{823EB724-F3FC-938C-1727-FDA20A822FCA}"/>
+              </a:ext>
+            </a:extLst>
+          </p:cNvPr>
+          <p:cNvSpPr txBox="1"/>
+          <p:nvPr/>
+        </p:nvSpPr>
+        <p:spPr>
+          <a:xfrm>
+            <a:off x="7437494" y="2799766"/>
+            <a:ext cx="324128" cy="369332"/>
+          </a:xfrm>
+          <a:prstGeom prst="rect">
+            <a:avLst/>
+          </a:prstGeom>
+          <a:noFill/>
+        </p:spPr>
+        <p:txBody>
+          <a:bodyPr wrap="none" rtlCol="0">
+            <a:spAutoFit/>
+          </a:bodyPr>
+          <a:lstStyle/>
+          <a:p>
+            <a:r>
+              <a:rPr lang="en-US" altLang="ko-KR" dirty="0"/>
+              <a:t>=</a:t>
+            </a:r>
+            <a:endParaRPr lang="ko-KR" altLang="en-US" dirty="0"/>
+          </a:p>
+        </p:txBody>
+      </p:sp>
+      <p:sp>
+        <p:nvSpPr>
+          <p:cNvPr id="26" name="TextBox 25">
+            <a:extLst>
+              <a:ext uri="{FF2B5EF4-FFF2-40B4-BE49-F238E27FC236}">
+                <a16:creationId xmlns:a16="http://schemas.microsoft.com/office/drawing/2014/main" id="{673BA7E5-90FF-0EAE-F46B-CAFEF29402C3}"/>
+              </a:ext>
+            </a:extLst>
+          </p:cNvPr>
+          <p:cNvSpPr txBox="1"/>
+          <p:nvPr/>
+        </p:nvSpPr>
+        <p:spPr>
+          <a:xfrm>
+            <a:off x="7961745" y="2799766"/>
+            <a:ext cx="4156364" cy="369332"/>
+          </a:xfrm>
+          <a:prstGeom prst="rect">
+            <a:avLst/>
+          </a:prstGeom>
+          <a:noFill/>
+        </p:spPr>
+        <p:txBody>
+          <a:bodyPr wrap="square">
+            <a:spAutoFit/>
+          </a:bodyPr>
+          <a:lstStyle/>
+          <a:p>
+            <a:r>
+              <a:rPr lang="ko-KR" altLang="en-US" dirty="0"/>
+              <a:t>이웃 거리의 합산 → 최단 경로와 무관</a:t>
+            </a:r>
+          </a:p>
+        </p:txBody>
+      </p:sp>
+      <p:cxnSp>
+        <p:nvCxnSpPr>
+          <p:cNvPr id="28" name="직선 연결선 27">
+            <a:extLst>
+              <a:ext uri="{FF2B5EF4-FFF2-40B4-BE49-F238E27FC236}">
+                <a16:creationId xmlns:a16="http://schemas.microsoft.com/office/drawing/2014/main" id="{2E25907B-0F24-80B1-C6B2-CE219D9B3D83}"/>
+              </a:ext>
+            </a:extLst>
+          </p:cNvPr>
+          <p:cNvCxnSpPr/>
+          <p:nvPr/>
+        </p:nvCxnSpPr>
+        <p:spPr>
+          <a:xfrm>
+            <a:off x="701964" y="3583707"/>
+            <a:ext cx="11203709" cy="0"/>
+          </a:xfrm>
+          <a:prstGeom prst="line">
+            <a:avLst/>
+          </a:prstGeom>
+          <a:ln>
+            <a:solidFill>
+              <a:schemeClr val="tx1"/>
+            </a:solidFill>
+          </a:ln>
+        </p:spPr>
+        <p:style>
+          <a:lnRef idx="1">
+            <a:schemeClr val="accent1"/>
+          </a:lnRef>
+          <a:fillRef idx="0">
+            <a:schemeClr val="accent1"/>
+          </a:fillRef>
+          <a:effectRef idx="0">
+            <a:schemeClr val="accent1"/>
+          </a:effectRef>
+          <a:fontRef idx="minor">
+            <a:schemeClr val="tx1"/>
+          </a:fontRef>
+        </p:style>
+      </p:cxnSp>
+      <p:sp>
+        <p:nvSpPr>
+          <p:cNvPr id="29" name="직사각형 28">
+            <a:extLst>
+              <a:ext uri="{FF2B5EF4-FFF2-40B4-BE49-F238E27FC236}">
+                <a16:creationId xmlns:a16="http://schemas.microsoft.com/office/drawing/2014/main" id="{C818162E-858C-9B1B-8924-FD719D8EA231}"/>
+              </a:ext>
+            </a:extLst>
+          </p:cNvPr>
+          <p:cNvSpPr/>
+          <p:nvPr/>
+        </p:nvSpPr>
+        <p:spPr>
+          <a:xfrm>
+            <a:off x="7761622" y="3894970"/>
+            <a:ext cx="3898859" cy="277091"/>
+          </a:xfrm>
+          <a:prstGeom prst="rect">
+            <a:avLst/>
+          </a:prstGeom>
+          <a:noFill/>
+          <a:ln w="28575">
+            <a:solidFill>
+              <a:srgbClr val="FFFF00"/>
+            </a:solidFill>
+          </a:ln>
+        </p:spPr>
+        <p:style>
+          <a:lnRef idx="2">
+            <a:schemeClr val="accent1">
+              <a:shade val="15000"/>
+            </a:schemeClr>
+          </a:lnRef>
+          <a:fillRef idx="1">
+            <a:schemeClr val="accent1"/>
+          </a:fillRef>
+          <a:effectRef idx="0">
+            <a:schemeClr val="accent1"/>
+          </a:effectRef>
+          <a:fontRef idx="minor">
+            <a:schemeClr val="lt1"/>
+          </a:fontRef>
+        </p:style>
+        <p:txBody>
+          <a:bodyPr rtlCol="0" anchor="ctr"/>
+          <a:lstStyle/>
+          <a:p>
+            <a:pPr algn="ctr"/>
+            <a:endParaRPr lang="ko-KR" altLang="en-US" dirty="0"/>
+          </a:p>
+        </p:txBody>
+      </p:sp>
+      <p:sp>
+        <p:nvSpPr>
+          <p:cNvPr id="30" name="TextBox 29">
+            <a:extLst>
+              <a:ext uri="{FF2B5EF4-FFF2-40B4-BE49-F238E27FC236}">
+                <a16:creationId xmlns:a16="http://schemas.microsoft.com/office/drawing/2014/main" id="{74D55AB2-EFF2-2AFE-2018-5E3263607681}"/>
+              </a:ext>
+            </a:extLst>
+          </p:cNvPr>
+          <p:cNvSpPr txBox="1"/>
+          <p:nvPr/>
+        </p:nvSpPr>
+        <p:spPr>
+          <a:xfrm>
+            <a:off x="535712" y="1420336"/>
+            <a:ext cx="11124769" cy="870495"/>
+          </a:xfrm>
+          <a:prstGeom prst="rect">
+            <a:avLst/>
+          </a:prstGeom>
+          <a:noFill/>
+        </p:spPr>
+        <p:txBody>
+          <a:bodyPr wrap="square" rtlCol="0">
+            <a:spAutoFit/>
+          </a:bodyPr>
+          <a:lstStyle/>
+          <a:p>
+            <a:pPr>
+              <a:lnSpc>
+                <a:spcPct val="150000"/>
+              </a:lnSpc>
+            </a:pPr>
+            <a:r>
+              <a:rPr lang="ko-KR" altLang="en-US" dirty="0"/>
+              <a:t>인접행렬과 도시간 거리 행렬을 </a:t>
+            </a:r>
+            <a:r>
+              <a:rPr lang="ko-KR" altLang="en-US" dirty="0" err="1"/>
+              <a:t>내적하면</a:t>
+            </a:r>
+            <a:r>
+              <a:rPr lang="ko-KR" altLang="en-US" dirty="0"/>
+              <a:t> 각 행은 출발도시에서 각 열 도시까지의 도달하는데 가능한 모든 경로에 해당되는 누적 거리</a:t>
+            </a:r>
+            <a:r>
+              <a:rPr lang="en-US" altLang="ko-KR" dirty="0"/>
+              <a:t>, </a:t>
+            </a:r>
+            <a:r>
+              <a:rPr lang="ko-KR" altLang="en-US" dirty="0"/>
+              <a:t>노란색 박스는 서울</a:t>
+            </a:r>
+            <a:r>
+              <a:rPr lang="en-US" altLang="ko-KR" dirty="0"/>
+              <a:t>(Node a)</a:t>
+            </a:r>
+            <a:r>
+              <a:rPr lang="ko-KR" altLang="en-US" dirty="0"/>
+              <a:t>에서 각 도시까지 가는데 걸리는 누적합산 거리</a:t>
+            </a:r>
+          </a:p>
+        </p:txBody>
+      </p:sp>
+    </p:spTree>
+    <p:extLst>
+      <p:ext uri="{BB962C8B-B14F-4D97-AF65-F5344CB8AC3E}">
+        <p14:creationId xmlns:p14="http://schemas.microsoft.com/office/powerpoint/2010/main" val="2590360119"/>
+      </p:ext>
+    </p:extLst>
+  </p:cSld>
+  <p:clrMapOvr>
+    <a:masterClrMapping/>
+  </p:clrMapOvr>
+</p:sld>
+</file>
+
+<file path=ppt/slides/slide51.xml><?xml version="1.0" encoding="utf-8"?>
+<p:sld xmlns:a="http://schemas.openxmlformats.org/drawingml/2006/main" xmlns:r="http://schemas.openxmlformats.org/officeDocument/2006/relationships" xmlns:p="http://schemas.openxmlformats.org/presentationml/2006/main">
+  <p:cSld>
+    <p:spTree>
+      <p:nvGrpSpPr>
+        <p:cNvPr id="1" name="">
+          <a:extLst>
+            <a:ext uri="{FF2B5EF4-FFF2-40B4-BE49-F238E27FC236}">
+              <a16:creationId xmlns:a16="http://schemas.microsoft.com/office/drawing/2014/main" id="{7D62CB3B-9AF7-4213-B5A1-6605D2A4A645}"/>
+            </a:ext>
+          </a:extLst>
+        </p:cNvPr>
+        <p:cNvGrpSpPr/>
+        <p:nvPr/>
+      </p:nvGrpSpPr>
+      <p:grpSpPr>
+        <a:xfrm>
+          <a:off x="0" y="0"/>
+          <a:ext cx="0" cy="0"/>
+          <a:chOff x="0" y="0"/>
+          <a:chExt cx="0" cy="0"/>
+        </a:xfrm>
+      </p:grpSpPr>
+      <p:sp>
+        <p:nvSpPr>
+          <p:cNvPr id="5" name="직사각형 4">
+            <a:extLst>
+              <a:ext uri="{FF2B5EF4-FFF2-40B4-BE49-F238E27FC236}">
+                <a16:creationId xmlns:a16="http://schemas.microsoft.com/office/drawing/2014/main" id="{8418055A-86BD-4F58-4EFC-13F9ED3D8CE7}"/>
+              </a:ext>
+            </a:extLst>
+          </p:cNvPr>
+          <p:cNvSpPr/>
+          <p:nvPr/>
+        </p:nvSpPr>
+        <p:spPr>
+          <a:xfrm>
+            <a:off x="1104901" y="5784946"/>
+            <a:ext cx="5124450" cy="478335"/>
+          </a:xfrm>
+          <a:prstGeom prst="rect">
+            <a:avLst/>
+          </a:prstGeom>
+          <a:solidFill>
+            <a:schemeClr val="accent2">
+              <a:lumMod val="50000"/>
+            </a:schemeClr>
+          </a:solidFill>
+          <a:ln>
+            <a:noFill/>
+          </a:ln>
+        </p:spPr>
+        <p:style>
+          <a:lnRef idx="2">
+            <a:schemeClr val="accent1">
+              <a:shade val="15000"/>
+            </a:schemeClr>
+          </a:lnRef>
+          <a:fillRef idx="1">
+            <a:schemeClr val="accent1"/>
+          </a:fillRef>
+          <a:effectRef idx="0">
+            <a:schemeClr val="accent1"/>
+          </a:effectRef>
+          <a:fontRef idx="minor">
+            <a:schemeClr val="lt1"/>
+          </a:fontRef>
+        </p:style>
+        <p:txBody>
+          <a:bodyPr rtlCol="0" anchor="ctr"/>
+          <a:lstStyle/>
+          <a:p>
+            <a:pPr algn="ctr"/>
+            <a:endParaRPr lang="ko-KR" altLang="en-US" dirty="0"/>
+          </a:p>
+        </p:txBody>
+      </p:sp>
+      <p:sp>
+        <p:nvSpPr>
+          <p:cNvPr id="2" name="제목 1">
+            <a:extLst>
+              <a:ext uri="{FF2B5EF4-FFF2-40B4-BE49-F238E27FC236}">
+                <a16:creationId xmlns:a16="http://schemas.microsoft.com/office/drawing/2014/main" id="{5743E8A7-5FD7-0FB3-9ADD-A997BF3E2B76}"/>
+              </a:ext>
+            </a:extLst>
+          </p:cNvPr>
+          <p:cNvSpPr>
+            <a:spLocks noGrp="1"/>
+          </p:cNvSpPr>
+          <p:nvPr>
+            <p:ph type="ctrTitle"/>
+          </p:nvPr>
+        </p:nvSpPr>
+        <p:spPr>
+          <a:xfrm>
+            <a:off x="612030" y="586381"/>
+            <a:ext cx="8825658" cy="609600"/>
+          </a:xfrm>
+        </p:spPr>
+        <p:txBody>
+          <a:bodyPr/>
+          <a:lstStyle/>
+          <a:p>
+            <a:r>
+              <a:rPr lang="en-US" altLang="ko-KR" sz="4400" dirty="0"/>
+              <a:t>Contents</a:t>
+            </a:r>
+            <a:endParaRPr lang="ko-KR" altLang="en-US" sz="4400" dirty="0"/>
+          </a:p>
+        </p:txBody>
+      </p:sp>
+      <p:sp>
+        <p:nvSpPr>
+          <p:cNvPr id="3" name="부제목 2">
+            <a:extLst>
+              <a:ext uri="{FF2B5EF4-FFF2-40B4-BE49-F238E27FC236}">
+                <a16:creationId xmlns:a16="http://schemas.microsoft.com/office/drawing/2014/main" id="{22FD3175-6A14-24B3-BEB8-7E122FE63F8B}"/>
+              </a:ext>
+            </a:extLst>
+          </p:cNvPr>
+          <p:cNvSpPr>
+            <a:spLocks noGrp="1"/>
+          </p:cNvSpPr>
+          <p:nvPr>
+            <p:ph type="subTitle" idx="1"/>
+          </p:nvPr>
+        </p:nvSpPr>
+        <p:spPr>
+          <a:xfrm>
+            <a:off x="1574055" y="1452837"/>
+            <a:ext cx="4855321" cy="3650160"/>
+          </a:xfrm>
+        </p:spPr>
+        <p:txBody>
+          <a:bodyPr>
+            <a:noAutofit/>
+          </a:bodyPr>
+          <a:lstStyle/>
+          <a:p>
+            <a:pPr marL="514350" indent="-514350">
+              <a:lnSpc>
+                <a:spcPct val="150000"/>
+              </a:lnSpc>
+              <a:buSzPct val="100000"/>
+              <a:buAutoNum type="arabicPeriod"/>
+            </a:pPr>
+            <a:r>
+              <a:rPr lang="en-US" altLang="ko-KR" sz="1800" cap="none" dirty="0">
+                <a:solidFill>
+                  <a:schemeClr val="tx1"/>
+                </a:solidFill>
+              </a:rPr>
+              <a:t>What</a:t>
+            </a:r>
+            <a:r>
+              <a:rPr lang="ko-KR" altLang="en-US" sz="1800" cap="none" dirty="0">
+                <a:solidFill>
+                  <a:schemeClr val="tx1"/>
+                </a:solidFill>
+              </a:rPr>
+              <a:t> </a:t>
+            </a:r>
+            <a:r>
+              <a:rPr lang="en-US" altLang="ko-KR" sz="1800" cap="none" dirty="0">
+                <a:solidFill>
+                  <a:schemeClr val="tx1"/>
+                </a:solidFill>
+              </a:rPr>
+              <a:t>is Modeling? </a:t>
+            </a:r>
+          </a:p>
+          <a:p>
+            <a:pPr marL="514350" indent="-514350">
+              <a:lnSpc>
+                <a:spcPct val="150000"/>
+              </a:lnSpc>
+              <a:buSzPct val="100000"/>
+              <a:buAutoNum type="arabicPeriod"/>
+            </a:pPr>
+            <a:r>
+              <a:rPr lang="en-US" altLang="ko-KR" sz="1800" cap="none" dirty="0">
+                <a:solidFill>
+                  <a:schemeClr val="tx1"/>
+                </a:solidFill>
+              </a:rPr>
+              <a:t>Python</a:t>
+            </a:r>
+            <a:r>
+              <a:rPr lang="ko-KR" altLang="en-US" sz="1800" cap="none" dirty="0">
+                <a:solidFill>
+                  <a:schemeClr val="tx1"/>
+                </a:solidFill>
+              </a:rPr>
+              <a:t> </a:t>
+            </a:r>
+            <a:r>
+              <a:rPr lang="en-US" altLang="ko-KR" sz="1800" cap="none" dirty="0" err="1">
+                <a:solidFill>
+                  <a:schemeClr val="tx1"/>
+                </a:solidFill>
+              </a:rPr>
+              <a:t>sympy</a:t>
+            </a:r>
+            <a:endParaRPr lang="en-US" altLang="ko-KR" sz="1800" cap="none" dirty="0">
+              <a:solidFill>
+                <a:schemeClr val="tx1"/>
+              </a:solidFill>
+            </a:endParaRPr>
+          </a:p>
+          <a:p>
+            <a:pPr marL="514350" indent="-514350">
+              <a:lnSpc>
+                <a:spcPct val="150000"/>
+              </a:lnSpc>
+              <a:buSzPct val="100000"/>
+              <a:buAutoNum type="arabicPeriod"/>
+            </a:pPr>
+            <a:r>
+              <a:rPr lang="en-US" altLang="ko-KR" sz="1800" cap="none" dirty="0">
+                <a:solidFill>
+                  <a:schemeClr val="tx1"/>
+                </a:solidFill>
+              </a:rPr>
+              <a:t>Derivative</a:t>
+            </a:r>
+          </a:p>
+          <a:p>
+            <a:pPr marL="514350" indent="-514350">
+              <a:lnSpc>
+                <a:spcPct val="150000"/>
+              </a:lnSpc>
+              <a:buSzPct val="100000"/>
+              <a:buAutoNum type="arabicPeriod"/>
+            </a:pPr>
+            <a:r>
+              <a:rPr lang="en-US" altLang="ko-KR" sz="1800" cap="none" dirty="0">
+                <a:solidFill>
+                  <a:schemeClr val="tx1"/>
+                </a:solidFill>
+              </a:rPr>
+              <a:t>Time &amp; Space (w1)</a:t>
+            </a:r>
+          </a:p>
+          <a:p>
+            <a:pPr marL="514350" indent="-514350">
+              <a:lnSpc>
+                <a:spcPct val="150000"/>
+              </a:lnSpc>
+              <a:buSzPct val="100000"/>
+              <a:buAutoNum type="arabicPeriod"/>
+            </a:pPr>
+            <a:r>
+              <a:rPr lang="en-US" altLang="ko-KR" sz="1800" cap="none" dirty="0">
+                <a:solidFill>
+                  <a:schemeClr val="tx1"/>
+                </a:solidFill>
+              </a:rPr>
+              <a:t>Optimization (w2)</a:t>
+            </a:r>
+          </a:p>
+          <a:p>
+            <a:pPr marL="514350" indent="-514350">
+              <a:lnSpc>
+                <a:spcPct val="150000"/>
+              </a:lnSpc>
+              <a:buSzPct val="100000"/>
+              <a:buAutoNum type="arabicPeriod"/>
+            </a:pPr>
+            <a:r>
+              <a:rPr lang="en-US" altLang="ko-KR" sz="1800" cap="none" dirty="0">
+                <a:solidFill>
+                  <a:schemeClr val="tx1"/>
+                </a:solidFill>
+              </a:rPr>
+              <a:t>Linear Regression (w3) (w4)</a:t>
+            </a:r>
+          </a:p>
+          <a:p>
+            <a:pPr marL="514350" indent="-514350">
+              <a:lnSpc>
+                <a:spcPct val="150000"/>
+              </a:lnSpc>
+              <a:buSzPct val="100000"/>
+              <a:buAutoNum type="arabicPeriod"/>
+            </a:pPr>
+            <a:r>
+              <a:rPr lang="en-US" altLang="ko-KR" sz="1800" cap="none" dirty="0">
+                <a:solidFill>
+                  <a:schemeClr val="tx1"/>
+                </a:solidFill>
+              </a:rPr>
+              <a:t>Optimization of loss function (L1, L2)</a:t>
+            </a:r>
+          </a:p>
+          <a:p>
+            <a:pPr marL="514350" indent="-514350">
+              <a:lnSpc>
+                <a:spcPct val="150000"/>
+              </a:lnSpc>
+              <a:buSzPct val="100000"/>
+              <a:buAutoNum type="arabicPeriod"/>
+            </a:pPr>
+            <a:r>
+              <a:rPr lang="en-US" altLang="ko-KR" sz="1800" cap="none" dirty="0">
+                <a:solidFill>
+                  <a:schemeClr val="tx1"/>
+                </a:solidFill>
+              </a:rPr>
+              <a:t>Short cut algorithm</a:t>
+            </a:r>
+          </a:p>
+          <a:p>
+            <a:pPr marL="514350" indent="-514350">
+              <a:lnSpc>
+                <a:spcPct val="150000"/>
+              </a:lnSpc>
+              <a:buSzPct val="100000"/>
+              <a:buAutoNum type="arabicPeriod"/>
+            </a:pPr>
+            <a:r>
+              <a:rPr lang="en-US" altLang="ko-KR" sz="1800" cap="none" dirty="0">
+                <a:solidFill>
+                  <a:schemeClr val="tx1"/>
+                </a:solidFill>
+              </a:rPr>
+              <a:t>Linear Programming</a:t>
+            </a:r>
+            <a:endParaRPr lang="en-US" altLang="ko-KR" sz="1800" cap="none" dirty="0"/>
+          </a:p>
+          <a:p>
+            <a:pPr marL="514350" indent="-514350">
+              <a:lnSpc>
+                <a:spcPct val="150000"/>
+              </a:lnSpc>
+              <a:buSzPct val="100000"/>
+              <a:buAutoNum type="arabicPeriod"/>
+            </a:pPr>
+            <a:endParaRPr lang="en-US" altLang="ko-KR" sz="1800" cap="none" dirty="0"/>
+          </a:p>
+          <a:p>
+            <a:pPr marL="514350" indent="-514350">
+              <a:lnSpc>
+                <a:spcPct val="150000"/>
+              </a:lnSpc>
+              <a:buSzPct val="100000"/>
+              <a:buAutoNum type="arabicPeriod"/>
+            </a:pPr>
+            <a:endParaRPr lang="ko-KR" altLang="en-US" sz="1800" cap="none" dirty="0"/>
+          </a:p>
+        </p:txBody>
+      </p:sp>
+      <p:sp>
+        <p:nvSpPr>
+          <p:cNvPr id="6" name="TextBox 5">
+            <a:extLst>
+              <a:ext uri="{FF2B5EF4-FFF2-40B4-BE49-F238E27FC236}">
+                <a16:creationId xmlns:a16="http://schemas.microsoft.com/office/drawing/2014/main" id="{0983F7B7-5C7A-3281-2C9C-2E6E60F23F68}"/>
+              </a:ext>
+            </a:extLst>
+          </p:cNvPr>
+          <p:cNvSpPr txBox="1"/>
+          <p:nvPr/>
+        </p:nvSpPr>
+        <p:spPr>
+          <a:xfrm>
+            <a:off x="7239000" y="1338537"/>
+            <a:ext cx="4400550" cy="3329053"/>
+          </a:xfrm>
+          <a:prstGeom prst="rect">
+            <a:avLst/>
+          </a:prstGeom>
+          <a:noFill/>
+        </p:spPr>
+        <p:txBody>
+          <a:bodyPr wrap="square">
+            <a:spAutoFit/>
+          </a:bodyPr>
+          <a:lstStyle/>
+          <a:p>
+            <a:pPr marL="514350" indent="-514350">
+              <a:lnSpc>
+                <a:spcPct val="200000"/>
+              </a:lnSpc>
+              <a:buClr>
+                <a:srgbClr val="FFC000"/>
+              </a:buClr>
+              <a:buFont typeface="+mj-lt"/>
+              <a:buAutoNum type="arabicPeriod" startAt="9"/>
+            </a:pPr>
+            <a:r>
+              <a:rPr lang="en-US" altLang="ko-KR" dirty="0"/>
+              <a:t>Transportation Problem</a:t>
+            </a:r>
+          </a:p>
+          <a:p>
+            <a:pPr marL="514350" indent="-514350">
+              <a:lnSpc>
+                <a:spcPct val="200000"/>
+              </a:lnSpc>
+              <a:buClr>
+                <a:srgbClr val="FFC000"/>
+              </a:buClr>
+              <a:buFont typeface="+mj-lt"/>
+              <a:buAutoNum type="arabicPeriod" startAt="9"/>
+            </a:pPr>
+            <a:r>
+              <a:rPr lang="en-US" altLang="ko-KR" dirty="0"/>
+              <a:t>Montecarlo simulation</a:t>
+            </a:r>
+          </a:p>
+          <a:p>
+            <a:pPr marL="514350" indent="-514350">
+              <a:lnSpc>
+                <a:spcPct val="200000"/>
+              </a:lnSpc>
+              <a:buClr>
+                <a:srgbClr val="FFC000"/>
+              </a:buClr>
+              <a:buFont typeface="+mj-lt"/>
+              <a:buAutoNum type="arabicPeriod" startAt="9"/>
+            </a:pPr>
+            <a:r>
+              <a:rPr lang="en-US" altLang="ko-KR" dirty="0"/>
+              <a:t>Random walk simulation</a:t>
+            </a:r>
+          </a:p>
+          <a:p>
+            <a:pPr marL="514350" indent="-514350">
+              <a:lnSpc>
+                <a:spcPct val="200000"/>
+              </a:lnSpc>
+              <a:buClr>
+                <a:srgbClr val="FFC000"/>
+              </a:buClr>
+              <a:buFont typeface="+mj-lt"/>
+              <a:buAutoNum type="arabicPeriod" startAt="9"/>
+            </a:pPr>
+            <a:r>
+              <a:rPr lang="en-US" altLang="ko-KR" dirty="0"/>
+              <a:t>Bootstrap</a:t>
+            </a:r>
+          </a:p>
+          <a:p>
+            <a:pPr marL="514350" indent="-514350">
+              <a:lnSpc>
+                <a:spcPct val="200000"/>
+              </a:lnSpc>
+              <a:buClr>
+                <a:srgbClr val="FFC000"/>
+              </a:buClr>
+              <a:buFont typeface="+mj-lt"/>
+              <a:buAutoNum type="arabicPeriod" startAt="9"/>
+            </a:pPr>
+            <a:r>
+              <a:rPr lang="en-US" altLang="ko-KR" dirty="0"/>
+              <a:t>Central limit theorem</a:t>
+            </a:r>
+          </a:p>
+          <a:p>
+            <a:pPr marL="514350" indent="-514350">
+              <a:lnSpc>
+                <a:spcPct val="200000"/>
+              </a:lnSpc>
+              <a:buClr>
+                <a:srgbClr val="FFC000"/>
+              </a:buClr>
+              <a:buFont typeface="+mj-lt"/>
+              <a:buAutoNum type="arabicPeriod" startAt="9"/>
+            </a:pPr>
+            <a:r>
+              <a:rPr lang="en-US" altLang="ko-KR" dirty="0"/>
+              <a:t>Random projection</a:t>
+            </a:r>
+          </a:p>
+        </p:txBody>
+      </p:sp>
+    </p:spTree>
+    <p:extLst>
+      <p:ext uri="{BB962C8B-B14F-4D97-AF65-F5344CB8AC3E}">
+        <p14:creationId xmlns:p14="http://schemas.microsoft.com/office/powerpoint/2010/main" val="1184269747"/>
+      </p:ext>
+    </p:extLst>
+  </p:cSld>
+  <p:clrMapOvr>
+    <a:masterClrMapping/>
+  </p:clrMapOvr>
+</p:sld>
+</file>
+
+<file path=ppt/slides/slide52.xml><?xml version="1.0" encoding="utf-8"?>
+<p:sld xmlns:a="http://schemas.openxmlformats.org/drawingml/2006/main" xmlns:r="http://schemas.openxmlformats.org/officeDocument/2006/relationships" xmlns:p="http://schemas.openxmlformats.org/presentationml/2006/main">
+  <p:cSld>
+    <p:spTree>
+      <p:nvGrpSpPr>
+        <p:cNvPr id="1" name="">
+          <a:extLst>
+            <a:ext uri="{FF2B5EF4-FFF2-40B4-BE49-F238E27FC236}">
+              <a16:creationId xmlns:a16="http://schemas.microsoft.com/office/drawing/2014/main" id="{F8570E3F-5EEC-F1A6-FAA6-F087DE60ECE5}"/>
+            </a:ext>
+          </a:extLst>
+        </p:cNvPr>
+        <p:cNvGrpSpPr/>
+        <p:nvPr/>
+      </p:nvGrpSpPr>
+      <p:grpSpPr>
+        <a:xfrm>
+          <a:off x="0" y="0"/>
+          <a:ext cx="0" cy="0"/>
+          <a:chOff x="0" y="0"/>
+          <a:chExt cx="0" cy="0"/>
+        </a:xfrm>
+      </p:grpSpPr>
+      <p:sp>
+        <p:nvSpPr>
+          <p:cNvPr id="6" name="제목 1">
+            <a:extLst>
+              <a:ext uri="{FF2B5EF4-FFF2-40B4-BE49-F238E27FC236}">
+                <a16:creationId xmlns:a16="http://schemas.microsoft.com/office/drawing/2014/main" id="{3A98E502-D2A8-03BA-7C44-261709BCB2FF}"/>
+              </a:ext>
+            </a:extLst>
+          </p:cNvPr>
+          <p:cNvSpPr>
+            <a:spLocks noGrp="1"/>
+          </p:cNvSpPr>
+          <p:nvPr>
+            <p:ph type="title"/>
+          </p:nvPr>
+        </p:nvSpPr>
+        <p:spPr>
+          <a:xfrm>
+            <a:off x="915383" y="139084"/>
+            <a:ext cx="10353762" cy="766439"/>
+          </a:xfrm>
+        </p:spPr>
+        <p:txBody>
+          <a:bodyPr>
+            <a:normAutofit/>
+          </a:bodyPr>
+          <a:lstStyle/>
+          <a:p>
+            <a:r>
+              <a:rPr lang="en-US" altLang="ko-KR" b="1" dirty="0">
+                <a:latin typeface="Times New Roman" panose="02020603050405020304" pitchFamily="18" charset="0"/>
+                <a:cs typeface="Times New Roman" panose="02020603050405020304" pitchFamily="18" charset="0"/>
+              </a:rPr>
+              <a:t>Linear Programming</a:t>
+            </a:r>
+            <a:endParaRPr lang="ko-KR" altLang="en-US" b="1" cap="none" dirty="0">
+              <a:latin typeface="Times New Roman" panose="02020603050405020304" pitchFamily="18" charset="0"/>
+              <a:cs typeface="Times New Roman" panose="02020603050405020304" pitchFamily="18" charset="0"/>
+            </a:endParaRPr>
+          </a:p>
+        </p:txBody>
+      </p:sp>
+      <p:sp>
+        <p:nvSpPr>
+          <p:cNvPr id="8" name="슬라이드 번호 개체 틀 7">
+            <a:extLst>
+              <a:ext uri="{FF2B5EF4-FFF2-40B4-BE49-F238E27FC236}">
+                <a16:creationId xmlns:a16="http://schemas.microsoft.com/office/drawing/2014/main" id="{2797A6E5-801E-04CF-7599-F1B28EB95EA7}"/>
+              </a:ext>
+            </a:extLst>
+          </p:cNvPr>
+          <p:cNvSpPr>
+            <a:spLocks noGrp="1"/>
+          </p:cNvSpPr>
+          <p:nvPr>
+            <p:ph type="sldNum" sz="quarter" idx="12"/>
+          </p:nvPr>
+        </p:nvSpPr>
+        <p:spPr/>
+        <p:txBody>
+          <a:bodyPr/>
+          <a:lstStyle/>
+          <a:p>
+            <a:fld id="{D57F1E4F-1CFF-5643-939E-02111984F565}" type="slidenum">
+              <a:rPr lang="en-US" smtClean="0"/>
+              <a:t>52</a:t>
+            </a:fld>
+            <a:endParaRPr lang="en-US" dirty="0"/>
+          </a:p>
+        </p:txBody>
+      </p:sp>
+      <p:sp>
+        <p:nvSpPr>
+          <p:cNvPr id="3" name="직사각형 2">
+            <a:extLst>
+              <a:ext uri="{FF2B5EF4-FFF2-40B4-BE49-F238E27FC236}">
+                <a16:creationId xmlns:a16="http://schemas.microsoft.com/office/drawing/2014/main" id="{69F3237E-DE96-394F-6719-57C4AE5790F0}"/>
+              </a:ext>
+            </a:extLst>
+          </p:cNvPr>
+          <p:cNvSpPr/>
+          <p:nvPr/>
+        </p:nvSpPr>
+        <p:spPr>
+          <a:xfrm>
+            <a:off x="535712" y="2286000"/>
+            <a:ext cx="10218013" cy="4276271"/>
+          </a:xfrm>
+          <a:prstGeom prst="rect">
+            <a:avLst/>
+          </a:prstGeom>
+          <a:solidFill>
+            <a:schemeClr val="bg1">
+              <a:lumMod val="75000"/>
+              <a:lumOff val="25000"/>
+            </a:schemeClr>
+          </a:solidFill>
+        </p:spPr>
+        <p:style>
+          <a:lnRef idx="2">
+            <a:schemeClr val="accent1">
+              <a:shade val="15000"/>
+            </a:schemeClr>
+          </a:lnRef>
+          <a:fillRef idx="1">
+            <a:schemeClr val="accent1"/>
+          </a:fillRef>
+          <a:effectRef idx="0">
+            <a:schemeClr val="accent1"/>
+          </a:effectRef>
+          <a:fontRef idx="minor">
+            <a:schemeClr val="lt1"/>
+          </a:fontRef>
+        </p:style>
+        <p:txBody>
+          <a:bodyPr rtlCol="0" anchor="ctr"/>
+          <a:lstStyle/>
+          <a:p>
+            <a:pPr algn="ctr"/>
+            <a:endParaRPr lang="ko-KR" altLang="en-US" dirty="0"/>
+          </a:p>
+        </p:txBody>
+      </p:sp>
+      <p:sp>
+        <p:nvSpPr>
+          <p:cNvPr id="30" name="TextBox 29">
+            <a:extLst>
+              <a:ext uri="{FF2B5EF4-FFF2-40B4-BE49-F238E27FC236}">
+                <a16:creationId xmlns:a16="http://schemas.microsoft.com/office/drawing/2014/main" id="{D77CEBF4-443F-B850-DC6E-5B092470F7FF}"/>
+              </a:ext>
+            </a:extLst>
+          </p:cNvPr>
+          <p:cNvSpPr txBox="1"/>
+          <p:nvPr/>
+        </p:nvSpPr>
+        <p:spPr>
+          <a:xfrm>
+            <a:off x="535712" y="1420336"/>
+            <a:ext cx="10655027" cy="4932441"/>
+          </a:xfrm>
+          <a:prstGeom prst="rect">
+            <a:avLst/>
+          </a:prstGeom>
+          <a:noFill/>
+        </p:spPr>
+        <p:txBody>
+          <a:bodyPr wrap="square" rtlCol="0">
+            <a:spAutoFit/>
+          </a:bodyPr>
+          <a:lstStyle/>
+          <a:p>
+            <a:pPr>
+              <a:lnSpc>
+                <a:spcPct val="150000"/>
+              </a:lnSpc>
+            </a:pPr>
+            <a:r>
+              <a:rPr lang="ko-KR" altLang="en-US" sz="2400" dirty="0">
+                <a:latin typeface="맑은 고딕 Semilight" panose="020B0502040204020203" pitchFamily="50" charset="-127"/>
+                <a:ea typeface="맑은 고딕 Semilight" panose="020B0502040204020203" pitchFamily="50" charset="-127"/>
+                <a:cs typeface="맑은 고딕 Semilight" panose="020B0502040204020203" pitchFamily="50" charset="-127"/>
+              </a:rPr>
+              <a:t>아래</a:t>
+            </a:r>
+            <a:r>
+              <a:rPr lang="en-US" altLang="ko-KR" sz="2400" dirty="0">
+                <a:latin typeface="맑은 고딕 Semilight" panose="020B0502040204020203" pitchFamily="50" charset="-127"/>
+                <a:ea typeface="맑은 고딕 Semilight" panose="020B0502040204020203" pitchFamily="50" charset="-127"/>
+                <a:cs typeface="맑은 고딕 Semilight" panose="020B0502040204020203" pitchFamily="50" charset="-127"/>
+              </a:rPr>
+              <a:t> </a:t>
+            </a:r>
+            <a:r>
+              <a:rPr lang="ko-KR" altLang="en-US" sz="2400" dirty="0">
+                <a:latin typeface="맑은 고딕 Semilight" panose="020B0502040204020203" pitchFamily="50" charset="-127"/>
+                <a:ea typeface="맑은 고딕 Semilight" panose="020B0502040204020203" pitchFamily="50" charset="-127"/>
+                <a:cs typeface="맑은 고딕 Semilight" panose="020B0502040204020203" pitchFamily="50" charset="-127"/>
+              </a:rPr>
+              <a:t>문제 </a:t>
+            </a:r>
+            <a:r>
+              <a:rPr lang="en-US" altLang="ko-KR" sz="2400" dirty="0">
+                <a:latin typeface="맑은 고딕 Semilight" panose="020B0502040204020203" pitchFamily="50" charset="-127"/>
+                <a:ea typeface="맑은 고딕 Semilight" panose="020B0502040204020203" pitchFamily="50" charset="-127"/>
+                <a:cs typeface="맑은 고딕 Semilight" panose="020B0502040204020203" pitchFamily="50" charset="-127"/>
+                <a:sym typeface="Wingdings" panose="05000000000000000000" pitchFamily="2" charset="2"/>
+              </a:rPr>
+              <a:t></a:t>
+            </a:r>
+            <a:r>
+              <a:rPr lang="en-US" altLang="ko-KR" sz="2400" dirty="0">
+                <a:latin typeface="맑은 고딕 Semilight" panose="020B0502040204020203" pitchFamily="50" charset="-127"/>
+                <a:ea typeface="맑은 고딕 Semilight" panose="020B0502040204020203" pitchFamily="50" charset="-127"/>
+                <a:cs typeface="맑은 고딕 Semilight" panose="020B0502040204020203" pitchFamily="50" charset="-127"/>
+              </a:rPr>
+              <a:t> </a:t>
+            </a:r>
+            <a:r>
+              <a:rPr lang="ko-KR" altLang="en-US" sz="2400" dirty="0">
+                <a:latin typeface="맑은 고딕 Semilight" panose="020B0502040204020203" pitchFamily="50" charset="-127"/>
+                <a:ea typeface="맑은 고딕 Semilight" panose="020B0502040204020203" pitchFamily="50" charset="-127"/>
+                <a:cs typeface="맑은 고딕 Semilight" panose="020B0502040204020203" pitchFamily="50" charset="-127"/>
+              </a:rPr>
+              <a:t>선형계획법으로</a:t>
+            </a:r>
+            <a:r>
+              <a:rPr lang="en-US" altLang="ko-KR" sz="2400" dirty="0">
+                <a:latin typeface="맑은 고딕 Semilight" panose="020B0502040204020203" pitchFamily="50" charset="-127"/>
+                <a:ea typeface="맑은 고딕 Semilight" panose="020B0502040204020203" pitchFamily="50" charset="-127"/>
+                <a:cs typeface="맑은 고딕 Semilight" panose="020B0502040204020203" pitchFamily="50" charset="-127"/>
+              </a:rPr>
+              <a:t> </a:t>
+            </a:r>
+            <a:r>
+              <a:rPr lang="ko-KR" altLang="en-US" sz="2400" dirty="0">
+                <a:latin typeface="맑은 고딕 Semilight" panose="020B0502040204020203" pitchFamily="50" charset="-127"/>
+                <a:ea typeface="맑은 고딕 Semilight" panose="020B0502040204020203" pitchFamily="50" charset="-127"/>
+                <a:cs typeface="맑은 고딕 Semilight" panose="020B0502040204020203" pitchFamily="50" charset="-127"/>
+              </a:rPr>
+              <a:t>이익을 최대화하는 </a:t>
+            </a:r>
+            <a:r>
+              <a:rPr lang="en-US" altLang="ko-KR" sz="2400" dirty="0">
+                <a:latin typeface="맑은 고딕 Semilight" panose="020B0502040204020203" pitchFamily="50" charset="-127"/>
+                <a:ea typeface="맑은 고딕 Semilight" panose="020B0502040204020203" pitchFamily="50" charset="-127"/>
+                <a:cs typeface="맑은 고딕 Semilight" panose="020B0502040204020203" pitchFamily="50" charset="-127"/>
+              </a:rPr>
+              <a:t>Optimization</a:t>
+            </a:r>
+          </a:p>
+          <a:p>
+            <a:pPr marL="342900" indent="-342900">
+              <a:lnSpc>
+                <a:spcPct val="150000"/>
+              </a:lnSpc>
+              <a:buFont typeface="Wingdings" panose="05000000000000000000" pitchFamily="2" charset="2"/>
+              <a:buChar char="§"/>
+            </a:pPr>
+            <a:endParaRPr lang="en-US" altLang="ko-KR" sz="2000" b="1" dirty="0">
+              <a:latin typeface="맑은 고딕 Semilight" panose="020B0502040204020203" pitchFamily="50" charset="-127"/>
+              <a:ea typeface="맑은 고딕 Semilight" panose="020B0502040204020203" pitchFamily="50" charset="-127"/>
+              <a:cs typeface="맑은 고딕 Semilight" panose="020B0502040204020203" pitchFamily="50" charset="-127"/>
+            </a:endParaRPr>
+          </a:p>
+          <a:p>
+            <a:pPr marL="342900" indent="-342900">
+              <a:lnSpc>
+                <a:spcPct val="150000"/>
+              </a:lnSpc>
+              <a:buFont typeface="Wingdings" panose="05000000000000000000" pitchFamily="2" charset="2"/>
+              <a:buChar char="§"/>
+            </a:pPr>
+            <a:r>
+              <a:rPr lang="ko-KR" altLang="en-US" sz="2000" b="1" dirty="0">
+                <a:latin typeface="맑은 고딕 Semilight" panose="020B0502040204020203" pitchFamily="50" charset="-127"/>
+                <a:ea typeface="맑은 고딕 Semilight" panose="020B0502040204020203" pitchFamily="50" charset="-127"/>
+                <a:cs typeface="맑은 고딕 Semilight" panose="020B0502040204020203" pitchFamily="50" charset="-127"/>
+              </a:rPr>
+              <a:t>목표</a:t>
+            </a:r>
+            <a:r>
+              <a:rPr lang="en-US" altLang="ko-KR" sz="2000" b="1" dirty="0">
+                <a:latin typeface="맑은 고딕 Semilight" panose="020B0502040204020203" pitchFamily="50" charset="-127"/>
+                <a:ea typeface="맑은 고딕 Semilight" panose="020B0502040204020203" pitchFamily="50" charset="-127"/>
+                <a:cs typeface="맑은 고딕 Semilight" panose="020B0502040204020203" pitchFamily="50" charset="-127"/>
+              </a:rPr>
+              <a:t>: </a:t>
+            </a:r>
+          </a:p>
+          <a:p>
+            <a:pPr marL="800100" lvl="1" indent="-342900">
+              <a:lnSpc>
+                <a:spcPct val="150000"/>
+              </a:lnSpc>
+              <a:buFont typeface="Wingdings" panose="05000000000000000000" pitchFamily="2" charset="2"/>
+              <a:buChar char="§"/>
+            </a:pPr>
+            <a:r>
+              <a:rPr lang="ko-KR" altLang="en-US" b="1" dirty="0">
+                <a:latin typeface="맑은 고딕 Semilight" panose="020B0502040204020203" pitchFamily="50" charset="-127"/>
+                <a:ea typeface="맑은 고딕 Semilight" panose="020B0502040204020203" pitchFamily="50" charset="-127"/>
+                <a:cs typeface="맑은 고딕 Semilight" panose="020B0502040204020203" pitchFamily="50" charset="-127"/>
+              </a:rPr>
+              <a:t>의자</a:t>
+            </a:r>
+            <a:r>
+              <a:rPr lang="en-US" altLang="ko-KR" b="1" dirty="0">
+                <a:latin typeface="맑은 고딕 Semilight" panose="020B0502040204020203" pitchFamily="50" charset="-127"/>
+                <a:ea typeface="맑은 고딕 Semilight" panose="020B0502040204020203" pitchFamily="50" charset="-127"/>
+                <a:cs typeface="맑은 고딕 Semilight" panose="020B0502040204020203" pitchFamily="50" charset="-127"/>
+              </a:rPr>
+              <a:t>(x1)</a:t>
+            </a:r>
+            <a:r>
+              <a:rPr lang="ko-KR" altLang="en-US" b="1" dirty="0">
+                <a:latin typeface="맑은 고딕 Semilight" panose="020B0502040204020203" pitchFamily="50" charset="-127"/>
+                <a:ea typeface="맑은 고딕 Semilight" panose="020B0502040204020203" pitchFamily="50" charset="-127"/>
+                <a:cs typeface="맑은 고딕 Semilight" panose="020B0502040204020203" pitchFamily="50" charset="-127"/>
+              </a:rPr>
+              <a:t>와 책상</a:t>
+            </a:r>
+            <a:r>
+              <a:rPr lang="en-US" altLang="ko-KR" b="1" dirty="0">
+                <a:latin typeface="맑은 고딕 Semilight" panose="020B0502040204020203" pitchFamily="50" charset="-127"/>
+                <a:ea typeface="맑은 고딕 Semilight" panose="020B0502040204020203" pitchFamily="50" charset="-127"/>
+                <a:cs typeface="맑은 고딕 Semilight" panose="020B0502040204020203" pitchFamily="50" charset="-127"/>
+              </a:rPr>
+              <a:t>(x2)</a:t>
+            </a:r>
+            <a:r>
+              <a:rPr lang="ko-KR" altLang="en-US" b="1" dirty="0">
+                <a:latin typeface="맑은 고딕 Semilight" panose="020B0502040204020203" pitchFamily="50" charset="-127"/>
+                <a:ea typeface="맑은 고딕 Semilight" panose="020B0502040204020203" pitchFamily="50" charset="-127"/>
+                <a:cs typeface="맑은 고딕 Semilight" panose="020B0502040204020203" pitchFamily="50" charset="-127"/>
+              </a:rPr>
+              <a:t>을 생산하는 공장에서 이익을 최대화하는 의자와 책상의 생산량은</a:t>
+            </a:r>
+            <a:r>
+              <a:rPr lang="en-US" altLang="ko-KR" b="1" dirty="0">
+                <a:latin typeface="맑은 고딕 Semilight" panose="020B0502040204020203" pitchFamily="50" charset="-127"/>
+                <a:ea typeface="맑은 고딕 Semilight" panose="020B0502040204020203" pitchFamily="50" charset="-127"/>
+                <a:cs typeface="맑은 고딕 Semilight" panose="020B0502040204020203" pitchFamily="50" charset="-127"/>
+              </a:rPr>
+              <a:t>?</a:t>
+            </a:r>
+          </a:p>
+          <a:p>
+            <a:pPr marL="342900" indent="-342900">
+              <a:lnSpc>
+                <a:spcPct val="150000"/>
+              </a:lnSpc>
+              <a:buFont typeface="Wingdings" panose="05000000000000000000" pitchFamily="2" charset="2"/>
+              <a:buChar char="§"/>
+            </a:pPr>
+            <a:endParaRPr lang="en-US" altLang="ko-KR" b="1" dirty="0">
+              <a:latin typeface="맑은 고딕 Semilight" panose="020B0502040204020203" pitchFamily="50" charset="-127"/>
+              <a:ea typeface="맑은 고딕 Semilight" panose="020B0502040204020203" pitchFamily="50" charset="-127"/>
+              <a:cs typeface="맑은 고딕 Semilight" panose="020B0502040204020203" pitchFamily="50" charset="-127"/>
+            </a:endParaRPr>
+          </a:p>
+          <a:p>
+            <a:pPr marL="342900" indent="-342900">
+              <a:lnSpc>
+                <a:spcPct val="150000"/>
+              </a:lnSpc>
+              <a:buFont typeface="Wingdings" panose="05000000000000000000" pitchFamily="2" charset="2"/>
+              <a:buChar char="§"/>
+            </a:pPr>
+            <a:r>
+              <a:rPr lang="ko-KR" altLang="en-US" sz="2000" b="1" dirty="0">
+                <a:latin typeface="맑은 고딕 Semilight" panose="020B0502040204020203" pitchFamily="50" charset="-127"/>
+                <a:ea typeface="맑은 고딕 Semilight" panose="020B0502040204020203" pitchFamily="50" charset="-127"/>
+                <a:cs typeface="맑은 고딕 Semilight" panose="020B0502040204020203" pitchFamily="50" charset="-127"/>
+              </a:rPr>
+              <a:t>이익</a:t>
+            </a:r>
+            <a:r>
+              <a:rPr lang="en-US" altLang="ko-KR" sz="2000" b="1" dirty="0">
+                <a:latin typeface="맑은 고딕 Semilight" panose="020B0502040204020203" pitchFamily="50" charset="-127"/>
+                <a:ea typeface="맑은 고딕 Semilight" panose="020B0502040204020203" pitchFamily="50" charset="-127"/>
+                <a:cs typeface="맑은 고딕 Semilight" panose="020B0502040204020203" pitchFamily="50" charset="-127"/>
+              </a:rPr>
+              <a:t>: </a:t>
+            </a:r>
+          </a:p>
+          <a:p>
+            <a:pPr marL="800100" lvl="1" indent="-342900">
+              <a:lnSpc>
+                <a:spcPct val="150000"/>
+              </a:lnSpc>
+              <a:buFont typeface="Wingdings" panose="05000000000000000000" pitchFamily="2" charset="2"/>
+              <a:buChar char="§"/>
+            </a:pPr>
+            <a:r>
+              <a:rPr lang="ko-KR" altLang="en-US" b="1" dirty="0">
+                <a:latin typeface="맑은 고딕 Semilight" panose="020B0502040204020203" pitchFamily="50" charset="-127"/>
+                <a:ea typeface="맑은 고딕 Semilight" panose="020B0502040204020203" pitchFamily="50" charset="-127"/>
+                <a:cs typeface="맑은 고딕 Semilight" panose="020B0502040204020203" pitchFamily="50" charset="-127"/>
+              </a:rPr>
+              <a:t>의자 한 개당 </a:t>
+            </a:r>
+            <a:r>
+              <a:rPr lang="en-US" altLang="ko-KR" b="1" dirty="0">
+                <a:latin typeface="맑은 고딕 Semilight" panose="020B0502040204020203" pitchFamily="50" charset="-127"/>
+                <a:ea typeface="맑은 고딕 Semilight" panose="020B0502040204020203" pitchFamily="50" charset="-127"/>
+                <a:cs typeface="맑은 고딕 Semilight" panose="020B0502040204020203" pitchFamily="50" charset="-127"/>
+              </a:rPr>
+              <a:t>3</a:t>
+            </a:r>
+            <a:r>
+              <a:rPr lang="ko-KR" altLang="en-US" b="1" dirty="0">
+                <a:latin typeface="맑은 고딕 Semilight" panose="020B0502040204020203" pitchFamily="50" charset="-127"/>
+                <a:ea typeface="맑은 고딕 Semilight" panose="020B0502040204020203" pitchFamily="50" charset="-127"/>
+                <a:cs typeface="맑은 고딕 Semilight" panose="020B0502040204020203" pitchFamily="50" charset="-127"/>
+              </a:rPr>
+              <a:t>만 원</a:t>
+            </a:r>
+            <a:r>
+              <a:rPr lang="en-US" altLang="ko-KR" b="1" dirty="0">
+                <a:latin typeface="맑은 고딕 Semilight" panose="020B0502040204020203" pitchFamily="50" charset="-127"/>
+                <a:ea typeface="맑은 고딕 Semilight" panose="020B0502040204020203" pitchFamily="50" charset="-127"/>
+                <a:cs typeface="맑은 고딕 Semilight" panose="020B0502040204020203" pitchFamily="50" charset="-127"/>
+              </a:rPr>
+              <a:t>, </a:t>
+            </a:r>
+            <a:r>
+              <a:rPr lang="ko-KR" altLang="en-US" b="1" dirty="0">
+                <a:latin typeface="맑은 고딕 Semilight" panose="020B0502040204020203" pitchFamily="50" charset="-127"/>
+                <a:ea typeface="맑은 고딕 Semilight" panose="020B0502040204020203" pitchFamily="50" charset="-127"/>
+                <a:cs typeface="맑은 고딕 Semilight" panose="020B0502040204020203" pitchFamily="50" charset="-127"/>
+              </a:rPr>
+              <a:t>책상 한 개당 </a:t>
+            </a:r>
+            <a:r>
+              <a:rPr lang="en-US" altLang="ko-KR" b="1" dirty="0">
+                <a:latin typeface="맑은 고딕 Semilight" panose="020B0502040204020203" pitchFamily="50" charset="-127"/>
+                <a:ea typeface="맑은 고딕 Semilight" panose="020B0502040204020203" pitchFamily="50" charset="-127"/>
+                <a:cs typeface="맑은 고딕 Semilight" panose="020B0502040204020203" pitchFamily="50" charset="-127"/>
+              </a:rPr>
+              <a:t>5</a:t>
+            </a:r>
+            <a:r>
+              <a:rPr lang="ko-KR" altLang="en-US" b="1" dirty="0">
+                <a:latin typeface="맑은 고딕 Semilight" panose="020B0502040204020203" pitchFamily="50" charset="-127"/>
+                <a:ea typeface="맑은 고딕 Semilight" panose="020B0502040204020203" pitchFamily="50" charset="-127"/>
+                <a:cs typeface="맑은 고딕 Semilight" panose="020B0502040204020203" pitchFamily="50" charset="-127"/>
+              </a:rPr>
+              <a:t>만 원의 이익</a:t>
+            </a:r>
+            <a:endParaRPr lang="en-US" altLang="ko-KR" b="1" dirty="0">
+              <a:latin typeface="맑은 고딕 Semilight" panose="020B0502040204020203" pitchFamily="50" charset="-127"/>
+              <a:ea typeface="맑은 고딕 Semilight" panose="020B0502040204020203" pitchFamily="50" charset="-127"/>
+              <a:cs typeface="맑은 고딕 Semilight" panose="020B0502040204020203" pitchFamily="50" charset="-127"/>
+            </a:endParaRPr>
+          </a:p>
+          <a:p>
+            <a:pPr marL="342900" indent="-342900">
+              <a:lnSpc>
+                <a:spcPct val="150000"/>
+              </a:lnSpc>
+              <a:buFont typeface="Wingdings" panose="05000000000000000000" pitchFamily="2" charset="2"/>
+              <a:buChar char="§"/>
+            </a:pPr>
+            <a:endParaRPr lang="en-US" altLang="ko-KR" b="1" dirty="0">
+              <a:latin typeface="맑은 고딕 Semilight" panose="020B0502040204020203" pitchFamily="50" charset="-127"/>
+              <a:ea typeface="맑은 고딕 Semilight" panose="020B0502040204020203" pitchFamily="50" charset="-127"/>
+              <a:cs typeface="맑은 고딕 Semilight" panose="020B0502040204020203" pitchFamily="50" charset="-127"/>
+            </a:endParaRPr>
+          </a:p>
+          <a:p>
+            <a:pPr marL="342900" indent="-342900">
+              <a:lnSpc>
+                <a:spcPct val="150000"/>
+              </a:lnSpc>
+              <a:buFont typeface="Wingdings" panose="05000000000000000000" pitchFamily="2" charset="2"/>
+              <a:buChar char="§"/>
+            </a:pPr>
+            <a:r>
+              <a:rPr lang="ko-KR" altLang="en-US" sz="2000" b="1" dirty="0">
+                <a:latin typeface="맑은 고딕 Semilight" panose="020B0502040204020203" pitchFamily="50" charset="-127"/>
+                <a:ea typeface="맑은 고딕 Semilight" panose="020B0502040204020203" pitchFamily="50" charset="-127"/>
+                <a:cs typeface="맑은 고딕 Semilight" panose="020B0502040204020203" pitchFamily="50" charset="-127"/>
+              </a:rPr>
+              <a:t>자원 제약</a:t>
+            </a:r>
+            <a:r>
+              <a:rPr lang="en-US" altLang="ko-KR" sz="2000" b="1" dirty="0">
+                <a:latin typeface="맑은 고딕 Semilight" panose="020B0502040204020203" pitchFamily="50" charset="-127"/>
+                <a:ea typeface="맑은 고딕 Semilight" panose="020B0502040204020203" pitchFamily="50" charset="-127"/>
+                <a:cs typeface="맑은 고딕 Semilight" panose="020B0502040204020203" pitchFamily="50" charset="-127"/>
+              </a:rPr>
+              <a:t>:</a:t>
+            </a:r>
+          </a:p>
+          <a:p>
+            <a:pPr marL="800100" lvl="1" indent="-342900">
+              <a:lnSpc>
+                <a:spcPct val="150000"/>
+              </a:lnSpc>
+              <a:buFont typeface="Wingdings" panose="05000000000000000000" pitchFamily="2" charset="2"/>
+              <a:buChar char="§"/>
+            </a:pPr>
+            <a:r>
+              <a:rPr lang="ko-KR" altLang="en-US" b="1" dirty="0">
+                <a:latin typeface="맑은 고딕 Semilight" panose="020B0502040204020203" pitchFamily="50" charset="-127"/>
+                <a:ea typeface="맑은 고딕 Semilight" panose="020B0502040204020203" pitchFamily="50" charset="-127"/>
+                <a:cs typeface="맑은 고딕 Semilight" panose="020B0502040204020203" pitchFamily="50" charset="-127"/>
+              </a:rPr>
+              <a:t>목재</a:t>
+            </a:r>
+            <a:r>
+              <a:rPr lang="en-US" altLang="ko-KR" b="1" dirty="0">
+                <a:latin typeface="맑은 고딕 Semilight" panose="020B0502040204020203" pitchFamily="50" charset="-127"/>
+                <a:ea typeface="맑은 고딕 Semilight" panose="020B0502040204020203" pitchFamily="50" charset="-127"/>
+                <a:cs typeface="맑은 고딕 Semilight" panose="020B0502040204020203" pitchFamily="50" charset="-127"/>
+              </a:rPr>
+              <a:t>: </a:t>
+            </a:r>
+            <a:r>
+              <a:rPr lang="ko-KR" altLang="en-US" b="1" dirty="0">
+                <a:latin typeface="맑은 고딕 Semilight" panose="020B0502040204020203" pitchFamily="50" charset="-127"/>
+                <a:ea typeface="맑은 고딕 Semilight" panose="020B0502040204020203" pitchFamily="50" charset="-127"/>
+                <a:cs typeface="맑은 고딕 Semilight" panose="020B0502040204020203" pitchFamily="50" charset="-127"/>
+              </a:rPr>
+              <a:t>의자는 </a:t>
+            </a:r>
+            <a:r>
+              <a:rPr lang="en-US" altLang="ko-KR" b="1" dirty="0">
+                <a:latin typeface="맑은 고딕 Semilight" panose="020B0502040204020203" pitchFamily="50" charset="-127"/>
+                <a:ea typeface="맑은 고딕 Semilight" panose="020B0502040204020203" pitchFamily="50" charset="-127"/>
+                <a:cs typeface="맑은 고딕 Semilight" panose="020B0502040204020203" pitchFamily="50" charset="-127"/>
+              </a:rPr>
+              <a:t>2</a:t>
+            </a:r>
+            <a:r>
+              <a:rPr lang="ko-KR" altLang="en-US" b="1" dirty="0">
+                <a:latin typeface="맑은 고딕 Semilight" panose="020B0502040204020203" pitchFamily="50" charset="-127"/>
+                <a:ea typeface="맑은 고딕 Semilight" panose="020B0502040204020203" pitchFamily="50" charset="-127"/>
+                <a:cs typeface="맑은 고딕 Semilight" panose="020B0502040204020203" pitchFamily="50" charset="-127"/>
+              </a:rPr>
+              <a:t>단위</a:t>
+            </a:r>
+            <a:r>
+              <a:rPr lang="en-US" altLang="ko-KR" b="1" dirty="0">
+                <a:latin typeface="맑은 고딕 Semilight" panose="020B0502040204020203" pitchFamily="50" charset="-127"/>
+                <a:ea typeface="맑은 고딕 Semilight" panose="020B0502040204020203" pitchFamily="50" charset="-127"/>
+                <a:cs typeface="맑은 고딕 Semilight" panose="020B0502040204020203" pitchFamily="50" charset="-127"/>
+              </a:rPr>
+              <a:t>, </a:t>
+            </a:r>
+            <a:r>
+              <a:rPr lang="ko-KR" altLang="en-US" b="1" dirty="0">
+                <a:latin typeface="맑은 고딕 Semilight" panose="020B0502040204020203" pitchFamily="50" charset="-127"/>
+                <a:ea typeface="맑은 고딕 Semilight" panose="020B0502040204020203" pitchFamily="50" charset="-127"/>
+                <a:cs typeface="맑은 고딕 Semilight" panose="020B0502040204020203" pitchFamily="50" charset="-127"/>
+              </a:rPr>
+              <a:t>책상은 </a:t>
+            </a:r>
+            <a:r>
+              <a:rPr lang="en-US" altLang="ko-KR" b="1" dirty="0">
+                <a:latin typeface="맑은 고딕 Semilight" panose="020B0502040204020203" pitchFamily="50" charset="-127"/>
+                <a:ea typeface="맑은 고딕 Semilight" panose="020B0502040204020203" pitchFamily="50" charset="-127"/>
+                <a:cs typeface="맑은 고딕 Semilight" panose="020B0502040204020203" pitchFamily="50" charset="-127"/>
+              </a:rPr>
+              <a:t>3</a:t>
+            </a:r>
+            <a:r>
+              <a:rPr lang="ko-KR" altLang="en-US" b="1" dirty="0">
+                <a:latin typeface="맑은 고딕 Semilight" panose="020B0502040204020203" pitchFamily="50" charset="-127"/>
+                <a:ea typeface="맑은 고딕 Semilight" panose="020B0502040204020203" pitchFamily="50" charset="-127"/>
+                <a:cs typeface="맑은 고딕 Semilight" panose="020B0502040204020203" pitchFamily="50" charset="-127"/>
+              </a:rPr>
+              <a:t>단위가 필요하며 총 </a:t>
+            </a:r>
+            <a:r>
+              <a:rPr lang="en-US" altLang="ko-KR" b="1" dirty="0">
+                <a:latin typeface="맑은 고딕 Semilight" panose="020B0502040204020203" pitchFamily="50" charset="-127"/>
+                <a:ea typeface="맑은 고딕 Semilight" panose="020B0502040204020203" pitchFamily="50" charset="-127"/>
+                <a:cs typeface="맑은 고딕 Semilight" panose="020B0502040204020203" pitchFamily="50" charset="-127"/>
+              </a:rPr>
+              <a:t>30</a:t>
+            </a:r>
+            <a:r>
+              <a:rPr lang="ko-KR" altLang="en-US" b="1" dirty="0">
+                <a:latin typeface="맑은 고딕 Semilight" panose="020B0502040204020203" pitchFamily="50" charset="-127"/>
+                <a:ea typeface="맑은 고딕 Semilight" panose="020B0502040204020203" pitchFamily="50" charset="-127"/>
+                <a:cs typeface="맑은 고딕 Semilight" panose="020B0502040204020203" pitchFamily="50" charset="-127"/>
+              </a:rPr>
+              <a:t>단위 까지만 사용 가능</a:t>
+            </a:r>
+            <a:endParaRPr lang="en-US" altLang="ko-KR" b="1" dirty="0">
+              <a:latin typeface="맑은 고딕 Semilight" panose="020B0502040204020203" pitchFamily="50" charset="-127"/>
+              <a:ea typeface="맑은 고딕 Semilight" panose="020B0502040204020203" pitchFamily="50" charset="-127"/>
+              <a:cs typeface="맑은 고딕 Semilight" panose="020B0502040204020203" pitchFamily="50" charset="-127"/>
+            </a:endParaRPr>
+          </a:p>
+          <a:p>
+            <a:pPr marL="800100" lvl="1" indent="-342900">
+              <a:lnSpc>
+                <a:spcPct val="150000"/>
+              </a:lnSpc>
+              <a:buFont typeface="Wingdings" panose="05000000000000000000" pitchFamily="2" charset="2"/>
+              <a:buChar char="§"/>
+            </a:pPr>
+            <a:r>
+              <a:rPr lang="ko-KR" altLang="en-US" b="1" dirty="0">
+                <a:latin typeface="맑은 고딕 Semilight" panose="020B0502040204020203" pitchFamily="50" charset="-127"/>
+                <a:ea typeface="맑은 고딕 Semilight" panose="020B0502040204020203" pitchFamily="50" charset="-127"/>
+                <a:cs typeface="맑은 고딕 Semilight" panose="020B0502040204020203" pitchFamily="50" charset="-127"/>
+              </a:rPr>
+              <a:t>노동 시간</a:t>
+            </a:r>
+            <a:r>
+              <a:rPr lang="en-US" altLang="ko-KR" b="1" dirty="0">
+                <a:latin typeface="맑은 고딕 Semilight" panose="020B0502040204020203" pitchFamily="50" charset="-127"/>
+                <a:ea typeface="맑은 고딕 Semilight" panose="020B0502040204020203" pitchFamily="50" charset="-127"/>
+                <a:cs typeface="맑은 고딕 Semilight" panose="020B0502040204020203" pitchFamily="50" charset="-127"/>
+              </a:rPr>
+              <a:t>: </a:t>
+            </a:r>
+            <a:r>
+              <a:rPr lang="ko-KR" altLang="en-US" b="1" dirty="0">
+                <a:latin typeface="맑은 고딕 Semilight" panose="020B0502040204020203" pitchFamily="50" charset="-127"/>
+                <a:ea typeface="맑은 고딕 Semilight" panose="020B0502040204020203" pitchFamily="50" charset="-127"/>
+                <a:cs typeface="맑은 고딕 Semilight" panose="020B0502040204020203" pitchFamily="50" charset="-127"/>
+              </a:rPr>
+              <a:t>의자는 </a:t>
+            </a:r>
+            <a:r>
+              <a:rPr lang="en-US" altLang="ko-KR" b="1" dirty="0">
+                <a:latin typeface="맑은 고딕 Semilight" panose="020B0502040204020203" pitchFamily="50" charset="-127"/>
+                <a:ea typeface="맑은 고딕 Semilight" panose="020B0502040204020203" pitchFamily="50" charset="-127"/>
+                <a:cs typeface="맑은 고딕 Semilight" panose="020B0502040204020203" pitchFamily="50" charset="-127"/>
+              </a:rPr>
+              <a:t>1</a:t>
+            </a:r>
+            <a:r>
+              <a:rPr lang="ko-KR" altLang="en-US" b="1" dirty="0">
+                <a:latin typeface="맑은 고딕 Semilight" panose="020B0502040204020203" pitchFamily="50" charset="-127"/>
+                <a:ea typeface="맑은 고딕 Semilight" panose="020B0502040204020203" pitchFamily="50" charset="-127"/>
+                <a:cs typeface="맑은 고딕 Semilight" panose="020B0502040204020203" pitchFamily="50" charset="-127"/>
+              </a:rPr>
+              <a:t>시간</a:t>
+            </a:r>
+            <a:r>
+              <a:rPr lang="en-US" altLang="ko-KR" b="1" dirty="0">
+                <a:latin typeface="맑은 고딕 Semilight" panose="020B0502040204020203" pitchFamily="50" charset="-127"/>
+                <a:ea typeface="맑은 고딕 Semilight" panose="020B0502040204020203" pitchFamily="50" charset="-127"/>
+                <a:cs typeface="맑은 고딕 Semilight" panose="020B0502040204020203" pitchFamily="50" charset="-127"/>
+              </a:rPr>
+              <a:t>, </a:t>
+            </a:r>
+            <a:r>
+              <a:rPr lang="ko-KR" altLang="en-US" b="1" dirty="0">
+                <a:latin typeface="맑은 고딕 Semilight" panose="020B0502040204020203" pitchFamily="50" charset="-127"/>
+                <a:ea typeface="맑은 고딕 Semilight" panose="020B0502040204020203" pitchFamily="50" charset="-127"/>
+                <a:cs typeface="맑은 고딕 Semilight" panose="020B0502040204020203" pitchFamily="50" charset="-127"/>
+              </a:rPr>
+              <a:t>책상은 </a:t>
+            </a:r>
+            <a:r>
+              <a:rPr lang="en-US" altLang="ko-KR" b="1" dirty="0">
+                <a:latin typeface="맑은 고딕 Semilight" panose="020B0502040204020203" pitchFamily="50" charset="-127"/>
+                <a:ea typeface="맑은 고딕 Semilight" panose="020B0502040204020203" pitchFamily="50" charset="-127"/>
+                <a:cs typeface="맑은 고딕 Semilight" panose="020B0502040204020203" pitchFamily="50" charset="-127"/>
+              </a:rPr>
+              <a:t>2</a:t>
+            </a:r>
+            <a:r>
+              <a:rPr lang="ko-KR" altLang="en-US" b="1" dirty="0">
+                <a:latin typeface="맑은 고딕 Semilight" panose="020B0502040204020203" pitchFamily="50" charset="-127"/>
+                <a:ea typeface="맑은 고딕 Semilight" panose="020B0502040204020203" pitchFamily="50" charset="-127"/>
+                <a:cs typeface="맑은 고딕 Semilight" panose="020B0502040204020203" pitchFamily="50" charset="-127"/>
+              </a:rPr>
+              <a:t>시간이 필요하며 총 </a:t>
+            </a:r>
+            <a:r>
+              <a:rPr lang="en-US" altLang="ko-KR" b="1" dirty="0">
+                <a:latin typeface="맑은 고딕 Semilight" panose="020B0502040204020203" pitchFamily="50" charset="-127"/>
+                <a:ea typeface="맑은 고딕 Semilight" panose="020B0502040204020203" pitchFamily="50" charset="-127"/>
+                <a:cs typeface="맑은 고딕 Semilight" panose="020B0502040204020203" pitchFamily="50" charset="-127"/>
+              </a:rPr>
+              <a:t>16</a:t>
+            </a:r>
+            <a:r>
+              <a:rPr lang="ko-KR" altLang="en-US" b="1" dirty="0">
+                <a:latin typeface="맑은 고딕 Semilight" panose="020B0502040204020203" pitchFamily="50" charset="-127"/>
+                <a:ea typeface="맑은 고딕 Semilight" panose="020B0502040204020203" pitchFamily="50" charset="-127"/>
+                <a:cs typeface="맑은 고딕 Semilight" panose="020B0502040204020203" pitchFamily="50" charset="-127"/>
+              </a:rPr>
+              <a:t>시간 까지만 가능</a:t>
+            </a:r>
+            <a:endParaRPr lang="en-US" altLang="ko-KR" b="1" dirty="0">
+              <a:latin typeface="맑은 고딕 Semilight" panose="020B0502040204020203" pitchFamily="50" charset="-127"/>
+              <a:ea typeface="맑은 고딕 Semilight" panose="020B0502040204020203" pitchFamily="50" charset="-127"/>
+              <a:cs typeface="맑은 고딕 Semilight" panose="020B0502040204020203" pitchFamily="50" charset="-127"/>
+            </a:endParaRPr>
+          </a:p>
+        </p:txBody>
+      </p:sp>
+    </p:spTree>
+    <p:extLst>
+      <p:ext uri="{BB962C8B-B14F-4D97-AF65-F5344CB8AC3E}">
+        <p14:creationId xmlns:p14="http://schemas.microsoft.com/office/powerpoint/2010/main" val="3119823322"/>
+      </p:ext>
+    </p:extLst>
+  </p:cSld>
+  <p:clrMapOvr>
+    <a:masterClrMapping/>
+  </p:clrMapOvr>
+</p:sld>
+</file>
+
+<file path=ppt/slides/slide53.xml><?xml version="1.0" encoding="utf-8"?>
+<p:sld xmlns:a="http://schemas.openxmlformats.org/drawingml/2006/main" xmlns:r="http://schemas.openxmlformats.org/officeDocument/2006/relationships" xmlns:p="http://schemas.openxmlformats.org/presentationml/2006/main">
+  <p:cSld>
+    <p:spTree>
+      <p:nvGrpSpPr>
+        <p:cNvPr id="1" name="">
+          <a:extLst>
+            <a:ext uri="{FF2B5EF4-FFF2-40B4-BE49-F238E27FC236}">
+              <a16:creationId xmlns:a16="http://schemas.microsoft.com/office/drawing/2014/main" id="{A090CFB8-C82A-C9EC-8C92-54F29EACEF99}"/>
+            </a:ext>
+          </a:extLst>
+        </p:cNvPr>
+        <p:cNvGrpSpPr/>
+        <p:nvPr/>
+      </p:nvGrpSpPr>
+      <p:grpSpPr>
+        <a:xfrm>
+          <a:off x="0" y="0"/>
+          <a:ext cx="0" cy="0"/>
+          <a:chOff x="0" y="0"/>
+          <a:chExt cx="0" cy="0"/>
+        </a:xfrm>
+      </p:grpSpPr>
+      <p:sp>
+        <p:nvSpPr>
+          <p:cNvPr id="6" name="제목 1">
+            <a:extLst>
+              <a:ext uri="{FF2B5EF4-FFF2-40B4-BE49-F238E27FC236}">
+                <a16:creationId xmlns:a16="http://schemas.microsoft.com/office/drawing/2014/main" id="{C880B0E6-0815-D986-2AED-FC39C14BD467}"/>
+              </a:ext>
+            </a:extLst>
+          </p:cNvPr>
+          <p:cNvSpPr>
+            <a:spLocks noGrp="1"/>
+          </p:cNvSpPr>
+          <p:nvPr>
+            <p:ph type="title"/>
+          </p:nvPr>
+        </p:nvSpPr>
+        <p:spPr>
+          <a:xfrm>
+            <a:off x="915383" y="139084"/>
+            <a:ext cx="10353762" cy="766439"/>
+          </a:xfrm>
+        </p:spPr>
+        <p:txBody>
+          <a:bodyPr>
+            <a:normAutofit/>
+          </a:bodyPr>
+          <a:lstStyle/>
+          <a:p>
+            <a:r>
+              <a:rPr lang="en-US" altLang="ko-KR" b="1" dirty="0">
+                <a:latin typeface="Times New Roman" panose="02020603050405020304" pitchFamily="18" charset="0"/>
+                <a:cs typeface="Times New Roman" panose="02020603050405020304" pitchFamily="18" charset="0"/>
+              </a:rPr>
+              <a:t>Linear Programming</a:t>
+            </a:r>
+            <a:endParaRPr lang="ko-KR" altLang="en-US" b="1" cap="none" dirty="0">
+              <a:latin typeface="Times New Roman" panose="02020603050405020304" pitchFamily="18" charset="0"/>
+              <a:cs typeface="Times New Roman" panose="02020603050405020304" pitchFamily="18" charset="0"/>
+            </a:endParaRPr>
+          </a:p>
+        </p:txBody>
+      </p:sp>
+      <p:sp>
+        <p:nvSpPr>
+          <p:cNvPr id="8" name="슬라이드 번호 개체 틀 7">
+            <a:extLst>
+              <a:ext uri="{FF2B5EF4-FFF2-40B4-BE49-F238E27FC236}">
+                <a16:creationId xmlns:a16="http://schemas.microsoft.com/office/drawing/2014/main" id="{5473C62C-0AC1-9AC7-F526-A8401B466BE6}"/>
+              </a:ext>
+            </a:extLst>
+          </p:cNvPr>
+          <p:cNvSpPr>
+            <a:spLocks noGrp="1"/>
+          </p:cNvSpPr>
+          <p:nvPr>
+            <p:ph type="sldNum" sz="quarter" idx="12"/>
+          </p:nvPr>
+        </p:nvSpPr>
+        <p:spPr/>
+        <p:txBody>
+          <a:bodyPr/>
+          <a:lstStyle/>
+          <a:p>
+            <a:fld id="{D57F1E4F-1CFF-5643-939E-02111984F565}" type="slidenum">
+              <a:rPr lang="en-US" smtClean="0"/>
+              <a:t>53</a:t>
+            </a:fld>
+            <a:endParaRPr lang="en-US" dirty="0"/>
+          </a:p>
+        </p:txBody>
+      </p:sp>
+      <p:pic>
+        <p:nvPicPr>
+          <p:cNvPr id="3" name="그림 2">
+            <a:extLst>
+              <a:ext uri="{FF2B5EF4-FFF2-40B4-BE49-F238E27FC236}">
+                <a16:creationId xmlns:a16="http://schemas.microsoft.com/office/drawing/2014/main" id="{13C13FC1-D6FB-5231-32F7-05813662EBCA}"/>
+              </a:ext>
+            </a:extLst>
+          </p:cNvPr>
+          <p:cNvPicPr>
+            <a:picLocks noChangeAspect="1"/>
+          </p:cNvPicPr>
+          <p:nvPr/>
+        </p:nvPicPr>
+        <p:blipFill>
+          <a:blip r:embed="rId2">
+            <a:duotone>
+              <a:prstClr val="black"/>
+              <a:schemeClr val="accent6">
+                <a:tint val="45000"/>
+                <a:satMod val="400000"/>
+              </a:schemeClr>
+            </a:duotone>
+          </a:blip>
+          <a:stretch>
+            <a:fillRect/>
+          </a:stretch>
+        </p:blipFill>
+        <p:spPr>
+          <a:xfrm>
+            <a:off x="1135221" y="1897275"/>
+            <a:ext cx="4877970" cy="3208125"/>
+          </a:xfrm>
+          <a:prstGeom prst="rect">
+            <a:avLst/>
+          </a:prstGeom>
+        </p:spPr>
+      </p:pic>
+      <p:pic>
+        <p:nvPicPr>
+          <p:cNvPr id="5" name="그림 4">
+            <a:extLst>
+              <a:ext uri="{FF2B5EF4-FFF2-40B4-BE49-F238E27FC236}">
+                <a16:creationId xmlns:a16="http://schemas.microsoft.com/office/drawing/2014/main" id="{CFF4F533-BD65-29C3-2F21-91D9A1A84FD8}"/>
+              </a:ext>
+            </a:extLst>
+          </p:cNvPr>
+          <p:cNvPicPr>
+            <a:picLocks noChangeAspect="1"/>
+          </p:cNvPicPr>
+          <p:nvPr/>
+        </p:nvPicPr>
+        <p:blipFill>
+          <a:blip r:embed="rId3">
+            <a:duotone>
+              <a:prstClr val="black"/>
+              <a:schemeClr val="accent5">
+                <a:tint val="45000"/>
+                <a:satMod val="400000"/>
+              </a:schemeClr>
+            </a:duotone>
+          </a:blip>
+          <a:stretch>
+            <a:fillRect/>
+          </a:stretch>
+        </p:blipFill>
+        <p:spPr>
+          <a:xfrm>
+            <a:off x="6920767" y="1897275"/>
+            <a:ext cx="3624446" cy="3208125"/>
+          </a:xfrm>
+          <a:prstGeom prst="rect">
+            <a:avLst/>
+          </a:prstGeom>
+        </p:spPr>
+      </p:pic>
+    </p:spTree>
+    <p:extLst>
+      <p:ext uri="{BB962C8B-B14F-4D97-AF65-F5344CB8AC3E}">
+        <p14:creationId xmlns:p14="http://schemas.microsoft.com/office/powerpoint/2010/main" val="4171524521"/>
+      </p:ext>
+    </p:extLst>
+  </p:cSld>
+  <p:clrMapOvr>
+    <a:masterClrMapping/>
+  </p:clrMapOvr>
+</p:sld>
+</file>
+
+<file path=ppt/slides/slide54.xml><?xml version="1.0" encoding="utf-8"?>
+<p:sld xmlns:a="http://schemas.openxmlformats.org/drawingml/2006/main" xmlns:r="http://schemas.openxmlformats.org/officeDocument/2006/relationships" xmlns:p="http://schemas.openxmlformats.org/presentationml/2006/main">
+  <p:cSld>
+    <p:spTree>
+      <p:nvGrpSpPr>
+        <p:cNvPr id="1" name="">
+          <a:extLst>
+            <a:ext uri="{FF2B5EF4-FFF2-40B4-BE49-F238E27FC236}">
               <a16:creationId xmlns:a16="http://schemas.microsoft.com/office/drawing/2014/main" id="{D6960B8A-82C9-541F-276F-C1D6CAF4338E}"/>
             </a:ext>
           </a:extLst>
@@ -37164,7 +41150,7 @@
           <a:p>
             <a:fld id="{D57F1E4F-1CFF-5643-939E-02111984F565}" type="slidenum">
               <a:rPr lang="en-US" smtClean="0"/>
-              <a:t>50</a:t>
+              <a:t>54</a:t>
             </a:fld>
             <a:endParaRPr lang="en-US" dirty="0"/>
           </a:p>
@@ -38964,7 +42950,7 @@
 </p:sld>
 </file>
 
-<file path=ppt/slides/slide51.xml><?xml version="1.0" encoding="utf-8"?>
+<file path=ppt/slides/slide55.xml><?xml version="1.0" encoding="utf-8"?>
 <p:sld xmlns:a="http://schemas.openxmlformats.org/drawingml/2006/main" xmlns:r="http://schemas.openxmlformats.org/officeDocument/2006/relationships" xmlns:p="http://schemas.openxmlformats.org/presentationml/2006/main">
   <p:cSld>
     <p:spTree>
@@ -39052,7 +43038,7 @@
           <a:p>
             <a:fld id="{D57F1E4F-1CFF-5643-939E-02111984F565}" type="slidenum">
               <a:rPr lang="en-US" smtClean="0"/>
-              <a:t>51</a:t>
+              <a:t>55</a:t>
             </a:fld>
             <a:endParaRPr lang="en-US" dirty="0"/>
           </a:p>
